--- a/production/slides/01-ch1-energy-causes-change-slides.pptx
+++ b/production/slides/01-ch1-energy-causes-change-slides.pptx
@@ -11,7 +11,9 @@
     <p:sldId id="259" r:id="rId10"/>
     <p:sldId id="260" r:id="rId11"/>
     <p:sldId id="261" r:id="rId12"/>
+    <p:sldId id="278" r:id="rId29"/>
     <p:sldId id="262" r:id="rId13"/>
+    <p:sldId id="279" r:id="rId30"/>
     <p:sldId id="263" r:id="rId14"/>
     <p:sldId id="264" r:id="rId15"/>
     <p:sldId id="265" r:id="rId16"/>
@@ -24,6 +26,7 @@
     <p:sldId id="272" r:id="rId23"/>
     <p:sldId id="273" r:id="rId24"/>
     <p:sldId id="274" r:id="rId25"/>
+    <p:sldId id="280" r:id="rId31"/>
     <p:sldId id="275" r:id="rId26"/>
     <p:sldId id="276" r:id="rId27"/>
     <p:sldId id="277" r:id="rId28"/>
@@ -7977,6 +7980,1408 @@
                 <a:latin typeface="Arial"/>
               </a:rPr>
               <a:t>22</a:t>
+            </a:r>
+          </a:p>
+        </p:txBody>
+      </p:sp>
+    </p:spTree>
+  </p:cSld>
+  <p:clrMapOvr>
+    <a:masterClrMapping/>
+  </p:clrMapOvr>
+</p:sld>
+</file>
+
+<file path=ppt/slides/slide23.xml><?xml version="1.0" encoding="utf-8"?>
+<p:sld xmlns:a="http://schemas.openxmlformats.org/drawingml/2006/main" xmlns:p="http://schemas.openxmlformats.org/presentationml/2006/main" xmlns:r="http://schemas.openxmlformats.org/officeDocument/2006/relationships">
+  <p:cSld>
+    <p:spTree>
+      <p:nvGrpSpPr>
+        <p:cNvPr id="1" name=""/>
+        <p:cNvGrpSpPr/>
+        <p:nvPr/>
+      </p:nvGrpSpPr>
+      <p:grpSpPr/>
+      <p:sp>
+        <p:nvSpPr>
+          <p:cNvPr id="2" name="Rounded Rectangle 1"/>
+          <p:cNvSpPr/>
+          <p:nvPr/>
+        </p:nvSpPr>
+        <p:spPr>
+          <a:xfrm>
+            <a:off x="0" y="0"/>
+            <a:ext cx="12191695" cy="1051560"/>
+          </a:xfrm>
+          <a:prstGeom prst="roundRect">
+            <a:avLst/>
+          </a:prstGeom>
+          <a:solidFill>
+            <a:srgbClr val="1F3A5F"/>
+          </a:solidFill>
+          <a:ln>
+            <a:noFill/>
+          </a:ln>
+        </p:spPr>
+        <p:style>
+          <a:lnRef idx="1">
+            <a:schemeClr val="accent1"/>
+          </a:lnRef>
+          <a:fillRef idx="3">
+            <a:schemeClr val="accent1"/>
+          </a:fillRef>
+          <a:effectRef idx="2">
+            <a:schemeClr val="accent1"/>
+          </a:effectRef>
+          <a:fontRef idx="minor">
+            <a:schemeClr val="lt1"/>
+          </a:fontRef>
+        </p:style>
+        <p:txBody>
+          <a:bodyPr rtlCol="0" anchor="ctr" wrap="square"/>
+          <a:lstStyle/>
+          <a:p>
+            <a:pPr algn="ctr"/>
+          </a:p>
+        </p:txBody>
+      </p:sp>
+      <p:sp>
+        <p:nvSpPr>
+          <p:cNvPr id="3" name="TextBox 2"/>
+          <p:cNvSpPr txBox="1"/>
+          <p:nvPr/>
+        </p:nvSpPr>
+        <p:spPr>
+          <a:xfrm>
+            <a:off x="457200" y="146304"/>
+            <a:ext cx="10058400" cy="777240"/>
+          </a:xfrm>
+          <a:prstGeom prst="rect">
+            <a:avLst/>
+          </a:prstGeom>
+          <a:noFill/>
+        </p:spPr>
+        <p:txBody>
+          <a:bodyPr wrap="square" anchor="ctr">
+            <a:spAutoFit/>
+          </a:bodyPr>
+          <a:lstStyle/>
+          <a:p>
+            <a:pPr algn="l"/>
+            <a:r>
+              <a:rPr sz="3400" b="1" i="0">
+                <a:solidFill>
+                  <a:srgbClr val="FFFFFF"/>
+                </a:solidFill>
+                <a:latin typeface="Arial"/>
+              </a:rPr>
+              <a:t>Notebook — Energy</a:t>
+            </a:r>
+          </a:p>
+        </p:txBody>
+      </p:sp>
+      <p:sp>
+        <p:nvSpPr>
+          <p:cNvPr id="4" name="Rounded Rectangle 3"/>
+          <p:cNvSpPr/>
+          <p:nvPr/>
+        </p:nvSpPr>
+        <p:spPr>
+          <a:xfrm>
+            <a:off x="9692640" y="256032"/>
+            <a:ext cx="2103120" cy="548640"/>
+          </a:xfrm>
+          <a:prstGeom prst="roundRect">
+            <a:avLst/>
+          </a:prstGeom>
+          <a:solidFill>
+            <a:srgbClr val="C05014"/>
+          </a:solidFill>
+          <a:ln>
+            <a:noFill/>
+          </a:ln>
+        </p:spPr>
+        <p:style>
+          <a:lnRef idx="1">
+            <a:schemeClr val="accent1"/>
+          </a:lnRef>
+          <a:fillRef idx="3">
+            <a:schemeClr val="accent1"/>
+          </a:fillRef>
+          <a:effectRef idx="2">
+            <a:schemeClr val="accent1"/>
+          </a:effectRef>
+          <a:fontRef idx="minor">
+            <a:schemeClr val="lt1"/>
+          </a:fontRef>
+        </p:style>
+        <p:txBody>
+          <a:bodyPr rtlCol="0" anchor="ctr" wrap="square"/>
+          <a:lstStyle/>
+          <a:p>
+            <a:pPr algn="ctr"/>
+            <a:r>
+              <a:rPr sz="1800" b="1">
+                <a:solidFill>
+                  <a:srgbClr val="FFFFFF"/>
+                </a:solidFill>
+                <a:latin typeface="Arial"/>
+              </a:rPr>
+              <a:t>NOTEBOOK</a:t>
+            </a:r>
+          </a:p>
+        </p:txBody>
+      </p:sp>
+      <p:sp>
+        <p:nvSpPr>
+          <p:cNvPr id="5" name="Rounded Rectangle 4"/>
+          <p:cNvSpPr/>
+          <p:nvPr/>
+        </p:nvSpPr>
+        <p:spPr>
+          <a:xfrm>
+            <a:off x="1097280" y="1737360"/>
+            <a:ext cx="9966960" cy="1234440"/>
+          </a:xfrm>
+          <a:prstGeom prst="roundRect">
+            <a:avLst/>
+          </a:prstGeom>
+          <a:solidFill>
+            <a:srgbClr val="E8EDF4"/>
+          </a:solidFill>
+          <a:ln>
+            <a:noFill/>
+          </a:ln>
+        </p:spPr>
+        <p:style>
+          <a:lnRef idx="1">
+            <a:schemeClr val="accent1"/>
+          </a:lnRef>
+          <a:fillRef idx="3">
+            <a:schemeClr val="accent1"/>
+          </a:fillRef>
+          <a:effectRef idx="2">
+            <a:schemeClr val="accent1"/>
+          </a:effectRef>
+          <a:fontRef idx="minor">
+            <a:schemeClr val="lt1"/>
+          </a:fontRef>
+        </p:style>
+        <p:txBody>
+          <a:bodyPr rtlCol="0" anchor="ctr" wrap="square"/>
+          <a:lstStyle/>
+          <a:p>
+            <a:pPr algn="ctr"/>
+          </a:p>
+        </p:txBody>
+      </p:sp>
+      <p:sp>
+        <p:nvSpPr>
+          <p:cNvPr id="6" name="TextBox 5"/>
+          <p:cNvSpPr txBox="1"/>
+          <p:nvPr/>
+        </p:nvSpPr>
+        <p:spPr>
+          <a:xfrm>
+            <a:off x="1371600" y="1828800"/>
+            <a:ext cx="9418320" cy="457200"/>
+          </a:xfrm>
+          <a:prstGeom prst="rect">
+            <a:avLst/>
+          </a:prstGeom>
+          <a:noFill/>
+        </p:spPr>
+        <p:txBody>
+          <a:bodyPr wrap="square" anchor="t">
+            <a:spAutoFit/>
+          </a:bodyPr>
+          <a:lstStyle/>
+          <a:p>
+            <a:pPr algn="l"/>
+            <a:r>
+              <a:rPr sz="1600" b="1" i="0">
+                <a:solidFill>
+                  <a:srgbClr val="C05014"/>
+                </a:solidFill>
+                <a:latin typeface="Arial"/>
+              </a:rPr>
+              <a:t>WRITE:</a:t>
+            </a:r>
+          </a:p>
+        </p:txBody>
+      </p:sp>
+      <p:sp>
+        <p:nvSpPr>
+          <p:cNvPr id="7" name="TextBox 6"/>
+          <p:cNvSpPr txBox="1"/>
+          <p:nvPr/>
+        </p:nvSpPr>
+        <p:spPr>
+          <a:xfrm>
+            <a:off x="1371600" y="2240280"/>
+            <a:ext cx="9418320" cy="640080"/>
+          </a:xfrm>
+          <a:prstGeom prst="rect">
+            <a:avLst/>
+          </a:prstGeom>
+          <a:noFill/>
+        </p:spPr>
+        <p:txBody>
+          <a:bodyPr wrap="square" anchor="t">
+            <a:spAutoFit/>
+          </a:bodyPr>
+          <a:lstStyle/>
+          <a:p>
+            <a:pPr algn="l"/>
+            <a:r>
+              <a:rPr sz="2800" b="1" i="0">
+                <a:solidFill>
+                  <a:srgbClr val="1F3A5F"/>
+                </a:solidFill>
+                <a:latin typeface="Arial"/>
+              </a:rPr>
+              <a:t>Energy is the ability to cause change.</a:t>
+            </a:r>
+          </a:p>
+        </p:txBody>
+      </p:sp>
+      <p:sp>
+        <p:nvSpPr>
+          <p:cNvPr id="8" name="TextBox 7"/>
+          <p:cNvSpPr txBox="1"/>
+          <p:nvPr/>
+        </p:nvSpPr>
+        <p:spPr>
+          <a:xfrm>
+            <a:off x="1371600" y="3017520"/>
+            <a:ext cx="9418320" cy="457200"/>
+          </a:xfrm>
+          <a:prstGeom prst="rect">
+            <a:avLst/>
+          </a:prstGeom>
+          <a:noFill/>
+        </p:spPr>
+        <p:txBody>
+          <a:bodyPr wrap="square" anchor="t">
+            <a:spAutoFit/>
+          </a:bodyPr>
+          <a:lstStyle/>
+          <a:p>
+            <a:pPr algn="l"/>
+            <a:r>
+              <a:rPr sz="1600" b="0" i="1">
+                <a:solidFill>
+                  <a:srgbClr val="555555"/>
+                </a:solidFill>
+                <a:latin typeface="Arial"/>
+              </a:rPr>
+              <a:t>REVEAL → CHANGE</a:t>
+            </a:r>
+          </a:p>
+        </p:txBody>
+      </p:sp>
+      <p:sp>
+        <p:nvSpPr>
+          <p:cNvPr id="9" name="Rounded Rectangle 8"/>
+          <p:cNvSpPr/>
+          <p:nvPr/>
+        </p:nvSpPr>
+        <p:spPr>
+          <a:xfrm>
+            <a:off x="1097280" y="4206240"/>
+            <a:ext cx="9966960" cy="1828800"/>
+          </a:xfrm>
+          <a:prstGeom prst="roundRect">
+            <a:avLst/>
+          </a:prstGeom>
+          <a:solidFill>
+            <a:srgbClr val="2E6B3F"/>
+          </a:solidFill>
+          <a:ln>
+            <a:noFill/>
+          </a:ln>
+        </p:spPr>
+        <p:style>
+          <a:lnRef idx="1">
+            <a:schemeClr val="accent1"/>
+          </a:lnRef>
+          <a:fillRef idx="3">
+            <a:schemeClr val="accent1"/>
+          </a:fillRef>
+          <a:effectRef idx="2">
+            <a:schemeClr val="accent1"/>
+          </a:effectRef>
+          <a:fontRef idx="minor">
+            <a:schemeClr val="lt1"/>
+          </a:fontRef>
+        </p:style>
+        <p:txBody>
+          <a:bodyPr rtlCol="0" anchor="ctr" wrap="square"/>
+          <a:lstStyle/>
+          <a:p>
+            <a:pPr algn="ctr"/>
+          </a:p>
+        </p:txBody>
+      </p:sp>
+      <p:sp>
+        <p:nvSpPr>
+          <p:cNvPr id="10" name="TextBox 9"/>
+          <p:cNvSpPr txBox="1"/>
+          <p:nvPr/>
+        </p:nvSpPr>
+        <p:spPr>
+          <a:xfrm>
+            <a:off x="1371600" y="4297679"/>
+            <a:ext cx="9418320" cy="457200"/>
+          </a:xfrm>
+          <a:prstGeom prst="rect">
+            <a:avLst/>
+          </a:prstGeom>
+          <a:noFill/>
+        </p:spPr>
+        <p:txBody>
+          <a:bodyPr wrap="square" anchor="t">
+            <a:spAutoFit/>
+          </a:bodyPr>
+          <a:lstStyle/>
+          <a:p>
+            <a:pPr algn="l"/>
+            <a:r>
+              <a:rPr sz="1600" b="1" i="0">
+                <a:solidFill>
+                  <a:srgbClr val="FFFFFF"/>
+                </a:solidFill>
+                <a:latin typeface="Arial"/>
+              </a:rPr>
+              <a:t>DRAWING IDEAS (draw YOUR example):</a:t>
+            </a:r>
+          </a:p>
+        </p:txBody>
+      </p:sp>
+      <p:sp>
+        <p:nvSpPr>
+          <p:cNvPr id="11" name="TextBox 10"/>
+          <p:cNvSpPr txBox="1"/>
+          <p:nvPr/>
+        </p:nvSpPr>
+        <p:spPr>
+          <a:xfrm>
+            <a:off x="1463040" y="4754879"/>
+            <a:ext cx="9418320" cy="411480"/>
+          </a:xfrm>
+          <a:prstGeom prst="rect">
+            <a:avLst/>
+          </a:prstGeom>
+          <a:noFill/>
+        </p:spPr>
+        <p:txBody>
+          <a:bodyPr wrap="square" anchor="t">
+            <a:spAutoFit/>
+          </a:bodyPr>
+          <a:lstStyle/>
+          <a:p>
+            <a:pPr algn="l"/>
+            <a:r>
+              <a:rPr sz="1800" b="0" i="0">
+                <a:solidFill>
+                  <a:srgbClr val="FFFFFF"/>
+                </a:solidFill>
+                <a:latin typeface="Arial"/>
+              </a:rPr>
+              <a:t>•  a flashlight turning on</a:t>
+            </a:r>
+          </a:p>
+        </p:txBody>
+      </p:sp>
+      <p:sp>
+        <p:nvSpPr>
+          <p:cNvPr id="12" name="TextBox 11"/>
+          <p:cNvSpPr txBox="1"/>
+          <p:nvPr/>
+        </p:nvSpPr>
+        <p:spPr>
+          <a:xfrm>
+            <a:off x="1463040" y="5166359"/>
+            <a:ext cx="9418320" cy="411480"/>
+          </a:xfrm>
+          <a:prstGeom prst="rect">
+            <a:avLst/>
+          </a:prstGeom>
+          <a:noFill/>
+        </p:spPr>
+        <p:txBody>
+          <a:bodyPr wrap="square" anchor="t">
+            <a:spAutoFit/>
+          </a:bodyPr>
+          <a:lstStyle/>
+          <a:p>
+            <a:pPr algn="l"/>
+            <a:r>
+              <a:rPr sz="1800" b="0" i="0">
+                <a:solidFill>
+                  <a:srgbClr val="FFFFFF"/>
+                </a:solidFill>
+                <a:latin typeface="Arial"/>
+              </a:rPr>
+              <a:t>•  a rolling ball moving a cup</a:t>
+            </a:r>
+          </a:p>
+        </p:txBody>
+      </p:sp>
+      <p:sp>
+        <p:nvSpPr>
+          <p:cNvPr id="13" name="TextBox 12"/>
+          <p:cNvSpPr txBox="1"/>
+          <p:nvPr/>
+        </p:nvSpPr>
+        <p:spPr>
+          <a:xfrm>
+            <a:off x="1463040" y="5577840"/>
+            <a:ext cx="9418320" cy="411480"/>
+          </a:xfrm>
+          <a:prstGeom prst="rect">
+            <a:avLst/>
+          </a:prstGeom>
+          <a:noFill/>
+        </p:spPr>
+        <p:txBody>
+          <a:bodyPr wrap="square" anchor="t">
+            <a:spAutoFit/>
+          </a:bodyPr>
+          <a:lstStyle/>
+          <a:p>
+            <a:pPr algn="l"/>
+            <a:r>
+              <a:rPr sz="1800" b="0" i="0">
+                <a:solidFill>
+                  <a:srgbClr val="FFFFFF"/>
+                </a:solidFill>
+                <a:latin typeface="Arial"/>
+              </a:rPr>
+              <a:t>•  a ringing bell</a:t>
+            </a:r>
+          </a:p>
+        </p:txBody>
+      </p:sp>
+    </p:spTree>
+  </p:cSld>
+  <p:clrMapOvr>
+    <a:masterClrMapping/>
+  </p:clrMapOvr>
+</p:sld>
+</file>
+
+<file path=ppt/slides/slide24.xml><?xml version="1.0" encoding="utf-8"?>
+<p:sld xmlns:a="http://schemas.openxmlformats.org/drawingml/2006/main" xmlns:p="http://schemas.openxmlformats.org/presentationml/2006/main" xmlns:r="http://schemas.openxmlformats.org/officeDocument/2006/relationships">
+  <p:cSld>
+    <p:spTree>
+      <p:nvGrpSpPr>
+        <p:cNvPr id="1" name=""/>
+        <p:cNvGrpSpPr/>
+        <p:nvPr/>
+      </p:nvGrpSpPr>
+      <p:grpSpPr/>
+      <p:sp>
+        <p:nvSpPr>
+          <p:cNvPr id="2" name="Rounded Rectangle 1"/>
+          <p:cNvSpPr/>
+          <p:nvPr/>
+        </p:nvSpPr>
+        <p:spPr>
+          <a:xfrm>
+            <a:off x="0" y="0"/>
+            <a:ext cx="12191695" cy="1051560"/>
+          </a:xfrm>
+          <a:prstGeom prst="roundRect">
+            <a:avLst/>
+          </a:prstGeom>
+          <a:solidFill>
+            <a:srgbClr val="1F3A5F"/>
+          </a:solidFill>
+          <a:ln>
+            <a:noFill/>
+          </a:ln>
+        </p:spPr>
+        <p:style>
+          <a:lnRef idx="1">
+            <a:schemeClr val="accent1"/>
+          </a:lnRef>
+          <a:fillRef idx="3">
+            <a:schemeClr val="accent1"/>
+          </a:fillRef>
+          <a:effectRef idx="2">
+            <a:schemeClr val="accent1"/>
+          </a:effectRef>
+          <a:fontRef idx="minor">
+            <a:schemeClr val="lt1"/>
+          </a:fontRef>
+        </p:style>
+        <p:txBody>
+          <a:bodyPr rtlCol="0" anchor="ctr" wrap="square"/>
+          <a:lstStyle/>
+          <a:p>
+            <a:pPr algn="ctr"/>
+          </a:p>
+        </p:txBody>
+      </p:sp>
+      <p:sp>
+        <p:nvSpPr>
+          <p:cNvPr id="3" name="TextBox 2"/>
+          <p:cNvSpPr txBox="1"/>
+          <p:nvPr/>
+        </p:nvSpPr>
+        <p:spPr>
+          <a:xfrm>
+            <a:off x="457200" y="146304"/>
+            <a:ext cx="10058400" cy="777240"/>
+          </a:xfrm>
+          <a:prstGeom prst="rect">
+            <a:avLst/>
+          </a:prstGeom>
+          <a:noFill/>
+        </p:spPr>
+        <p:txBody>
+          <a:bodyPr wrap="square" anchor="ctr">
+            <a:spAutoFit/>
+          </a:bodyPr>
+          <a:lstStyle/>
+          <a:p>
+            <a:pPr algn="l"/>
+            <a:r>
+              <a:rPr sz="3400" b="1" i="0">
+                <a:solidFill>
+                  <a:srgbClr val="FFFFFF"/>
+                </a:solidFill>
+                <a:latin typeface="Arial"/>
+              </a:rPr>
+              <a:t>Notebook — Energy Model</a:t>
+            </a:r>
+          </a:p>
+        </p:txBody>
+      </p:sp>
+      <p:sp>
+        <p:nvSpPr>
+          <p:cNvPr id="4" name="Rounded Rectangle 3"/>
+          <p:cNvSpPr/>
+          <p:nvPr/>
+        </p:nvSpPr>
+        <p:spPr>
+          <a:xfrm>
+            <a:off x="9692640" y="256032"/>
+            <a:ext cx="2103120" cy="548640"/>
+          </a:xfrm>
+          <a:prstGeom prst="roundRect">
+            <a:avLst/>
+          </a:prstGeom>
+          <a:solidFill>
+            <a:srgbClr val="C05014"/>
+          </a:solidFill>
+          <a:ln>
+            <a:noFill/>
+          </a:ln>
+        </p:spPr>
+        <p:style>
+          <a:lnRef idx="1">
+            <a:schemeClr val="accent1"/>
+          </a:lnRef>
+          <a:fillRef idx="3">
+            <a:schemeClr val="accent1"/>
+          </a:fillRef>
+          <a:effectRef idx="2">
+            <a:schemeClr val="accent1"/>
+          </a:effectRef>
+          <a:fontRef idx="minor">
+            <a:schemeClr val="lt1"/>
+          </a:fontRef>
+        </p:style>
+        <p:txBody>
+          <a:bodyPr rtlCol="0" anchor="ctr" wrap="square"/>
+          <a:lstStyle/>
+          <a:p>
+            <a:pPr algn="ctr"/>
+            <a:r>
+              <a:rPr sz="1800" b="1">
+                <a:solidFill>
+                  <a:srgbClr val="FFFFFF"/>
+                </a:solidFill>
+                <a:latin typeface="Arial"/>
+              </a:rPr>
+              <a:t>NOTEBOOK</a:t>
+            </a:r>
+          </a:p>
+        </p:txBody>
+      </p:sp>
+      <p:sp>
+        <p:nvSpPr>
+          <p:cNvPr id="5" name="Rounded Rectangle 4"/>
+          <p:cNvSpPr/>
+          <p:nvPr/>
+        </p:nvSpPr>
+        <p:spPr>
+          <a:xfrm>
+            <a:off x="1097280" y="1737360"/>
+            <a:ext cx="9966960" cy="1234440"/>
+          </a:xfrm>
+          <a:prstGeom prst="roundRect">
+            <a:avLst/>
+          </a:prstGeom>
+          <a:solidFill>
+            <a:srgbClr val="E8EDF4"/>
+          </a:solidFill>
+          <a:ln>
+            <a:noFill/>
+          </a:ln>
+        </p:spPr>
+        <p:style>
+          <a:lnRef idx="1">
+            <a:schemeClr val="accent1"/>
+          </a:lnRef>
+          <a:fillRef idx="3">
+            <a:schemeClr val="accent1"/>
+          </a:fillRef>
+          <a:effectRef idx="2">
+            <a:schemeClr val="accent1"/>
+          </a:effectRef>
+          <a:fontRef idx="minor">
+            <a:schemeClr val="lt1"/>
+          </a:fontRef>
+        </p:style>
+        <p:txBody>
+          <a:bodyPr rtlCol="0" anchor="ctr" wrap="square"/>
+          <a:lstStyle/>
+          <a:p>
+            <a:pPr algn="ctr"/>
+          </a:p>
+        </p:txBody>
+      </p:sp>
+      <p:sp>
+        <p:nvSpPr>
+          <p:cNvPr id="6" name="TextBox 5"/>
+          <p:cNvSpPr txBox="1"/>
+          <p:nvPr/>
+        </p:nvSpPr>
+        <p:spPr>
+          <a:xfrm>
+            <a:off x="1371600" y="1828800"/>
+            <a:ext cx="9418320" cy="457200"/>
+          </a:xfrm>
+          <a:prstGeom prst="rect">
+            <a:avLst/>
+          </a:prstGeom>
+          <a:noFill/>
+        </p:spPr>
+        <p:txBody>
+          <a:bodyPr wrap="square" anchor="t">
+            <a:spAutoFit/>
+          </a:bodyPr>
+          <a:lstStyle/>
+          <a:p>
+            <a:pPr algn="l"/>
+            <a:r>
+              <a:rPr sz="1600" b="1" i="0">
+                <a:solidFill>
+                  <a:srgbClr val="C05014"/>
+                </a:solidFill>
+                <a:latin typeface="Arial"/>
+              </a:rPr>
+              <a:t>WRITE:</a:t>
+            </a:r>
+          </a:p>
+        </p:txBody>
+      </p:sp>
+      <p:sp>
+        <p:nvSpPr>
+          <p:cNvPr id="7" name="TextBox 6"/>
+          <p:cNvSpPr txBox="1"/>
+          <p:nvPr/>
+        </p:nvSpPr>
+        <p:spPr>
+          <a:xfrm>
+            <a:off x="1371600" y="2240280"/>
+            <a:ext cx="9418320" cy="640080"/>
+          </a:xfrm>
+          <a:prstGeom prst="rect">
+            <a:avLst/>
+          </a:prstGeom>
+          <a:noFill/>
+        </p:spPr>
+        <p:txBody>
+          <a:bodyPr wrap="square" anchor="t">
+            <a:spAutoFit/>
+          </a:bodyPr>
+          <a:lstStyle/>
+          <a:p>
+            <a:pPr algn="l"/>
+            <a:r>
+              <a:rPr sz="2800" b="1" i="0">
+                <a:solidFill>
+                  <a:srgbClr val="1F3A5F"/>
+                </a:solidFill>
+                <a:latin typeface="Arial"/>
+              </a:rPr>
+              <a:t>ENERGY  →  CHANGE  →  EVIDENCE</a:t>
+            </a:r>
+          </a:p>
+        </p:txBody>
+      </p:sp>
+      <p:sp>
+        <p:nvSpPr>
+          <p:cNvPr id="8" name="TextBox 7"/>
+          <p:cNvSpPr txBox="1"/>
+          <p:nvPr/>
+        </p:nvSpPr>
+        <p:spPr>
+          <a:xfrm>
+            <a:off x="1371600" y="3017520"/>
+            <a:ext cx="9418320" cy="457200"/>
+          </a:xfrm>
+          <a:prstGeom prst="rect">
+            <a:avLst/>
+          </a:prstGeom>
+          <a:noFill/>
+        </p:spPr>
+        <p:txBody>
+          <a:bodyPr wrap="square" anchor="t">
+            <a:spAutoFit/>
+          </a:bodyPr>
+          <a:lstStyle/>
+          <a:p>
+            <a:pPr algn="l"/>
+            <a:r>
+              <a:rPr sz="1600" b="0" i="1">
+                <a:solidFill>
+                  <a:srgbClr val="555555"/>
+                </a:solidFill>
+                <a:latin typeface="Arial"/>
+              </a:rPr>
+              <a:t>REVEAL → the chain</a:t>
+            </a:r>
+          </a:p>
+        </p:txBody>
+      </p:sp>
+      <p:sp>
+        <p:nvSpPr>
+          <p:cNvPr id="9" name="Rounded Rectangle 8"/>
+          <p:cNvSpPr/>
+          <p:nvPr/>
+        </p:nvSpPr>
+        <p:spPr>
+          <a:xfrm>
+            <a:off x="1097280" y="4206240"/>
+            <a:ext cx="9966960" cy="1828800"/>
+          </a:xfrm>
+          <a:prstGeom prst="roundRect">
+            <a:avLst/>
+          </a:prstGeom>
+          <a:solidFill>
+            <a:srgbClr val="2E6B3F"/>
+          </a:solidFill>
+          <a:ln>
+            <a:noFill/>
+          </a:ln>
+        </p:spPr>
+        <p:style>
+          <a:lnRef idx="1">
+            <a:schemeClr val="accent1"/>
+          </a:lnRef>
+          <a:fillRef idx="3">
+            <a:schemeClr val="accent1"/>
+          </a:fillRef>
+          <a:effectRef idx="2">
+            <a:schemeClr val="accent1"/>
+          </a:effectRef>
+          <a:fontRef idx="minor">
+            <a:schemeClr val="lt1"/>
+          </a:fontRef>
+        </p:style>
+        <p:txBody>
+          <a:bodyPr rtlCol="0" anchor="ctr" wrap="square"/>
+          <a:lstStyle/>
+          <a:p>
+            <a:pPr algn="ctr"/>
+          </a:p>
+        </p:txBody>
+      </p:sp>
+      <p:sp>
+        <p:nvSpPr>
+          <p:cNvPr id="10" name="TextBox 9"/>
+          <p:cNvSpPr txBox="1"/>
+          <p:nvPr/>
+        </p:nvSpPr>
+        <p:spPr>
+          <a:xfrm>
+            <a:off x="1371600" y="4297679"/>
+            <a:ext cx="9418320" cy="457200"/>
+          </a:xfrm>
+          <a:prstGeom prst="rect">
+            <a:avLst/>
+          </a:prstGeom>
+          <a:noFill/>
+        </p:spPr>
+        <p:txBody>
+          <a:bodyPr wrap="square" anchor="t">
+            <a:spAutoFit/>
+          </a:bodyPr>
+          <a:lstStyle/>
+          <a:p>
+            <a:pPr algn="l"/>
+            <a:r>
+              <a:rPr sz="1600" b="1" i="0">
+                <a:solidFill>
+                  <a:srgbClr val="FFFFFF"/>
+                </a:solidFill>
+                <a:latin typeface="Arial"/>
+              </a:rPr>
+              <a:t>DRAWING IDEAS (draw YOUR example):</a:t>
+            </a:r>
+          </a:p>
+        </p:txBody>
+      </p:sp>
+      <p:sp>
+        <p:nvSpPr>
+          <p:cNvPr id="11" name="TextBox 10"/>
+          <p:cNvSpPr txBox="1"/>
+          <p:nvPr/>
+        </p:nvSpPr>
+        <p:spPr>
+          <a:xfrm>
+            <a:off x="1463040" y="4754879"/>
+            <a:ext cx="9418320" cy="411480"/>
+          </a:xfrm>
+          <a:prstGeom prst="rect">
+            <a:avLst/>
+          </a:prstGeom>
+          <a:noFill/>
+        </p:spPr>
+        <p:txBody>
+          <a:bodyPr wrap="square" anchor="t">
+            <a:spAutoFit/>
+          </a:bodyPr>
+          <a:lstStyle/>
+          <a:p>
+            <a:pPr algn="l"/>
+            <a:r>
+              <a:rPr sz="1800" b="0" i="0">
+                <a:solidFill>
+                  <a:srgbClr val="FFFFFF"/>
+                </a:solidFill>
+                <a:latin typeface="Arial"/>
+              </a:rPr>
+              <a:t>•  draw a before/after example</a:t>
+            </a:r>
+          </a:p>
+        </p:txBody>
+      </p:sp>
+      <p:sp>
+        <p:nvSpPr>
+          <p:cNvPr id="12" name="TextBox 11"/>
+          <p:cNvSpPr txBox="1"/>
+          <p:nvPr/>
+        </p:nvSpPr>
+        <p:spPr>
+          <a:xfrm>
+            <a:off x="1463040" y="5166359"/>
+            <a:ext cx="9418320" cy="411480"/>
+          </a:xfrm>
+          <a:prstGeom prst="rect">
+            <a:avLst/>
+          </a:prstGeom>
+          <a:noFill/>
+        </p:spPr>
+        <p:txBody>
+          <a:bodyPr wrap="square" anchor="t">
+            <a:spAutoFit/>
+          </a:bodyPr>
+          <a:lstStyle/>
+          <a:p>
+            <a:pPr algn="l"/>
+            <a:r>
+              <a:rPr sz="1800" b="0" i="0">
+                <a:solidFill>
+                  <a:srgbClr val="FFFFFF"/>
+                </a:solidFill>
+                <a:latin typeface="Arial"/>
+              </a:rPr>
+              <a:t>•  add arrows to show the change</a:t>
+            </a:r>
+          </a:p>
+        </p:txBody>
+      </p:sp>
+    </p:spTree>
+  </p:cSld>
+  <p:clrMapOvr>
+    <a:masterClrMapping/>
+  </p:clrMapOvr>
+</p:sld>
+</file>
+
+<file path=ppt/slides/slide25.xml><?xml version="1.0" encoding="utf-8"?>
+<p:sld xmlns:a="http://schemas.openxmlformats.org/drawingml/2006/main" xmlns:p="http://schemas.openxmlformats.org/presentationml/2006/main" xmlns:r="http://schemas.openxmlformats.org/officeDocument/2006/relationships">
+  <p:cSld>
+    <p:spTree>
+      <p:nvGrpSpPr>
+        <p:cNvPr id="1" name=""/>
+        <p:cNvGrpSpPr/>
+        <p:nvPr/>
+      </p:nvGrpSpPr>
+      <p:grpSpPr/>
+      <p:sp>
+        <p:nvSpPr>
+          <p:cNvPr id="2" name="Rounded Rectangle 1"/>
+          <p:cNvSpPr/>
+          <p:nvPr/>
+        </p:nvSpPr>
+        <p:spPr>
+          <a:xfrm>
+            <a:off x="0" y="0"/>
+            <a:ext cx="12191695" cy="1051560"/>
+          </a:xfrm>
+          <a:prstGeom prst="roundRect">
+            <a:avLst/>
+          </a:prstGeom>
+          <a:solidFill>
+            <a:srgbClr val="1F3A5F"/>
+          </a:solidFill>
+          <a:ln>
+            <a:noFill/>
+          </a:ln>
+        </p:spPr>
+        <p:style>
+          <a:lnRef idx="1">
+            <a:schemeClr val="accent1"/>
+          </a:lnRef>
+          <a:fillRef idx="3">
+            <a:schemeClr val="accent1"/>
+          </a:fillRef>
+          <a:effectRef idx="2">
+            <a:schemeClr val="accent1"/>
+          </a:effectRef>
+          <a:fontRef idx="minor">
+            <a:schemeClr val="lt1"/>
+          </a:fontRef>
+        </p:style>
+        <p:txBody>
+          <a:bodyPr rtlCol="0" anchor="ctr" wrap="square"/>
+          <a:lstStyle/>
+          <a:p>
+            <a:pPr algn="ctr"/>
+          </a:p>
+        </p:txBody>
+      </p:sp>
+      <p:sp>
+        <p:nvSpPr>
+          <p:cNvPr id="3" name="TextBox 2"/>
+          <p:cNvSpPr txBox="1"/>
+          <p:nvPr/>
+        </p:nvSpPr>
+        <p:spPr>
+          <a:xfrm>
+            <a:off x="457200" y="146304"/>
+            <a:ext cx="10058400" cy="777240"/>
+          </a:xfrm>
+          <a:prstGeom prst="rect">
+            <a:avLst/>
+          </a:prstGeom>
+          <a:noFill/>
+        </p:spPr>
+        <p:txBody>
+          <a:bodyPr wrap="square" anchor="ctr">
+            <a:spAutoFit/>
+          </a:bodyPr>
+          <a:lstStyle/>
+          <a:p>
+            <a:pPr algn="l"/>
+            <a:r>
+              <a:rPr sz="3400" b="1" i="0">
+                <a:solidFill>
+                  <a:srgbClr val="FFFFFF"/>
+                </a:solidFill>
+                <a:latin typeface="Arial"/>
+              </a:rPr>
+              <a:t>Notebook — Stored Energy</a:t>
+            </a:r>
+          </a:p>
+        </p:txBody>
+      </p:sp>
+      <p:sp>
+        <p:nvSpPr>
+          <p:cNvPr id="4" name="Rounded Rectangle 3"/>
+          <p:cNvSpPr/>
+          <p:nvPr/>
+        </p:nvSpPr>
+        <p:spPr>
+          <a:xfrm>
+            <a:off x="9692640" y="256032"/>
+            <a:ext cx="2103120" cy="548640"/>
+          </a:xfrm>
+          <a:prstGeom prst="roundRect">
+            <a:avLst/>
+          </a:prstGeom>
+          <a:solidFill>
+            <a:srgbClr val="C05014"/>
+          </a:solidFill>
+          <a:ln>
+            <a:noFill/>
+          </a:ln>
+        </p:spPr>
+        <p:style>
+          <a:lnRef idx="1">
+            <a:schemeClr val="accent1"/>
+          </a:lnRef>
+          <a:fillRef idx="3">
+            <a:schemeClr val="accent1"/>
+          </a:fillRef>
+          <a:effectRef idx="2">
+            <a:schemeClr val="accent1"/>
+          </a:effectRef>
+          <a:fontRef idx="minor">
+            <a:schemeClr val="lt1"/>
+          </a:fontRef>
+        </p:style>
+        <p:txBody>
+          <a:bodyPr rtlCol="0" anchor="ctr" wrap="square"/>
+          <a:lstStyle/>
+          <a:p>
+            <a:pPr algn="ctr"/>
+            <a:r>
+              <a:rPr sz="1800" b="1">
+                <a:solidFill>
+                  <a:srgbClr val="FFFFFF"/>
+                </a:solidFill>
+                <a:latin typeface="Arial"/>
+              </a:rPr>
+              <a:t>NOTEBOOK</a:t>
+            </a:r>
+          </a:p>
+        </p:txBody>
+      </p:sp>
+      <p:sp>
+        <p:nvSpPr>
+          <p:cNvPr id="5" name="Rounded Rectangle 4"/>
+          <p:cNvSpPr/>
+          <p:nvPr/>
+        </p:nvSpPr>
+        <p:spPr>
+          <a:xfrm>
+            <a:off x="1097280" y="1737360"/>
+            <a:ext cx="9966960" cy="1234440"/>
+          </a:xfrm>
+          <a:prstGeom prst="roundRect">
+            <a:avLst/>
+          </a:prstGeom>
+          <a:solidFill>
+            <a:srgbClr val="E8EDF4"/>
+          </a:solidFill>
+          <a:ln>
+            <a:noFill/>
+          </a:ln>
+        </p:spPr>
+        <p:style>
+          <a:lnRef idx="1">
+            <a:schemeClr val="accent1"/>
+          </a:lnRef>
+          <a:fillRef idx="3">
+            <a:schemeClr val="accent1"/>
+          </a:fillRef>
+          <a:effectRef idx="2">
+            <a:schemeClr val="accent1"/>
+          </a:effectRef>
+          <a:fontRef idx="minor">
+            <a:schemeClr val="lt1"/>
+          </a:fontRef>
+        </p:style>
+        <p:txBody>
+          <a:bodyPr rtlCol="0" anchor="ctr" wrap="square"/>
+          <a:lstStyle/>
+          <a:p>
+            <a:pPr algn="ctr"/>
+          </a:p>
+        </p:txBody>
+      </p:sp>
+      <p:sp>
+        <p:nvSpPr>
+          <p:cNvPr id="6" name="TextBox 5"/>
+          <p:cNvSpPr txBox="1"/>
+          <p:nvPr/>
+        </p:nvSpPr>
+        <p:spPr>
+          <a:xfrm>
+            <a:off x="1371600" y="1828800"/>
+            <a:ext cx="9418320" cy="457200"/>
+          </a:xfrm>
+          <a:prstGeom prst="rect">
+            <a:avLst/>
+          </a:prstGeom>
+          <a:noFill/>
+        </p:spPr>
+        <p:txBody>
+          <a:bodyPr wrap="square" anchor="t">
+            <a:spAutoFit/>
+          </a:bodyPr>
+          <a:lstStyle/>
+          <a:p>
+            <a:pPr algn="l"/>
+            <a:r>
+              <a:rPr sz="1600" b="1" i="0">
+                <a:solidFill>
+                  <a:srgbClr val="C05014"/>
+                </a:solidFill>
+                <a:latin typeface="Arial"/>
+              </a:rPr>
+              <a:t>WRITE:</a:t>
+            </a:r>
+          </a:p>
+        </p:txBody>
+      </p:sp>
+      <p:sp>
+        <p:nvSpPr>
+          <p:cNvPr id="7" name="TextBox 6"/>
+          <p:cNvSpPr txBox="1"/>
+          <p:nvPr/>
+        </p:nvSpPr>
+        <p:spPr>
+          <a:xfrm>
+            <a:off x="1371600" y="2240280"/>
+            <a:ext cx="9418320" cy="640080"/>
+          </a:xfrm>
+          <a:prstGeom prst="rect">
+            <a:avLst/>
+          </a:prstGeom>
+          <a:noFill/>
+        </p:spPr>
+        <p:txBody>
+          <a:bodyPr wrap="square" anchor="t">
+            <a:spAutoFit/>
+          </a:bodyPr>
+          <a:lstStyle/>
+          <a:p>
+            <a:pPr algn="l"/>
+            <a:r>
+              <a:rPr sz="2800" b="1" i="0">
+                <a:solidFill>
+                  <a:srgbClr val="1F3A5F"/>
+                </a:solidFill>
+                <a:latin typeface="Arial"/>
+              </a:rPr>
+              <a:t>Stored energy can cause a change later.</a:t>
+            </a:r>
+          </a:p>
+        </p:txBody>
+      </p:sp>
+      <p:sp>
+        <p:nvSpPr>
+          <p:cNvPr id="8" name="TextBox 7"/>
+          <p:cNvSpPr txBox="1"/>
+          <p:nvPr/>
+        </p:nvSpPr>
+        <p:spPr>
+          <a:xfrm>
+            <a:off x="1371600" y="3017520"/>
+            <a:ext cx="9418320" cy="457200"/>
+          </a:xfrm>
+          <a:prstGeom prst="rect">
+            <a:avLst/>
+          </a:prstGeom>
+          <a:noFill/>
+        </p:spPr>
+        <p:txBody>
+          <a:bodyPr wrap="square" anchor="t">
+            <a:spAutoFit/>
+          </a:bodyPr>
+          <a:lstStyle/>
+          <a:p>
+            <a:pPr algn="l"/>
+            <a:r>
+              <a:rPr sz="1600" b="0" i="1">
+                <a:solidFill>
+                  <a:srgbClr val="555555"/>
+                </a:solidFill>
+                <a:latin typeface="Arial"/>
+              </a:rPr>
+              <a:t>REVEAL → LATER</a:t>
+            </a:r>
+          </a:p>
+        </p:txBody>
+      </p:sp>
+      <p:sp>
+        <p:nvSpPr>
+          <p:cNvPr id="9" name="Rounded Rectangle 8"/>
+          <p:cNvSpPr/>
+          <p:nvPr/>
+        </p:nvSpPr>
+        <p:spPr>
+          <a:xfrm>
+            <a:off x="1097280" y="4206240"/>
+            <a:ext cx="9966960" cy="1828800"/>
+          </a:xfrm>
+          <a:prstGeom prst="roundRect">
+            <a:avLst/>
+          </a:prstGeom>
+          <a:solidFill>
+            <a:srgbClr val="2E6B3F"/>
+          </a:solidFill>
+          <a:ln>
+            <a:noFill/>
+          </a:ln>
+        </p:spPr>
+        <p:style>
+          <a:lnRef idx="1">
+            <a:schemeClr val="accent1"/>
+          </a:lnRef>
+          <a:fillRef idx="3">
+            <a:schemeClr val="accent1"/>
+          </a:fillRef>
+          <a:effectRef idx="2">
+            <a:schemeClr val="accent1"/>
+          </a:effectRef>
+          <a:fontRef idx="minor">
+            <a:schemeClr val="lt1"/>
+          </a:fontRef>
+        </p:style>
+        <p:txBody>
+          <a:bodyPr rtlCol="0" anchor="ctr" wrap="square"/>
+          <a:lstStyle/>
+          <a:p>
+            <a:pPr algn="ctr"/>
+          </a:p>
+        </p:txBody>
+      </p:sp>
+      <p:sp>
+        <p:nvSpPr>
+          <p:cNvPr id="10" name="TextBox 9"/>
+          <p:cNvSpPr txBox="1"/>
+          <p:nvPr/>
+        </p:nvSpPr>
+        <p:spPr>
+          <a:xfrm>
+            <a:off x="1371600" y="4297679"/>
+            <a:ext cx="9418320" cy="457200"/>
+          </a:xfrm>
+          <a:prstGeom prst="rect">
+            <a:avLst/>
+          </a:prstGeom>
+          <a:noFill/>
+        </p:spPr>
+        <p:txBody>
+          <a:bodyPr wrap="square" anchor="t">
+            <a:spAutoFit/>
+          </a:bodyPr>
+          <a:lstStyle/>
+          <a:p>
+            <a:pPr algn="l"/>
+            <a:r>
+              <a:rPr sz="1600" b="1" i="0">
+                <a:solidFill>
+                  <a:srgbClr val="FFFFFF"/>
+                </a:solidFill>
+                <a:latin typeface="Arial"/>
+              </a:rPr>
+              <a:t>DRAWING IDEAS (draw YOUR example):</a:t>
+            </a:r>
+          </a:p>
+        </p:txBody>
+      </p:sp>
+      <p:sp>
+        <p:nvSpPr>
+          <p:cNvPr id="11" name="TextBox 10"/>
+          <p:cNvSpPr txBox="1"/>
+          <p:nvPr/>
+        </p:nvSpPr>
+        <p:spPr>
+          <a:xfrm>
+            <a:off x="1463040" y="4754879"/>
+            <a:ext cx="9418320" cy="411480"/>
+          </a:xfrm>
+          <a:prstGeom prst="rect">
+            <a:avLst/>
+          </a:prstGeom>
+          <a:noFill/>
+        </p:spPr>
+        <p:txBody>
+          <a:bodyPr wrap="square" anchor="t">
+            <a:spAutoFit/>
+          </a:bodyPr>
+          <a:lstStyle/>
+          <a:p>
+            <a:pPr algn="l"/>
+            <a:r>
+              <a:rPr sz="1800" b="0" i="0">
+                <a:solidFill>
+                  <a:srgbClr val="FFFFFF"/>
+                </a:solidFill>
+                <a:latin typeface="Arial"/>
+              </a:rPr>
+              <a:t>•  a battery in a flashlight</a:t>
+            </a:r>
+          </a:p>
+        </p:txBody>
+      </p:sp>
+      <p:sp>
+        <p:nvSpPr>
+          <p:cNvPr id="12" name="TextBox 11"/>
+          <p:cNvSpPr txBox="1"/>
+          <p:nvPr/>
+        </p:nvSpPr>
+        <p:spPr>
+          <a:xfrm>
+            <a:off x="1463040" y="5166359"/>
+            <a:ext cx="9418320" cy="411480"/>
+          </a:xfrm>
+          <a:prstGeom prst="rect">
+            <a:avLst/>
+          </a:prstGeom>
+          <a:noFill/>
+        </p:spPr>
+        <p:txBody>
+          <a:bodyPr wrap="square" anchor="t">
+            <a:spAutoFit/>
+          </a:bodyPr>
+          <a:lstStyle/>
+          <a:p>
+            <a:pPr algn="l"/>
+            <a:r>
+              <a:rPr sz="1800" b="0" i="0">
+                <a:solidFill>
+                  <a:srgbClr val="FFFFFF"/>
+                </a:solidFill>
+                <a:latin typeface="Arial"/>
+              </a:rPr>
+              <a:t>•  a stretched rubber band</a:t>
+            </a:r>
+          </a:p>
+        </p:txBody>
+      </p:sp>
+      <p:sp>
+        <p:nvSpPr>
+          <p:cNvPr id="13" name="TextBox 12"/>
+          <p:cNvSpPr txBox="1"/>
+          <p:nvPr/>
+        </p:nvSpPr>
+        <p:spPr>
+          <a:xfrm>
+            <a:off x="1463040" y="5577840"/>
+            <a:ext cx="9418320" cy="411480"/>
+          </a:xfrm>
+          <a:prstGeom prst="rect">
+            <a:avLst/>
+          </a:prstGeom>
+          <a:noFill/>
+        </p:spPr>
+        <p:txBody>
+          <a:bodyPr wrap="square" anchor="t">
+            <a:spAutoFit/>
+          </a:bodyPr>
+          <a:lstStyle/>
+          <a:p>
+            <a:pPr algn="l"/>
+            <a:r>
+              <a:rPr sz="1800" b="0" i="0">
+                <a:solidFill>
+                  <a:srgbClr val="FFFFFF"/>
+                </a:solidFill>
+                <a:latin typeface="Arial"/>
+              </a:rPr>
+              <a:t>•  a raised object (apple/book)</a:t>
             </a:r>
           </a:p>
         </p:txBody>

--- a/production/slides/01-ch1-energy-causes-change-slides.pptx
+++ b/production/slides/01-ch1-energy-causes-change-slides.pptx
@@ -3558,7 +3558,7 @@
                 </a:solidFill>
                 <a:latin typeface="Arial"/>
               </a:rPr>
-              <a:t>Energy has different forms</a:t>
+              <a:t>What changes does the pencil sharpener cause?</a:t>
             </a:r>
           </a:p>
         </p:txBody>
@@ -3571,14 +3571,14 @@
         </p:nvSpPr>
         <p:spPr>
           <a:xfrm>
-            <a:off x="640080" y="2651760"/>
-            <a:ext cx="2103120" cy="1554480"/>
+            <a:off x="914400" y="2103120"/>
+            <a:ext cx="4754880" cy="2286000"/>
           </a:xfrm>
           <a:prstGeom prst="roundRect">
             <a:avLst/>
           </a:prstGeom>
           <a:solidFill>
-            <a:srgbClr val="1F3A5F"/>
+            <a:srgbClr val="E8EDF4"/>
           </a:solidFill>
           <a:ln>
             <a:noFill/>
@@ -3604,33 +3604,34 @@
           <a:p>
             <a:pPr algn="ctr"/>
             <a:r>
-              <a:rPr sz="2400" b="1">
-                <a:solidFill>
-                  <a:srgbClr val="FFFFFF"/>
-                </a:solidFill>
-                <a:latin typeface="Arial"/>
-              </a:rPr>
-              <a:t>motion</a:t>
-            </a:r>
-          </a:p>
-        </p:txBody>
-      </p:sp>
-      <p:sp>
-        <p:nvSpPr>
-          <p:cNvPr id="5" name="Rounded Rectangle 4"/>
+              <a:rPr sz="2800" b="1">
+                <a:solidFill>
+                  <a:srgbClr val="1F3A5F"/>
+                </a:solidFill>
+                <a:latin typeface="Arial"/>
+              </a:rPr>
+              <a:t>BEFORE
+dull pencil · silent</a:t>
+            </a:r>
+          </a:p>
+        </p:txBody>
+      </p:sp>
+      <p:sp>
+        <p:nvSpPr>
+          <p:cNvPr id="5" name="Right Arrow 4"/>
           <p:cNvSpPr/>
           <p:nvPr/>
         </p:nvSpPr>
         <p:spPr>
           <a:xfrm>
-            <a:off x="2926080" y="2651760"/>
-            <a:ext cx="2103120" cy="1554480"/>
-          </a:xfrm>
-          <a:prstGeom prst="roundRect">
-            <a:avLst/>
-          </a:prstGeom>
-          <a:solidFill>
-            <a:srgbClr val="1F3A5F"/>
+            <a:off x="5806440" y="2834640"/>
+            <a:ext cx="822960" cy="640080"/>
+          </a:xfrm>
+          <a:prstGeom prst="rightArrow">
+            <a:avLst/>
+          </a:prstGeom>
+          <a:solidFill>
+            <a:srgbClr val="C05014"/>
           </a:solidFill>
           <a:ln>
             <a:noFill/>
@@ -3651,19 +3652,10 @@
           </a:fontRef>
         </p:style>
         <p:txBody>
-          <a:bodyPr rtlCol="0" anchor="ctr" wrap="square"/>
+          <a:bodyPr rtlCol="0" anchor="ctr"/>
           <a:lstStyle/>
           <a:p>
             <a:pPr algn="ctr"/>
-            <a:r>
-              <a:rPr sz="2400" b="1">
-                <a:solidFill>
-                  <a:srgbClr val="FFFFFF"/>
-                </a:solidFill>
-                <a:latin typeface="Arial"/>
-              </a:rPr>
-              <a:t>sound</a:t>
-            </a:r>
           </a:p>
         </p:txBody>
       </p:sp>
@@ -3675,14 +3667,14 @@
         </p:nvSpPr>
         <p:spPr>
           <a:xfrm>
-            <a:off x="5212080" y="2651760"/>
-            <a:ext cx="2103120" cy="1554480"/>
+            <a:off x="6766560" y="2103120"/>
+            <a:ext cx="4754880" cy="2286000"/>
           </a:xfrm>
           <a:prstGeom prst="roundRect">
             <a:avLst/>
           </a:prstGeom>
           <a:solidFill>
-            <a:srgbClr val="1F3A5F"/>
+            <a:srgbClr val="C05014"/>
           </a:solidFill>
           <a:ln>
             <a:noFill/>
@@ -3708,131 +3700,28 @@
           <a:p>
             <a:pPr algn="ctr"/>
             <a:r>
-              <a:rPr sz="2400" b="1">
+              <a:rPr sz="2800" b="1">
                 <a:solidFill>
                   <a:srgbClr val="FFFFFF"/>
                 </a:solidFill>
                 <a:latin typeface="Arial"/>
               </a:rPr>
-              <a:t>light</a:t>
-            </a:r>
-          </a:p>
-        </p:txBody>
-      </p:sp>
-      <p:sp>
-        <p:nvSpPr>
-          <p:cNvPr id="7" name="Rounded Rectangle 6"/>
-          <p:cNvSpPr/>
-          <p:nvPr/>
-        </p:nvSpPr>
-        <p:spPr>
-          <a:xfrm>
-            <a:off x="7498079" y="2651760"/>
-            <a:ext cx="2103120" cy="1554480"/>
-          </a:xfrm>
-          <a:prstGeom prst="roundRect">
-            <a:avLst/>
-          </a:prstGeom>
-          <a:solidFill>
-            <a:srgbClr val="1F3A5F"/>
-          </a:solidFill>
-          <a:ln>
-            <a:noFill/>
-          </a:ln>
-        </p:spPr>
-        <p:style>
-          <a:lnRef idx="1">
-            <a:schemeClr val="accent1"/>
-          </a:lnRef>
-          <a:fillRef idx="3">
-            <a:schemeClr val="accent1"/>
-          </a:fillRef>
-          <a:effectRef idx="2">
-            <a:schemeClr val="accent1"/>
-          </a:effectRef>
-          <a:fontRef idx="minor">
-            <a:schemeClr val="lt1"/>
-          </a:fontRef>
-        </p:style>
-        <p:txBody>
-          <a:bodyPr rtlCol="0" anchor="ctr" wrap="square"/>
-          <a:lstStyle/>
-          <a:p>
-            <a:pPr algn="ctr"/>
-            <a:r>
-              <a:rPr sz="2400" b="1">
-                <a:solidFill>
-                  <a:srgbClr val="FFFFFF"/>
-                </a:solidFill>
-                <a:latin typeface="Arial"/>
-              </a:rPr>
-              <a:t>heat</a:t>
-            </a:r>
-          </a:p>
-        </p:txBody>
-      </p:sp>
-      <p:sp>
-        <p:nvSpPr>
-          <p:cNvPr id="8" name="Rounded Rectangle 7"/>
-          <p:cNvSpPr/>
-          <p:nvPr/>
-        </p:nvSpPr>
-        <p:spPr>
-          <a:xfrm>
-            <a:off x="9784080" y="2651760"/>
-            <a:ext cx="2103120" cy="1554480"/>
-          </a:xfrm>
-          <a:prstGeom prst="roundRect">
-            <a:avLst/>
-          </a:prstGeom>
-          <a:solidFill>
-            <a:srgbClr val="1F3A5F"/>
-          </a:solidFill>
-          <a:ln>
-            <a:noFill/>
-          </a:ln>
-        </p:spPr>
-        <p:style>
-          <a:lnRef idx="1">
-            <a:schemeClr val="accent1"/>
-          </a:lnRef>
-          <a:fillRef idx="3">
-            <a:schemeClr val="accent1"/>
-          </a:fillRef>
-          <a:effectRef idx="2">
-            <a:schemeClr val="accent1"/>
-          </a:effectRef>
-          <a:fontRef idx="minor">
-            <a:schemeClr val="lt1"/>
-          </a:fontRef>
-        </p:style>
-        <p:txBody>
-          <a:bodyPr rtlCol="0" anchor="ctr" wrap="square"/>
-          <a:lstStyle/>
-          <a:p>
-            <a:pPr algn="ctr"/>
-            <a:r>
-              <a:rPr sz="2400" b="1">
-                <a:solidFill>
-                  <a:srgbClr val="FFFFFF"/>
-                </a:solidFill>
-                <a:latin typeface="Arial"/>
-              </a:rPr>
-              <a:t>electrical energy</a:t>
-            </a:r>
-          </a:p>
-        </p:txBody>
-      </p:sp>
-      <p:sp>
-        <p:nvSpPr>
-          <p:cNvPr id="9" name="TextBox 8"/>
+              <a:t>AFTER
+sharp tip · humming</a:t>
+            </a:r>
+          </a:p>
+        </p:txBody>
+      </p:sp>
+      <p:sp>
+        <p:nvSpPr>
+          <p:cNvPr id="7" name="TextBox 6"/>
           <p:cNvSpPr txBox="1"/>
           <p:nvPr/>
         </p:nvSpPr>
         <p:spPr>
           <a:xfrm>
-            <a:off x="11338560" y="6446520"/>
-            <a:ext cx="731520" cy="365760"/>
+            <a:off x="914400" y="4937760"/>
+            <a:ext cx="10332720" cy="731520"/>
           </a:xfrm>
           <a:prstGeom prst="rect">
             <a:avLst/>
@@ -3845,6 +3734,41 @@
           </a:bodyPr>
           <a:lstStyle/>
           <a:p>
+            <a:pPr algn="ctr"/>
+            <a:r>
+              <a:rPr sz="2600" b="1">
+                <a:solidFill>
+                  <a:srgbClr val="C05014"/>
+                </a:solidFill>
+                <a:latin typeface="Arial"/>
+              </a:rPr>
+              <a:t>Predict first — then watch!</a:t>
+            </a:r>
+          </a:p>
+        </p:txBody>
+      </p:sp>
+      <p:sp>
+        <p:nvSpPr>
+          <p:cNvPr id="8" name="TextBox 7"/>
+          <p:cNvSpPr txBox="1"/>
+          <p:nvPr/>
+        </p:nvSpPr>
+        <p:spPr>
+          <a:xfrm>
+            <a:off x="11338560" y="6446520"/>
+            <a:ext cx="731520" cy="365760"/>
+          </a:xfrm>
+          <a:prstGeom prst="rect">
+            <a:avLst/>
+          </a:prstGeom>
+          <a:noFill/>
+        </p:spPr>
+        <p:txBody>
+          <a:bodyPr wrap="square" anchor="t">
+            <a:spAutoFit/>
+          </a:bodyPr>
+          <a:lstStyle/>
+          <a:p>
             <a:pPr algn="r"/>
             <a:r>
               <a:rPr sz="1200" b="0">
@@ -3853,7 +3777,7 @@
                 </a:solidFill>
                 <a:latin typeface="Arial"/>
               </a:rPr>
-              <a:t>10</a:t>
+              <a:t>8</a:t>
             </a:r>
           </a:p>
         </p:txBody>
@@ -3949,21 +3873,56 @@
                 </a:solidFill>
                 <a:latin typeface="Arial"/>
               </a:rPr>
-              <a:t>Motion</a:t>
-            </a:r>
-          </a:p>
-        </p:txBody>
-      </p:sp>
-      <p:sp>
-        <p:nvSpPr>
-          <p:cNvPr id="4" name="Rounded Rectangle 3"/>
+              <a:t>Energy Detectives</a:t>
+            </a:r>
+          </a:p>
+        </p:txBody>
+      </p:sp>
+      <p:sp>
+        <p:nvSpPr>
+          <p:cNvPr id="4" name="TextBox 3"/>
+          <p:cNvSpPr txBox="1"/>
+          <p:nvPr/>
+        </p:nvSpPr>
+        <p:spPr>
+          <a:xfrm>
+            <a:off x="502920" y="1170432"/>
+            <a:ext cx="11247120" cy="457200"/>
+          </a:xfrm>
+          <a:prstGeom prst="rect">
+            <a:avLst/>
+          </a:prstGeom>
+          <a:noFill/>
+        </p:spPr>
+        <p:txBody>
+          <a:bodyPr wrap="square" anchor="t">
+            <a:spAutoFit/>
+          </a:bodyPr>
+          <a:lstStyle/>
+          <a:p>
+            <a:pPr algn="l"/>
+            <a:r>
+              <a:rPr sz="1600" b="0">
+                <a:solidFill>
+                  <a:srgbClr val="555555"/>
+                </a:solidFill>
+                <a:latin typeface="Arial"/>
+              </a:rPr>
+              <a:t>Lab directions</a:t>
+            </a:r>
+          </a:p>
+        </p:txBody>
+      </p:sp>
+      <p:sp>
+        <p:nvSpPr>
+          <p:cNvPr id="5" name="Rounded Rectangle 4"/>
           <p:cNvSpPr/>
           <p:nvPr/>
         </p:nvSpPr>
         <p:spPr>
           <a:xfrm>
-            <a:off x="914400" y="2194560"/>
-            <a:ext cx="4114800" cy="2011680"/>
+            <a:off x="822960" y="2103120"/>
+            <a:ext cx="10515600" cy="3291840"/>
           </a:xfrm>
           <a:prstGeom prst="roundRect">
             <a:avLst/>
@@ -3994,123 +3953,19 @@
           <a:lstStyle/>
           <a:p>
             <a:pPr algn="ctr"/>
-            <a:r>
-              <a:rPr sz="3000" b="1">
-                <a:solidFill>
-                  <a:srgbClr val="1F3A5F"/>
-                </a:solidFill>
-                <a:latin typeface="Arial"/>
-              </a:rPr>
-              <a:t>rolling ball</a:t>
-            </a:r>
-          </a:p>
-        </p:txBody>
-      </p:sp>
-      <p:sp>
-        <p:nvSpPr>
-          <p:cNvPr id="5" name="Right Arrow 4"/>
-          <p:cNvSpPr/>
-          <p:nvPr/>
-        </p:nvSpPr>
-        <p:spPr>
-          <a:xfrm>
-            <a:off x="5120640" y="2834640"/>
-            <a:ext cx="822960" cy="640080"/>
-          </a:xfrm>
-          <a:prstGeom prst="rightArrow">
-            <a:avLst/>
-          </a:prstGeom>
-          <a:solidFill>
-            <a:srgbClr val="C05014"/>
-          </a:solidFill>
-          <a:ln>
-            <a:noFill/>
-          </a:ln>
-        </p:spPr>
-        <p:style>
-          <a:lnRef idx="1">
-            <a:schemeClr val="accent1"/>
-          </a:lnRef>
-          <a:fillRef idx="3">
-            <a:schemeClr val="accent1"/>
-          </a:fillRef>
-          <a:effectRef idx="2">
-            <a:schemeClr val="accent1"/>
-          </a:effectRef>
-          <a:fontRef idx="minor">
-            <a:schemeClr val="lt1"/>
-          </a:fontRef>
-        </p:style>
-        <p:txBody>
-          <a:bodyPr rtlCol="0" anchor="ctr"/>
-          <a:lstStyle/>
-          <a:p>
-            <a:pPr algn="ctr"/>
-          </a:p>
-        </p:txBody>
-      </p:sp>
-      <p:sp>
-        <p:nvSpPr>
-          <p:cNvPr id="6" name="Rounded Rectangle 5"/>
-          <p:cNvSpPr/>
-          <p:nvPr/>
-        </p:nvSpPr>
-        <p:spPr>
-          <a:xfrm>
-            <a:off x="6035040" y="2194560"/>
-            <a:ext cx="4114800" cy="2011680"/>
-          </a:xfrm>
-          <a:prstGeom prst="roundRect">
-            <a:avLst/>
-          </a:prstGeom>
-          <a:solidFill>
-            <a:srgbClr val="C05014"/>
-          </a:solidFill>
-          <a:ln>
-            <a:noFill/>
-          </a:ln>
-        </p:spPr>
-        <p:style>
-          <a:lnRef idx="1">
-            <a:schemeClr val="accent1"/>
-          </a:lnRef>
-          <a:fillRef idx="3">
-            <a:schemeClr val="accent1"/>
-          </a:fillRef>
-          <a:effectRef idx="2">
-            <a:schemeClr val="accent1"/>
-          </a:effectRef>
-          <a:fontRef idx="minor">
-            <a:schemeClr val="lt1"/>
-          </a:fontRef>
-        </p:style>
-        <p:txBody>
-          <a:bodyPr rtlCol="0" anchor="ctr" wrap="square"/>
-          <a:lstStyle/>
-          <a:p>
-            <a:pPr algn="ctr"/>
-            <a:r>
-              <a:rPr sz="3000" b="1">
-                <a:solidFill>
-                  <a:srgbClr val="FFFFFF"/>
-                </a:solidFill>
-                <a:latin typeface="Arial"/>
-              </a:rPr>
-              <a:t>moved the block</a:t>
-            </a:r>
-          </a:p>
-        </p:txBody>
-      </p:sp>
-      <p:sp>
-        <p:nvSpPr>
-          <p:cNvPr id="7" name="TextBox 6"/>
+          </a:p>
+        </p:txBody>
+      </p:sp>
+      <p:sp>
+        <p:nvSpPr>
+          <p:cNvPr id="6" name="TextBox 5"/>
           <p:cNvSpPr txBox="1"/>
           <p:nvPr/>
         </p:nvSpPr>
         <p:spPr>
           <a:xfrm>
-            <a:off x="914400" y="4846320"/>
-            <a:ext cx="10332720" cy="822960"/>
+            <a:off x="1280160" y="2377440"/>
+            <a:ext cx="9692640" cy="822960"/>
           </a:xfrm>
           <a:prstGeom prst="rect">
             <a:avLst/>
@@ -4123,29 +3978,29 @@
           </a:bodyPr>
           <a:lstStyle/>
           <a:p>
-            <a:pPr algn="ctr"/>
-            <a:r>
-              <a:rPr sz="2800" b="1">
+            <a:pPr algn="l"/>
+            <a:r>
+              <a:rPr sz="2600" b="0">
                 <a:solidFill>
                   <a:srgbClr val="1F3A5F"/>
                 </a:solidFill>
                 <a:latin typeface="Arial"/>
               </a:rPr>
-              <a:t>Moving objects have energy of motion.</a:t>
-            </a:r>
-          </a:p>
-        </p:txBody>
-      </p:sp>
-      <p:sp>
-        <p:nvSpPr>
-          <p:cNvPr id="8" name="TextBox 7"/>
+              <a:t>1.  Find 3 classroom examples of change.</a:t>
+            </a:r>
+          </a:p>
+        </p:txBody>
+      </p:sp>
+      <p:sp>
+        <p:nvSpPr>
+          <p:cNvPr id="7" name="TextBox 6"/>
           <p:cNvSpPr txBox="1"/>
           <p:nvPr/>
         </p:nvSpPr>
         <p:spPr>
           <a:xfrm>
-            <a:off x="11338560" y="6446520"/>
-            <a:ext cx="731520" cy="365760"/>
+            <a:off x="1280160" y="3291840"/>
+            <a:ext cx="9692640" cy="822960"/>
           </a:xfrm>
           <a:prstGeom prst="rect">
             <a:avLst/>
@@ -4158,6 +4013,111 @@
           </a:bodyPr>
           <a:lstStyle/>
           <a:p>
+            <a:pPr algn="l"/>
+            <a:r>
+              <a:rPr sz="2600" b="0">
+                <a:solidFill>
+                  <a:srgbClr val="1F3A5F"/>
+                </a:solidFill>
+                <a:latin typeface="Arial"/>
+              </a:rPr>
+              <a:t>2.  For each, record: what changed, the evidence, and the energy form.</a:t>
+            </a:r>
+          </a:p>
+        </p:txBody>
+      </p:sp>
+      <p:sp>
+        <p:nvSpPr>
+          <p:cNvPr id="8" name="TextBox 7"/>
+          <p:cNvSpPr txBox="1"/>
+          <p:nvPr/>
+        </p:nvSpPr>
+        <p:spPr>
+          <a:xfrm>
+            <a:off x="1280160" y="4206240"/>
+            <a:ext cx="9692640" cy="822960"/>
+          </a:xfrm>
+          <a:prstGeom prst="rect">
+            <a:avLst/>
+          </a:prstGeom>
+          <a:noFill/>
+        </p:spPr>
+        <p:txBody>
+          <a:bodyPr wrap="square" anchor="t">
+            <a:spAutoFit/>
+          </a:bodyPr>
+          <a:lstStyle/>
+          <a:p>
+            <a:pPr algn="l"/>
+            <a:r>
+              <a:rPr sz="2600" b="0">
+                <a:solidFill>
+                  <a:srgbClr val="1F3A5F"/>
+                </a:solidFill>
+                <a:latin typeface="Arial"/>
+              </a:rPr>
+              <a:t>3.  Write one question you still have.</a:t>
+            </a:r>
+          </a:p>
+        </p:txBody>
+      </p:sp>
+      <p:sp>
+        <p:nvSpPr>
+          <p:cNvPr id="9" name="TextBox 8"/>
+          <p:cNvSpPr txBox="1"/>
+          <p:nvPr/>
+        </p:nvSpPr>
+        <p:spPr>
+          <a:xfrm>
+            <a:off x="822960" y="5577840"/>
+            <a:ext cx="10515600" cy="640080"/>
+          </a:xfrm>
+          <a:prstGeom prst="rect">
+            <a:avLst/>
+          </a:prstGeom>
+          <a:noFill/>
+        </p:spPr>
+        <p:txBody>
+          <a:bodyPr wrap="square" anchor="t">
+            <a:spAutoFit/>
+          </a:bodyPr>
+          <a:lstStyle/>
+          <a:p>
+            <a:pPr algn="ctr"/>
+            <a:r>
+              <a:rPr sz="2000" b="0">
+                <a:solidFill>
+                  <a:srgbClr val="555555"/>
+                </a:solidFill>
+                <a:latin typeface="Arial"/>
+              </a:rPr>
+              <a:t>Observation only — describe what you see.</a:t>
+            </a:r>
+          </a:p>
+        </p:txBody>
+      </p:sp>
+      <p:sp>
+        <p:nvSpPr>
+          <p:cNvPr id="10" name="TextBox 9"/>
+          <p:cNvSpPr txBox="1"/>
+          <p:nvPr/>
+        </p:nvSpPr>
+        <p:spPr>
+          <a:xfrm>
+            <a:off x="11338560" y="6446520"/>
+            <a:ext cx="731520" cy="365760"/>
+          </a:xfrm>
+          <a:prstGeom prst="rect">
+            <a:avLst/>
+          </a:prstGeom>
+          <a:noFill/>
+        </p:spPr>
+        <p:txBody>
+          <a:bodyPr wrap="square" anchor="t">
+            <a:spAutoFit/>
+          </a:bodyPr>
+          <a:lstStyle/>
+          <a:p>
             <a:pPr algn="r"/>
             <a:r>
               <a:rPr sz="1200" b="0">
@@ -4166,7 +4126,7 @@
                 </a:solidFill>
                 <a:latin typeface="Arial"/>
               </a:rPr>
-              <a:t>11</a:t>
+              <a:t>9</a:t>
             </a:r>
           </a:p>
         </p:txBody>
@@ -4262,7 +4222,7 @@
                 </a:solidFill>
                 <a:latin typeface="Arial"/>
               </a:rPr>
-              <a:t>Sound</a:t>
+              <a:t>Energy has different forms</a:t>
             </a:r>
           </a:p>
         </p:txBody>
@@ -4275,14 +4235,14 @@
         </p:nvSpPr>
         <p:spPr>
           <a:xfrm>
-            <a:off x="914400" y="2194560"/>
-            <a:ext cx="4114800" cy="2011680"/>
+            <a:off x="640080" y="2651760"/>
+            <a:ext cx="2103120" cy="1554480"/>
           </a:xfrm>
           <a:prstGeom prst="roundRect">
             <a:avLst/>
           </a:prstGeom>
           <a:solidFill>
-            <a:srgbClr val="E8EDF4"/>
+            <a:srgbClr val="1F3A5F"/>
           </a:solidFill>
           <a:ln>
             <a:noFill/>
@@ -4308,33 +4268,33 @@
           <a:p>
             <a:pPr algn="ctr"/>
             <a:r>
-              <a:rPr sz="3000" b="1">
-                <a:solidFill>
-                  <a:srgbClr val="1F3A5F"/>
-                </a:solidFill>
-                <a:latin typeface="Arial"/>
-              </a:rPr>
-              <a:t>ringing bell</a:t>
-            </a:r>
-          </a:p>
-        </p:txBody>
-      </p:sp>
-      <p:sp>
-        <p:nvSpPr>
-          <p:cNvPr id="5" name="Right Arrow 4"/>
+              <a:rPr sz="2400" b="1">
+                <a:solidFill>
+                  <a:srgbClr val="FFFFFF"/>
+                </a:solidFill>
+                <a:latin typeface="Arial"/>
+              </a:rPr>
+              <a:t>motion</a:t>
+            </a:r>
+          </a:p>
+        </p:txBody>
+      </p:sp>
+      <p:sp>
+        <p:nvSpPr>
+          <p:cNvPr id="5" name="Rounded Rectangle 4"/>
           <p:cNvSpPr/>
           <p:nvPr/>
         </p:nvSpPr>
         <p:spPr>
           <a:xfrm>
-            <a:off x="5120640" y="2834640"/>
-            <a:ext cx="822960" cy="640080"/>
-          </a:xfrm>
-          <a:prstGeom prst="rightArrow">
-            <a:avLst/>
-          </a:prstGeom>
-          <a:solidFill>
-            <a:srgbClr val="C05014"/>
+            <a:off x="2926080" y="2651760"/>
+            <a:ext cx="2103120" cy="1554480"/>
+          </a:xfrm>
+          <a:prstGeom prst="roundRect">
+            <a:avLst/>
+          </a:prstGeom>
+          <a:solidFill>
+            <a:srgbClr val="1F3A5F"/>
           </a:solidFill>
           <a:ln>
             <a:noFill/>
@@ -4355,10 +4315,19 @@
           </a:fontRef>
         </p:style>
         <p:txBody>
-          <a:bodyPr rtlCol="0" anchor="ctr"/>
+          <a:bodyPr rtlCol="0" anchor="ctr" wrap="square"/>
           <a:lstStyle/>
           <a:p>
             <a:pPr algn="ctr"/>
+            <a:r>
+              <a:rPr sz="2400" b="1">
+                <a:solidFill>
+                  <a:srgbClr val="FFFFFF"/>
+                </a:solidFill>
+                <a:latin typeface="Arial"/>
+              </a:rPr>
+              <a:t>sound</a:t>
+            </a:r>
           </a:p>
         </p:txBody>
       </p:sp>
@@ -4370,14 +4339,14 @@
         </p:nvSpPr>
         <p:spPr>
           <a:xfrm>
-            <a:off x="6035040" y="2194560"/>
-            <a:ext cx="4114800" cy="2011680"/>
+            <a:off x="5212080" y="2651760"/>
+            <a:ext cx="2103120" cy="1554480"/>
           </a:xfrm>
           <a:prstGeom prst="roundRect">
             <a:avLst/>
           </a:prstGeom>
           <a:solidFill>
-            <a:srgbClr val="C05014"/>
+            <a:srgbClr val="1F3A5F"/>
           </a:solidFill>
           <a:ln>
             <a:noFill/>
@@ -4403,27 +4372,131 @@
           <a:p>
             <a:pPr algn="ctr"/>
             <a:r>
-              <a:rPr sz="2600" b="1">
+              <a:rPr sz="2400" b="1">
                 <a:solidFill>
                   <a:srgbClr val="FFFFFF"/>
                 </a:solidFill>
                 <a:latin typeface="Arial"/>
               </a:rPr>
-              <a:t>sound reaches your ear</a:t>
-            </a:r>
-          </a:p>
-        </p:txBody>
-      </p:sp>
-      <p:sp>
-        <p:nvSpPr>
-          <p:cNvPr id="7" name="TextBox 6"/>
+              <a:t>light</a:t>
+            </a:r>
+          </a:p>
+        </p:txBody>
+      </p:sp>
+      <p:sp>
+        <p:nvSpPr>
+          <p:cNvPr id="7" name="Rounded Rectangle 6"/>
+          <p:cNvSpPr/>
+          <p:nvPr/>
+        </p:nvSpPr>
+        <p:spPr>
+          <a:xfrm>
+            <a:off x="7498079" y="2651760"/>
+            <a:ext cx="2103120" cy="1554480"/>
+          </a:xfrm>
+          <a:prstGeom prst="roundRect">
+            <a:avLst/>
+          </a:prstGeom>
+          <a:solidFill>
+            <a:srgbClr val="1F3A5F"/>
+          </a:solidFill>
+          <a:ln>
+            <a:noFill/>
+          </a:ln>
+        </p:spPr>
+        <p:style>
+          <a:lnRef idx="1">
+            <a:schemeClr val="accent1"/>
+          </a:lnRef>
+          <a:fillRef idx="3">
+            <a:schemeClr val="accent1"/>
+          </a:fillRef>
+          <a:effectRef idx="2">
+            <a:schemeClr val="accent1"/>
+          </a:effectRef>
+          <a:fontRef idx="minor">
+            <a:schemeClr val="lt1"/>
+          </a:fontRef>
+        </p:style>
+        <p:txBody>
+          <a:bodyPr rtlCol="0" anchor="ctr" wrap="square"/>
+          <a:lstStyle/>
+          <a:p>
+            <a:pPr algn="ctr"/>
+            <a:r>
+              <a:rPr sz="2400" b="1">
+                <a:solidFill>
+                  <a:srgbClr val="FFFFFF"/>
+                </a:solidFill>
+                <a:latin typeface="Arial"/>
+              </a:rPr>
+              <a:t>heat</a:t>
+            </a:r>
+          </a:p>
+        </p:txBody>
+      </p:sp>
+      <p:sp>
+        <p:nvSpPr>
+          <p:cNvPr id="8" name="Rounded Rectangle 7"/>
+          <p:cNvSpPr/>
+          <p:nvPr/>
+        </p:nvSpPr>
+        <p:spPr>
+          <a:xfrm>
+            <a:off x="9784080" y="2651760"/>
+            <a:ext cx="2103120" cy="1554480"/>
+          </a:xfrm>
+          <a:prstGeom prst="roundRect">
+            <a:avLst/>
+          </a:prstGeom>
+          <a:solidFill>
+            <a:srgbClr val="1F3A5F"/>
+          </a:solidFill>
+          <a:ln>
+            <a:noFill/>
+          </a:ln>
+        </p:spPr>
+        <p:style>
+          <a:lnRef idx="1">
+            <a:schemeClr val="accent1"/>
+          </a:lnRef>
+          <a:fillRef idx="3">
+            <a:schemeClr val="accent1"/>
+          </a:fillRef>
+          <a:effectRef idx="2">
+            <a:schemeClr val="accent1"/>
+          </a:effectRef>
+          <a:fontRef idx="minor">
+            <a:schemeClr val="lt1"/>
+          </a:fontRef>
+        </p:style>
+        <p:txBody>
+          <a:bodyPr rtlCol="0" anchor="ctr" wrap="square"/>
+          <a:lstStyle/>
+          <a:p>
+            <a:pPr algn="ctr"/>
+            <a:r>
+              <a:rPr sz="2400" b="1">
+                <a:solidFill>
+                  <a:srgbClr val="FFFFFF"/>
+                </a:solidFill>
+                <a:latin typeface="Arial"/>
+              </a:rPr>
+              <a:t>electrical energy</a:t>
+            </a:r>
+          </a:p>
+        </p:txBody>
+      </p:sp>
+      <p:sp>
+        <p:nvSpPr>
+          <p:cNvPr id="9" name="TextBox 8"/>
           <p:cNvSpPr txBox="1"/>
           <p:nvPr/>
         </p:nvSpPr>
         <p:spPr>
           <a:xfrm>
-            <a:off x="914400" y="4846320"/>
-            <a:ext cx="10332720" cy="822960"/>
+            <a:off x="11338560" y="6446520"/>
+            <a:ext cx="731520" cy="365760"/>
           </a:xfrm>
           <a:prstGeom prst="rect">
             <a:avLst/>
@@ -4436,41 +4509,6 @@
           </a:bodyPr>
           <a:lstStyle/>
           <a:p>
-            <a:pPr algn="ctr"/>
-            <a:r>
-              <a:rPr sz="2600" b="1">
-                <a:solidFill>
-                  <a:srgbClr val="1F3A5F"/>
-                </a:solidFill>
-                <a:latin typeface="Arial"/>
-              </a:rPr>
-              <a:t>Sound is a form of energy. Clap — what do you hear?</a:t>
-            </a:r>
-          </a:p>
-        </p:txBody>
-      </p:sp>
-      <p:sp>
-        <p:nvSpPr>
-          <p:cNvPr id="8" name="TextBox 7"/>
-          <p:cNvSpPr txBox="1"/>
-          <p:nvPr/>
-        </p:nvSpPr>
-        <p:spPr>
-          <a:xfrm>
-            <a:off x="11338560" y="6446520"/>
-            <a:ext cx="731520" cy="365760"/>
-          </a:xfrm>
-          <a:prstGeom prst="rect">
-            <a:avLst/>
-          </a:prstGeom>
-          <a:noFill/>
-        </p:spPr>
-        <p:txBody>
-          <a:bodyPr wrap="square" anchor="t">
-            <a:spAutoFit/>
-          </a:bodyPr>
-          <a:lstStyle/>
-          <a:p>
             <a:pPr algn="r"/>
             <a:r>
               <a:rPr sz="1200" b="0">
@@ -4479,7 +4517,7 @@
                 </a:solidFill>
                 <a:latin typeface="Arial"/>
               </a:rPr>
-              <a:t>12</a:t>
+              <a:t>10</a:t>
             </a:r>
           </a:p>
         </p:txBody>
@@ -4575,7 +4613,7 @@
                 </a:solidFill>
                 <a:latin typeface="Arial"/>
               </a:rPr>
-              <a:t>Light</a:t>
+              <a:t>Motion</a:t>
             </a:r>
           </a:p>
         </p:txBody>
@@ -4627,7 +4665,7 @@
                 </a:solidFill>
                 <a:latin typeface="Arial"/>
               </a:rPr>
-              <a:t>light bulb</a:t>
+              <a:t>rolling ball</a:t>
             </a:r>
           </a:p>
         </p:txBody>
@@ -4722,7 +4760,7 @@
                 </a:solidFill>
                 <a:latin typeface="Arial"/>
               </a:rPr>
-              <a:t>bright wall</a:t>
+              <a:t>moved the block</a:t>
             </a:r>
           </a:p>
         </p:txBody>
@@ -4757,7 +4795,7 @@
                 </a:solidFill>
                 <a:latin typeface="Arial"/>
               </a:rPr>
-              <a:t>Light is a form of energy.</a:t>
+              <a:t>Moving objects have energy of motion.</a:t>
             </a:r>
           </a:p>
         </p:txBody>
@@ -4792,7 +4830,7 @@
                 </a:solidFill>
                 <a:latin typeface="Arial"/>
               </a:rPr>
-              <a:t>13</a:t>
+              <a:t>11</a:t>
             </a:r>
           </a:p>
         </p:txBody>
@@ -4888,7 +4926,7 @@
                 </a:solidFill>
                 <a:latin typeface="Arial"/>
               </a:rPr>
-              <a:t>Heat</a:t>
+              <a:t>Sound</a:t>
             </a:r>
           </a:p>
         </p:txBody>
@@ -4940,7 +4978,7 @@
                 </a:solidFill>
                 <a:latin typeface="Arial"/>
               </a:rPr>
-              <a:t>warm cup</a:t>
+              <a:t>ringing bell</a:t>
             </a:r>
           </a:p>
         </p:txBody>
@@ -5029,13 +5067,13 @@
           <a:p>
             <a:pPr algn="ctr"/>
             <a:r>
-              <a:rPr sz="3000" b="1">
+              <a:rPr sz="2600" b="1">
                 <a:solidFill>
                   <a:srgbClr val="FFFFFF"/>
                 </a:solidFill>
                 <a:latin typeface="Arial"/>
               </a:rPr>
-              <a:t>melting / warming</a:t>
+              <a:t>sound reaches your ear</a:t>
             </a:r>
           </a:p>
         </p:txBody>
@@ -5064,13 +5102,13 @@
           <a:p>
             <a:pPr algn="ctr"/>
             <a:r>
-              <a:rPr sz="2800" b="1">
+              <a:rPr sz="2600" b="1">
                 <a:solidFill>
                   <a:srgbClr val="1F3A5F"/>
                 </a:solidFill>
                 <a:latin typeface="Arial"/>
               </a:rPr>
-              <a:t>Heat is a form of energy.</a:t>
+              <a:t>Sound is a form of energy. Clap — what do you hear?</a:t>
             </a:r>
           </a:p>
         </p:txBody>
@@ -5105,7 +5143,7 @@
                 </a:solidFill>
                 <a:latin typeface="Arial"/>
               </a:rPr>
-              <a:t>14</a:t>
+              <a:t>12</a:t>
             </a:r>
           </a:p>
         </p:txBody>
@@ -5201,7 +5239,7 @@
                 </a:solidFill>
                 <a:latin typeface="Arial"/>
               </a:rPr>
-              <a:t>Electrical energy</a:t>
+              <a:t>Light</a:t>
             </a:r>
           </a:p>
         </p:txBody>
@@ -5253,7 +5291,7 @@
                 </a:solidFill>
                 <a:latin typeface="Arial"/>
               </a:rPr>
-              <a:t>power cord</a:t>
+              <a:t>light bulb</a:t>
             </a:r>
           </a:p>
         </p:txBody>
@@ -5342,13 +5380,13 @@
           <a:p>
             <a:pPr algn="ctr"/>
             <a:r>
-              <a:rPr sz="2600" b="1">
+              <a:rPr sz="3000" b="1">
                 <a:solidFill>
                   <a:srgbClr val="FFFFFF"/>
                 </a:solidFill>
                 <a:latin typeface="Arial"/>
               </a:rPr>
-              <a:t>lights the carousel</a:t>
+              <a:t>bright wall</a:t>
             </a:r>
           </a:p>
         </p:txBody>
@@ -5383,7 +5421,7 @@
                 </a:solidFill>
                 <a:latin typeface="Arial"/>
               </a:rPr>
-              <a:t>Electrical energy powers many devices.</a:t>
+              <a:t>Light is a form of energy.</a:t>
             </a:r>
           </a:p>
         </p:txBody>
@@ -5418,7 +5456,7 @@
                 </a:solidFill>
                 <a:latin typeface="Arial"/>
               </a:rPr>
-              <a:t>15</a:t>
+              <a:t>13</a:t>
             </a:r>
           </a:p>
         </p:txBody>
@@ -5514,7 +5552,7 @@
                 </a:solidFill>
                 <a:latin typeface="Arial"/>
               </a:rPr>
-              <a:t>Which form of energy?</a:t>
+              <a:t>Heat</a:t>
             </a:r>
           </a:p>
         </p:txBody>
@@ -5527,8 +5565,8 @@
         </p:nvSpPr>
         <p:spPr>
           <a:xfrm>
-            <a:off x="914400" y="2011680"/>
-            <a:ext cx="6949440" cy="868680"/>
+            <a:off x="914400" y="2194560"/>
+            <a:ext cx="4114800" cy="2011680"/>
           </a:xfrm>
           <a:prstGeom prst="roundRect">
             <a:avLst/>
@@ -5558,31 +5596,31 @@
           <a:bodyPr rtlCol="0" anchor="ctr" wrap="square"/>
           <a:lstStyle/>
           <a:p>
-            <a:pPr algn="l"/>
-            <a:r>
-              <a:rPr sz="2200" b="1">
+            <a:pPr algn="ctr"/>
+            <a:r>
+              <a:rPr sz="3000" b="1">
                 <a:solidFill>
                   <a:srgbClr val="1F3A5F"/>
                 </a:solidFill>
                 <a:latin typeface="Arial"/>
               </a:rPr>
-              <a:t>The toy car starts to roll.</a:t>
-            </a:r>
-          </a:p>
-        </p:txBody>
-      </p:sp>
-      <p:sp>
-        <p:nvSpPr>
-          <p:cNvPr id="5" name="Rounded Rectangle 4"/>
+              <a:t>warm cup</a:t>
+            </a:r>
+          </a:p>
+        </p:txBody>
+      </p:sp>
+      <p:sp>
+        <p:nvSpPr>
+          <p:cNvPr id="5" name="Right Arrow 4"/>
           <p:cNvSpPr/>
           <p:nvPr/>
         </p:nvSpPr>
         <p:spPr>
           <a:xfrm>
-            <a:off x="8138160" y="2011680"/>
-            <a:ext cx="3108960" cy="868680"/>
-          </a:xfrm>
-          <a:prstGeom prst="roundRect">
+            <a:off x="5120640" y="2834640"/>
+            <a:ext cx="822960" cy="640080"/>
+          </a:xfrm>
+          <a:prstGeom prst="rightArrow">
             <a:avLst/>
           </a:prstGeom>
           <a:solidFill>
@@ -5607,19 +5645,10 @@
           </a:fontRef>
         </p:style>
         <p:txBody>
-          <a:bodyPr rtlCol="0" anchor="ctr" wrap="square"/>
+          <a:bodyPr rtlCol="0" anchor="ctr"/>
           <a:lstStyle/>
           <a:p>
             <a:pPr algn="ctr"/>
-            <a:r>
-              <a:rPr sz="2200" b="1">
-                <a:solidFill>
-                  <a:srgbClr val="FFFFFF"/>
-                </a:solidFill>
-                <a:latin typeface="Arial"/>
-              </a:rPr>
-              <a:t>motion</a:t>
-            </a:r>
           </a:p>
         </p:txBody>
       </p:sp>
@@ -5631,14 +5660,14 @@
         </p:nvSpPr>
         <p:spPr>
           <a:xfrm>
-            <a:off x="914400" y="3108960"/>
-            <a:ext cx="6949440" cy="868680"/>
+            <a:off x="6035040" y="2194560"/>
+            <a:ext cx="4114800" cy="2011680"/>
           </a:xfrm>
           <a:prstGeom prst="roundRect">
             <a:avLst/>
           </a:prstGeom>
           <a:solidFill>
-            <a:srgbClr val="E8EDF4"/>
+            <a:srgbClr val="C05014"/>
           </a:solidFill>
           <a:ln>
             <a:noFill/>
@@ -5662,185 +5691,29 @@
           <a:bodyPr rtlCol="0" anchor="ctr" wrap="square"/>
           <a:lstStyle/>
           <a:p>
-            <a:pPr algn="l"/>
-            <a:r>
-              <a:rPr sz="2200" b="1">
-                <a:solidFill>
-                  <a:srgbClr val="1F3A5F"/>
-                </a:solidFill>
-                <a:latin typeface="Arial"/>
-              </a:rPr>
-              <a:t>The bell rings.</a:t>
-            </a:r>
-          </a:p>
-        </p:txBody>
-      </p:sp>
-      <p:sp>
-        <p:nvSpPr>
-          <p:cNvPr id="7" name="Rounded Rectangle 6"/>
-          <p:cNvSpPr/>
-          <p:nvPr/>
-        </p:nvSpPr>
-        <p:spPr>
-          <a:xfrm>
-            <a:off x="8138160" y="3108960"/>
-            <a:ext cx="3108960" cy="868680"/>
-          </a:xfrm>
-          <a:prstGeom prst="roundRect">
-            <a:avLst/>
-          </a:prstGeom>
-          <a:solidFill>
-            <a:srgbClr val="C05014"/>
-          </a:solidFill>
-          <a:ln>
-            <a:noFill/>
-          </a:ln>
-        </p:spPr>
-        <p:style>
-          <a:lnRef idx="1">
-            <a:schemeClr val="accent1"/>
-          </a:lnRef>
-          <a:fillRef idx="3">
-            <a:schemeClr val="accent1"/>
-          </a:fillRef>
-          <a:effectRef idx="2">
-            <a:schemeClr val="accent1"/>
-          </a:effectRef>
-          <a:fontRef idx="minor">
-            <a:schemeClr val="lt1"/>
-          </a:fontRef>
-        </p:style>
-        <p:txBody>
-          <a:bodyPr rtlCol="0" anchor="ctr" wrap="square"/>
-          <a:lstStyle/>
-          <a:p>
             <a:pPr algn="ctr"/>
             <a:r>
-              <a:rPr sz="2200" b="1">
+              <a:rPr sz="3000" b="1">
                 <a:solidFill>
                   <a:srgbClr val="FFFFFF"/>
                 </a:solidFill>
                 <a:latin typeface="Arial"/>
               </a:rPr>
-              <a:t>sound</a:t>
-            </a:r>
-          </a:p>
-        </p:txBody>
-      </p:sp>
-      <p:sp>
-        <p:nvSpPr>
-          <p:cNvPr id="8" name="Rounded Rectangle 7"/>
-          <p:cNvSpPr/>
-          <p:nvPr/>
-        </p:nvSpPr>
-        <p:spPr>
-          <a:xfrm>
-            <a:off x="914400" y="4206240"/>
-            <a:ext cx="6949440" cy="868680"/>
-          </a:xfrm>
-          <a:prstGeom prst="roundRect">
-            <a:avLst/>
-          </a:prstGeom>
-          <a:solidFill>
-            <a:srgbClr val="E8EDF4"/>
-          </a:solidFill>
-          <a:ln>
-            <a:noFill/>
-          </a:ln>
-        </p:spPr>
-        <p:style>
-          <a:lnRef idx="1">
-            <a:schemeClr val="accent1"/>
-          </a:lnRef>
-          <a:fillRef idx="3">
-            <a:schemeClr val="accent1"/>
-          </a:fillRef>
-          <a:effectRef idx="2">
-            <a:schemeClr val="accent1"/>
-          </a:effectRef>
-          <a:fontRef idx="minor">
-            <a:schemeClr val="lt1"/>
-          </a:fontRef>
-        </p:style>
-        <p:txBody>
-          <a:bodyPr rtlCol="0" anchor="ctr" wrap="square"/>
-          <a:lstStyle/>
-          <a:p>
-            <a:pPr algn="l"/>
-            <a:r>
-              <a:rPr sz="2200" b="1">
-                <a:solidFill>
-                  <a:srgbClr val="1F3A5F"/>
-                </a:solidFill>
-                <a:latin typeface="Arial"/>
-              </a:rPr>
-              <a:t>The bulb glows.</a:t>
-            </a:r>
-          </a:p>
-        </p:txBody>
-      </p:sp>
-      <p:sp>
-        <p:nvSpPr>
-          <p:cNvPr id="9" name="Rounded Rectangle 8"/>
-          <p:cNvSpPr/>
-          <p:nvPr/>
-        </p:nvSpPr>
-        <p:spPr>
-          <a:xfrm>
-            <a:off x="8138160" y="4206240"/>
-            <a:ext cx="3108960" cy="868680"/>
-          </a:xfrm>
-          <a:prstGeom prst="roundRect">
-            <a:avLst/>
-          </a:prstGeom>
-          <a:solidFill>
-            <a:srgbClr val="C05014"/>
-          </a:solidFill>
-          <a:ln>
-            <a:noFill/>
-          </a:ln>
-        </p:spPr>
-        <p:style>
-          <a:lnRef idx="1">
-            <a:schemeClr val="accent1"/>
-          </a:lnRef>
-          <a:fillRef idx="3">
-            <a:schemeClr val="accent1"/>
-          </a:fillRef>
-          <a:effectRef idx="2">
-            <a:schemeClr val="accent1"/>
-          </a:effectRef>
-          <a:fontRef idx="minor">
-            <a:schemeClr val="lt1"/>
-          </a:fontRef>
-        </p:style>
-        <p:txBody>
-          <a:bodyPr rtlCol="0" anchor="ctr" wrap="square"/>
-          <a:lstStyle/>
-          <a:p>
-            <a:pPr algn="ctr"/>
-            <a:r>
-              <a:rPr sz="2200" b="1">
-                <a:solidFill>
-                  <a:srgbClr val="FFFFFF"/>
-                </a:solidFill>
-                <a:latin typeface="Arial"/>
-              </a:rPr>
-              <a:t>light (electrical)</a:t>
-            </a:r>
-          </a:p>
-        </p:txBody>
-      </p:sp>
-      <p:sp>
-        <p:nvSpPr>
-          <p:cNvPr id="10" name="TextBox 9"/>
+              <a:t>melting / warming</a:t>
+            </a:r>
+          </a:p>
+        </p:txBody>
+      </p:sp>
+      <p:sp>
+        <p:nvSpPr>
+          <p:cNvPr id="7" name="TextBox 6"/>
           <p:cNvSpPr txBox="1"/>
           <p:nvPr/>
         </p:nvSpPr>
         <p:spPr>
           <a:xfrm>
-            <a:off x="11338560" y="6446520"/>
-            <a:ext cx="731520" cy="365760"/>
+            <a:off x="914400" y="4846320"/>
+            <a:ext cx="10332720" cy="822960"/>
           </a:xfrm>
           <a:prstGeom prst="rect">
             <a:avLst/>
@@ -5853,6 +5726,41 @@
           </a:bodyPr>
           <a:lstStyle/>
           <a:p>
+            <a:pPr algn="ctr"/>
+            <a:r>
+              <a:rPr sz="2800" b="1">
+                <a:solidFill>
+                  <a:srgbClr val="1F3A5F"/>
+                </a:solidFill>
+                <a:latin typeface="Arial"/>
+              </a:rPr>
+              <a:t>Heat is a form of energy.</a:t>
+            </a:r>
+          </a:p>
+        </p:txBody>
+      </p:sp>
+      <p:sp>
+        <p:nvSpPr>
+          <p:cNvPr id="8" name="TextBox 7"/>
+          <p:cNvSpPr txBox="1"/>
+          <p:nvPr/>
+        </p:nvSpPr>
+        <p:spPr>
+          <a:xfrm>
+            <a:off x="11338560" y="6446520"/>
+            <a:ext cx="731520" cy="365760"/>
+          </a:xfrm>
+          <a:prstGeom prst="rect">
+            <a:avLst/>
+          </a:prstGeom>
+          <a:noFill/>
+        </p:spPr>
+        <p:txBody>
+          <a:bodyPr wrap="square" anchor="t">
+            <a:spAutoFit/>
+          </a:bodyPr>
+          <a:lstStyle/>
+          <a:p>
             <a:pPr algn="r"/>
             <a:r>
               <a:rPr sz="1200" b="0">
@@ -5861,7 +5769,7 @@
                 </a:solidFill>
                 <a:latin typeface="Arial"/>
               </a:rPr>
-              <a:t>16</a:t>
+              <a:t>14</a:t>
             </a:r>
           </a:p>
         </p:txBody>
@@ -5957,7 +5865,7 @@
                 </a:solidFill>
                 <a:latin typeface="Arial"/>
               </a:rPr>
-              <a:t>Does a battery have energy if it is sitting still?</a:t>
+              <a:t>Electrical energy</a:t>
             </a:r>
           </a:p>
         </p:txBody>
@@ -5970,8 +5878,8 @@
         </p:nvSpPr>
         <p:spPr>
           <a:xfrm>
-            <a:off x="2286000" y="2286000"/>
-            <a:ext cx="7589520" cy="1463040"/>
+            <a:off x="914400" y="2194560"/>
+            <a:ext cx="4114800" cy="2011680"/>
           </a:xfrm>
           <a:prstGeom prst="roundRect">
             <a:avLst/>
@@ -6003,27 +5911,122 @@
           <a:p>
             <a:pPr algn="ctr"/>
             <a:r>
-              <a:rPr sz="3400" b="1">
+              <a:rPr sz="3000" b="1">
                 <a:solidFill>
                   <a:srgbClr val="1F3A5F"/>
                 </a:solidFill>
                 <a:latin typeface="Arial"/>
               </a:rPr>
-              <a:t>PREDICT</a:t>
-            </a:r>
-          </a:p>
-        </p:txBody>
-      </p:sp>
-      <p:sp>
-        <p:nvSpPr>
-          <p:cNvPr id="5" name="TextBox 4"/>
+              <a:t>power cord</a:t>
+            </a:r>
+          </a:p>
+        </p:txBody>
+      </p:sp>
+      <p:sp>
+        <p:nvSpPr>
+          <p:cNvPr id="5" name="Right Arrow 4"/>
+          <p:cNvSpPr/>
+          <p:nvPr/>
+        </p:nvSpPr>
+        <p:spPr>
+          <a:xfrm>
+            <a:off x="5120640" y="2834640"/>
+            <a:ext cx="822960" cy="640080"/>
+          </a:xfrm>
+          <a:prstGeom prst="rightArrow">
+            <a:avLst/>
+          </a:prstGeom>
+          <a:solidFill>
+            <a:srgbClr val="C05014"/>
+          </a:solidFill>
+          <a:ln>
+            <a:noFill/>
+          </a:ln>
+        </p:spPr>
+        <p:style>
+          <a:lnRef idx="1">
+            <a:schemeClr val="accent1"/>
+          </a:lnRef>
+          <a:fillRef idx="3">
+            <a:schemeClr val="accent1"/>
+          </a:fillRef>
+          <a:effectRef idx="2">
+            <a:schemeClr val="accent1"/>
+          </a:effectRef>
+          <a:fontRef idx="minor">
+            <a:schemeClr val="lt1"/>
+          </a:fontRef>
+        </p:style>
+        <p:txBody>
+          <a:bodyPr rtlCol="0" anchor="ctr"/>
+          <a:lstStyle/>
+          <a:p>
+            <a:pPr algn="ctr"/>
+          </a:p>
+        </p:txBody>
+      </p:sp>
+      <p:sp>
+        <p:nvSpPr>
+          <p:cNvPr id="6" name="Rounded Rectangle 5"/>
+          <p:cNvSpPr/>
+          <p:nvPr/>
+        </p:nvSpPr>
+        <p:spPr>
+          <a:xfrm>
+            <a:off x="6035040" y="2194560"/>
+            <a:ext cx="4114800" cy="2011680"/>
+          </a:xfrm>
+          <a:prstGeom prst="roundRect">
+            <a:avLst/>
+          </a:prstGeom>
+          <a:solidFill>
+            <a:srgbClr val="C05014"/>
+          </a:solidFill>
+          <a:ln>
+            <a:noFill/>
+          </a:ln>
+        </p:spPr>
+        <p:style>
+          <a:lnRef idx="1">
+            <a:schemeClr val="accent1"/>
+          </a:lnRef>
+          <a:fillRef idx="3">
+            <a:schemeClr val="accent1"/>
+          </a:fillRef>
+          <a:effectRef idx="2">
+            <a:schemeClr val="accent1"/>
+          </a:effectRef>
+          <a:fontRef idx="minor">
+            <a:schemeClr val="lt1"/>
+          </a:fontRef>
+        </p:style>
+        <p:txBody>
+          <a:bodyPr rtlCol="0" anchor="ctr" wrap="square"/>
+          <a:lstStyle/>
+          <a:p>
+            <a:pPr algn="ctr"/>
+            <a:r>
+              <a:rPr sz="2600" b="1">
+                <a:solidFill>
+                  <a:srgbClr val="FFFFFF"/>
+                </a:solidFill>
+                <a:latin typeface="Arial"/>
+              </a:rPr>
+              <a:t>lights the carousel</a:t>
+            </a:r>
+          </a:p>
+        </p:txBody>
+      </p:sp>
+      <p:sp>
+        <p:nvSpPr>
+          <p:cNvPr id="7" name="TextBox 6"/>
           <p:cNvSpPr txBox="1"/>
           <p:nvPr/>
         </p:nvSpPr>
         <p:spPr>
           <a:xfrm>
-            <a:off x="2286000" y="4023360"/>
-            <a:ext cx="7589520" cy="731520"/>
+            <a:off x="914400" y="4846320"/>
+            <a:ext cx="10332720" cy="822960"/>
           </a:xfrm>
           <a:prstGeom prst="rect">
             <a:avLst/>
@@ -6038,20 +6041,20 @@
           <a:p>
             <a:pPr algn="ctr"/>
             <a:r>
-              <a:rPr sz="2400" b="0">
-                <a:solidFill>
-                  <a:srgbClr val="555555"/>
-                </a:solidFill>
-                <a:latin typeface="Arial"/>
-              </a:rPr>
-              <a:t>A battery sitting still shows no change — yet.</a:t>
-            </a:r>
-          </a:p>
-        </p:txBody>
-      </p:sp>
-      <p:sp>
-        <p:nvSpPr>
-          <p:cNvPr id="6" name="TextBox 5"/>
+              <a:rPr sz="2800" b="1">
+                <a:solidFill>
+                  <a:srgbClr val="1F3A5F"/>
+                </a:solidFill>
+                <a:latin typeface="Arial"/>
+              </a:rPr>
+              <a:t>Electrical energy powers many devices.</a:t>
+            </a:r>
+          </a:p>
+        </p:txBody>
+      </p:sp>
+      <p:sp>
+        <p:nvSpPr>
+          <p:cNvPr id="8" name="TextBox 7"/>
           <p:cNvSpPr txBox="1"/>
           <p:nvPr/>
         </p:nvSpPr>
@@ -6079,7 +6082,7 @@
                 </a:solidFill>
                 <a:latin typeface="Arial"/>
               </a:rPr>
-              <a:t>17</a:t>
+              <a:t>15</a:t>
             </a:r>
           </a:p>
         </p:txBody>
@@ -6175,7 +6178,7 @@
                 </a:solidFill>
                 <a:latin typeface="Arial"/>
               </a:rPr>
-              <a:t>Stored energy — reveal</a:t>
+              <a:t>Which form of energy?</a:t>
             </a:r>
           </a:p>
         </p:txBody>
@@ -6188,8 +6191,8 @@
         </p:nvSpPr>
         <p:spPr>
           <a:xfrm>
-            <a:off x="822960" y="2286000"/>
-            <a:ext cx="2743200" cy="1371600"/>
+            <a:off x="914400" y="2011680"/>
+            <a:ext cx="6949440" cy="868680"/>
           </a:xfrm>
           <a:prstGeom prst="roundRect">
             <a:avLst/>
@@ -6219,32 +6222,31 @@
           <a:bodyPr rtlCol="0" anchor="ctr" wrap="square"/>
           <a:lstStyle/>
           <a:p>
-            <a:pPr algn="ctr"/>
-            <a:r>
-              <a:rPr sz="2400" b="1">
+            <a:pPr algn="l"/>
+            <a:r>
+              <a:rPr sz="2200" b="1">
                 <a:solidFill>
                   <a:srgbClr val="1F3A5F"/>
                 </a:solidFill>
                 <a:latin typeface="Arial"/>
               </a:rPr>
-              <a:t>battery
-(stored)</a:t>
-            </a:r>
-          </a:p>
-        </p:txBody>
-      </p:sp>
-      <p:sp>
-        <p:nvSpPr>
-          <p:cNvPr id="5" name="Right Arrow 4"/>
+              <a:t>The toy car starts to roll.</a:t>
+            </a:r>
+          </a:p>
+        </p:txBody>
+      </p:sp>
+      <p:sp>
+        <p:nvSpPr>
+          <p:cNvPr id="5" name="Rounded Rectangle 4"/>
           <p:cNvSpPr/>
           <p:nvPr/>
         </p:nvSpPr>
         <p:spPr>
           <a:xfrm>
-            <a:off x="3657600" y="2834640"/>
-            <a:ext cx="914400" cy="640080"/>
-          </a:xfrm>
-          <a:prstGeom prst="rightArrow">
+            <a:off x="8138160" y="2011680"/>
+            <a:ext cx="3108960" cy="868680"/>
+          </a:xfrm>
+          <a:prstGeom prst="roundRect">
             <a:avLst/>
           </a:prstGeom>
           <a:solidFill>
@@ -6269,10 +6271,19 @@
           </a:fontRef>
         </p:style>
         <p:txBody>
-          <a:bodyPr rtlCol="0" anchor="ctr"/>
+          <a:bodyPr rtlCol="0" anchor="ctr" wrap="square"/>
           <a:lstStyle/>
           <a:p>
             <a:pPr algn="ctr"/>
+            <a:r>
+              <a:rPr sz="2200" b="1">
+                <a:solidFill>
+                  <a:srgbClr val="FFFFFF"/>
+                </a:solidFill>
+                <a:latin typeface="Arial"/>
+              </a:rPr>
+              <a:t>motion</a:t>
+            </a:r>
           </a:p>
         </p:txBody>
       </p:sp>
@@ -6284,14 +6295,14 @@
         </p:nvSpPr>
         <p:spPr>
           <a:xfrm>
-            <a:off x="4663440" y="2286000"/>
-            <a:ext cx="2743200" cy="1371600"/>
+            <a:off x="914400" y="3108960"/>
+            <a:ext cx="6949440" cy="868680"/>
           </a:xfrm>
           <a:prstGeom prst="roundRect">
             <a:avLst/>
           </a:prstGeom>
           <a:solidFill>
-            <a:srgbClr val="1F3A5F"/>
+            <a:srgbClr val="E8EDF4"/>
           </a:solidFill>
           <a:ln>
             <a:noFill/>
@@ -6315,31 +6326,31 @@
           <a:bodyPr rtlCol="0" anchor="ctr" wrap="square"/>
           <a:lstStyle/>
           <a:p>
-            <a:pPr algn="ctr"/>
-            <a:r>
-              <a:rPr sz="2400" b="1">
-                <a:solidFill>
-                  <a:srgbClr val="FFFFFF"/>
-                </a:solidFill>
-                <a:latin typeface="Arial"/>
-              </a:rPr>
-              <a:t>flashlight</a:t>
-            </a:r>
-          </a:p>
-        </p:txBody>
-      </p:sp>
-      <p:sp>
-        <p:nvSpPr>
-          <p:cNvPr id="7" name="Right Arrow 6"/>
+            <a:pPr algn="l"/>
+            <a:r>
+              <a:rPr sz="2200" b="1">
+                <a:solidFill>
+                  <a:srgbClr val="1F3A5F"/>
+                </a:solidFill>
+                <a:latin typeface="Arial"/>
+              </a:rPr>
+              <a:t>The bell rings.</a:t>
+            </a:r>
+          </a:p>
+        </p:txBody>
+      </p:sp>
+      <p:sp>
+        <p:nvSpPr>
+          <p:cNvPr id="7" name="Rounded Rectangle 6"/>
           <p:cNvSpPr/>
           <p:nvPr/>
         </p:nvSpPr>
         <p:spPr>
           <a:xfrm>
-            <a:off x="7498079" y="2834640"/>
-            <a:ext cx="914400" cy="640080"/>
-          </a:xfrm>
-          <a:prstGeom prst="rightArrow">
+            <a:off x="8138160" y="3108960"/>
+            <a:ext cx="3108960" cy="868680"/>
+          </a:xfrm>
+          <a:prstGeom prst="roundRect">
             <a:avLst/>
           </a:prstGeom>
           <a:solidFill>
@@ -6364,10 +6375,19 @@
           </a:fontRef>
         </p:style>
         <p:txBody>
-          <a:bodyPr rtlCol="0" anchor="ctr"/>
+          <a:bodyPr rtlCol="0" anchor="ctr" wrap="square"/>
           <a:lstStyle/>
           <a:p>
             <a:pPr algn="ctr"/>
+            <a:r>
+              <a:rPr sz="2200" b="1">
+                <a:solidFill>
+                  <a:srgbClr val="FFFFFF"/>
+                </a:solidFill>
+                <a:latin typeface="Arial"/>
+              </a:rPr>
+              <a:t>sound</a:t>
+            </a:r>
           </a:p>
         </p:txBody>
       </p:sp>
@@ -6379,14 +6399,14 @@
         </p:nvSpPr>
         <p:spPr>
           <a:xfrm>
-            <a:off x="8503920" y="2286000"/>
-            <a:ext cx="2743200" cy="1371600"/>
+            <a:off x="914400" y="4206240"/>
+            <a:ext cx="6949440" cy="868680"/>
           </a:xfrm>
           <a:prstGeom prst="roundRect">
             <a:avLst/>
           </a:prstGeom>
           <a:solidFill>
-            <a:srgbClr val="C05014"/>
+            <a:srgbClr val="E8EDF4"/>
           </a:solidFill>
           <a:ln>
             <a:noFill/>
@@ -6410,29 +6430,81 @@
           <a:bodyPr rtlCol="0" anchor="ctr" wrap="square"/>
           <a:lstStyle/>
           <a:p>
+            <a:pPr algn="l"/>
+            <a:r>
+              <a:rPr sz="2200" b="1">
+                <a:solidFill>
+                  <a:srgbClr val="1F3A5F"/>
+                </a:solidFill>
+                <a:latin typeface="Arial"/>
+              </a:rPr>
+              <a:t>The bulb glows.</a:t>
+            </a:r>
+          </a:p>
+        </p:txBody>
+      </p:sp>
+      <p:sp>
+        <p:nvSpPr>
+          <p:cNvPr id="9" name="Rounded Rectangle 8"/>
+          <p:cNvSpPr/>
+          <p:nvPr/>
+        </p:nvSpPr>
+        <p:spPr>
+          <a:xfrm>
+            <a:off x="8138160" y="4206240"/>
+            <a:ext cx="3108960" cy="868680"/>
+          </a:xfrm>
+          <a:prstGeom prst="roundRect">
+            <a:avLst/>
+          </a:prstGeom>
+          <a:solidFill>
+            <a:srgbClr val="C05014"/>
+          </a:solidFill>
+          <a:ln>
+            <a:noFill/>
+          </a:ln>
+        </p:spPr>
+        <p:style>
+          <a:lnRef idx="1">
+            <a:schemeClr val="accent1"/>
+          </a:lnRef>
+          <a:fillRef idx="3">
+            <a:schemeClr val="accent1"/>
+          </a:fillRef>
+          <a:effectRef idx="2">
+            <a:schemeClr val="accent1"/>
+          </a:effectRef>
+          <a:fontRef idx="minor">
+            <a:schemeClr val="lt1"/>
+          </a:fontRef>
+        </p:style>
+        <p:txBody>
+          <a:bodyPr rtlCol="0" anchor="ctr" wrap="square"/>
+          <a:lstStyle/>
+          <a:p>
             <a:pPr algn="ctr"/>
             <a:r>
-              <a:rPr sz="3000" b="1">
+              <a:rPr sz="2200" b="1">
                 <a:solidFill>
                   <a:srgbClr val="FFFFFF"/>
                 </a:solidFill>
                 <a:latin typeface="Arial"/>
               </a:rPr>
-              <a:t>light</a:t>
-            </a:r>
-          </a:p>
-        </p:txBody>
-      </p:sp>
-      <p:sp>
-        <p:nvSpPr>
-          <p:cNvPr id="9" name="TextBox 8"/>
+              <a:t>light (electrical)</a:t>
+            </a:r>
+          </a:p>
+        </p:txBody>
+      </p:sp>
+      <p:sp>
+        <p:nvSpPr>
+          <p:cNvPr id="10" name="TextBox 9"/>
           <p:cNvSpPr txBox="1"/>
           <p:nvPr/>
         </p:nvSpPr>
         <p:spPr>
           <a:xfrm>
-            <a:off x="822960" y="4297680"/>
-            <a:ext cx="10515600" cy="914400"/>
+            <a:off x="11338560" y="6446520"/>
+            <a:ext cx="731520" cy="365760"/>
           </a:xfrm>
           <a:prstGeom prst="rect">
             <a:avLst/>
@@ -6445,41 +6517,6 @@
           </a:bodyPr>
           <a:lstStyle/>
           <a:p>
-            <a:pPr algn="ctr"/>
-            <a:r>
-              <a:rPr sz="2600" b="1">
-                <a:solidFill>
-                  <a:srgbClr val="1F3A5F"/>
-                </a:solidFill>
-                <a:latin typeface="Arial"/>
-              </a:rPr>
-              <a:t>The light is our evidence. The battery had stored energy.</a:t>
-            </a:r>
-          </a:p>
-        </p:txBody>
-      </p:sp>
-      <p:sp>
-        <p:nvSpPr>
-          <p:cNvPr id="10" name="TextBox 9"/>
-          <p:cNvSpPr txBox="1"/>
-          <p:nvPr/>
-        </p:nvSpPr>
-        <p:spPr>
-          <a:xfrm>
-            <a:off x="11338560" y="6446520"/>
-            <a:ext cx="731520" cy="365760"/>
-          </a:xfrm>
-          <a:prstGeom prst="rect">
-            <a:avLst/>
-          </a:prstGeom>
-          <a:noFill/>
-        </p:spPr>
-        <p:txBody>
-          <a:bodyPr wrap="square" anchor="t">
-            <a:spAutoFit/>
-          </a:bodyPr>
-          <a:lstStyle/>
-          <a:p>
             <a:pPr algn="r"/>
             <a:r>
               <a:rPr sz="1200" b="0">
@@ -6488,7 +6525,7 @@
                 </a:solidFill>
                 <a:latin typeface="Arial"/>
               </a:rPr>
-              <a:t>18</a:t>
+              <a:t>16</a:t>
             </a:r>
           </a:p>
         </p:txBody>
@@ -6584,7 +6621,7 @@
                 </a:solidFill>
                 <a:latin typeface="Arial"/>
               </a:rPr>
-              <a:t>An object held up has stored energy</a:t>
+              <a:t>Does a battery have energy if it is sitting still?</a:t>
             </a:r>
           </a:p>
         </p:txBody>
@@ -6597,8 +6634,8 @@
         </p:nvSpPr>
         <p:spPr>
           <a:xfrm>
-            <a:off x="914400" y="2194560"/>
-            <a:ext cx="4114800" cy="2011680"/>
+            <a:off x="2286000" y="2286000"/>
+            <a:ext cx="7589520" cy="1463040"/>
           </a:xfrm>
           <a:prstGeom prst="roundRect">
             <a:avLst/>
@@ -6630,122 +6667,27 @@
           <a:p>
             <a:pPr algn="ctr"/>
             <a:r>
-              <a:rPr sz="2800" b="1">
+              <a:rPr sz="3400" b="1">
                 <a:solidFill>
                   <a:srgbClr val="1F3A5F"/>
                 </a:solidFill>
                 <a:latin typeface="Arial"/>
               </a:rPr>
-              <a:t>raised book / apple</a:t>
-            </a:r>
-          </a:p>
-        </p:txBody>
-      </p:sp>
-      <p:sp>
-        <p:nvSpPr>
-          <p:cNvPr id="5" name="Right Arrow 4"/>
-          <p:cNvSpPr/>
-          <p:nvPr/>
-        </p:nvSpPr>
-        <p:spPr>
-          <a:xfrm>
-            <a:off x="5120640" y="2834640"/>
-            <a:ext cx="822960" cy="640080"/>
-          </a:xfrm>
-          <a:prstGeom prst="rightArrow">
-            <a:avLst/>
-          </a:prstGeom>
-          <a:solidFill>
-            <a:srgbClr val="C05014"/>
-          </a:solidFill>
-          <a:ln>
-            <a:noFill/>
-          </a:ln>
-        </p:spPr>
-        <p:style>
-          <a:lnRef idx="1">
-            <a:schemeClr val="accent1"/>
-          </a:lnRef>
-          <a:fillRef idx="3">
-            <a:schemeClr val="accent1"/>
-          </a:fillRef>
-          <a:effectRef idx="2">
-            <a:schemeClr val="accent1"/>
-          </a:effectRef>
-          <a:fontRef idx="minor">
-            <a:schemeClr val="lt1"/>
-          </a:fontRef>
-        </p:style>
-        <p:txBody>
-          <a:bodyPr rtlCol="0" anchor="ctr"/>
-          <a:lstStyle/>
-          <a:p>
-            <a:pPr algn="ctr"/>
-          </a:p>
-        </p:txBody>
-      </p:sp>
-      <p:sp>
-        <p:nvSpPr>
-          <p:cNvPr id="6" name="Rounded Rectangle 5"/>
-          <p:cNvSpPr/>
-          <p:nvPr/>
-        </p:nvSpPr>
-        <p:spPr>
-          <a:xfrm>
-            <a:off x="6035040" y="2194560"/>
-            <a:ext cx="4114800" cy="2011680"/>
-          </a:xfrm>
-          <a:prstGeom prst="roundRect">
-            <a:avLst/>
-          </a:prstGeom>
-          <a:solidFill>
-            <a:srgbClr val="C05014"/>
-          </a:solidFill>
-          <a:ln>
-            <a:noFill/>
-          </a:ln>
-        </p:spPr>
-        <p:style>
-          <a:lnRef idx="1">
-            <a:schemeClr val="accent1"/>
-          </a:lnRef>
-          <a:fillRef idx="3">
-            <a:schemeClr val="accent1"/>
-          </a:fillRef>
-          <a:effectRef idx="2">
-            <a:schemeClr val="accent1"/>
-          </a:effectRef>
-          <a:fontRef idx="minor">
-            <a:schemeClr val="lt1"/>
-          </a:fontRef>
-        </p:style>
-        <p:txBody>
-          <a:bodyPr rtlCol="0" anchor="ctr" wrap="square"/>
-          <a:lstStyle/>
-          <a:p>
-            <a:pPr algn="ctr"/>
-            <a:r>
-              <a:rPr sz="2600" b="1">
-                <a:solidFill>
-                  <a:srgbClr val="FFFFFF"/>
-                </a:solidFill>
-                <a:latin typeface="Arial"/>
-              </a:rPr>
-              <a:t>falls when released</a:t>
-            </a:r>
-          </a:p>
-        </p:txBody>
-      </p:sp>
-      <p:sp>
-        <p:nvSpPr>
-          <p:cNvPr id="7" name="TextBox 6"/>
+              <a:t>PREDICT</a:t>
+            </a:r>
+          </a:p>
+        </p:txBody>
+      </p:sp>
+      <p:sp>
+        <p:nvSpPr>
+          <p:cNvPr id="5" name="TextBox 4"/>
           <p:cNvSpPr txBox="1"/>
           <p:nvPr/>
         </p:nvSpPr>
         <p:spPr>
           <a:xfrm>
-            <a:off x="914400" y="4846320"/>
-            <a:ext cx="10332720" cy="822960"/>
+            <a:off x="2286000" y="4023360"/>
+            <a:ext cx="7589520" cy="731520"/>
           </a:xfrm>
           <a:prstGeom prst="rect">
             <a:avLst/>
@@ -6760,20 +6702,20 @@
           <a:p>
             <a:pPr algn="ctr"/>
             <a:r>
-              <a:rPr sz="2600" b="1">
-                <a:solidFill>
-                  <a:srgbClr val="1F3A5F"/>
-                </a:solidFill>
-                <a:latin typeface="Arial"/>
-              </a:rPr>
-              <a:t>It has stored energy because of its position.</a:t>
-            </a:r>
-          </a:p>
-        </p:txBody>
-      </p:sp>
-      <p:sp>
-        <p:nvSpPr>
-          <p:cNvPr id="8" name="TextBox 7"/>
+              <a:rPr sz="2400" b="0">
+                <a:solidFill>
+                  <a:srgbClr val="555555"/>
+                </a:solidFill>
+                <a:latin typeface="Arial"/>
+              </a:rPr>
+              <a:t>A battery sitting still shows no change — yet.</a:t>
+            </a:r>
+          </a:p>
+        </p:txBody>
+      </p:sp>
+      <p:sp>
+        <p:nvSpPr>
+          <p:cNvPr id="6" name="TextBox 5"/>
           <p:cNvSpPr txBox="1"/>
           <p:nvPr/>
         </p:nvSpPr>
@@ -6801,7 +6743,7 @@
                 </a:solidFill>
                 <a:latin typeface="Arial"/>
               </a:rPr>
-              <a:t>19</a:t>
+              <a:t>17</a:t>
             </a:r>
           </a:p>
         </p:txBody>
@@ -7212,7 +7154,7 @@
                 </a:solidFill>
                 <a:latin typeface="Arial"/>
               </a:rPr>
-              <a:t>Which shows stored energy?</a:t>
+              <a:t>Stored energy — reveal</a:t>
             </a:r>
           </a:p>
         </p:txBody>
@@ -7225,14 +7167,14 @@
         </p:nvSpPr>
         <p:spPr>
           <a:xfrm>
-            <a:off x="822960" y="2103120"/>
-            <a:ext cx="5029200" cy="2651760"/>
+            <a:off x="822960" y="2286000"/>
+            <a:ext cx="2743200" cy="1371600"/>
           </a:xfrm>
           <a:prstGeom prst="roundRect">
             <a:avLst/>
           </a:prstGeom>
           <a:solidFill>
-            <a:srgbClr val="2E6B3F"/>
+            <a:srgbClr val="E8EDF4"/>
           </a:solidFill>
           <a:ln>
             <a:noFill/>
@@ -7260,32 +7202,32 @@
             <a:r>
               <a:rPr sz="2400" b="1">
                 <a:solidFill>
-                  <a:srgbClr val="FFFFFF"/>
-                </a:solidFill>
-                <a:latin typeface="Arial"/>
-              </a:rPr>
-              <a:t>STORED ENERGY
-battery · stretched band · raised book</a:t>
-            </a:r>
-          </a:p>
-        </p:txBody>
-      </p:sp>
-      <p:sp>
-        <p:nvSpPr>
-          <p:cNvPr id="5" name="Rounded Rectangle 4"/>
+                  <a:srgbClr val="1F3A5F"/>
+                </a:solidFill>
+                <a:latin typeface="Arial"/>
+              </a:rPr>
+              <a:t>battery
+(stored)</a:t>
+            </a:r>
+          </a:p>
+        </p:txBody>
+      </p:sp>
+      <p:sp>
+        <p:nvSpPr>
+          <p:cNvPr id="5" name="Right Arrow 4"/>
           <p:cNvSpPr/>
           <p:nvPr/>
         </p:nvSpPr>
         <p:spPr>
           <a:xfrm>
-            <a:off x="6309360" y="2103120"/>
-            <a:ext cx="5029200" cy="2651760"/>
-          </a:xfrm>
-          <a:prstGeom prst="roundRect">
-            <a:avLst/>
-          </a:prstGeom>
-          <a:solidFill>
-            <a:srgbClr val="555555"/>
+            <a:off x="3657600" y="2834640"/>
+            <a:ext cx="914400" cy="640080"/>
+          </a:xfrm>
+          <a:prstGeom prst="rightArrow">
+            <a:avLst/>
+          </a:prstGeom>
+          <a:solidFill>
+            <a:srgbClr val="C05014"/>
           </a:solidFill>
           <a:ln>
             <a:noFill/>
@@ -7306,33 +7248,170 @@
           </a:fontRef>
         </p:style>
         <p:txBody>
+          <a:bodyPr rtlCol="0" anchor="ctr"/>
+          <a:lstStyle/>
+          <a:p>
+            <a:pPr algn="ctr"/>
+          </a:p>
+        </p:txBody>
+      </p:sp>
+      <p:sp>
+        <p:nvSpPr>
+          <p:cNvPr id="6" name="Rounded Rectangle 5"/>
+          <p:cNvSpPr/>
+          <p:nvPr/>
+        </p:nvSpPr>
+        <p:spPr>
+          <a:xfrm>
+            <a:off x="4663440" y="2286000"/>
+            <a:ext cx="2743200" cy="1371600"/>
+          </a:xfrm>
+          <a:prstGeom prst="roundRect">
+            <a:avLst/>
+          </a:prstGeom>
+          <a:solidFill>
+            <a:srgbClr val="1F3A5F"/>
+          </a:solidFill>
+          <a:ln>
+            <a:noFill/>
+          </a:ln>
+        </p:spPr>
+        <p:style>
+          <a:lnRef idx="1">
+            <a:schemeClr val="accent1"/>
+          </a:lnRef>
+          <a:fillRef idx="3">
+            <a:schemeClr val="accent1"/>
+          </a:fillRef>
+          <a:effectRef idx="2">
+            <a:schemeClr val="accent1"/>
+          </a:effectRef>
+          <a:fontRef idx="minor">
+            <a:schemeClr val="lt1"/>
+          </a:fontRef>
+        </p:style>
+        <p:txBody>
           <a:bodyPr rtlCol="0" anchor="ctr" wrap="square"/>
           <a:lstStyle/>
           <a:p>
             <a:pPr algn="ctr"/>
             <a:r>
-              <a:rPr sz="2600" b="1">
+              <a:rPr sz="2400" b="1">
                 <a:solidFill>
                   <a:srgbClr val="FFFFFF"/>
                 </a:solidFill>
                 <a:latin typeface="Arial"/>
               </a:rPr>
-              <a:t>NOT stored
-book lying flat</a:t>
-            </a:r>
-          </a:p>
-        </p:txBody>
-      </p:sp>
-      <p:sp>
-        <p:nvSpPr>
-          <p:cNvPr id="6" name="TextBox 5"/>
+              <a:t>flashlight</a:t>
+            </a:r>
+          </a:p>
+        </p:txBody>
+      </p:sp>
+      <p:sp>
+        <p:nvSpPr>
+          <p:cNvPr id="7" name="Right Arrow 6"/>
+          <p:cNvSpPr/>
+          <p:nvPr/>
+        </p:nvSpPr>
+        <p:spPr>
+          <a:xfrm>
+            <a:off x="7498079" y="2834640"/>
+            <a:ext cx="914400" cy="640080"/>
+          </a:xfrm>
+          <a:prstGeom prst="rightArrow">
+            <a:avLst/>
+          </a:prstGeom>
+          <a:solidFill>
+            <a:srgbClr val="C05014"/>
+          </a:solidFill>
+          <a:ln>
+            <a:noFill/>
+          </a:ln>
+        </p:spPr>
+        <p:style>
+          <a:lnRef idx="1">
+            <a:schemeClr val="accent1"/>
+          </a:lnRef>
+          <a:fillRef idx="3">
+            <a:schemeClr val="accent1"/>
+          </a:fillRef>
+          <a:effectRef idx="2">
+            <a:schemeClr val="accent1"/>
+          </a:effectRef>
+          <a:fontRef idx="minor">
+            <a:schemeClr val="lt1"/>
+          </a:fontRef>
+        </p:style>
+        <p:txBody>
+          <a:bodyPr rtlCol="0" anchor="ctr"/>
+          <a:lstStyle/>
+          <a:p>
+            <a:pPr algn="ctr"/>
+          </a:p>
+        </p:txBody>
+      </p:sp>
+      <p:sp>
+        <p:nvSpPr>
+          <p:cNvPr id="8" name="Rounded Rectangle 7"/>
+          <p:cNvSpPr/>
+          <p:nvPr/>
+        </p:nvSpPr>
+        <p:spPr>
+          <a:xfrm>
+            <a:off x="8503920" y="2286000"/>
+            <a:ext cx="2743200" cy="1371600"/>
+          </a:xfrm>
+          <a:prstGeom prst="roundRect">
+            <a:avLst/>
+          </a:prstGeom>
+          <a:solidFill>
+            <a:srgbClr val="C05014"/>
+          </a:solidFill>
+          <a:ln>
+            <a:noFill/>
+          </a:ln>
+        </p:spPr>
+        <p:style>
+          <a:lnRef idx="1">
+            <a:schemeClr val="accent1"/>
+          </a:lnRef>
+          <a:fillRef idx="3">
+            <a:schemeClr val="accent1"/>
+          </a:fillRef>
+          <a:effectRef idx="2">
+            <a:schemeClr val="accent1"/>
+          </a:effectRef>
+          <a:fontRef idx="minor">
+            <a:schemeClr val="lt1"/>
+          </a:fontRef>
+        </p:style>
+        <p:txBody>
+          <a:bodyPr rtlCol="0" anchor="ctr" wrap="square"/>
+          <a:lstStyle/>
+          <a:p>
+            <a:pPr algn="ctr"/>
+            <a:r>
+              <a:rPr sz="3000" b="1">
+                <a:solidFill>
+                  <a:srgbClr val="FFFFFF"/>
+                </a:solidFill>
+                <a:latin typeface="Arial"/>
+              </a:rPr>
+              <a:t>light</a:t>
+            </a:r>
+          </a:p>
+        </p:txBody>
+      </p:sp>
+      <p:sp>
+        <p:nvSpPr>
+          <p:cNvPr id="9" name="TextBox 8"/>
           <p:cNvSpPr txBox="1"/>
           <p:nvPr/>
         </p:nvSpPr>
         <p:spPr>
           <a:xfrm>
-            <a:off x="822960" y="5120640"/>
-            <a:ext cx="10515600" cy="731520"/>
+            <a:off x="822960" y="4297680"/>
+            <a:ext cx="10515600" cy="914400"/>
           </a:xfrm>
           <a:prstGeom prst="rect">
             <a:avLst/>
@@ -7347,20 +7426,20 @@
           <a:p>
             <a:pPr algn="ctr"/>
             <a:r>
-              <a:rPr sz="2400" b="1">
+              <a:rPr sz="2600" b="1">
                 <a:solidFill>
                   <a:srgbClr val="1F3A5F"/>
                 </a:solidFill>
                 <a:latin typeface="Arial"/>
               </a:rPr>
-              <a:t>Stored energy = can cause a change later.</a:t>
-            </a:r>
-          </a:p>
-        </p:txBody>
-      </p:sp>
-      <p:sp>
-        <p:nvSpPr>
-          <p:cNvPr id="7" name="TextBox 6"/>
+              <a:t>The light is our evidence. The battery had stored energy.</a:t>
+            </a:r>
+          </a:p>
+        </p:txBody>
+      </p:sp>
+      <p:sp>
+        <p:nvSpPr>
+          <p:cNvPr id="10" name="TextBox 9"/>
           <p:cNvSpPr txBox="1"/>
           <p:nvPr/>
         </p:nvSpPr>
@@ -7388,7 +7467,7 @@
                 </a:solidFill>
                 <a:latin typeface="Arial"/>
               </a:rPr>
-              <a:t>20</a:t>
+              <a:t>18</a:t>
             </a:r>
           </a:p>
         </p:txBody>
@@ -7484,7 +7563,7 @@
                 </a:solidFill>
                 <a:latin typeface="Arial"/>
               </a:rPr>
-              <a:t>Bring it together</a:t>
+              <a:t>An object held up has stored energy</a:t>
             </a:r>
           </a:p>
         </p:txBody>
@@ -7497,14 +7576,14 @@
         </p:nvSpPr>
         <p:spPr>
           <a:xfrm>
-            <a:off x="822960" y="2377440"/>
-            <a:ext cx="2743200" cy="1371600"/>
+            <a:off x="914400" y="2194560"/>
+            <a:ext cx="4114800" cy="2011680"/>
           </a:xfrm>
           <a:prstGeom prst="roundRect">
             <a:avLst/>
           </a:prstGeom>
           <a:solidFill>
-            <a:srgbClr val="C05014"/>
+            <a:srgbClr val="E8EDF4"/>
           </a:solidFill>
           <a:ln>
             <a:noFill/>
@@ -7530,13 +7609,13 @@
           <a:p>
             <a:pPr algn="ctr"/>
             <a:r>
-              <a:rPr sz="3000" b="1">
-                <a:solidFill>
-                  <a:srgbClr val="FFFFFF"/>
-                </a:solidFill>
-                <a:latin typeface="Arial"/>
-              </a:rPr>
-              <a:t>ENERGY</a:t>
+              <a:rPr sz="2800" b="1">
+                <a:solidFill>
+                  <a:srgbClr val="1F3A5F"/>
+                </a:solidFill>
+                <a:latin typeface="Arial"/>
+              </a:rPr>
+              <a:t>raised book / apple</a:t>
             </a:r>
           </a:p>
         </p:txBody>
@@ -7549,8 +7628,8 @@
         </p:nvSpPr>
         <p:spPr>
           <a:xfrm>
-            <a:off x="3657600" y="2743200"/>
-            <a:ext cx="1005840" cy="640080"/>
+            <a:off x="5120640" y="2834640"/>
+            <a:ext cx="822960" cy="640080"/>
           </a:xfrm>
           <a:prstGeom prst="rightArrow">
             <a:avLst/>
@@ -7592,14 +7671,14 @@
         </p:nvSpPr>
         <p:spPr>
           <a:xfrm>
-            <a:off x="4754880" y="2377440"/>
-            <a:ext cx="2743200" cy="1371600"/>
+            <a:off x="6035040" y="2194560"/>
+            <a:ext cx="4114800" cy="2011680"/>
           </a:xfrm>
           <a:prstGeom prst="roundRect">
             <a:avLst/>
           </a:prstGeom>
           <a:solidFill>
-            <a:srgbClr val="E8EDF4"/>
+            <a:srgbClr val="C05014"/>
           </a:solidFill>
           <a:ln>
             <a:noFill/>
@@ -7625,122 +7704,27 @@
           <a:p>
             <a:pPr algn="ctr"/>
             <a:r>
-              <a:rPr sz="3000" b="1">
-                <a:solidFill>
-                  <a:srgbClr val="1F3A5F"/>
-                </a:solidFill>
-                <a:latin typeface="Arial"/>
-              </a:rPr>
-              <a:t>CHANGE</a:t>
-            </a:r>
-          </a:p>
-        </p:txBody>
-      </p:sp>
-      <p:sp>
-        <p:nvSpPr>
-          <p:cNvPr id="7" name="Right Arrow 6"/>
-          <p:cNvSpPr/>
-          <p:nvPr/>
-        </p:nvSpPr>
-        <p:spPr>
-          <a:xfrm>
-            <a:off x="7589520" y="2743200"/>
-            <a:ext cx="1005840" cy="640080"/>
-          </a:xfrm>
-          <a:prstGeom prst="rightArrow">
-            <a:avLst/>
-          </a:prstGeom>
-          <a:solidFill>
-            <a:srgbClr val="C05014"/>
-          </a:solidFill>
-          <a:ln>
-            <a:noFill/>
-          </a:ln>
-        </p:spPr>
-        <p:style>
-          <a:lnRef idx="1">
-            <a:schemeClr val="accent1"/>
-          </a:lnRef>
-          <a:fillRef idx="3">
-            <a:schemeClr val="accent1"/>
-          </a:fillRef>
-          <a:effectRef idx="2">
-            <a:schemeClr val="accent1"/>
-          </a:effectRef>
-          <a:fontRef idx="minor">
-            <a:schemeClr val="lt1"/>
-          </a:fontRef>
-        </p:style>
-        <p:txBody>
-          <a:bodyPr rtlCol="0" anchor="ctr"/>
-          <a:lstStyle/>
-          <a:p>
-            <a:pPr algn="ctr"/>
-          </a:p>
-        </p:txBody>
-      </p:sp>
-      <p:sp>
-        <p:nvSpPr>
-          <p:cNvPr id="8" name="Rounded Rectangle 7"/>
-          <p:cNvSpPr/>
-          <p:nvPr/>
-        </p:nvSpPr>
-        <p:spPr>
-          <a:xfrm>
-            <a:off x="8686800" y="2377440"/>
-            <a:ext cx="2743200" cy="1371600"/>
-          </a:xfrm>
-          <a:prstGeom prst="roundRect">
-            <a:avLst/>
-          </a:prstGeom>
-          <a:solidFill>
-            <a:srgbClr val="2E6B3F"/>
-          </a:solidFill>
-          <a:ln>
-            <a:noFill/>
-          </a:ln>
-        </p:spPr>
-        <p:style>
-          <a:lnRef idx="1">
-            <a:schemeClr val="accent1"/>
-          </a:lnRef>
-          <a:fillRef idx="3">
-            <a:schemeClr val="accent1"/>
-          </a:fillRef>
-          <a:effectRef idx="2">
-            <a:schemeClr val="accent1"/>
-          </a:effectRef>
-          <a:fontRef idx="minor">
-            <a:schemeClr val="lt1"/>
-          </a:fontRef>
-        </p:style>
-        <p:txBody>
-          <a:bodyPr rtlCol="0" anchor="ctr" wrap="square"/>
-          <a:lstStyle/>
-          <a:p>
-            <a:pPr algn="ctr"/>
-            <a:r>
-              <a:rPr sz="3000" b="1">
+              <a:rPr sz="2600" b="1">
                 <a:solidFill>
                   <a:srgbClr val="FFFFFF"/>
                 </a:solidFill>
                 <a:latin typeface="Arial"/>
               </a:rPr>
-              <a:t>EVIDENCE</a:t>
-            </a:r>
-          </a:p>
-        </p:txBody>
-      </p:sp>
-      <p:sp>
-        <p:nvSpPr>
-          <p:cNvPr id="9" name="TextBox 8"/>
+              <a:t>falls when released</a:t>
+            </a:r>
+          </a:p>
+        </p:txBody>
+      </p:sp>
+      <p:sp>
+        <p:nvSpPr>
+          <p:cNvPr id="7" name="TextBox 6"/>
           <p:cNvSpPr txBox="1"/>
           <p:nvPr/>
         </p:nvSpPr>
         <p:spPr>
           <a:xfrm>
-            <a:off x="822960" y="4572000"/>
-            <a:ext cx="10515600" cy="822960"/>
+            <a:off x="914400" y="4846320"/>
+            <a:ext cx="10332720" cy="822960"/>
           </a:xfrm>
           <a:prstGeom prst="rect">
             <a:avLst/>
@@ -7761,14 +7745,14 @@
                 </a:solidFill>
                 <a:latin typeface="Arial"/>
               </a:rPr>
-              <a:t>Energy causes a change. The change is our evidence.</a:t>
-            </a:r>
-          </a:p>
-        </p:txBody>
-      </p:sp>
-      <p:sp>
-        <p:nvSpPr>
-          <p:cNvPr id="10" name="TextBox 9"/>
+              <a:t>It has stored energy because of its position.</a:t>
+            </a:r>
+          </a:p>
+        </p:txBody>
+      </p:sp>
+      <p:sp>
+        <p:nvSpPr>
+          <p:cNvPr id="8" name="TextBox 7"/>
           <p:cNvSpPr txBox="1"/>
           <p:nvPr/>
         </p:nvSpPr>
@@ -7796,7 +7780,7 @@
                 </a:solidFill>
                 <a:latin typeface="Arial"/>
               </a:rPr>
-              <a:t>21</a:t>
+              <a:t>19</a:t>
             </a:r>
           </a:p>
         </p:txBody>
@@ -7871,7 +7855,7 @@
         <p:spPr>
           <a:xfrm>
             <a:off x="457200" y="146304"/>
-            <a:ext cx="11247120" cy="777240"/>
+            <a:ext cx="10058400" cy="777240"/>
           </a:xfrm>
           <a:prstGeom prst="rect">
             <a:avLst/>
@@ -7886,13 +7870,13 @@
           <a:p>
             <a:pPr algn="l"/>
             <a:r>
-              <a:rPr sz="3400" b="1">
+              <a:rPr sz="3400" b="1" i="0">
                 <a:solidFill>
                   <a:srgbClr val="FFFFFF"/>
                 </a:solidFill>
                 <a:latin typeface="Arial"/>
               </a:rPr>
-              <a:t>Exit ticket</a:t>
+              <a:t>Notes — Stored Energy</a:t>
             </a:r>
           </a:p>
         </p:txBody>
@@ -7905,14 +7889,14 @@
         </p:nvSpPr>
         <p:spPr>
           <a:xfrm>
-            <a:off x="1097280" y="2377440"/>
-            <a:ext cx="9966960" cy="1828800"/>
+            <a:off x="9692640" y="256032"/>
+            <a:ext cx="2103120" cy="548640"/>
           </a:xfrm>
           <a:prstGeom prst="roundRect">
             <a:avLst/>
           </a:prstGeom>
           <a:solidFill>
-            <a:srgbClr val="E8EDF4"/>
+            <a:srgbClr val="C05014"/>
           </a:solidFill>
           <a:ln>
             <a:noFill/>
@@ -7938,27 +7922,70 @@
           <a:p>
             <a:pPr algn="ctr"/>
             <a:r>
-              <a:rPr sz="3000" b="1">
-                <a:solidFill>
-                  <a:srgbClr val="1F3A5F"/>
-                </a:solidFill>
-                <a:latin typeface="Arial"/>
-              </a:rPr>
-              <a:t>Name one change you saw this week, and the energy that caused it.</a:t>
-            </a:r>
-          </a:p>
-        </p:txBody>
-      </p:sp>
-      <p:sp>
-        <p:nvSpPr>
-          <p:cNvPr id="5" name="TextBox 4"/>
+              <a:rPr sz="1800" b="1">
+                <a:solidFill>
+                  <a:srgbClr val="FFFFFF"/>
+                </a:solidFill>
+                <a:latin typeface="Arial"/>
+              </a:rPr>
+              <a:t>NOTES</a:t>
+            </a:r>
+          </a:p>
+        </p:txBody>
+      </p:sp>
+      <p:sp>
+        <p:nvSpPr>
+          <p:cNvPr id="5" name="Rounded Rectangle 4"/>
+          <p:cNvSpPr/>
+          <p:nvPr/>
+        </p:nvSpPr>
+        <p:spPr>
+          <a:xfrm>
+            <a:off x="1097280" y="1737360"/>
+            <a:ext cx="9966960" cy="1234440"/>
+          </a:xfrm>
+          <a:prstGeom prst="roundRect">
+            <a:avLst/>
+          </a:prstGeom>
+          <a:solidFill>
+            <a:srgbClr val="E8EDF4"/>
+          </a:solidFill>
+          <a:ln>
+            <a:noFill/>
+          </a:ln>
+        </p:spPr>
+        <p:style>
+          <a:lnRef idx="1">
+            <a:schemeClr val="accent1"/>
+          </a:lnRef>
+          <a:fillRef idx="3">
+            <a:schemeClr val="accent1"/>
+          </a:fillRef>
+          <a:effectRef idx="2">
+            <a:schemeClr val="accent1"/>
+          </a:effectRef>
+          <a:fontRef idx="minor">
+            <a:schemeClr val="lt1"/>
+          </a:fontRef>
+        </p:style>
+        <p:txBody>
+          <a:bodyPr rtlCol="0" anchor="ctr" wrap="square"/>
+          <a:lstStyle/>
+          <a:p>
+            <a:pPr algn="ctr"/>
+          </a:p>
+        </p:txBody>
+      </p:sp>
+      <p:sp>
+        <p:nvSpPr>
+          <p:cNvPr id="6" name="TextBox 5"/>
           <p:cNvSpPr txBox="1"/>
           <p:nvPr/>
         </p:nvSpPr>
         <p:spPr>
           <a:xfrm>
-            <a:off x="11338560" y="6446520"/>
-            <a:ext cx="731520" cy="365760"/>
+            <a:off x="1371600" y="1828800"/>
+            <a:ext cx="9418320" cy="457200"/>
           </a:xfrm>
           <a:prstGeom prst="rect">
             <a:avLst/>
@@ -7971,15 +7998,268 @@
           </a:bodyPr>
           <a:lstStyle/>
           <a:p>
-            <a:pPr algn="r"/>
-            <a:r>
-              <a:rPr sz="1200" b="0">
+            <a:pPr algn="l"/>
+            <a:r>
+              <a:rPr sz="1600" b="1" i="0">
+                <a:solidFill>
+                  <a:srgbClr val="C05014"/>
+                </a:solidFill>
+                <a:latin typeface="Arial"/>
+              </a:rPr>
+              <a:t>WRITE:</a:t>
+            </a:r>
+          </a:p>
+        </p:txBody>
+      </p:sp>
+      <p:sp>
+        <p:nvSpPr>
+          <p:cNvPr id="7" name="TextBox 6"/>
+          <p:cNvSpPr txBox="1"/>
+          <p:nvPr/>
+        </p:nvSpPr>
+        <p:spPr>
+          <a:xfrm>
+            <a:off x="1371600" y="2240280"/>
+            <a:ext cx="9418320" cy="640080"/>
+          </a:xfrm>
+          <a:prstGeom prst="rect">
+            <a:avLst/>
+          </a:prstGeom>
+          <a:noFill/>
+        </p:spPr>
+        <p:txBody>
+          <a:bodyPr wrap="square" anchor="t">
+            <a:spAutoFit/>
+          </a:bodyPr>
+          <a:lstStyle/>
+          <a:p>
+            <a:pPr algn="l"/>
+            <a:r>
+              <a:rPr sz="2800" b="1" i="0">
+                <a:solidFill>
+                  <a:srgbClr val="1F3A5F"/>
+                </a:solidFill>
+                <a:latin typeface="Arial"/>
+              </a:rPr>
+              <a:t>Stored energy can cause a change later.</a:t>
+            </a:r>
+          </a:p>
+        </p:txBody>
+      </p:sp>
+      <p:sp>
+        <p:nvSpPr>
+          <p:cNvPr id="8" name="TextBox 7"/>
+          <p:cNvSpPr txBox="1"/>
+          <p:nvPr/>
+        </p:nvSpPr>
+        <p:spPr>
+          <a:xfrm>
+            <a:off x="1371600" y="3017520"/>
+            <a:ext cx="9418320" cy="457200"/>
+          </a:xfrm>
+          <a:prstGeom prst="rect">
+            <a:avLst/>
+          </a:prstGeom>
+          <a:noFill/>
+        </p:spPr>
+        <p:txBody>
+          <a:bodyPr wrap="square" anchor="t">
+            <a:spAutoFit/>
+          </a:bodyPr>
+          <a:lstStyle/>
+          <a:p>
+            <a:pPr algn="l"/>
+            <a:r>
+              <a:rPr sz="1600" b="0" i="1">
                 <a:solidFill>
                   <a:srgbClr val="555555"/>
                 </a:solidFill>
                 <a:latin typeface="Arial"/>
               </a:rPr>
-              <a:t>22</a:t>
+              <a:t>REVEAL → LATER</a:t>
+            </a:r>
+          </a:p>
+        </p:txBody>
+      </p:sp>
+      <p:sp>
+        <p:nvSpPr>
+          <p:cNvPr id="9" name="Rounded Rectangle 8"/>
+          <p:cNvSpPr/>
+          <p:nvPr/>
+        </p:nvSpPr>
+        <p:spPr>
+          <a:xfrm>
+            <a:off x="1097280" y="4206240"/>
+            <a:ext cx="9966960" cy="1828800"/>
+          </a:xfrm>
+          <a:prstGeom prst="roundRect">
+            <a:avLst/>
+          </a:prstGeom>
+          <a:solidFill>
+            <a:srgbClr val="2E6B3F"/>
+          </a:solidFill>
+          <a:ln>
+            <a:noFill/>
+          </a:ln>
+        </p:spPr>
+        <p:style>
+          <a:lnRef idx="1">
+            <a:schemeClr val="accent1"/>
+          </a:lnRef>
+          <a:fillRef idx="3">
+            <a:schemeClr val="accent1"/>
+          </a:fillRef>
+          <a:effectRef idx="2">
+            <a:schemeClr val="accent1"/>
+          </a:effectRef>
+          <a:fontRef idx="minor">
+            <a:schemeClr val="lt1"/>
+          </a:fontRef>
+        </p:style>
+        <p:txBody>
+          <a:bodyPr rtlCol="0" anchor="ctr" wrap="square"/>
+          <a:lstStyle/>
+          <a:p>
+            <a:pPr algn="ctr"/>
+          </a:p>
+        </p:txBody>
+      </p:sp>
+      <p:sp>
+        <p:nvSpPr>
+          <p:cNvPr id="10" name="TextBox 9"/>
+          <p:cNvSpPr txBox="1"/>
+          <p:nvPr/>
+        </p:nvSpPr>
+        <p:spPr>
+          <a:xfrm>
+            <a:off x="1371600" y="4297679"/>
+            <a:ext cx="9418320" cy="457200"/>
+          </a:xfrm>
+          <a:prstGeom prst="rect">
+            <a:avLst/>
+          </a:prstGeom>
+          <a:noFill/>
+        </p:spPr>
+        <p:txBody>
+          <a:bodyPr wrap="square" anchor="t">
+            <a:spAutoFit/>
+          </a:bodyPr>
+          <a:lstStyle/>
+          <a:p>
+            <a:pPr algn="l"/>
+            <a:r>
+              <a:rPr sz="1600" b="1" i="0">
+                <a:solidFill>
+                  <a:srgbClr val="FFFFFF"/>
+                </a:solidFill>
+                <a:latin typeface="Arial"/>
+              </a:rPr>
+              <a:t>DRAWING IDEAS (draw YOUR example):</a:t>
+            </a:r>
+          </a:p>
+        </p:txBody>
+      </p:sp>
+      <p:sp>
+        <p:nvSpPr>
+          <p:cNvPr id="11" name="TextBox 10"/>
+          <p:cNvSpPr txBox="1"/>
+          <p:nvPr/>
+        </p:nvSpPr>
+        <p:spPr>
+          <a:xfrm>
+            <a:off x="1463040" y="4754879"/>
+            <a:ext cx="9418320" cy="411480"/>
+          </a:xfrm>
+          <a:prstGeom prst="rect">
+            <a:avLst/>
+          </a:prstGeom>
+          <a:noFill/>
+        </p:spPr>
+        <p:txBody>
+          <a:bodyPr wrap="square" anchor="t">
+            <a:spAutoFit/>
+          </a:bodyPr>
+          <a:lstStyle/>
+          <a:p>
+            <a:pPr algn="l"/>
+            <a:r>
+              <a:rPr sz="1800" b="0" i="0">
+                <a:solidFill>
+                  <a:srgbClr val="FFFFFF"/>
+                </a:solidFill>
+                <a:latin typeface="Arial"/>
+              </a:rPr>
+              <a:t>•  a battery in a flashlight</a:t>
+            </a:r>
+          </a:p>
+        </p:txBody>
+      </p:sp>
+      <p:sp>
+        <p:nvSpPr>
+          <p:cNvPr id="12" name="TextBox 11"/>
+          <p:cNvSpPr txBox="1"/>
+          <p:nvPr/>
+        </p:nvSpPr>
+        <p:spPr>
+          <a:xfrm>
+            <a:off x="1463040" y="5166359"/>
+            <a:ext cx="9418320" cy="411480"/>
+          </a:xfrm>
+          <a:prstGeom prst="rect">
+            <a:avLst/>
+          </a:prstGeom>
+          <a:noFill/>
+        </p:spPr>
+        <p:txBody>
+          <a:bodyPr wrap="square" anchor="t">
+            <a:spAutoFit/>
+          </a:bodyPr>
+          <a:lstStyle/>
+          <a:p>
+            <a:pPr algn="l"/>
+            <a:r>
+              <a:rPr sz="1800" b="0" i="0">
+                <a:solidFill>
+                  <a:srgbClr val="FFFFFF"/>
+                </a:solidFill>
+                <a:latin typeface="Arial"/>
+              </a:rPr>
+              <a:t>•  a stretched rubber band</a:t>
+            </a:r>
+          </a:p>
+        </p:txBody>
+      </p:sp>
+      <p:sp>
+        <p:nvSpPr>
+          <p:cNvPr id="13" name="TextBox 12"/>
+          <p:cNvSpPr txBox="1"/>
+          <p:nvPr/>
+        </p:nvSpPr>
+        <p:spPr>
+          <a:xfrm>
+            <a:off x="1463040" y="5577840"/>
+            <a:ext cx="9418320" cy="411480"/>
+          </a:xfrm>
+          <a:prstGeom prst="rect">
+            <a:avLst/>
+          </a:prstGeom>
+          <a:noFill/>
+        </p:spPr>
+        <p:txBody>
+          <a:bodyPr wrap="square" anchor="t">
+            <a:spAutoFit/>
+          </a:bodyPr>
+          <a:lstStyle/>
+          <a:p>
+            <a:pPr algn="l"/>
+            <a:r>
+              <a:rPr sz="1800" b="0" i="0">
+                <a:solidFill>
+                  <a:srgbClr val="FFFFFF"/>
+                </a:solidFill>
+                <a:latin typeface="Arial"/>
+              </a:rPr>
+              <a:t>•  a raised object (apple/book)</a:t>
             </a:r>
           </a:p>
         </p:txBody>
@@ -8054,7 +8334,7 @@
         <p:spPr>
           <a:xfrm>
             <a:off x="457200" y="146304"/>
-            <a:ext cx="10058400" cy="777240"/>
+            <a:ext cx="11247120" cy="777240"/>
           </a:xfrm>
           <a:prstGeom prst="rect">
             <a:avLst/>
@@ -8069,13 +8349,13 @@
           <a:p>
             <a:pPr algn="l"/>
             <a:r>
-              <a:rPr sz="3400" b="1" i="0">
+              <a:rPr sz="3400" b="1">
                 <a:solidFill>
                   <a:srgbClr val="FFFFFF"/>
                 </a:solidFill>
                 <a:latin typeface="Arial"/>
               </a:rPr>
-              <a:t>Notebook — Energy</a:t>
+              <a:t>Which shows stored energy?</a:t>
             </a:r>
           </a:p>
         </p:txBody>
@@ -8088,14 +8368,14 @@
         </p:nvSpPr>
         <p:spPr>
           <a:xfrm>
-            <a:off x="9692640" y="256032"/>
-            <a:ext cx="2103120" cy="548640"/>
+            <a:off x="822960" y="2103120"/>
+            <a:ext cx="5029200" cy="2651760"/>
           </a:xfrm>
           <a:prstGeom prst="roundRect">
             <a:avLst/>
           </a:prstGeom>
           <a:solidFill>
-            <a:srgbClr val="C05014"/>
+            <a:srgbClr val="2E6B3F"/>
           </a:solidFill>
           <a:ln>
             <a:noFill/>
@@ -8121,13 +8401,14 @@
           <a:p>
             <a:pPr algn="ctr"/>
             <a:r>
-              <a:rPr sz="1800" b="1">
+              <a:rPr sz="2400" b="1">
                 <a:solidFill>
                   <a:srgbClr val="FFFFFF"/>
                 </a:solidFill>
                 <a:latin typeface="Arial"/>
               </a:rPr>
-              <a:t>NOTEBOOK</a:t>
+              <a:t>STORED ENERGY
+battery · stretched band · raised book</a:t>
             </a:r>
           </a:p>
         </p:txBody>
@@ -8140,14 +8421,14 @@
         </p:nvSpPr>
         <p:spPr>
           <a:xfrm>
-            <a:off x="1097280" y="1737360"/>
-            <a:ext cx="9966960" cy="1234440"/>
+            <a:off x="6309360" y="2103120"/>
+            <a:ext cx="5029200" cy="2651760"/>
           </a:xfrm>
           <a:prstGeom prst="roundRect">
             <a:avLst/>
           </a:prstGeom>
           <a:solidFill>
-            <a:srgbClr val="E8EDF4"/>
+            <a:srgbClr val="555555"/>
           </a:solidFill>
           <a:ln>
             <a:noFill/>
@@ -8172,6 +8453,16 @@
           <a:lstStyle/>
           <a:p>
             <a:pPr algn="ctr"/>
+            <a:r>
+              <a:rPr sz="2600" b="1">
+                <a:solidFill>
+                  <a:srgbClr val="FFFFFF"/>
+                </a:solidFill>
+                <a:latin typeface="Arial"/>
+              </a:rPr>
+              <a:t>NOT stored
+book lying flat</a:t>
+            </a:r>
           </a:p>
         </p:txBody>
       </p:sp>
@@ -8183,8 +8474,8 @@
         </p:nvSpPr>
         <p:spPr>
           <a:xfrm>
-            <a:off x="1371600" y="1828800"/>
-            <a:ext cx="9418320" cy="457200"/>
+            <a:off x="822960" y="5120640"/>
+            <a:ext cx="10515600" cy="731520"/>
           </a:xfrm>
           <a:prstGeom prst="rect">
             <a:avLst/>
@@ -8197,15 +8488,15 @@
           </a:bodyPr>
           <a:lstStyle/>
           <a:p>
-            <a:pPr algn="l"/>
-            <a:r>
-              <a:rPr sz="1600" b="1" i="0">
-                <a:solidFill>
-                  <a:srgbClr val="C05014"/>
-                </a:solidFill>
-                <a:latin typeface="Arial"/>
-              </a:rPr>
-              <a:t>WRITE:</a:t>
+            <a:pPr algn="ctr"/>
+            <a:r>
+              <a:rPr sz="2400" b="1">
+                <a:solidFill>
+                  <a:srgbClr val="1F3A5F"/>
+                </a:solidFill>
+                <a:latin typeface="Arial"/>
+              </a:rPr>
+              <a:t>Stored energy = can cause a change later.</a:t>
             </a:r>
           </a:p>
         </p:txBody>
@@ -8218,8 +8509,8 @@
         </p:nvSpPr>
         <p:spPr>
           <a:xfrm>
-            <a:off x="1371600" y="2240280"/>
-            <a:ext cx="9418320" cy="640080"/>
+            <a:off x="11338560" y="6446520"/>
+            <a:ext cx="731520" cy="365760"/>
           </a:xfrm>
           <a:prstGeom prst="rect">
             <a:avLst/>
@@ -8232,233 +8523,15 @@
           </a:bodyPr>
           <a:lstStyle/>
           <a:p>
-            <a:pPr algn="l"/>
-            <a:r>
-              <a:rPr sz="2800" b="1" i="0">
-                <a:solidFill>
-                  <a:srgbClr val="1F3A5F"/>
-                </a:solidFill>
-                <a:latin typeface="Arial"/>
-              </a:rPr>
-              <a:t>Energy is the ability to cause change.</a:t>
-            </a:r>
-          </a:p>
-        </p:txBody>
-      </p:sp>
-      <p:sp>
-        <p:nvSpPr>
-          <p:cNvPr id="8" name="TextBox 7"/>
-          <p:cNvSpPr txBox="1"/>
-          <p:nvPr/>
-        </p:nvSpPr>
-        <p:spPr>
-          <a:xfrm>
-            <a:off x="1371600" y="3017520"/>
-            <a:ext cx="9418320" cy="457200"/>
-          </a:xfrm>
-          <a:prstGeom prst="rect">
-            <a:avLst/>
-          </a:prstGeom>
-          <a:noFill/>
-        </p:spPr>
-        <p:txBody>
-          <a:bodyPr wrap="square" anchor="t">
-            <a:spAutoFit/>
-          </a:bodyPr>
-          <a:lstStyle/>
-          <a:p>
-            <a:pPr algn="l"/>
-            <a:r>
-              <a:rPr sz="1600" b="0" i="1">
+            <a:pPr algn="r"/>
+            <a:r>
+              <a:rPr sz="1200" b="0">
                 <a:solidFill>
                   <a:srgbClr val="555555"/>
                 </a:solidFill>
                 <a:latin typeface="Arial"/>
               </a:rPr>
-              <a:t>REVEAL → CHANGE</a:t>
-            </a:r>
-          </a:p>
-        </p:txBody>
-      </p:sp>
-      <p:sp>
-        <p:nvSpPr>
-          <p:cNvPr id="9" name="Rounded Rectangle 8"/>
-          <p:cNvSpPr/>
-          <p:nvPr/>
-        </p:nvSpPr>
-        <p:spPr>
-          <a:xfrm>
-            <a:off x="1097280" y="4206240"/>
-            <a:ext cx="9966960" cy="1828800"/>
-          </a:xfrm>
-          <a:prstGeom prst="roundRect">
-            <a:avLst/>
-          </a:prstGeom>
-          <a:solidFill>
-            <a:srgbClr val="2E6B3F"/>
-          </a:solidFill>
-          <a:ln>
-            <a:noFill/>
-          </a:ln>
-        </p:spPr>
-        <p:style>
-          <a:lnRef idx="1">
-            <a:schemeClr val="accent1"/>
-          </a:lnRef>
-          <a:fillRef idx="3">
-            <a:schemeClr val="accent1"/>
-          </a:fillRef>
-          <a:effectRef idx="2">
-            <a:schemeClr val="accent1"/>
-          </a:effectRef>
-          <a:fontRef idx="minor">
-            <a:schemeClr val="lt1"/>
-          </a:fontRef>
-        </p:style>
-        <p:txBody>
-          <a:bodyPr rtlCol="0" anchor="ctr" wrap="square"/>
-          <a:lstStyle/>
-          <a:p>
-            <a:pPr algn="ctr"/>
-          </a:p>
-        </p:txBody>
-      </p:sp>
-      <p:sp>
-        <p:nvSpPr>
-          <p:cNvPr id="10" name="TextBox 9"/>
-          <p:cNvSpPr txBox="1"/>
-          <p:nvPr/>
-        </p:nvSpPr>
-        <p:spPr>
-          <a:xfrm>
-            <a:off x="1371600" y="4297679"/>
-            <a:ext cx="9418320" cy="457200"/>
-          </a:xfrm>
-          <a:prstGeom prst="rect">
-            <a:avLst/>
-          </a:prstGeom>
-          <a:noFill/>
-        </p:spPr>
-        <p:txBody>
-          <a:bodyPr wrap="square" anchor="t">
-            <a:spAutoFit/>
-          </a:bodyPr>
-          <a:lstStyle/>
-          <a:p>
-            <a:pPr algn="l"/>
-            <a:r>
-              <a:rPr sz="1600" b="1" i="0">
-                <a:solidFill>
-                  <a:srgbClr val="FFFFFF"/>
-                </a:solidFill>
-                <a:latin typeface="Arial"/>
-              </a:rPr>
-              <a:t>DRAWING IDEAS (draw YOUR example):</a:t>
-            </a:r>
-          </a:p>
-        </p:txBody>
-      </p:sp>
-      <p:sp>
-        <p:nvSpPr>
-          <p:cNvPr id="11" name="TextBox 10"/>
-          <p:cNvSpPr txBox="1"/>
-          <p:nvPr/>
-        </p:nvSpPr>
-        <p:spPr>
-          <a:xfrm>
-            <a:off x="1463040" y="4754879"/>
-            <a:ext cx="9418320" cy="411480"/>
-          </a:xfrm>
-          <a:prstGeom prst="rect">
-            <a:avLst/>
-          </a:prstGeom>
-          <a:noFill/>
-        </p:spPr>
-        <p:txBody>
-          <a:bodyPr wrap="square" anchor="t">
-            <a:spAutoFit/>
-          </a:bodyPr>
-          <a:lstStyle/>
-          <a:p>
-            <a:pPr algn="l"/>
-            <a:r>
-              <a:rPr sz="1800" b="0" i="0">
-                <a:solidFill>
-                  <a:srgbClr val="FFFFFF"/>
-                </a:solidFill>
-                <a:latin typeface="Arial"/>
-              </a:rPr>
-              <a:t>•  a flashlight turning on</a:t>
-            </a:r>
-          </a:p>
-        </p:txBody>
-      </p:sp>
-      <p:sp>
-        <p:nvSpPr>
-          <p:cNvPr id="12" name="TextBox 11"/>
-          <p:cNvSpPr txBox="1"/>
-          <p:nvPr/>
-        </p:nvSpPr>
-        <p:spPr>
-          <a:xfrm>
-            <a:off x="1463040" y="5166359"/>
-            <a:ext cx="9418320" cy="411480"/>
-          </a:xfrm>
-          <a:prstGeom prst="rect">
-            <a:avLst/>
-          </a:prstGeom>
-          <a:noFill/>
-        </p:spPr>
-        <p:txBody>
-          <a:bodyPr wrap="square" anchor="t">
-            <a:spAutoFit/>
-          </a:bodyPr>
-          <a:lstStyle/>
-          <a:p>
-            <a:pPr algn="l"/>
-            <a:r>
-              <a:rPr sz="1800" b="0" i="0">
-                <a:solidFill>
-                  <a:srgbClr val="FFFFFF"/>
-                </a:solidFill>
-                <a:latin typeface="Arial"/>
-              </a:rPr>
-              <a:t>•  a rolling ball moving a cup</a:t>
-            </a:r>
-          </a:p>
-        </p:txBody>
-      </p:sp>
-      <p:sp>
-        <p:nvSpPr>
-          <p:cNvPr id="13" name="TextBox 12"/>
-          <p:cNvSpPr txBox="1"/>
-          <p:nvPr/>
-        </p:nvSpPr>
-        <p:spPr>
-          <a:xfrm>
-            <a:off x="1463040" y="5577840"/>
-            <a:ext cx="9418320" cy="411480"/>
-          </a:xfrm>
-          <a:prstGeom prst="rect">
-            <a:avLst/>
-          </a:prstGeom>
-          <a:noFill/>
-        </p:spPr>
-        <p:txBody>
-          <a:bodyPr wrap="square" anchor="t">
-            <a:spAutoFit/>
-          </a:bodyPr>
-          <a:lstStyle/>
-          <a:p>
-            <a:pPr algn="l"/>
-            <a:r>
-              <a:rPr sz="1800" b="0" i="0">
-                <a:solidFill>
-                  <a:srgbClr val="FFFFFF"/>
-                </a:solidFill>
-                <a:latin typeface="Arial"/>
-              </a:rPr>
-              <a:t>•  a ringing bell</a:t>
+              <a:t>20</a:t>
             </a:r>
           </a:p>
         </p:txBody>
@@ -8533,7 +8606,7 @@
         <p:spPr>
           <a:xfrm>
             <a:off x="457200" y="146304"/>
-            <a:ext cx="10058400" cy="777240"/>
+            <a:ext cx="11247120" cy="777240"/>
           </a:xfrm>
           <a:prstGeom prst="rect">
             <a:avLst/>
@@ -8548,13 +8621,13 @@
           <a:p>
             <a:pPr algn="l"/>
             <a:r>
-              <a:rPr sz="3400" b="1" i="0">
+              <a:rPr sz="3400" b="1">
                 <a:solidFill>
                   <a:srgbClr val="FFFFFF"/>
                 </a:solidFill>
                 <a:latin typeface="Arial"/>
               </a:rPr>
-              <a:t>Notebook — Energy Model</a:t>
+              <a:t>Bring it together</a:t>
             </a:r>
           </a:p>
         </p:txBody>
@@ -8567,8 +8640,8 @@
         </p:nvSpPr>
         <p:spPr>
           <a:xfrm>
-            <a:off x="9692640" y="256032"/>
-            <a:ext cx="2103120" cy="548640"/>
+            <a:off x="822960" y="2377440"/>
+            <a:ext cx="2743200" cy="1371600"/>
           </a:xfrm>
           <a:prstGeom prst="roundRect">
             <a:avLst/>
@@ -8600,33 +8673,33 @@
           <a:p>
             <a:pPr algn="ctr"/>
             <a:r>
-              <a:rPr sz="1800" b="1">
+              <a:rPr sz="3000" b="1">
                 <a:solidFill>
                   <a:srgbClr val="FFFFFF"/>
                 </a:solidFill>
                 <a:latin typeface="Arial"/>
               </a:rPr>
-              <a:t>NOTEBOOK</a:t>
-            </a:r>
-          </a:p>
-        </p:txBody>
-      </p:sp>
-      <p:sp>
-        <p:nvSpPr>
-          <p:cNvPr id="5" name="Rounded Rectangle 4"/>
+              <a:t>ENERGY</a:t>
+            </a:r>
+          </a:p>
+        </p:txBody>
+      </p:sp>
+      <p:sp>
+        <p:nvSpPr>
+          <p:cNvPr id="5" name="Right Arrow 4"/>
           <p:cNvSpPr/>
           <p:nvPr/>
         </p:nvSpPr>
         <p:spPr>
           <a:xfrm>
-            <a:off x="1097280" y="1737360"/>
-            <a:ext cx="9966960" cy="1234440"/>
-          </a:xfrm>
-          <a:prstGeom prst="roundRect">
-            <a:avLst/>
-          </a:prstGeom>
-          <a:solidFill>
-            <a:srgbClr val="E8EDF4"/>
+            <a:off x="3657600" y="2743200"/>
+            <a:ext cx="1005840" cy="640080"/>
+          </a:xfrm>
+          <a:prstGeom prst="rightArrow">
+            <a:avLst/>
+          </a:prstGeom>
+          <a:solidFill>
+            <a:srgbClr val="C05014"/>
           </a:solidFill>
           <a:ln>
             <a:noFill/>
@@ -8647,7 +8720,7 @@
           </a:fontRef>
         </p:style>
         <p:txBody>
-          <a:bodyPr rtlCol="0" anchor="ctr" wrap="square"/>
+          <a:bodyPr rtlCol="0" anchor="ctr"/>
           <a:lstStyle/>
           <a:p>
             <a:pPr algn="ctr"/>
@@ -8656,125 +8729,20 @@
       </p:sp>
       <p:sp>
         <p:nvSpPr>
-          <p:cNvPr id="6" name="TextBox 5"/>
-          <p:cNvSpPr txBox="1"/>
-          <p:nvPr/>
-        </p:nvSpPr>
-        <p:spPr>
-          <a:xfrm>
-            <a:off x="1371600" y="1828800"/>
-            <a:ext cx="9418320" cy="457200"/>
-          </a:xfrm>
-          <a:prstGeom prst="rect">
-            <a:avLst/>
-          </a:prstGeom>
-          <a:noFill/>
-        </p:spPr>
-        <p:txBody>
-          <a:bodyPr wrap="square" anchor="t">
-            <a:spAutoFit/>
-          </a:bodyPr>
-          <a:lstStyle/>
-          <a:p>
-            <a:pPr algn="l"/>
-            <a:r>
-              <a:rPr sz="1600" b="1" i="0">
-                <a:solidFill>
-                  <a:srgbClr val="C05014"/>
-                </a:solidFill>
-                <a:latin typeface="Arial"/>
-              </a:rPr>
-              <a:t>WRITE:</a:t>
-            </a:r>
-          </a:p>
-        </p:txBody>
-      </p:sp>
-      <p:sp>
-        <p:nvSpPr>
-          <p:cNvPr id="7" name="TextBox 6"/>
-          <p:cNvSpPr txBox="1"/>
-          <p:nvPr/>
-        </p:nvSpPr>
-        <p:spPr>
-          <a:xfrm>
-            <a:off x="1371600" y="2240280"/>
-            <a:ext cx="9418320" cy="640080"/>
-          </a:xfrm>
-          <a:prstGeom prst="rect">
-            <a:avLst/>
-          </a:prstGeom>
-          <a:noFill/>
-        </p:spPr>
-        <p:txBody>
-          <a:bodyPr wrap="square" anchor="t">
-            <a:spAutoFit/>
-          </a:bodyPr>
-          <a:lstStyle/>
-          <a:p>
-            <a:pPr algn="l"/>
-            <a:r>
-              <a:rPr sz="2800" b="1" i="0">
-                <a:solidFill>
-                  <a:srgbClr val="1F3A5F"/>
-                </a:solidFill>
-                <a:latin typeface="Arial"/>
-              </a:rPr>
-              <a:t>ENERGY  →  CHANGE  →  EVIDENCE</a:t>
-            </a:r>
-          </a:p>
-        </p:txBody>
-      </p:sp>
-      <p:sp>
-        <p:nvSpPr>
-          <p:cNvPr id="8" name="TextBox 7"/>
-          <p:cNvSpPr txBox="1"/>
-          <p:nvPr/>
-        </p:nvSpPr>
-        <p:spPr>
-          <a:xfrm>
-            <a:off x="1371600" y="3017520"/>
-            <a:ext cx="9418320" cy="457200"/>
-          </a:xfrm>
-          <a:prstGeom prst="rect">
-            <a:avLst/>
-          </a:prstGeom>
-          <a:noFill/>
-        </p:spPr>
-        <p:txBody>
-          <a:bodyPr wrap="square" anchor="t">
-            <a:spAutoFit/>
-          </a:bodyPr>
-          <a:lstStyle/>
-          <a:p>
-            <a:pPr algn="l"/>
-            <a:r>
-              <a:rPr sz="1600" b="0" i="1">
-                <a:solidFill>
-                  <a:srgbClr val="555555"/>
-                </a:solidFill>
-                <a:latin typeface="Arial"/>
-              </a:rPr>
-              <a:t>REVEAL → the chain</a:t>
-            </a:r>
-          </a:p>
-        </p:txBody>
-      </p:sp>
-      <p:sp>
-        <p:nvSpPr>
-          <p:cNvPr id="9" name="Rounded Rectangle 8"/>
+          <p:cNvPr id="6" name="Rounded Rectangle 5"/>
           <p:cNvSpPr/>
           <p:nvPr/>
         </p:nvSpPr>
         <p:spPr>
           <a:xfrm>
-            <a:off x="1097280" y="4206240"/>
-            <a:ext cx="9966960" cy="1828800"/>
+            <a:off x="4754880" y="2377440"/>
+            <a:ext cx="2743200" cy="1371600"/>
           </a:xfrm>
           <a:prstGeom prst="roundRect">
             <a:avLst/>
           </a:prstGeom>
           <a:solidFill>
-            <a:srgbClr val="2E6B3F"/>
+            <a:srgbClr val="E8EDF4"/>
           </a:solidFill>
           <a:ln>
             <a:noFill/>
@@ -8799,19 +8767,123 @@
           <a:lstStyle/>
           <a:p>
             <a:pPr algn="ctr"/>
-          </a:p>
-        </p:txBody>
-      </p:sp>
-      <p:sp>
-        <p:nvSpPr>
-          <p:cNvPr id="10" name="TextBox 9"/>
+            <a:r>
+              <a:rPr sz="3000" b="1">
+                <a:solidFill>
+                  <a:srgbClr val="1F3A5F"/>
+                </a:solidFill>
+                <a:latin typeface="Arial"/>
+              </a:rPr>
+              <a:t>CHANGE</a:t>
+            </a:r>
+          </a:p>
+        </p:txBody>
+      </p:sp>
+      <p:sp>
+        <p:nvSpPr>
+          <p:cNvPr id="7" name="Right Arrow 6"/>
+          <p:cNvSpPr/>
+          <p:nvPr/>
+        </p:nvSpPr>
+        <p:spPr>
+          <a:xfrm>
+            <a:off x="7589520" y="2743200"/>
+            <a:ext cx="1005840" cy="640080"/>
+          </a:xfrm>
+          <a:prstGeom prst="rightArrow">
+            <a:avLst/>
+          </a:prstGeom>
+          <a:solidFill>
+            <a:srgbClr val="C05014"/>
+          </a:solidFill>
+          <a:ln>
+            <a:noFill/>
+          </a:ln>
+        </p:spPr>
+        <p:style>
+          <a:lnRef idx="1">
+            <a:schemeClr val="accent1"/>
+          </a:lnRef>
+          <a:fillRef idx="3">
+            <a:schemeClr val="accent1"/>
+          </a:fillRef>
+          <a:effectRef idx="2">
+            <a:schemeClr val="accent1"/>
+          </a:effectRef>
+          <a:fontRef idx="minor">
+            <a:schemeClr val="lt1"/>
+          </a:fontRef>
+        </p:style>
+        <p:txBody>
+          <a:bodyPr rtlCol="0" anchor="ctr"/>
+          <a:lstStyle/>
+          <a:p>
+            <a:pPr algn="ctr"/>
+          </a:p>
+        </p:txBody>
+      </p:sp>
+      <p:sp>
+        <p:nvSpPr>
+          <p:cNvPr id="8" name="Rounded Rectangle 7"/>
+          <p:cNvSpPr/>
+          <p:nvPr/>
+        </p:nvSpPr>
+        <p:spPr>
+          <a:xfrm>
+            <a:off x="8686800" y="2377440"/>
+            <a:ext cx="2743200" cy="1371600"/>
+          </a:xfrm>
+          <a:prstGeom prst="roundRect">
+            <a:avLst/>
+          </a:prstGeom>
+          <a:solidFill>
+            <a:srgbClr val="2E6B3F"/>
+          </a:solidFill>
+          <a:ln>
+            <a:noFill/>
+          </a:ln>
+        </p:spPr>
+        <p:style>
+          <a:lnRef idx="1">
+            <a:schemeClr val="accent1"/>
+          </a:lnRef>
+          <a:fillRef idx="3">
+            <a:schemeClr val="accent1"/>
+          </a:fillRef>
+          <a:effectRef idx="2">
+            <a:schemeClr val="accent1"/>
+          </a:effectRef>
+          <a:fontRef idx="minor">
+            <a:schemeClr val="lt1"/>
+          </a:fontRef>
+        </p:style>
+        <p:txBody>
+          <a:bodyPr rtlCol="0" anchor="ctr" wrap="square"/>
+          <a:lstStyle/>
+          <a:p>
+            <a:pPr algn="ctr"/>
+            <a:r>
+              <a:rPr sz="3000" b="1">
+                <a:solidFill>
+                  <a:srgbClr val="FFFFFF"/>
+                </a:solidFill>
+                <a:latin typeface="Arial"/>
+              </a:rPr>
+              <a:t>EVIDENCE</a:t>
+            </a:r>
+          </a:p>
+        </p:txBody>
+      </p:sp>
+      <p:sp>
+        <p:nvSpPr>
+          <p:cNvPr id="9" name="TextBox 8"/>
           <p:cNvSpPr txBox="1"/>
           <p:nvPr/>
         </p:nvSpPr>
         <p:spPr>
           <a:xfrm>
-            <a:off x="1371600" y="4297679"/>
-            <a:ext cx="9418320" cy="457200"/>
+            <a:off x="822960" y="4572000"/>
+            <a:ext cx="10515600" cy="822960"/>
           </a:xfrm>
           <a:prstGeom prst="rect">
             <a:avLst/>
@@ -8824,29 +8896,29 @@
           </a:bodyPr>
           <a:lstStyle/>
           <a:p>
-            <a:pPr algn="l"/>
-            <a:r>
-              <a:rPr sz="1600" b="1" i="0">
-                <a:solidFill>
-                  <a:srgbClr val="FFFFFF"/>
-                </a:solidFill>
-                <a:latin typeface="Arial"/>
-              </a:rPr>
-              <a:t>DRAWING IDEAS (draw YOUR example):</a:t>
-            </a:r>
-          </a:p>
-        </p:txBody>
-      </p:sp>
-      <p:sp>
-        <p:nvSpPr>
-          <p:cNvPr id="11" name="TextBox 10"/>
+            <a:pPr algn="ctr"/>
+            <a:r>
+              <a:rPr sz="2600" b="1">
+                <a:solidFill>
+                  <a:srgbClr val="1F3A5F"/>
+                </a:solidFill>
+                <a:latin typeface="Arial"/>
+              </a:rPr>
+              <a:t>Energy causes a change. The change is our evidence.</a:t>
+            </a:r>
+          </a:p>
+        </p:txBody>
+      </p:sp>
+      <p:sp>
+        <p:nvSpPr>
+          <p:cNvPr id="10" name="TextBox 9"/>
           <p:cNvSpPr txBox="1"/>
           <p:nvPr/>
         </p:nvSpPr>
         <p:spPr>
           <a:xfrm>
-            <a:off x="1463040" y="4754879"/>
-            <a:ext cx="9418320" cy="411480"/>
+            <a:off x="11338560" y="6446520"/>
+            <a:ext cx="731520" cy="365760"/>
           </a:xfrm>
           <a:prstGeom prst="rect">
             <a:avLst/>
@@ -8859,50 +8931,15 @@
           </a:bodyPr>
           <a:lstStyle/>
           <a:p>
-            <a:pPr algn="l"/>
-            <a:r>
-              <a:rPr sz="1800" b="0" i="0">
-                <a:solidFill>
-                  <a:srgbClr val="FFFFFF"/>
-                </a:solidFill>
-                <a:latin typeface="Arial"/>
-              </a:rPr>
-              <a:t>•  draw a before/after example</a:t>
-            </a:r>
-          </a:p>
-        </p:txBody>
-      </p:sp>
-      <p:sp>
-        <p:nvSpPr>
-          <p:cNvPr id="12" name="TextBox 11"/>
-          <p:cNvSpPr txBox="1"/>
-          <p:nvPr/>
-        </p:nvSpPr>
-        <p:spPr>
-          <a:xfrm>
-            <a:off x="1463040" y="5166359"/>
-            <a:ext cx="9418320" cy="411480"/>
-          </a:xfrm>
-          <a:prstGeom prst="rect">
-            <a:avLst/>
-          </a:prstGeom>
-          <a:noFill/>
-        </p:spPr>
-        <p:txBody>
-          <a:bodyPr wrap="square" anchor="t">
-            <a:spAutoFit/>
-          </a:bodyPr>
-          <a:lstStyle/>
-          <a:p>
-            <a:pPr algn="l"/>
-            <a:r>
-              <a:rPr sz="1800" b="0" i="0">
-                <a:solidFill>
-                  <a:srgbClr val="FFFFFF"/>
-                </a:solidFill>
-                <a:latin typeface="Arial"/>
-              </a:rPr>
-              <a:t>•  add arrows to show the change</a:t>
+            <a:pPr algn="r"/>
+            <a:r>
+              <a:rPr sz="1200" b="0">
+                <a:solidFill>
+                  <a:srgbClr val="555555"/>
+                </a:solidFill>
+                <a:latin typeface="Arial"/>
+              </a:rPr>
+              <a:t>21</a:t>
             </a:r>
           </a:p>
         </p:txBody>
@@ -8977,7 +9014,7 @@
         <p:spPr>
           <a:xfrm>
             <a:off x="457200" y="146304"/>
-            <a:ext cx="10058400" cy="777240"/>
+            <a:ext cx="11247120" cy="777240"/>
           </a:xfrm>
           <a:prstGeom prst="rect">
             <a:avLst/>
@@ -8992,13 +9029,13 @@
           <a:p>
             <a:pPr algn="l"/>
             <a:r>
-              <a:rPr sz="3400" b="1" i="0">
+              <a:rPr sz="3400" b="1">
                 <a:solidFill>
                   <a:srgbClr val="FFFFFF"/>
                 </a:solidFill>
                 <a:latin typeface="Arial"/>
               </a:rPr>
-              <a:t>Notebook — Stored Energy</a:t>
+              <a:t>Exit ticket</a:t>
             </a:r>
           </a:p>
         </p:txBody>
@@ -9011,14 +9048,14 @@
         </p:nvSpPr>
         <p:spPr>
           <a:xfrm>
-            <a:off x="9692640" y="256032"/>
-            <a:ext cx="2103120" cy="548640"/>
+            <a:off x="1097280" y="2377440"/>
+            <a:ext cx="9966960" cy="1828800"/>
           </a:xfrm>
           <a:prstGeom prst="roundRect">
             <a:avLst/>
           </a:prstGeom>
           <a:solidFill>
-            <a:srgbClr val="C05014"/>
+            <a:srgbClr val="E8EDF4"/>
           </a:solidFill>
           <a:ln>
             <a:noFill/>
@@ -9044,70 +9081,27 @@
           <a:p>
             <a:pPr algn="ctr"/>
             <a:r>
-              <a:rPr sz="1800" b="1">
-                <a:solidFill>
-                  <a:srgbClr val="FFFFFF"/>
-                </a:solidFill>
-                <a:latin typeface="Arial"/>
-              </a:rPr>
-              <a:t>NOTEBOOK</a:t>
-            </a:r>
-          </a:p>
-        </p:txBody>
-      </p:sp>
-      <p:sp>
-        <p:nvSpPr>
-          <p:cNvPr id="5" name="Rounded Rectangle 4"/>
-          <p:cNvSpPr/>
-          <p:nvPr/>
-        </p:nvSpPr>
-        <p:spPr>
-          <a:xfrm>
-            <a:off x="1097280" y="1737360"/>
-            <a:ext cx="9966960" cy="1234440"/>
-          </a:xfrm>
-          <a:prstGeom prst="roundRect">
-            <a:avLst/>
-          </a:prstGeom>
-          <a:solidFill>
-            <a:srgbClr val="E8EDF4"/>
-          </a:solidFill>
-          <a:ln>
-            <a:noFill/>
-          </a:ln>
-        </p:spPr>
-        <p:style>
-          <a:lnRef idx="1">
-            <a:schemeClr val="accent1"/>
-          </a:lnRef>
-          <a:fillRef idx="3">
-            <a:schemeClr val="accent1"/>
-          </a:fillRef>
-          <a:effectRef idx="2">
-            <a:schemeClr val="accent1"/>
-          </a:effectRef>
-          <a:fontRef idx="minor">
-            <a:schemeClr val="lt1"/>
-          </a:fontRef>
-        </p:style>
-        <p:txBody>
-          <a:bodyPr rtlCol="0" anchor="ctr" wrap="square"/>
-          <a:lstStyle/>
-          <a:p>
-            <a:pPr algn="ctr"/>
-          </a:p>
-        </p:txBody>
-      </p:sp>
-      <p:sp>
-        <p:nvSpPr>
-          <p:cNvPr id="6" name="TextBox 5"/>
+              <a:rPr sz="3000" b="1">
+                <a:solidFill>
+                  <a:srgbClr val="1F3A5F"/>
+                </a:solidFill>
+                <a:latin typeface="Arial"/>
+              </a:rPr>
+              <a:t>Name one change you saw this week, and the energy that caused it.</a:t>
+            </a:r>
+          </a:p>
+        </p:txBody>
+      </p:sp>
+      <p:sp>
+        <p:nvSpPr>
+          <p:cNvPr id="5" name="TextBox 4"/>
           <p:cNvSpPr txBox="1"/>
           <p:nvPr/>
         </p:nvSpPr>
         <p:spPr>
           <a:xfrm>
-            <a:off x="1371600" y="1828800"/>
-            <a:ext cx="9418320" cy="457200"/>
+            <a:off x="11338560" y="6446520"/>
+            <a:ext cx="731520" cy="365760"/>
           </a:xfrm>
           <a:prstGeom prst="rect">
             <a:avLst/>
@@ -9120,268 +9114,15 @@
           </a:bodyPr>
           <a:lstStyle/>
           <a:p>
-            <a:pPr algn="l"/>
-            <a:r>
-              <a:rPr sz="1600" b="1" i="0">
-                <a:solidFill>
-                  <a:srgbClr val="C05014"/>
-                </a:solidFill>
-                <a:latin typeface="Arial"/>
-              </a:rPr>
-              <a:t>WRITE:</a:t>
-            </a:r>
-          </a:p>
-        </p:txBody>
-      </p:sp>
-      <p:sp>
-        <p:nvSpPr>
-          <p:cNvPr id="7" name="TextBox 6"/>
-          <p:cNvSpPr txBox="1"/>
-          <p:nvPr/>
-        </p:nvSpPr>
-        <p:spPr>
-          <a:xfrm>
-            <a:off x="1371600" y="2240280"/>
-            <a:ext cx="9418320" cy="640080"/>
-          </a:xfrm>
-          <a:prstGeom prst="rect">
-            <a:avLst/>
-          </a:prstGeom>
-          <a:noFill/>
-        </p:spPr>
-        <p:txBody>
-          <a:bodyPr wrap="square" anchor="t">
-            <a:spAutoFit/>
-          </a:bodyPr>
-          <a:lstStyle/>
-          <a:p>
-            <a:pPr algn="l"/>
-            <a:r>
-              <a:rPr sz="2800" b="1" i="0">
-                <a:solidFill>
-                  <a:srgbClr val="1F3A5F"/>
-                </a:solidFill>
-                <a:latin typeface="Arial"/>
-              </a:rPr>
-              <a:t>Stored energy can cause a change later.</a:t>
-            </a:r>
-          </a:p>
-        </p:txBody>
-      </p:sp>
-      <p:sp>
-        <p:nvSpPr>
-          <p:cNvPr id="8" name="TextBox 7"/>
-          <p:cNvSpPr txBox="1"/>
-          <p:nvPr/>
-        </p:nvSpPr>
-        <p:spPr>
-          <a:xfrm>
-            <a:off x="1371600" y="3017520"/>
-            <a:ext cx="9418320" cy="457200"/>
-          </a:xfrm>
-          <a:prstGeom prst="rect">
-            <a:avLst/>
-          </a:prstGeom>
-          <a:noFill/>
-        </p:spPr>
-        <p:txBody>
-          <a:bodyPr wrap="square" anchor="t">
-            <a:spAutoFit/>
-          </a:bodyPr>
-          <a:lstStyle/>
-          <a:p>
-            <a:pPr algn="l"/>
-            <a:r>
-              <a:rPr sz="1600" b="0" i="1">
+            <a:pPr algn="r"/>
+            <a:r>
+              <a:rPr sz="1200" b="0">
                 <a:solidFill>
                   <a:srgbClr val="555555"/>
                 </a:solidFill>
                 <a:latin typeface="Arial"/>
               </a:rPr>
-              <a:t>REVEAL → LATER</a:t>
-            </a:r>
-          </a:p>
-        </p:txBody>
-      </p:sp>
-      <p:sp>
-        <p:nvSpPr>
-          <p:cNvPr id="9" name="Rounded Rectangle 8"/>
-          <p:cNvSpPr/>
-          <p:nvPr/>
-        </p:nvSpPr>
-        <p:spPr>
-          <a:xfrm>
-            <a:off x="1097280" y="4206240"/>
-            <a:ext cx="9966960" cy="1828800"/>
-          </a:xfrm>
-          <a:prstGeom prst="roundRect">
-            <a:avLst/>
-          </a:prstGeom>
-          <a:solidFill>
-            <a:srgbClr val="2E6B3F"/>
-          </a:solidFill>
-          <a:ln>
-            <a:noFill/>
-          </a:ln>
-        </p:spPr>
-        <p:style>
-          <a:lnRef idx="1">
-            <a:schemeClr val="accent1"/>
-          </a:lnRef>
-          <a:fillRef idx="3">
-            <a:schemeClr val="accent1"/>
-          </a:fillRef>
-          <a:effectRef idx="2">
-            <a:schemeClr val="accent1"/>
-          </a:effectRef>
-          <a:fontRef idx="minor">
-            <a:schemeClr val="lt1"/>
-          </a:fontRef>
-        </p:style>
-        <p:txBody>
-          <a:bodyPr rtlCol="0" anchor="ctr" wrap="square"/>
-          <a:lstStyle/>
-          <a:p>
-            <a:pPr algn="ctr"/>
-          </a:p>
-        </p:txBody>
-      </p:sp>
-      <p:sp>
-        <p:nvSpPr>
-          <p:cNvPr id="10" name="TextBox 9"/>
-          <p:cNvSpPr txBox="1"/>
-          <p:nvPr/>
-        </p:nvSpPr>
-        <p:spPr>
-          <a:xfrm>
-            <a:off x="1371600" y="4297679"/>
-            <a:ext cx="9418320" cy="457200"/>
-          </a:xfrm>
-          <a:prstGeom prst="rect">
-            <a:avLst/>
-          </a:prstGeom>
-          <a:noFill/>
-        </p:spPr>
-        <p:txBody>
-          <a:bodyPr wrap="square" anchor="t">
-            <a:spAutoFit/>
-          </a:bodyPr>
-          <a:lstStyle/>
-          <a:p>
-            <a:pPr algn="l"/>
-            <a:r>
-              <a:rPr sz="1600" b="1" i="0">
-                <a:solidFill>
-                  <a:srgbClr val="FFFFFF"/>
-                </a:solidFill>
-                <a:latin typeface="Arial"/>
-              </a:rPr>
-              <a:t>DRAWING IDEAS (draw YOUR example):</a:t>
-            </a:r>
-          </a:p>
-        </p:txBody>
-      </p:sp>
-      <p:sp>
-        <p:nvSpPr>
-          <p:cNvPr id="11" name="TextBox 10"/>
-          <p:cNvSpPr txBox="1"/>
-          <p:nvPr/>
-        </p:nvSpPr>
-        <p:spPr>
-          <a:xfrm>
-            <a:off x="1463040" y="4754879"/>
-            <a:ext cx="9418320" cy="411480"/>
-          </a:xfrm>
-          <a:prstGeom prst="rect">
-            <a:avLst/>
-          </a:prstGeom>
-          <a:noFill/>
-        </p:spPr>
-        <p:txBody>
-          <a:bodyPr wrap="square" anchor="t">
-            <a:spAutoFit/>
-          </a:bodyPr>
-          <a:lstStyle/>
-          <a:p>
-            <a:pPr algn="l"/>
-            <a:r>
-              <a:rPr sz="1800" b="0" i="0">
-                <a:solidFill>
-                  <a:srgbClr val="FFFFFF"/>
-                </a:solidFill>
-                <a:latin typeface="Arial"/>
-              </a:rPr>
-              <a:t>•  a battery in a flashlight</a:t>
-            </a:r>
-          </a:p>
-        </p:txBody>
-      </p:sp>
-      <p:sp>
-        <p:nvSpPr>
-          <p:cNvPr id="12" name="TextBox 11"/>
-          <p:cNvSpPr txBox="1"/>
-          <p:nvPr/>
-        </p:nvSpPr>
-        <p:spPr>
-          <a:xfrm>
-            <a:off x="1463040" y="5166359"/>
-            <a:ext cx="9418320" cy="411480"/>
-          </a:xfrm>
-          <a:prstGeom prst="rect">
-            <a:avLst/>
-          </a:prstGeom>
-          <a:noFill/>
-        </p:spPr>
-        <p:txBody>
-          <a:bodyPr wrap="square" anchor="t">
-            <a:spAutoFit/>
-          </a:bodyPr>
-          <a:lstStyle/>
-          <a:p>
-            <a:pPr algn="l"/>
-            <a:r>
-              <a:rPr sz="1800" b="0" i="0">
-                <a:solidFill>
-                  <a:srgbClr val="FFFFFF"/>
-                </a:solidFill>
-                <a:latin typeface="Arial"/>
-              </a:rPr>
-              <a:t>•  a stretched rubber band</a:t>
-            </a:r>
-          </a:p>
-        </p:txBody>
-      </p:sp>
-      <p:sp>
-        <p:nvSpPr>
-          <p:cNvPr id="13" name="TextBox 12"/>
-          <p:cNvSpPr txBox="1"/>
-          <p:nvPr/>
-        </p:nvSpPr>
-        <p:spPr>
-          <a:xfrm>
-            <a:off x="1463040" y="5577840"/>
-            <a:ext cx="9418320" cy="411480"/>
-          </a:xfrm>
-          <a:prstGeom prst="rect">
-            <a:avLst/>
-          </a:prstGeom>
-          <a:noFill/>
-        </p:spPr>
-        <p:txBody>
-          <a:bodyPr wrap="square" anchor="t">
-            <a:spAutoFit/>
-          </a:bodyPr>
-          <a:lstStyle/>
-          <a:p>
-            <a:pPr algn="l"/>
-            <a:r>
-              <a:rPr sz="1800" b="0" i="0">
-                <a:solidFill>
-                  <a:srgbClr val="FFFFFF"/>
-                </a:solidFill>
-                <a:latin typeface="Arial"/>
-              </a:rPr>
-              <a:t>•  a raised object (apple/book)</a:t>
+              <a:t>22</a:t>
             </a:r>
           </a:p>
         </p:txBody>
@@ -10414,7 +10155,7 @@
         <p:spPr>
           <a:xfrm>
             <a:off x="457200" y="146304"/>
-            <a:ext cx="11247120" cy="777240"/>
+            <a:ext cx="10058400" cy="777240"/>
           </a:xfrm>
           <a:prstGeom prst="rect">
             <a:avLst/>
@@ -10429,13 +10170,13 @@
           <a:p>
             <a:pPr algn="l"/>
             <a:r>
-              <a:rPr sz="3400" b="1">
+              <a:rPr sz="3400" b="1" i="0">
                 <a:solidFill>
                   <a:srgbClr val="FFFFFF"/>
                 </a:solidFill>
                 <a:latin typeface="Arial"/>
               </a:rPr>
-              <a:t>Change is evidence of energy</a:t>
+              <a:t>Notes — Energy</a:t>
             </a:r>
           </a:p>
         </p:txBody>
@@ -10448,8 +10189,8 @@
         </p:nvSpPr>
         <p:spPr>
           <a:xfrm>
-            <a:off x="822960" y="2468880"/>
-            <a:ext cx="2743200" cy="1371600"/>
+            <a:off x="9692640" y="256032"/>
+            <a:ext cx="2103120" cy="548640"/>
           </a:xfrm>
           <a:prstGeom prst="roundRect">
             <a:avLst/>
@@ -10481,33 +10222,33 @@
           <a:p>
             <a:pPr algn="ctr"/>
             <a:r>
-              <a:rPr sz="3000" b="1">
+              <a:rPr sz="1800" b="1">
                 <a:solidFill>
                   <a:srgbClr val="FFFFFF"/>
                 </a:solidFill>
                 <a:latin typeface="Arial"/>
               </a:rPr>
-              <a:t>ENERGY</a:t>
-            </a:r>
-          </a:p>
-        </p:txBody>
-      </p:sp>
-      <p:sp>
-        <p:nvSpPr>
-          <p:cNvPr id="5" name="Right Arrow 4"/>
+              <a:t>NOTES</a:t>
+            </a:r>
+          </a:p>
+        </p:txBody>
+      </p:sp>
+      <p:sp>
+        <p:nvSpPr>
+          <p:cNvPr id="5" name="Rounded Rectangle 4"/>
           <p:cNvSpPr/>
           <p:nvPr/>
         </p:nvSpPr>
         <p:spPr>
           <a:xfrm>
-            <a:off x="3657600" y="2834640"/>
-            <a:ext cx="1005840" cy="640080"/>
-          </a:xfrm>
-          <a:prstGeom prst="rightArrow">
-            <a:avLst/>
-          </a:prstGeom>
-          <a:solidFill>
-            <a:srgbClr val="C05014"/>
+            <a:off x="1097280" y="1737360"/>
+            <a:ext cx="9966960" cy="1234440"/>
+          </a:xfrm>
+          <a:prstGeom prst="roundRect">
+            <a:avLst/>
+          </a:prstGeom>
+          <a:solidFill>
+            <a:srgbClr val="E8EDF4"/>
           </a:solidFill>
           <a:ln>
             <a:noFill/>
@@ -10528,7 +10269,7 @@
           </a:fontRef>
         </p:style>
         <p:txBody>
-          <a:bodyPr rtlCol="0" anchor="ctr"/>
+          <a:bodyPr rtlCol="0" anchor="ctr" wrap="square"/>
           <a:lstStyle/>
           <a:p>
             <a:pPr algn="ctr"/>
@@ -10537,20 +10278,125 @@
       </p:sp>
       <p:sp>
         <p:nvSpPr>
-          <p:cNvPr id="6" name="Rounded Rectangle 5"/>
+          <p:cNvPr id="6" name="TextBox 5"/>
+          <p:cNvSpPr txBox="1"/>
+          <p:nvPr/>
+        </p:nvSpPr>
+        <p:spPr>
+          <a:xfrm>
+            <a:off x="1371600" y="1828800"/>
+            <a:ext cx="9418320" cy="457200"/>
+          </a:xfrm>
+          <a:prstGeom prst="rect">
+            <a:avLst/>
+          </a:prstGeom>
+          <a:noFill/>
+        </p:spPr>
+        <p:txBody>
+          <a:bodyPr wrap="square" anchor="t">
+            <a:spAutoFit/>
+          </a:bodyPr>
+          <a:lstStyle/>
+          <a:p>
+            <a:pPr algn="l"/>
+            <a:r>
+              <a:rPr sz="1600" b="1" i="0">
+                <a:solidFill>
+                  <a:srgbClr val="C05014"/>
+                </a:solidFill>
+                <a:latin typeface="Arial"/>
+              </a:rPr>
+              <a:t>WRITE:</a:t>
+            </a:r>
+          </a:p>
+        </p:txBody>
+      </p:sp>
+      <p:sp>
+        <p:nvSpPr>
+          <p:cNvPr id="7" name="TextBox 6"/>
+          <p:cNvSpPr txBox="1"/>
+          <p:nvPr/>
+        </p:nvSpPr>
+        <p:spPr>
+          <a:xfrm>
+            <a:off x="1371600" y="2240280"/>
+            <a:ext cx="9418320" cy="640080"/>
+          </a:xfrm>
+          <a:prstGeom prst="rect">
+            <a:avLst/>
+          </a:prstGeom>
+          <a:noFill/>
+        </p:spPr>
+        <p:txBody>
+          <a:bodyPr wrap="square" anchor="t">
+            <a:spAutoFit/>
+          </a:bodyPr>
+          <a:lstStyle/>
+          <a:p>
+            <a:pPr algn="l"/>
+            <a:r>
+              <a:rPr sz="2800" b="1" i="0">
+                <a:solidFill>
+                  <a:srgbClr val="1F3A5F"/>
+                </a:solidFill>
+                <a:latin typeface="Arial"/>
+              </a:rPr>
+              <a:t>Energy is the ability to cause change.</a:t>
+            </a:r>
+          </a:p>
+        </p:txBody>
+      </p:sp>
+      <p:sp>
+        <p:nvSpPr>
+          <p:cNvPr id="8" name="TextBox 7"/>
+          <p:cNvSpPr txBox="1"/>
+          <p:nvPr/>
+        </p:nvSpPr>
+        <p:spPr>
+          <a:xfrm>
+            <a:off x="1371600" y="3017520"/>
+            <a:ext cx="9418320" cy="457200"/>
+          </a:xfrm>
+          <a:prstGeom prst="rect">
+            <a:avLst/>
+          </a:prstGeom>
+          <a:noFill/>
+        </p:spPr>
+        <p:txBody>
+          <a:bodyPr wrap="square" anchor="t">
+            <a:spAutoFit/>
+          </a:bodyPr>
+          <a:lstStyle/>
+          <a:p>
+            <a:pPr algn="l"/>
+            <a:r>
+              <a:rPr sz="1600" b="0" i="1">
+                <a:solidFill>
+                  <a:srgbClr val="555555"/>
+                </a:solidFill>
+                <a:latin typeface="Arial"/>
+              </a:rPr>
+              <a:t>REVEAL → CHANGE</a:t>
+            </a:r>
+          </a:p>
+        </p:txBody>
+      </p:sp>
+      <p:sp>
+        <p:nvSpPr>
+          <p:cNvPr id="9" name="Rounded Rectangle 8"/>
           <p:cNvSpPr/>
           <p:nvPr/>
         </p:nvSpPr>
         <p:spPr>
           <a:xfrm>
-            <a:off x="4754880" y="2468880"/>
-            <a:ext cx="2743200" cy="1371600"/>
+            <a:off x="1097280" y="4206240"/>
+            <a:ext cx="9966960" cy="1828800"/>
           </a:xfrm>
           <a:prstGeom prst="roundRect">
             <a:avLst/>
           </a:prstGeom>
           <a:solidFill>
-            <a:srgbClr val="E8EDF4"/>
+            <a:srgbClr val="2E6B3F"/>
           </a:solidFill>
           <a:ln>
             <a:noFill/>
@@ -10575,123 +10421,19 @@
           <a:lstStyle/>
           <a:p>
             <a:pPr algn="ctr"/>
-            <a:r>
-              <a:rPr sz="3000" b="1">
-                <a:solidFill>
-                  <a:srgbClr val="1F3A5F"/>
-                </a:solidFill>
-                <a:latin typeface="Arial"/>
-              </a:rPr>
-              <a:t>CHANGE</a:t>
-            </a:r>
-          </a:p>
-        </p:txBody>
-      </p:sp>
-      <p:sp>
-        <p:nvSpPr>
-          <p:cNvPr id="7" name="Right Arrow 6"/>
-          <p:cNvSpPr/>
-          <p:nvPr/>
-        </p:nvSpPr>
-        <p:spPr>
-          <a:xfrm>
-            <a:off x="7589520" y="2834640"/>
-            <a:ext cx="1005840" cy="640080"/>
-          </a:xfrm>
-          <a:prstGeom prst="rightArrow">
-            <a:avLst/>
-          </a:prstGeom>
-          <a:solidFill>
-            <a:srgbClr val="C05014"/>
-          </a:solidFill>
-          <a:ln>
-            <a:noFill/>
-          </a:ln>
-        </p:spPr>
-        <p:style>
-          <a:lnRef idx="1">
-            <a:schemeClr val="accent1"/>
-          </a:lnRef>
-          <a:fillRef idx="3">
-            <a:schemeClr val="accent1"/>
-          </a:fillRef>
-          <a:effectRef idx="2">
-            <a:schemeClr val="accent1"/>
-          </a:effectRef>
-          <a:fontRef idx="minor">
-            <a:schemeClr val="lt1"/>
-          </a:fontRef>
-        </p:style>
-        <p:txBody>
-          <a:bodyPr rtlCol="0" anchor="ctr"/>
-          <a:lstStyle/>
-          <a:p>
-            <a:pPr algn="ctr"/>
-          </a:p>
-        </p:txBody>
-      </p:sp>
-      <p:sp>
-        <p:nvSpPr>
-          <p:cNvPr id="8" name="Rounded Rectangle 7"/>
-          <p:cNvSpPr/>
-          <p:nvPr/>
-        </p:nvSpPr>
-        <p:spPr>
-          <a:xfrm>
-            <a:off x="8686800" y="2468880"/>
-            <a:ext cx="2743200" cy="1371600"/>
-          </a:xfrm>
-          <a:prstGeom prst="roundRect">
-            <a:avLst/>
-          </a:prstGeom>
-          <a:solidFill>
-            <a:srgbClr val="2E6B3F"/>
-          </a:solidFill>
-          <a:ln>
-            <a:noFill/>
-          </a:ln>
-        </p:spPr>
-        <p:style>
-          <a:lnRef idx="1">
-            <a:schemeClr val="accent1"/>
-          </a:lnRef>
-          <a:fillRef idx="3">
-            <a:schemeClr val="accent1"/>
-          </a:fillRef>
-          <a:effectRef idx="2">
-            <a:schemeClr val="accent1"/>
-          </a:effectRef>
-          <a:fontRef idx="minor">
-            <a:schemeClr val="lt1"/>
-          </a:fontRef>
-        </p:style>
-        <p:txBody>
-          <a:bodyPr rtlCol="0" anchor="ctr" wrap="square"/>
-          <a:lstStyle/>
-          <a:p>
-            <a:pPr algn="ctr"/>
-            <a:r>
-              <a:rPr sz="3000" b="1">
-                <a:solidFill>
-                  <a:srgbClr val="FFFFFF"/>
-                </a:solidFill>
-                <a:latin typeface="Arial"/>
-              </a:rPr>
-              <a:t>EVIDENCE</a:t>
-            </a:r>
-          </a:p>
-        </p:txBody>
-      </p:sp>
-      <p:sp>
-        <p:nvSpPr>
-          <p:cNvPr id="9" name="TextBox 8"/>
+          </a:p>
+        </p:txBody>
+      </p:sp>
+      <p:sp>
+        <p:nvSpPr>
+          <p:cNvPr id="10" name="TextBox 9"/>
           <p:cNvSpPr txBox="1"/>
           <p:nvPr/>
         </p:nvSpPr>
         <p:spPr>
           <a:xfrm>
-            <a:off x="822960" y="4572000"/>
-            <a:ext cx="10515600" cy="914400"/>
+            <a:off x="1371600" y="4297679"/>
+            <a:ext cx="9418320" cy="457200"/>
           </a:xfrm>
           <a:prstGeom prst="rect">
             <a:avLst/>
@@ -10704,29 +10446,29 @@
           </a:bodyPr>
           <a:lstStyle/>
           <a:p>
-            <a:pPr algn="ctr"/>
-            <a:r>
-              <a:rPr sz="2600" b="1">
-                <a:solidFill>
-                  <a:srgbClr val="1F3A5F"/>
-                </a:solidFill>
-                <a:latin typeface="Arial"/>
-              </a:rPr>
-              <a:t>When you see a change, that change is evidence that energy was there.</a:t>
-            </a:r>
-          </a:p>
-        </p:txBody>
-      </p:sp>
-      <p:sp>
-        <p:nvSpPr>
-          <p:cNvPr id="10" name="TextBox 9"/>
+            <a:pPr algn="l"/>
+            <a:r>
+              <a:rPr sz="1600" b="1" i="0">
+                <a:solidFill>
+                  <a:srgbClr val="FFFFFF"/>
+                </a:solidFill>
+                <a:latin typeface="Arial"/>
+              </a:rPr>
+              <a:t>DRAWING IDEAS (draw YOUR example):</a:t>
+            </a:r>
+          </a:p>
+        </p:txBody>
+      </p:sp>
+      <p:sp>
+        <p:nvSpPr>
+          <p:cNvPr id="11" name="TextBox 10"/>
           <p:cNvSpPr txBox="1"/>
           <p:nvPr/>
         </p:nvSpPr>
         <p:spPr>
           <a:xfrm>
-            <a:off x="11338560" y="6446520"/>
-            <a:ext cx="731520" cy="365760"/>
+            <a:off x="1463040" y="4754879"/>
+            <a:ext cx="9418320" cy="411480"/>
           </a:xfrm>
           <a:prstGeom prst="rect">
             <a:avLst/>
@@ -10739,15 +10481,85 @@
           </a:bodyPr>
           <a:lstStyle/>
           <a:p>
-            <a:pPr algn="r"/>
-            <a:r>
-              <a:rPr sz="1200" b="0">
-                <a:solidFill>
-                  <a:srgbClr val="555555"/>
-                </a:solidFill>
-                <a:latin typeface="Arial"/>
-              </a:rPr>
-              <a:t>7</a:t>
+            <a:pPr algn="l"/>
+            <a:r>
+              <a:rPr sz="1800" b="0" i="0">
+                <a:solidFill>
+                  <a:srgbClr val="FFFFFF"/>
+                </a:solidFill>
+                <a:latin typeface="Arial"/>
+              </a:rPr>
+              <a:t>•  a flashlight turning on</a:t>
+            </a:r>
+          </a:p>
+        </p:txBody>
+      </p:sp>
+      <p:sp>
+        <p:nvSpPr>
+          <p:cNvPr id="12" name="TextBox 11"/>
+          <p:cNvSpPr txBox="1"/>
+          <p:nvPr/>
+        </p:nvSpPr>
+        <p:spPr>
+          <a:xfrm>
+            <a:off x="1463040" y="5166359"/>
+            <a:ext cx="9418320" cy="411480"/>
+          </a:xfrm>
+          <a:prstGeom prst="rect">
+            <a:avLst/>
+          </a:prstGeom>
+          <a:noFill/>
+        </p:spPr>
+        <p:txBody>
+          <a:bodyPr wrap="square" anchor="t">
+            <a:spAutoFit/>
+          </a:bodyPr>
+          <a:lstStyle/>
+          <a:p>
+            <a:pPr algn="l"/>
+            <a:r>
+              <a:rPr sz="1800" b="0" i="0">
+                <a:solidFill>
+                  <a:srgbClr val="FFFFFF"/>
+                </a:solidFill>
+                <a:latin typeface="Arial"/>
+              </a:rPr>
+              <a:t>•  a rolling ball moving a cup</a:t>
+            </a:r>
+          </a:p>
+        </p:txBody>
+      </p:sp>
+      <p:sp>
+        <p:nvSpPr>
+          <p:cNvPr id="13" name="TextBox 12"/>
+          <p:cNvSpPr txBox="1"/>
+          <p:nvPr/>
+        </p:nvSpPr>
+        <p:spPr>
+          <a:xfrm>
+            <a:off x="1463040" y="5577840"/>
+            <a:ext cx="9418320" cy="411480"/>
+          </a:xfrm>
+          <a:prstGeom prst="rect">
+            <a:avLst/>
+          </a:prstGeom>
+          <a:noFill/>
+        </p:spPr>
+        <p:txBody>
+          <a:bodyPr wrap="square" anchor="t">
+            <a:spAutoFit/>
+          </a:bodyPr>
+          <a:lstStyle/>
+          <a:p>
+            <a:pPr algn="l"/>
+            <a:r>
+              <a:rPr sz="1800" b="0" i="0">
+                <a:solidFill>
+                  <a:srgbClr val="FFFFFF"/>
+                </a:solidFill>
+                <a:latin typeface="Arial"/>
+              </a:rPr>
+              <a:t>•  a ringing bell</a:t>
             </a:r>
           </a:p>
         </p:txBody>
@@ -10843,7 +10655,7 @@
                 </a:solidFill>
                 <a:latin typeface="Arial"/>
               </a:rPr>
-              <a:t>What changes does the pencil sharpener cause?</a:t>
+              <a:t>Change is evidence of energy</a:t>
             </a:r>
           </a:p>
         </p:txBody>
@@ -10856,14 +10668,14 @@
         </p:nvSpPr>
         <p:spPr>
           <a:xfrm>
-            <a:off x="914400" y="2103120"/>
-            <a:ext cx="4754880" cy="2286000"/>
+            <a:off x="822960" y="2468880"/>
+            <a:ext cx="2743200" cy="1371600"/>
           </a:xfrm>
           <a:prstGeom prst="roundRect">
             <a:avLst/>
           </a:prstGeom>
           <a:solidFill>
-            <a:srgbClr val="E8EDF4"/>
+            <a:srgbClr val="C05014"/>
           </a:solidFill>
           <a:ln>
             <a:noFill/>
@@ -10889,14 +10701,13 @@
           <a:p>
             <a:pPr algn="ctr"/>
             <a:r>
-              <a:rPr sz="2800" b="1">
-                <a:solidFill>
-                  <a:srgbClr val="1F3A5F"/>
-                </a:solidFill>
-                <a:latin typeface="Arial"/>
-              </a:rPr>
-              <a:t>BEFORE
-dull pencil · silent</a:t>
+              <a:rPr sz="3000" b="1">
+                <a:solidFill>
+                  <a:srgbClr val="FFFFFF"/>
+                </a:solidFill>
+                <a:latin typeface="Arial"/>
+              </a:rPr>
+              <a:t>ENERGY</a:t>
             </a:r>
           </a:p>
         </p:txBody>
@@ -10909,8 +10720,8 @@
         </p:nvSpPr>
         <p:spPr>
           <a:xfrm>
-            <a:off x="5806440" y="2834640"/>
-            <a:ext cx="822960" cy="640080"/>
+            <a:off x="3657600" y="2834640"/>
+            <a:ext cx="1005840" cy="640080"/>
           </a:xfrm>
           <a:prstGeom prst="rightArrow">
             <a:avLst/>
@@ -10952,14 +10763,14 @@
         </p:nvSpPr>
         <p:spPr>
           <a:xfrm>
-            <a:off x="6766560" y="2103120"/>
-            <a:ext cx="4754880" cy="2286000"/>
+            <a:off x="4754880" y="2468880"/>
+            <a:ext cx="2743200" cy="1371600"/>
           </a:xfrm>
           <a:prstGeom prst="roundRect">
             <a:avLst/>
           </a:prstGeom>
           <a:solidFill>
-            <a:srgbClr val="C05014"/>
+            <a:srgbClr val="E8EDF4"/>
           </a:solidFill>
           <a:ln>
             <a:noFill/>
@@ -10985,28 +10796,122 @@
           <a:p>
             <a:pPr algn="ctr"/>
             <a:r>
-              <a:rPr sz="2800" b="1">
+              <a:rPr sz="3000" b="1">
+                <a:solidFill>
+                  <a:srgbClr val="1F3A5F"/>
+                </a:solidFill>
+                <a:latin typeface="Arial"/>
+              </a:rPr>
+              <a:t>CHANGE</a:t>
+            </a:r>
+          </a:p>
+        </p:txBody>
+      </p:sp>
+      <p:sp>
+        <p:nvSpPr>
+          <p:cNvPr id="7" name="Right Arrow 6"/>
+          <p:cNvSpPr/>
+          <p:nvPr/>
+        </p:nvSpPr>
+        <p:spPr>
+          <a:xfrm>
+            <a:off x="7589520" y="2834640"/>
+            <a:ext cx="1005840" cy="640080"/>
+          </a:xfrm>
+          <a:prstGeom prst="rightArrow">
+            <a:avLst/>
+          </a:prstGeom>
+          <a:solidFill>
+            <a:srgbClr val="C05014"/>
+          </a:solidFill>
+          <a:ln>
+            <a:noFill/>
+          </a:ln>
+        </p:spPr>
+        <p:style>
+          <a:lnRef idx="1">
+            <a:schemeClr val="accent1"/>
+          </a:lnRef>
+          <a:fillRef idx="3">
+            <a:schemeClr val="accent1"/>
+          </a:fillRef>
+          <a:effectRef idx="2">
+            <a:schemeClr val="accent1"/>
+          </a:effectRef>
+          <a:fontRef idx="minor">
+            <a:schemeClr val="lt1"/>
+          </a:fontRef>
+        </p:style>
+        <p:txBody>
+          <a:bodyPr rtlCol="0" anchor="ctr"/>
+          <a:lstStyle/>
+          <a:p>
+            <a:pPr algn="ctr"/>
+          </a:p>
+        </p:txBody>
+      </p:sp>
+      <p:sp>
+        <p:nvSpPr>
+          <p:cNvPr id="8" name="Rounded Rectangle 7"/>
+          <p:cNvSpPr/>
+          <p:nvPr/>
+        </p:nvSpPr>
+        <p:spPr>
+          <a:xfrm>
+            <a:off x="8686800" y="2468880"/>
+            <a:ext cx="2743200" cy="1371600"/>
+          </a:xfrm>
+          <a:prstGeom prst="roundRect">
+            <a:avLst/>
+          </a:prstGeom>
+          <a:solidFill>
+            <a:srgbClr val="2E6B3F"/>
+          </a:solidFill>
+          <a:ln>
+            <a:noFill/>
+          </a:ln>
+        </p:spPr>
+        <p:style>
+          <a:lnRef idx="1">
+            <a:schemeClr val="accent1"/>
+          </a:lnRef>
+          <a:fillRef idx="3">
+            <a:schemeClr val="accent1"/>
+          </a:fillRef>
+          <a:effectRef idx="2">
+            <a:schemeClr val="accent1"/>
+          </a:effectRef>
+          <a:fontRef idx="minor">
+            <a:schemeClr val="lt1"/>
+          </a:fontRef>
+        </p:style>
+        <p:txBody>
+          <a:bodyPr rtlCol="0" anchor="ctr" wrap="square"/>
+          <a:lstStyle/>
+          <a:p>
+            <a:pPr algn="ctr"/>
+            <a:r>
+              <a:rPr sz="3000" b="1">
                 <a:solidFill>
                   <a:srgbClr val="FFFFFF"/>
                 </a:solidFill>
                 <a:latin typeface="Arial"/>
               </a:rPr>
-              <a:t>AFTER
-sharp tip · humming</a:t>
-            </a:r>
-          </a:p>
-        </p:txBody>
-      </p:sp>
-      <p:sp>
-        <p:nvSpPr>
-          <p:cNvPr id="7" name="TextBox 6"/>
+              <a:t>EVIDENCE</a:t>
+            </a:r>
+          </a:p>
+        </p:txBody>
+      </p:sp>
+      <p:sp>
+        <p:nvSpPr>
+          <p:cNvPr id="9" name="TextBox 8"/>
           <p:cNvSpPr txBox="1"/>
           <p:nvPr/>
         </p:nvSpPr>
         <p:spPr>
           <a:xfrm>
-            <a:off x="914400" y="4937760"/>
-            <a:ext cx="10332720" cy="731520"/>
+            <a:off x="822960" y="4572000"/>
+            <a:ext cx="10515600" cy="914400"/>
           </a:xfrm>
           <a:prstGeom prst="rect">
             <a:avLst/>
@@ -11023,18 +10928,18 @@
             <a:r>
               <a:rPr sz="2600" b="1">
                 <a:solidFill>
-                  <a:srgbClr val="C05014"/>
-                </a:solidFill>
-                <a:latin typeface="Arial"/>
-              </a:rPr>
-              <a:t>Predict first — then watch!</a:t>
-            </a:r>
-          </a:p>
-        </p:txBody>
-      </p:sp>
-      <p:sp>
-        <p:nvSpPr>
-          <p:cNvPr id="8" name="TextBox 7"/>
+                  <a:srgbClr val="1F3A5F"/>
+                </a:solidFill>
+                <a:latin typeface="Arial"/>
+              </a:rPr>
+              <a:t>When you see a change, that change is evidence that energy was there.</a:t>
+            </a:r>
+          </a:p>
+        </p:txBody>
+      </p:sp>
+      <p:sp>
+        <p:nvSpPr>
+          <p:cNvPr id="10" name="TextBox 9"/>
           <p:cNvSpPr txBox="1"/>
           <p:nvPr/>
         </p:nvSpPr>
@@ -11062,7 +10967,7 @@
                 </a:solidFill>
                 <a:latin typeface="Arial"/>
               </a:rPr>
-              <a:t>8</a:t>
+              <a:t>7</a:t>
             </a:r>
           </a:p>
         </p:txBody>
@@ -11137,7 +11042,7 @@
         <p:spPr>
           <a:xfrm>
             <a:off x="457200" y="146304"/>
-            <a:ext cx="11247120" cy="777240"/>
+            <a:ext cx="10058400" cy="777240"/>
           </a:xfrm>
           <a:prstGeom prst="rect">
             <a:avLst/>
@@ -11152,68 +11057,33 @@
           <a:p>
             <a:pPr algn="l"/>
             <a:r>
-              <a:rPr sz="3400" b="1">
+              <a:rPr sz="3400" b="1" i="0">
                 <a:solidFill>
                   <a:srgbClr val="FFFFFF"/>
                 </a:solidFill>
                 <a:latin typeface="Arial"/>
               </a:rPr>
-              <a:t>Energy Detectives</a:t>
-            </a:r>
-          </a:p>
-        </p:txBody>
-      </p:sp>
-      <p:sp>
-        <p:nvSpPr>
-          <p:cNvPr id="4" name="TextBox 3"/>
-          <p:cNvSpPr txBox="1"/>
-          <p:nvPr/>
-        </p:nvSpPr>
-        <p:spPr>
-          <a:xfrm>
-            <a:off x="502920" y="1170432"/>
-            <a:ext cx="11247120" cy="457200"/>
-          </a:xfrm>
-          <a:prstGeom prst="rect">
-            <a:avLst/>
-          </a:prstGeom>
-          <a:noFill/>
-        </p:spPr>
-        <p:txBody>
-          <a:bodyPr wrap="square" anchor="t">
-            <a:spAutoFit/>
-          </a:bodyPr>
-          <a:lstStyle/>
-          <a:p>
-            <a:pPr algn="l"/>
-            <a:r>
-              <a:rPr sz="1600" b="0">
-                <a:solidFill>
-                  <a:srgbClr val="555555"/>
-                </a:solidFill>
-                <a:latin typeface="Arial"/>
-              </a:rPr>
-              <a:t>Lab directions</a:t>
-            </a:r>
-          </a:p>
-        </p:txBody>
-      </p:sp>
-      <p:sp>
-        <p:nvSpPr>
-          <p:cNvPr id="5" name="Rounded Rectangle 4"/>
+              <a:t>Notes — Energy Model</a:t>
+            </a:r>
+          </a:p>
+        </p:txBody>
+      </p:sp>
+      <p:sp>
+        <p:nvSpPr>
+          <p:cNvPr id="4" name="Rounded Rectangle 3"/>
           <p:cNvSpPr/>
           <p:nvPr/>
         </p:nvSpPr>
         <p:spPr>
           <a:xfrm>
-            <a:off x="822960" y="2103120"/>
-            <a:ext cx="10515600" cy="3291840"/>
+            <a:off x="9692640" y="256032"/>
+            <a:ext cx="2103120" cy="548640"/>
           </a:xfrm>
           <a:prstGeom prst="roundRect">
             <a:avLst/>
           </a:prstGeom>
           <a:solidFill>
-            <a:srgbClr val="E8EDF4"/>
+            <a:srgbClr val="C05014"/>
           </a:solidFill>
           <a:ln>
             <a:noFill/>
@@ -11238,6 +11108,58 @@
           <a:lstStyle/>
           <a:p>
             <a:pPr algn="ctr"/>
+            <a:r>
+              <a:rPr sz="1800" b="1">
+                <a:solidFill>
+                  <a:srgbClr val="FFFFFF"/>
+                </a:solidFill>
+                <a:latin typeface="Arial"/>
+              </a:rPr>
+              <a:t>NOTES</a:t>
+            </a:r>
+          </a:p>
+        </p:txBody>
+      </p:sp>
+      <p:sp>
+        <p:nvSpPr>
+          <p:cNvPr id="5" name="Rounded Rectangle 4"/>
+          <p:cNvSpPr/>
+          <p:nvPr/>
+        </p:nvSpPr>
+        <p:spPr>
+          <a:xfrm>
+            <a:off x="1097280" y="1737360"/>
+            <a:ext cx="9966960" cy="1234440"/>
+          </a:xfrm>
+          <a:prstGeom prst="roundRect">
+            <a:avLst/>
+          </a:prstGeom>
+          <a:solidFill>
+            <a:srgbClr val="E8EDF4"/>
+          </a:solidFill>
+          <a:ln>
+            <a:noFill/>
+          </a:ln>
+        </p:spPr>
+        <p:style>
+          <a:lnRef idx="1">
+            <a:schemeClr val="accent1"/>
+          </a:lnRef>
+          <a:fillRef idx="3">
+            <a:schemeClr val="accent1"/>
+          </a:fillRef>
+          <a:effectRef idx="2">
+            <a:schemeClr val="accent1"/>
+          </a:effectRef>
+          <a:fontRef idx="minor">
+            <a:schemeClr val="lt1"/>
+          </a:fontRef>
+        </p:style>
+        <p:txBody>
+          <a:bodyPr rtlCol="0" anchor="ctr" wrap="square"/>
+          <a:lstStyle/>
+          <a:p>
+            <a:pPr algn="ctr"/>
           </a:p>
         </p:txBody>
       </p:sp>
@@ -11249,8 +11171,8 @@
         </p:nvSpPr>
         <p:spPr>
           <a:xfrm>
-            <a:off x="1280160" y="2377440"/>
-            <a:ext cx="9692640" cy="822960"/>
+            <a:off x="1371600" y="1828800"/>
+            <a:ext cx="9418320" cy="457200"/>
           </a:xfrm>
           <a:prstGeom prst="rect">
             <a:avLst/>
@@ -11265,13 +11187,13 @@
           <a:p>
             <a:pPr algn="l"/>
             <a:r>
-              <a:rPr sz="2600" b="0">
-                <a:solidFill>
-                  <a:srgbClr val="1F3A5F"/>
-                </a:solidFill>
-                <a:latin typeface="Arial"/>
-              </a:rPr>
-              <a:t>1.  Find 3 classroom examples of change.</a:t>
+              <a:rPr sz="1600" b="1" i="0">
+                <a:solidFill>
+                  <a:srgbClr val="C05014"/>
+                </a:solidFill>
+                <a:latin typeface="Arial"/>
+              </a:rPr>
+              <a:t>WRITE:</a:t>
             </a:r>
           </a:p>
         </p:txBody>
@@ -11284,8 +11206,8 @@
         </p:nvSpPr>
         <p:spPr>
           <a:xfrm>
-            <a:off x="1280160" y="3291840"/>
-            <a:ext cx="9692640" cy="822960"/>
+            <a:off x="1371600" y="2240280"/>
+            <a:ext cx="9418320" cy="640080"/>
           </a:xfrm>
           <a:prstGeom prst="rect">
             <a:avLst/>
@@ -11300,13 +11222,13 @@
           <a:p>
             <a:pPr algn="l"/>
             <a:r>
-              <a:rPr sz="2600" b="0">
+              <a:rPr sz="2800" b="1" i="0">
                 <a:solidFill>
                   <a:srgbClr val="1F3A5F"/>
                 </a:solidFill>
                 <a:latin typeface="Arial"/>
               </a:rPr>
-              <a:t>2.  For each, record: what changed, the evidence, and the energy form.</a:t>
+              <a:t>ENERGY  →  CHANGE  →  EVIDENCE</a:t>
             </a:r>
           </a:p>
         </p:txBody>
@@ -11319,8 +11241,8 @@
         </p:nvSpPr>
         <p:spPr>
           <a:xfrm>
-            <a:off x="1280160" y="4206240"/>
-            <a:ext cx="9692640" cy="822960"/>
+            <a:off x="1371600" y="3017520"/>
+            <a:ext cx="9418320" cy="457200"/>
           </a:xfrm>
           <a:prstGeom prst="rect">
             <a:avLst/>
@@ -11335,27 +11257,70 @@
           <a:p>
             <a:pPr algn="l"/>
             <a:r>
-              <a:rPr sz="2600" b="0">
-                <a:solidFill>
-                  <a:srgbClr val="1F3A5F"/>
-                </a:solidFill>
-                <a:latin typeface="Arial"/>
-              </a:rPr>
-              <a:t>3.  Write one question you still have.</a:t>
-            </a:r>
-          </a:p>
-        </p:txBody>
-      </p:sp>
-      <p:sp>
-        <p:nvSpPr>
-          <p:cNvPr id="9" name="TextBox 8"/>
+              <a:rPr sz="1600" b="0" i="1">
+                <a:solidFill>
+                  <a:srgbClr val="555555"/>
+                </a:solidFill>
+                <a:latin typeface="Arial"/>
+              </a:rPr>
+              <a:t>REVEAL → the chain</a:t>
+            </a:r>
+          </a:p>
+        </p:txBody>
+      </p:sp>
+      <p:sp>
+        <p:nvSpPr>
+          <p:cNvPr id="9" name="Rounded Rectangle 8"/>
+          <p:cNvSpPr/>
+          <p:nvPr/>
+        </p:nvSpPr>
+        <p:spPr>
+          <a:xfrm>
+            <a:off x="1097280" y="4206240"/>
+            <a:ext cx="9966960" cy="1828800"/>
+          </a:xfrm>
+          <a:prstGeom prst="roundRect">
+            <a:avLst/>
+          </a:prstGeom>
+          <a:solidFill>
+            <a:srgbClr val="2E6B3F"/>
+          </a:solidFill>
+          <a:ln>
+            <a:noFill/>
+          </a:ln>
+        </p:spPr>
+        <p:style>
+          <a:lnRef idx="1">
+            <a:schemeClr val="accent1"/>
+          </a:lnRef>
+          <a:fillRef idx="3">
+            <a:schemeClr val="accent1"/>
+          </a:fillRef>
+          <a:effectRef idx="2">
+            <a:schemeClr val="accent1"/>
+          </a:effectRef>
+          <a:fontRef idx="minor">
+            <a:schemeClr val="lt1"/>
+          </a:fontRef>
+        </p:style>
+        <p:txBody>
+          <a:bodyPr rtlCol="0" anchor="ctr" wrap="square"/>
+          <a:lstStyle/>
+          <a:p>
+            <a:pPr algn="ctr"/>
+          </a:p>
+        </p:txBody>
+      </p:sp>
+      <p:sp>
+        <p:nvSpPr>
+          <p:cNvPr id="10" name="TextBox 9"/>
           <p:cNvSpPr txBox="1"/>
           <p:nvPr/>
         </p:nvSpPr>
         <p:spPr>
           <a:xfrm>
-            <a:off x="822960" y="5577840"/>
-            <a:ext cx="10515600" cy="640080"/>
+            <a:off x="1371600" y="4297679"/>
+            <a:ext cx="9418320" cy="457200"/>
           </a:xfrm>
           <a:prstGeom prst="rect">
             <a:avLst/>
@@ -11368,29 +11333,29 @@
           </a:bodyPr>
           <a:lstStyle/>
           <a:p>
-            <a:pPr algn="ctr"/>
-            <a:r>
-              <a:rPr sz="2000" b="0">
-                <a:solidFill>
-                  <a:srgbClr val="555555"/>
-                </a:solidFill>
-                <a:latin typeface="Arial"/>
-              </a:rPr>
-              <a:t>Observation only — describe what you see.</a:t>
-            </a:r>
-          </a:p>
-        </p:txBody>
-      </p:sp>
-      <p:sp>
-        <p:nvSpPr>
-          <p:cNvPr id="10" name="TextBox 9"/>
+            <a:pPr algn="l"/>
+            <a:r>
+              <a:rPr sz="1600" b="1" i="0">
+                <a:solidFill>
+                  <a:srgbClr val="FFFFFF"/>
+                </a:solidFill>
+                <a:latin typeface="Arial"/>
+              </a:rPr>
+              <a:t>DRAWING IDEAS (draw YOUR example):</a:t>
+            </a:r>
+          </a:p>
+        </p:txBody>
+      </p:sp>
+      <p:sp>
+        <p:nvSpPr>
+          <p:cNvPr id="11" name="TextBox 10"/>
           <p:cNvSpPr txBox="1"/>
           <p:nvPr/>
         </p:nvSpPr>
         <p:spPr>
           <a:xfrm>
-            <a:off x="11338560" y="6446520"/>
-            <a:ext cx="731520" cy="365760"/>
+            <a:off x="1463040" y="4754879"/>
+            <a:ext cx="9418320" cy="411480"/>
           </a:xfrm>
           <a:prstGeom prst="rect">
             <a:avLst/>
@@ -11403,15 +11368,50 @@
           </a:bodyPr>
           <a:lstStyle/>
           <a:p>
-            <a:pPr algn="r"/>
-            <a:r>
-              <a:rPr sz="1200" b="0">
-                <a:solidFill>
-                  <a:srgbClr val="555555"/>
-                </a:solidFill>
-                <a:latin typeface="Arial"/>
-              </a:rPr>
-              <a:t>9</a:t>
+            <a:pPr algn="l"/>
+            <a:r>
+              <a:rPr sz="1800" b="0" i="0">
+                <a:solidFill>
+                  <a:srgbClr val="FFFFFF"/>
+                </a:solidFill>
+                <a:latin typeface="Arial"/>
+              </a:rPr>
+              <a:t>•  draw a before/after example</a:t>
+            </a:r>
+          </a:p>
+        </p:txBody>
+      </p:sp>
+      <p:sp>
+        <p:nvSpPr>
+          <p:cNvPr id="12" name="TextBox 11"/>
+          <p:cNvSpPr txBox="1"/>
+          <p:nvPr/>
+        </p:nvSpPr>
+        <p:spPr>
+          <a:xfrm>
+            <a:off x="1463040" y="5166359"/>
+            <a:ext cx="9418320" cy="411480"/>
+          </a:xfrm>
+          <a:prstGeom prst="rect">
+            <a:avLst/>
+          </a:prstGeom>
+          <a:noFill/>
+        </p:spPr>
+        <p:txBody>
+          <a:bodyPr wrap="square" anchor="t">
+            <a:spAutoFit/>
+          </a:bodyPr>
+          <a:lstStyle/>
+          <a:p>
+            <a:pPr algn="l"/>
+            <a:r>
+              <a:rPr sz="1800" b="0" i="0">
+                <a:solidFill>
+                  <a:srgbClr val="FFFFFF"/>
+                </a:solidFill>
+                <a:latin typeface="Arial"/>
+              </a:rPr>
+              <a:t>•  add arrows to show the change</a:t>
             </a:r>
           </a:p>
         </p:txBody>

--- a/production/slides/01-ch1-energy-causes-change-slides.pptx
+++ b/production/slides/01-ch1-energy-causes-change-slides.pptx
@@ -30,6 +30,7 @@
     <p:sldId id="275" r:id="rId26"/>
     <p:sldId id="276" r:id="rId27"/>
     <p:sldId id="277" r:id="rId28"/>
+    <p:sldId id="281" r:id="rId32"/>
   </p:sldIdLst>
   <p:sldSz cx="12191695" cy="6858000" type="screen4x3"/>
   <p:notesSz cx="6858000" cy="9144000"/>
@@ -129,6 +130,442 @@
     </a:lvl9pPr>
   </p:defaultTextStyle>
 </p:presentation>
+</file>
+
+<file path=ppt/notesMasters/notesMaster1.xml><?xml version="1.0" encoding="utf-8"?>
+<p:notesMaster xmlns:a="http://schemas.openxmlformats.org/drawingml/2006/main" xmlns:p="http://schemas.openxmlformats.org/presentationml/2006/main" xmlns:r="http://schemas.openxmlformats.org/officeDocument/2006/relationships">
+  <p:cSld>
+    <p:bg>
+      <p:bgRef idx="1001">
+        <a:schemeClr val="bg1"/>
+      </p:bgRef>
+    </p:bg>
+    <p:spTree>
+      <p:nvGrpSpPr>
+        <p:cNvPr id="1" name=""/>
+        <p:cNvGrpSpPr/>
+        <p:nvPr/>
+      </p:nvGrpSpPr>
+      <p:grpSpPr>
+        <a:xfrm>
+          <a:off x="0" y="0"/>
+          <a:ext cx="0" cy="0"/>
+          <a:chOff x="0" y="0"/>
+          <a:chExt cx="0" cy="0"/>
+        </a:xfrm>
+      </p:grpSpPr>
+      <p:sp>
+        <p:nvSpPr>
+          <p:cNvPr id="2" name="Header Placeholder 1"/>
+          <p:cNvSpPr>
+            <a:spLocks noGrp="1"/>
+          </p:cNvSpPr>
+          <p:nvPr>
+            <p:ph type="hdr" sz="quarter"/>
+          </p:nvPr>
+        </p:nvSpPr>
+        <p:spPr>
+          <a:xfrm>
+            <a:off x="0" y="0"/>
+            <a:ext cx="2971800" cy="457200"/>
+          </a:xfrm>
+          <a:prstGeom prst="rect">
+            <a:avLst/>
+          </a:prstGeom>
+        </p:spPr>
+        <p:txBody>
+          <a:bodyPr vert="horz" lIns="91440" tIns="45720" rIns="91440" bIns="45720" rtlCol="0"/>
+          <a:lstStyle>
+            <a:lvl1pPr algn="l">
+              <a:defRPr sz="1200"/>
+            </a:lvl1pPr>
+          </a:lstStyle>
+          <a:p>
+            <a:endParaRPr lang="en-US"/>
+          </a:p>
+        </p:txBody>
+      </p:sp>
+      <p:sp>
+        <p:nvSpPr>
+          <p:cNvPr id="3" name="Date Placeholder 2"/>
+          <p:cNvSpPr>
+            <a:spLocks noGrp="1"/>
+          </p:cNvSpPr>
+          <p:nvPr>
+            <p:ph type="dt" idx="1"/>
+          </p:nvPr>
+        </p:nvSpPr>
+        <p:spPr>
+          <a:xfrm>
+            <a:off x="3884613" y="0"/>
+            <a:ext cx="2971800" cy="457200"/>
+          </a:xfrm>
+          <a:prstGeom prst="rect">
+            <a:avLst/>
+          </a:prstGeom>
+        </p:spPr>
+        <p:txBody>
+          <a:bodyPr vert="horz" lIns="91440" tIns="45720" rIns="91440" bIns="45720" rtlCol="0"/>
+          <a:lstStyle>
+            <a:lvl1pPr algn="r">
+              <a:defRPr sz="1200"/>
+            </a:lvl1pPr>
+          </a:lstStyle>
+          <a:p>
+            <a:fld id="{0F89C1C7-3DCD-1040-A9CF-14679D8B5DDD}" type="datetimeFigureOut">
+              <a:rPr lang="en-US" smtClean="0"/>
+              <a:t>10/17/16</a:t>
+            </a:fld>
+            <a:endParaRPr lang="en-US"/>
+          </a:p>
+        </p:txBody>
+      </p:sp>
+      <p:sp>
+        <p:nvSpPr>
+          <p:cNvPr id="4" name="Slide Image Placeholder 3"/>
+          <p:cNvSpPr>
+            <a:spLocks noGrp="1" noRot="1" noChangeAspect="1"/>
+          </p:cNvSpPr>
+          <p:nvPr>
+            <p:ph type="sldImg" idx="2"/>
+          </p:nvPr>
+        </p:nvSpPr>
+        <p:spPr>
+          <a:xfrm>
+            <a:off x="1143000" y="685800"/>
+            <a:ext cx="4572000" cy="3429000"/>
+          </a:xfrm>
+          <a:prstGeom prst="rect">
+            <a:avLst/>
+          </a:prstGeom>
+          <a:noFill/>
+          <a:ln w="12700">
+            <a:solidFill>
+              <a:prstClr val="black"/>
+            </a:solidFill>
+          </a:ln>
+        </p:spPr>
+        <p:txBody>
+          <a:bodyPr vert="horz" lIns="91440" tIns="45720" rIns="91440" bIns="45720" rtlCol="0" anchor="ctr"/>
+          <a:lstStyle/>
+          <a:p>
+            <a:endParaRPr lang="en-US"/>
+          </a:p>
+        </p:txBody>
+      </p:sp>
+      <p:sp>
+        <p:nvSpPr>
+          <p:cNvPr id="5" name="Notes Placeholder 4"/>
+          <p:cNvSpPr>
+            <a:spLocks noGrp="1"/>
+          </p:cNvSpPr>
+          <p:nvPr>
+            <p:ph type="body" sz="quarter" idx="3"/>
+          </p:nvPr>
+        </p:nvSpPr>
+        <p:spPr>
+          <a:xfrm>
+            <a:off x="685800" y="4343400"/>
+            <a:ext cx="5486400" cy="4114800"/>
+          </a:xfrm>
+          <a:prstGeom prst="rect">
+            <a:avLst/>
+          </a:prstGeom>
+        </p:spPr>
+        <p:txBody>
+          <a:bodyPr vert="horz" lIns="91440" tIns="45720" rIns="91440" bIns="45720" rtlCol="0"/>
+          <a:lstStyle/>
+          <a:p>
+            <a:pPr lvl="0"/>
+            <a:r>
+              <a:rPr lang="en-US" smtClean="0"/>
+              <a:t>Click to edit Master text styles</a:t>
+            </a:r>
+          </a:p>
+          <a:p>
+            <a:pPr lvl="1"/>
+            <a:r>
+              <a:rPr lang="en-US" smtClean="0"/>
+              <a:t>Second level</a:t>
+            </a:r>
+          </a:p>
+          <a:p>
+            <a:pPr lvl="2"/>
+            <a:r>
+              <a:rPr lang="en-US" smtClean="0"/>
+              <a:t>Third level</a:t>
+            </a:r>
+          </a:p>
+          <a:p>
+            <a:pPr lvl="3"/>
+            <a:r>
+              <a:rPr lang="en-US" smtClean="0"/>
+              <a:t>Fourth level</a:t>
+            </a:r>
+          </a:p>
+          <a:p>
+            <a:pPr lvl="4"/>
+            <a:r>
+              <a:rPr lang="en-US" smtClean="0"/>
+              <a:t>Fifth level</a:t>
+            </a:r>
+            <a:endParaRPr lang="en-US"/>
+          </a:p>
+        </p:txBody>
+      </p:sp>
+      <p:sp>
+        <p:nvSpPr>
+          <p:cNvPr id="6" name="Footer Placeholder 5"/>
+          <p:cNvSpPr>
+            <a:spLocks noGrp="1"/>
+          </p:cNvSpPr>
+          <p:nvPr>
+            <p:ph type="ftr" sz="quarter" idx="4"/>
+          </p:nvPr>
+        </p:nvSpPr>
+        <p:spPr>
+          <a:xfrm>
+            <a:off x="0" y="8685213"/>
+            <a:ext cx="2971800" cy="457200"/>
+          </a:xfrm>
+          <a:prstGeom prst="rect">
+            <a:avLst/>
+          </a:prstGeom>
+        </p:spPr>
+        <p:txBody>
+          <a:bodyPr vert="horz" lIns="91440" tIns="45720" rIns="91440" bIns="45720" rtlCol="0" anchor="b"/>
+          <a:lstStyle>
+            <a:lvl1pPr algn="l">
+              <a:defRPr sz="1200"/>
+            </a:lvl1pPr>
+          </a:lstStyle>
+          <a:p>
+            <a:endParaRPr lang="en-US"/>
+          </a:p>
+        </p:txBody>
+      </p:sp>
+      <p:sp>
+        <p:nvSpPr>
+          <p:cNvPr id="7" name="Slide Number Placeholder 6"/>
+          <p:cNvSpPr>
+            <a:spLocks noGrp="1"/>
+          </p:cNvSpPr>
+          <p:nvPr>
+            <p:ph type="sldNum" sz="quarter" idx="5"/>
+          </p:nvPr>
+        </p:nvSpPr>
+        <p:spPr>
+          <a:xfrm>
+            <a:off x="3884613" y="8685213"/>
+            <a:ext cx="2971800" cy="457200"/>
+          </a:xfrm>
+          <a:prstGeom prst="rect">
+            <a:avLst/>
+          </a:prstGeom>
+        </p:spPr>
+        <p:txBody>
+          <a:bodyPr vert="horz" lIns="91440" tIns="45720" rIns="91440" bIns="45720" rtlCol="0" anchor="b"/>
+          <a:lstStyle>
+            <a:lvl1pPr algn="r">
+              <a:defRPr sz="1200"/>
+            </a:lvl1pPr>
+          </a:lstStyle>
+          <a:p>
+            <a:fld id="{BB5E49A5-4136-284D-997B-48E1D791AD67}" type="slidenum">
+              <a:rPr lang="en-US" smtClean="0"/>
+              <a:t>‹#›</a:t>
+            </a:fld>
+            <a:endParaRPr lang="en-US"/>
+          </a:p>
+        </p:txBody>
+      </p:sp>
+    </p:spTree>
+    <p:extLst>
+      <p:ext uri="{BB962C8B-B14F-4D97-AF65-F5344CB8AC3E}">
+        <p14:creationId xmlns:p14="http://schemas.microsoft.com/office/powerpoint/2010/main" val="2623252185"/>
+      </p:ext>
+    </p:extLst>
+  </p:cSld>
+  <p:clrMap bg1="lt1" tx1="dk1" bg2="lt2" tx2="dk2" accent1="accent1" accent2="accent2" accent3="accent3" accent4="accent4" accent5="accent5" accent6="accent6" hlink="hlink" folHlink="folHlink"/>
+  <p:notesStyle>
+    <a:lvl1pPr marL="0" algn="l" defTabSz="457200" rtl="0" eaLnBrk="1" latinLnBrk="0" hangingPunct="1">
+      <a:defRPr sz="1200" kern="1200">
+        <a:solidFill>
+          <a:schemeClr val="tx1"/>
+        </a:solidFill>
+        <a:latin typeface="+mn-lt"/>
+        <a:ea typeface="+mn-ea"/>
+        <a:cs typeface="+mn-cs"/>
+      </a:defRPr>
+    </a:lvl1pPr>
+    <a:lvl2pPr marL="457200" algn="l" defTabSz="457200" rtl="0" eaLnBrk="1" latinLnBrk="0" hangingPunct="1">
+      <a:defRPr sz="1200" kern="1200">
+        <a:solidFill>
+          <a:schemeClr val="tx1"/>
+        </a:solidFill>
+        <a:latin typeface="+mn-lt"/>
+        <a:ea typeface="+mn-ea"/>
+        <a:cs typeface="+mn-cs"/>
+      </a:defRPr>
+    </a:lvl2pPr>
+    <a:lvl3pPr marL="914400" algn="l" defTabSz="457200" rtl="0" eaLnBrk="1" latinLnBrk="0" hangingPunct="1">
+      <a:defRPr sz="1200" kern="1200">
+        <a:solidFill>
+          <a:schemeClr val="tx1"/>
+        </a:solidFill>
+        <a:latin typeface="+mn-lt"/>
+        <a:ea typeface="+mn-ea"/>
+        <a:cs typeface="+mn-cs"/>
+      </a:defRPr>
+    </a:lvl3pPr>
+    <a:lvl4pPr marL="1371600" algn="l" defTabSz="457200" rtl="0" eaLnBrk="1" latinLnBrk="0" hangingPunct="1">
+      <a:defRPr sz="1200" kern="1200">
+        <a:solidFill>
+          <a:schemeClr val="tx1"/>
+        </a:solidFill>
+        <a:latin typeface="+mn-lt"/>
+        <a:ea typeface="+mn-ea"/>
+        <a:cs typeface="+mn-cs"/>
+      </a:defRPr>
+    </a:lvl4pPr>
+    <a:lvl5pPr marL="1828800" algn="l" defTabSz="457200" rtl="0" eaLnBrk="1" latinLnBrk="0" hangingPunct="1">
+      <a:defRPr sz="1200" kern="1200">
+        <a:solidFill>
+          <a:schemeClr val="tx1"/>
+        </a:solidFill>
+        <a:latin typeface="+mn-lt"/>
+        <a:ea typeface="+mn-ea"/>
+        <a:cs typeface="+mn-cs"/>
+      </a:defRPr>
+    </a:lvl5pPr>
+    <a:lvl6pPr marL="2286000" algn="l" defTabSz="457200" rtl="0" eaLnBrk="1" latinLnBrk="0" hangingPunct="1">
+      <a:defRPr sz="1200" kern="1200">
+        <a:solidFill>
+          <a:schemeClr val="tx1"/>
+        </a:solidFill>
+        <a:latin typeface="+mn-lt"/>
+        <a:ea typeface="+mn-ea"/>
+        <a:cs typeface="+mn-cs"/>
+      </a:defRPr>
+    </a:lvl6pPr>
+    <a:lvl7pPr marL="2743200" algn="l" defTabSz="457200" rtl="0" eaLnBrk="1" latinLnBrk="0" hangingPunct="1">
+      <a:defRPr sz="1200" kern="1200">
+        <a:solidFill>
+          <a:schemeClr val="tx1"/>
+        </a:solidFill>
+        <a:latin typeface="+mn-lt"/>
+        <a:ea typeface="+mn-ea"/>
+        <a:cs typeface="+mn-cs"/>
+      </a:defRPr>
+    </a:lvl7pPr>
+    <a:lvl8pPr marL="3200400" algn="l" defTabSz="457200" rtl="0" eaLnBrk="1" latinLnBrk="0" hangingPunct="1">
+      <a:defRPr sz="1200" kern="1200">
+        <a:solidFill>
+          <a:schemeClr val="tx1"/>
+        </a:solidFill>
+        <a:latin typeface="+mn-lt"/>
+        <a:ea typeface="+mn-ea"/>
+        <a:cs typeface="+mn-cs"/>
+      </a:defRPr>
+    </a:lvl8pPr>
+    <a:lvl9pPr marL="3657600" algn="l" defTabSz="457200" rtl="0" eaLnBrk="1" latinLnBrk="0" hangingPunct="1">
+      <a:defRPr sz="1200" kern="1200">
+        <a:solidFill>
+          <a:schemeClr val="tx1"/>
+        </a:solidFill>
+        <a:latin typeface="+mn-lt"/>
+        <a:ea typeface="+mn-ea"/>
+        <a:cs typeface="+mn-cs"/>
+      </a:defRPr>
+    </a:lvl9pPr>
+  </p:notesStyle>
+</p:notesMaster>
+</file>
+
+<file path=ppt/notesSlides/notesSlide1.xml><?xml version="1.0" encoding="utf-8"?>
+<p:notes xmlns:a="http://schemas.openxmlformats.org/drawingml/2006/main" xmlns:p="http://schemas.openxmlformats.org/presentationml/2006/main" xmlns:r="http://schemas.openxmlformats.org/officeDocument/2006/relationships">
+  <p:cSld>
+    <p:spTree>
+      <p:nvGrpSpPr>
+        <p:cNvPr id="1" name=""/>
+        <p:cNvGrpSpPr/>
+        <p:nvPr/>
+      </p:nvGrpSpPr>
+      <p:grpSpPr>
+        <a:xfrm>
+          <a:off x="0" y="0"/>
+          <a:ext cx="0" cy="0"/>
+          <a:chOff x="0" y="0"/>
+          <a:chExt cx="0" cy="0"/>
+        </a:xfrm>
+      </p:grpSpPr>
+      <p:sp>
+        <p:nvSpPr>
+          <p:cNvPr id="2" name="Slide Image Placeholder 1"/>
+          <p:cNvSpPr>
+            <a:spLocks noGrp="1"/>
+          </p:cNvSpPr>
+          <p:nvPr>
+            <p:ph type="sldImg" idx="2"/>
+          </p:nvPr>
+        </p:nvSpPr>
+        <p:spPr/>
+      </p:sp>
+      <p:sp>
+        <p:nvSpPr>
+          <p:cNvPr id="3" name="Notes Placeholder 2"/>
+          <p:cNvSpPr>
+            <a:spLocks noGrp="1"/>
+          </p:cNvSpPr>
+          <p:nvPr>
+            <p:ph type="body" idx="3" sz="quarter"/>
+          </p:nvPr>
+        </p:nvSpPr>
+        <p:spPr/>
+        <p:txBody>
+          <a:bodyPr/>
+          <a:lstStyle/>
+          <a:p>
+            <a:r>
+              <a:t>INFOGRAPHIC REFERENCE (REFERENCE)</a:t>
+            </a:r>
+          </a:p>
+          <a:p>
+            <a:r>
+              <a:t>What change is the evidence?</a:t>
+            </a:r>
+          </a:p>
+          <a:p/>
+          <a:p>
+            <a:r>
+              <a:t>Ch1 Energy Detective anchor (energy → change → evidence).</a:t>
+            </a:r>
+          </a:p>
+          <a:p>
+            <a:r>
+              <a:t>Approved rebuilt visual — production/infographics/unit1-energy-detective-anchor.png. Locked Grade 4 vocabulary only.</a:t>
+            </a:r>
+          </a:p>
+        </p:txBody>
+      </p:sp>
+      <p:sp>
+        <p:nvSpPr>
+          <p:cNvPr id="4" name="Slide Number Placeholder 3"/>
+          <p:cNvSpPr>
+            <a:spLocks noGrp="1"/>
+          </p:cNvSpPr>
+          <p:nvPr>
+            <p:ph type="sldNum" idx="5" sz="quarter"/>
+          </p:nvPr>
+        </p:nvSpPr>
+        <p:spPr/>
+      </p:sp>
+    </p:spTree>
+  </p:cSld>
+  <p:clrMapOvr>
+    <a:masterClrMapping/>
+  </p:clrMapOvr>
+</p:notes>
 </file>
 
 <file path=ppt/slideLayouts/slideLayout1.xml><?xml version="1.0" encoding="utf-8"?>
@@ -9123,6 +9560,110 @@
                 <a:latin typeface="Arial"/>
               </a:rPr>
               <a:t>22</a:t>
+            </a:r>
+          </a:p>
+        </p:txBody>
+      </p:sp>
+    </p:spTree>
+  </p:cSld>
+  <p:clrMapOvr>
+    <a:masterClrMapping/>
+  </p:clrMapOvr>
+</p:sld>
+</file>
+
+<file path=ppt/slides/slide26.xml><?xml version="1.0" encoding="utf-8"?>
+<p:sld xmlns:a="http://schemas.openxmlformats.org/drawingml/2006/main" xmlns:p="http://schemas.openxmlformats.org/presentationml/2006/main" xmlns:r="http://schemas.openxmlformats.org/officeDocument/2006/relationships">
+  <p:cSld>
+    <p:spTree>
+      <p:nvGrpSpPr>
+        <p:cNvPr id="1" name=""/>
+        <p:cNvGrpSpPr/>
+        <p:nvPr/>
+      </p:nvGrpSpPr>
+      <p:grpSpPr/>
+      <p:pic>
+        <p:nvPicPr>
+          <p:cNvPr id="2" name="Picture 1" descr="unit1-energy-detective-anchor.png"/>
+          <p:cNvPicPr>
+            <a:picLocks noChangeAspect="1"/>
+          </p:cNvPicPr>
+          <p:nvPr/>
+        </p:nvPicPr>
+        <p:blipFill>
+          <a:blip r:embed="rId2"/>
+          <a:stretch>
+            <a:fillRect/>
+          </a:stretch>
+        </p:blipFill>
+        <p:spPr>
+          <a:xfrm>
+            <a:off x="609447" y="182880"/>
+            <a:ext cx="10972800" cy="6124353"/>
+          </a:xfrm>
+          <a:prstGeom prst="rect">
+            <a:avLst/>
+          </a:prstGeom>
+        </p:spPr>
+      </p:pic>
+      <p:sp>
+        <p:nvSpPr>
+          <p:cNvPr id="3" name="Rounded Rectangle 2"/>
+          <p:cNvSpPr/>
+          <p:nvPr/>
+        </p:nvSpPr>
+        <p:spPr>
+          <a:xfrm>
+            <a:off x="609447" y="6419088"/>
+            <a:ext cx="10972800" cy="384048"/>
+          </a:xfrm>
+          <a:prstGeom prst="roundRect">
+            <a:avLst/>
+          </a:prstGeom>
+          <a:solidFill>
+            <a:srgbClr val="1F3A5F"/>
+          </a:solidFill>
+          <a:ln>
+            <a:noFill/>
+          </a:ln>
+          <a:effectLst/>
+        </p:spPr>
+        <p:style>
+          <a:lnRef idx="1">
+            <a:schemeClr val="accent1"/>
+          </a:lnRef>
+          <a:fillRef idx="3">
+            <a:schemeClr val="accent1"/>
+          </a:fillRef>
+          <a:effectRef idx="2">
+            <a:schemeClr val="accent1"/>
+          </a:effectRef>
+          <a:fontRef idx="minor">
+            <a:schemeClr val="lt1"/>
+          </a:fontRef>
+        </p:style>
+        <p:txBody>
+          <a:bodyPr rtlCol="0" anchor="ctr" wrap="square" tIns="25400" bIns="25400"/>
+          <a:lstStyle/>
+          <a:p>
+            <a:pPr algn="ctr"/>
+            <a:r>
+              <a:rPr sz="1500" b="1">
+                <a:solidFill>
+                  <a:srgbClr val="D9A441"/>
+                </a:solidFill>
+                <a:latin typeface="Arial"/>
+              </a:rPr>
+              <a:t>REFERENCE   ·   </a:t>
+            </a:r>
+            <a:r>
+              <a:rPr sz="1500" b="1">
+                <a:solidFill>
+                  <a:srgbClr val="FFFFFF"/>
+                </a:solidFill>
+                <a:latin typeface="Arial"/>
+              </a:rPr>
+              <a:t>What change is the evidence?</a:t>
             </a:r>
           </a:p>
         </p:txBody>
@@ -11742,4 +12283,324 @@
   </a:objectDefaults>
   <a:extraClrSchemeLst/>
 </a:theme>
+</file>
+
+<file path=ppt/theme/theme2.xml><?xml version="1.0" encoding="utf-8"?>
+<a:theme xmlns:a="http://schemas.openxmlformats.org/drawingml/2006/main" name="Office Theme">
+  <a:themeElements>
+    <a:clrScheme name="Office">
+      <a:dk1>
+        <a:sysClr val="windowText" lastClr="000000"/>
+      </a:dk1>
+      <a:lt1>
+        <a:sysClr val="window" lastClr="FFFFFF"/>
+      </a:lt1>
+      <a:dk2>
+        <a:srgbClr val="1F497D"/>
+      </a:dk2>
+      <a:lt2>
+        <a:srgbClr val="EEECE1"/>
+      </a:lt2>
+      <a:accent1>
+        <a:srgbClr val="4F81BD"/>
+      </a:accent1>
+      <a:accent2>
+        <a:srgbClr val="C0504D"/>
+      </a:accent2>
+      <a:accent3>
+        <a:srgbClr val="9BBB59"/>
+      </a:accent3>
+      <a:accent4>
+        <a:srgbClr val="8064A2"/>
+      </a:accent4>
+      <a:accent5>
+        <a:srgbClr val="4BACC6"/>
+      </a:accent5>
+      <a:accent6>
+        <a:srgbClr val="F79646"/>
+      </a:accent6>
+      <a:hlink>
+        <a:srgbClr val="0000FF"/>
+      </a:hlink>
+      <a:folHlink>
+        <a:srgbClr val="800080"/>
+      </a:folHlink>
+    </a:clrScheme>
+    <a:fontScheme name="Office">
+      <a:majorFont>
+        <a:latin typeface="Calibri"/>
+        <a:ea typeface=""/>
+        <a:cs typeface=""/>
+        <a:font script="Jpan" typeface="ＭＳ Ｐゴシック"/>
+        <a:font script="Hang" typeface="맑은 고딕"/>
+        <a:font script="Hans" typeface="宋体"/>
+        <a:font script="Hant" typeface="新細明體"/>
+        <a:font script="Arab" typeface="Times New Roman"/>
+        <a:font script="Hebr" typeface="Times New Roman"/>
+        <a:font script="Thai" typeface="Angsana New"/>
+        <a:font script="Ethi" typeface="Nyala"/>
+        <a:font script="Beng" typeface="Vrinda"/>
+        <a:font script="Gujr" typeface="Shruti"/>
+        <a:font script="Khmr" typeface="MoolBoran"/>
+        <a:font script="Knda" typeface="Tunga"/>
+        <a:font script="Guru" typeface="Raavi"/>
+        <a:font script="Cans" typeface="Euphemia"/>
+        <a:font script="Cher" typeface="Plantagenet Cherokee"/>
+        <a:font script="Yiii" typeface="Microsoft Yi Baiti"/>
+        <a:font script="Tibt" typeface="Microsoft Himalaya"/>
+        <a:font script="Thaa" typeface="MV Boli"/>
+        <a:font script="Deva" typeface="Mangal"/>
+        <a:font script="Telu" typeface="Gautami"/>
+        <a:font script="Taml" typeface="Latha"/>
+        <a:font script="Syrc" typeface="Estrangelo Edessa"/>
+        <a:font script="Orya" typeface="Kalinga"/>
+        <a:font script="Mlym" typeface="Kartika"/>
+        <a:font script="Laoo" typeface="DokChampa"/>
+        <a:font script="Sinh" typeface="Iskoola Pota"/>
+        <a:font script="Mong" typeface="Mongolian Baiti"/>
+        <a:font script="Viet" typeface="Times New Roman"/>
+        <a:font script="Uigh" typeface="Microsoft Uighur"/>
+        <a:font script="Geor" typeface="Sylfaen"/>
+      </a:majorFont>
+      <a:minorFont>
+        <a:latin typeface="Calibri"/>
+        <a:ea typeface=""/>
+        <a:cs typeface=""/>
+        <a:font script="Jpan" typeface="ＭＳ Ｐゴシック"/>
+        <a:font script="Hang" typeface="맑은 고딕"/>
+        <a:font script="Hans" typeface="宋体"/>
+        <a:font script="Hant" typeface="新細明體"/>
+        <a:font script="Arab" typeface="Arial"/>
+        <a:font script="Hebr" typeface="Arial"/>
+        <a:font script="Thai" typeface="Cordia New"/>
+        <a:font script="Ethi" typeface="Nyala"/>
+        <a:font script="Beng" typeface="Vrinda"/>
+        <a:font script="Gujr" typeface="Shruti"/>
+        <a:font script="Khmr" typeface="DaunPenh"/>
+        <a:font script="Knda" typeface="Tunga"/>
+        <a:font script="Guru" typeface="Raavi"/>
+        <a:font script="Cans" typeface="Euphemia"/>
+        <a:font script="Cher" typeface="Plantagenet Cherokee"/>
+        <a:font script="Yiii" typeface="Microsoft Yi Baiti"/>
+        <a:font script="Tibt" typeface="Microsoft Himalaya"/>
+        <a:font script="Thaa" typeface="MV Boli"/>
+        <a:font script="Deva" typeface="Mangal"/>
+        <a:font script="Telu" typeface="Gautami"/>
+        <a:font script="Taml" typeface="Latha"/>
+        <a:font script="Syrc" typeface="Estrangelo Edessa"/>
+        <a:font script="Orya" typeface="Kalinga"/>
+        <a:font script="Mlym" typeface="Kartika"/>
+        <a:font script="Laoo" typeface="DokChampa"/>
+        <a:font script="Sinh" typeface="Iskoola Pota"/>
+        <a:font script="Mong" typeface="Mongolian Baiti"/>
+        <a:font script="Viet" typeface="Arial"/>
+        <a:font script="Uigh" typeface="Microsoft Uighur"/>
+        <a:font script="Geor" typeface="Sylfaen"/>
+      </a:minorFont>
+    </a:fontScheme>
+    <a:fmtScheme name="Office">
+      <a:fillStyleLst>
+        <a:solidFill>
+          <a:schemeClr val="phClr"/>
+        </a:solidFill>
+        <a:gradFill rotWithShape="1">
+          <a:gsLst>
+            <a:gs pos="0">
+              <a:schemeClr val="phClr">
+                <a:tint val="50000"/>
+                <a:satMod val="300000"/>
+              </a:schemeClr>
+            </a:gs>
+            <a:gs pos="35000">
+              <a:schemeClr val="phClr">
+                <a:tint val="37000"/>
+                <a:satMod val="300000"/>
+              </a:schemeClr>
+            </a:gs>
+            <a:gs pos="100000">
+              <a:schemeClr val="phClr">
+                <a:tint val="15000"/>
+                <a:satMod val="350000"/>
+              </a:schemeClr>
+            </a:gs>
+          </a:gsLst>
+          <a:lin ang="16200000" scaled="1"/>
+        </a:gradFill>
+        <a:gradFill rotWithShape="1">
+          <a:gsLst>
+            <a:gs pos="0">
+              <a:schemeClr val="phClr">
+                <a:tint val="100000"/>
+                <a:shade val="100000"/>
+                <a:satMod val="130000"/>
+              </a:schemeClr>
+            </a:gs>
+            <a:gs pos="100000">
+              <a:schemeClr val="phClr">
+                <a:tint val="50000"/>
+                <a:shade val="100000"/>
+                <a:satMod val="350000"/>
+              </a:schemeClr>
+            </a:gs>
+          </a:gsLst>
+          <a:lin ang="16200000" scaled="0"/>
+        </a:gradFill>
+      </a:fillStyleLst>
+      <a:lnStyleLst>
+        <a:ln w="9525" cap="flat" cmpd="sng" algn="ctr">
+          <a:solidFill>
+            <a:schemeClr val="phClr">
+              <a:shade val="95000"/>
+              <a:satMod val="105000"/>
+            </a:schemeClr>
+          </a:solidFill>
+          <a:prstDash val="solid"/>
+        </a:ln>
+        <a:ln w="25400" cap="flat" cmpd="sng" algn="ctr">
+          <a:solidFill>
+            <a:schemeClr val="phClr"/>
+          </a:solidFill>
+          <a:prstDash val="solid"/>
+        </a:ln>
+        <a:ln w="38100" cap="flat" cmpd="sng" algn="ctr">
+          <a:solidFill>
+            <a:schemeClr val="phClr"/>
+          </a:solidFill>
+          <a:prstDash val="solid"/>
+        </a:ln>
+      </a:lnStyleLst>
+      <a:effectStyleLst>
+        <a:effectStyle>
+          <a:effectLst>
+            <a:outerShdw blurRad="40000" dist="20000" dir="5400000" rotWithShape="0">
+              <a:srgbClr val="000000">
+                <a:alpha val="38000"/>
+              </a:srgbClr>
+            </a:outerShdw>
+          </a:effectLst>
+        </a:effectStyle>
+        <a:effectStyle>
+          <a:effectLst>
+            <a:outerShdw blurRad="40000" dist="23000" dir="5400000" rotWithShape="0">
+              <a:srgbClr val="000000">
+                <a:alpha val="35000"/>
+              </a:srgbClr>
+            </a:outerShdw>
+          </a:effectLst>
+        </a:effectStyle>
+        <a:effectStyle>
+          <a:effectLst>
+            <a:outerShdw blurRad="40000" dist="23000" dir="5400000" rotWithShape="0">
+              <a:srgbClr val="000000">
+                <a:alpha val="35000"/>
+              </a:srgbClr>
+            </a:outerShdw>
+          </a:effectLst>
+          <a:scene3d>
+            <a:camera prst="orthographicFront">
+              <a:rot lat="0" lon="0" rev="0"/>
+            </a:camera>
+            <a:lightRig rig="threePt" dir="t">
+              <a:rot lat="0" lon="0" rev="1200000"/>
+            </a:lightRig>
+          </a:scene3d>
+          <a:sp3d>
+            <a:bevelT w="63500" h="25400"/>
+          </a:sp3d>
+        </a:effectStyle>
+      </a:effectStyleLst>
+      <a:bgFillStyleLst>
+        <a:solidFill>
+          <a:schemeClr val="phClr"/>
+        </a:solidFill>
+        <a:gradFill rotWithShape="1">
+          <a:gsLst>
+            <a:gs pos="0">
+              <a:schemeClr val="phClr">
+                <a:tint val="40000"/>
+                <a:satMod val="350000"/>
+              </a:schemeClr>
+            </a:gs>
+            <a:gs pos="40000">
+              <a:schemeClr val="phClr">
+                <a:tint val="45000"/>
+                <a:shade val="99000"/>
+                <a:satMod val="350000"/>
+              </a:schemeClr>
+            </a:gs>
+            <a:gs pos="100000">
+              <a:schemeClr val="phClr">
+                <a:shade val="20000"/>
+                <a:satMod val="255000"/>
+              </a:schemeClr>
+            </a:gs>
+          </a:gsLst>
+          <a:path path="circle">
+            <a:fillToRect l="50000" t="-80000" r="50000" b="180000"/>
+          </a:path>
+        </a:gradFill>
+        <a:gradFill rotWithShape="1">
+          <a:gsLst>
+            <a:gs pos="0">
+              <a:schemeClr val="phClr">
+                <a:tint val="80000"/>
+                <a:satMod val="300000"/>
+              </a:schemeClr>
+            </a:gs>
+            <a:gs pos="100000">
+              <a:schemeClr val="phClr">
+                <a:shade val="30000"/>
+                <a:satMod val="200000"/>
+              </a:schemeClr>
+            </a:gs>
+          </a:gsLst>
+          <a:path path="circle">
+            <a:fillToRect l="50000" t="50000" r="50000" b="50000"/>
+          </a:path>
+        </a:gradFill>
+      </a:bgFillStyleLst>
+    </a:fmtScheme>
+  </a:themeElements>
+  <a:objectDefaults>
+    <a:spDef>
+      <a:spPr/>
+      <a:bodyPr/>
+      <a:lstStyle/>
+      <a:style>
+        <a:lnRef idx="1">
+          <a:schemeClr val="accent1"/>
+        </a:lnRef>
+        <a:fillRef idx="3">
+          <a:schemeClr val="accent1"/>
+        </a:fillRef>
+        <a:effectRef idx="2">
+          <a:schemeClr val="accent1"/>
+        </a:effectRef>
+        <a:fontRef idx="minor">
+          <a:schemeClr val="lt1"/>
+        </a:fontRef>
+      </a:style>
+    </a:spDef>
+    <a:lnDef>
+      <a:spPr/>
+      <a:bodyPr/>
+      <a:lstStyle/>
+      <a:style>
+        <a:lnRef idx="2">
+          <a:schemeClr val="accent1"/>
+        </a:lnRef>
+        <a:fillRef idx="0">
+          <a:schemeClr val="accent1"/>
+        </a:fillRef>
+        <a:effectRef idx="1">
+          <a:schemeClr val="accent1"/>
+        </a:effectRef>
+        <a:fontRef idx="minor">
+          <a:schemeClr val="tx1"/>
+        </a:fontRef>
+      </a:style>
+    </a:lnDef>
+  </a:objectDefaults>
+  <a:extraClrSchemeLst/>
+</a:theme>
 </file>
--- a/production/slides/01-ch1-energy-causes-change-slides.pptx
+++ b/production/slides/01-ch1-energy-causes-change-slides.pptx
@@ -51,7 +51,7 @@
     <p:sldId id="299" r:id="rId51"/>
     <p:sldId id="300" r:id="rId52"/>
   </p:sldIdLst>
-  <p:sldSz cx="12191695" cy="6858000" type="screen4x3"/>
+  <p:sldSz cx="12191695" cy="6858000"/>
   <p:notesSz cx="6858000" cy="9144000"/>
   <p:defaultTextStyle>
     <a:defPPr>
@@ -551,7 +551,12 @@
           </a:p>
           <a:p>
             <a:r>
-              <a:t>TIME 2 min</a:t>
+              <a:t>TIME 1 min</a:t>
+            </a:r>
+          </a:p>
+          <a:p>
+            <a:r>
+              <a:t>PLAN Session 1 (Mon 10/12) · REQUIRED · 1 min</a:t>
             </a:r>
           </a:p>
           <a:p>
@@ -572,6 +577,11 @@
           <a:p>
             <a:r>
               <a:t>NEXT Flip the lights as you open the Big Question.</a:t>
+            </a:r>
+          </a:p>
+          <a:p>
+            <a:r>
+              <a:t>SESSIONS Mon: slides 1-3, 6-16 (optional 4-5) · Tue: slides 2, 17, 19-27 (18 is OPTIONAL) · Fri: slides 2 then 28-31, 33 (optional 32), then the quiz. Slides 34-45 = optional review.</a:t>
             </a:r>
           </a:p>
         </p:txBody>
@@ -646,7 +656,12 @@
           </a:p>
           <a:p>
             <a:r>
-              <a:t>TIME 4 min</a:t>
+              <a:t>TIME 3 min</a:t>
+            </a:r>
+          </a:p>
+          <a:p>
+            <a:r>
+              <a:t>PLAN Session 1 (Mon 10/12) · REQUIRED · 3 min</a:t>
             </a:r>
           </a:p>
           <a:p>
@@ -746,7 +761,12 @@
           </a:p>
           <a:p>
             <a:r>
-              <a:t>TIME 3 min</a:t>
+              <a:t>TIME 2 min</a:t>
+            </a:r>
+          </a:p>
+          <a:p>
+            <a:r>
+              <a:t>PLAN Session 1 (Mon 10/12) · REQUIRED · 2 min</a:t>
             </a:r>
           </a:p>
           <a:p>
@@ -846,7 +866,12 @@
           </a:p>
           <a:p>
             <a:r>
-              <a:t>TIME 1 min</a:t>
+              <a:t>TIME 0.5 min</a:t>
+            </a:r>
+          </a:p>
+          <a:p>
+            <a:r>
+              <a:t>PLAN Session 1 (Mon 10/12) · REQUIRED · 0.5 min</a:t>
             </a:r>
           </a:p>
           <a:p>
@@ -936,7 +961,12 @@
           </a:p>
           <a:p>
             <a:r>
-              <a:t>TIME 3 min</a:t>
+              <a:t>TIME 1 min</a:t>
+            </a:r>
+          </a:p>
+          <a:p>
+            <a:r>
+              <a:t>PLAN Session 1 (Mon 10/12) · REQUIRED · 1 min</a:t>
             </a:r>
           </a:p>
           <a:p>
@@ -1041,17 +1071,32 @@
           </a:p>
           <a:p>
             <a:r>
+              <a:t>PLAN Session 1 (Mon 10/12) · REQUIRED · 3 min</a:t>
+            </a:r>
+          </a:p>
+          <a:p>
+            <a:r>
               <a:t>STUDENT RESOURCE Reader p.2</a:t>
             </a:r>
           </a:p>
           <a:p>
             <a:r>
-              <a:t>ASK Trace the arrow: energy causes a change, the change is evidence.</a:t>
-            </a:r>
-          </a:p>
-          <a:p>
-            <a:r>
-              <a:t>LISTEN FOR students using 'evidence' not 'proof'</a:t>
+              <a:t>ASK What changes can you find at the seashore? What are those changes a clue about?</a:t>
+            </a:r>
+          </a:p>
+          <a:p>
+            <a:r>
+              <a:t>LISTEN FOR 'evidence' / 'a clue' / 'energy is there'</a:t>
+            </a:r>
+          </a:p>
+          <a:p>
+            <a:r>
+              <a:t>LANGUAGE The Reader says 'evidence, or proof.' Teach and use the word EVIDENCE (it is in the Big Question). If a student says 'proof', accept it and restate: 'Yes - we say evidence.'</a:t>
+            </a:r>
+          </a:p>
+          <a:p>
+            <a:r>
+              <a:t>REVEAL Keep the third box as '?' - students name it on the next slide's notes, then slide 16 completes the model.</a:t>
             </a:r>
           </a:p>
           <a:p>
@@ -1131,7 +1176,12 @@
           </a:p>
           <a:p>
             <a:r>
-              <a:t>TIME 4 min</a:t>
+              <a:t>TIME 2 min</a:t>
+            </a:r>
+          </a:p>
+          <a:p>
+            <a:r>
+              <a:t>PLAN Session 1 (Mon 10/12) · REQUIRED · 2 min</a:t>
             </a:r>
           </a:p>
           <a:p>
@@ -1141,12 +1191,12 @@
           </a:p>
           <a:p>
             <a:r>
-              <a:t>ASK Fill in the three blanks.</a:t>
-            </a:r>
-          </a:p>
-          <a:p>
-            <a:r>
-              <a:t>LISTEN FOR cause · change · evidence</a:t>
+              <a:t>ASK Fill in the one blank in the sentence. The last box of the model on the notes page is empty on purpose - do not fill it yet.</a:t>
+            </a:r>
+          </a:p>
+          <a:p>
+            <a:r>
+              <a:t>LISTEN FOR evidence</a:t>
             </a:r>
           </a:p>
           <a:p>
@@ -1156,7 +1206,7 @@
           </a:p>
           <a:p>
             <a:r>
-              <a:t>NEXT Check answers.</a:t>
+              <a:t>NEXT Check answer.</a:t>
             </a:r>
           </a:p>
         </p:txBody>
@@ -1236,17 +1286,22 @@
           </a:p>
           <a:p>
             <a:r>
+              <a:t>PLAN Session 1 (Mon 10/12) · REQUIRED · 1 min</a:t>
+            </a:r>
+          </a:p>
+          <a:p>
+            <a:r>
               <a:t>STUDENT RESOURCE Guided Notes N1</a:t>
             </a:r>
           </a:p>
           <a:p>
             <a:r>
-              <a:t>REVEAL cause · change · evidence</a:t>
-            </a:r>
-          </a:p>
-          <a:p>
-            <a:r>
-              <a:t>NEXT Forms of energy (N2).</a:t>
+              <a:t>REVEAL evidence (accept 'proof' once, then restate 'evidence'). Students check their sentence, then copy the word into the empty last box of the model on the notes page.</a:t>
+            </a:r>
+          </a:p>
+          <a:p>
+            <a:r>
+              <a:t>NEXT Close Session 1. Session 2 opens on slide 2 (the Big Question).</a:t>
             </a:r>
           </a:p>
         </p:txBody>
@@ -1321,7 +1376,12 @@
           </a:p>
           <a:p>
             <a:r>
-              <a:t>TIME 4 min</a:t>
+              <a:t>TIME 3 min</a:t>
+            </a:r>
+          </a:p>
+          <a:p>
+            <a:r>
+              <a:t>PLAN Session 2 (Tue 10/13) · REQUIRED · 3 min</a:t>
             </a:r>
           </a:p>
           <a:p>
@@ -1337,6 +1397,11 @@
           <a:p>
             <a:r>
               <a:t>LISTEN FOR motion, sound, light, heat, electrical</a:t>
+            </a:r>
+          </a:p>
+          <a:p>
+            <a:r>
+              <a:t>REVEAL Model ONLY the motion example. Do not supply examples for the other four forms - students write their own on slide 19.</a:t>
             </a:r>
           </a:p>
           <a:p>
@@ -1421,6 +1486,11 @@
           </a:p>
           <a:p>
             <a:r>
+              <a:t>PLAN Session 2 (Tue 10/13) · OPTIONAL - skip freely · 2 min</a:t>
+            </a:r>
+          </a:p>
+          <a:p>
+            <a:r>
               <a:t>STUDENT RESOURCE Reader p.3</a:t>
             </a:r>
           </a:p>
@@ -1431,7 +1501,7 @@
           </a:p>
           <a:p>
             <a:r>
-              <a:t>LISTEN FOR motion, sound, and maybe heat</a:t>
+              <a:t>LISTEN FOR motion, sound, and maybe heat (students name them - not shown on the slide)</a:t>
             </a:r>
           </a:p>
           <a:p>
@@ -1516,17 +1586,27 @@
           </a:p>
           <a:p>
             <a:r>
+              <a:t>PLAN Session 2 (Tue 10/13) · REQUIRED · 5 min</a:t>
+            </a:r>
+          </a:p>
+          <a:p>
+            <a:r>
               <a:t>STUDENT RESOURCE Guided Notes N2 (Reader p.3)</a:t>
             </a:r>
           </a:p>
           <a:p>
             <a:r>
-              <a:t>ASK Write or draw one example per form.</a:t>
-            </a:r>
-          </a:p>
-          <a:p>
-            <a:r>
-              <a:t>LISTEN FOR carousel examples or clap examples</a:t>
+              <a:t>ASK Write one example per form. Then turn &amp; talk: share two examples with a partner and add one new idea from your partner.</a:t>
+            </a:r>
+          </a:p>
+          <a:p>
+            <a:r>
+              <a:t>LISTEN FOR carousel examples, clap examples, home/school examples - accept any real example that shows a change</a:t>
+            </a:r>
+          </a:p>
+          <a:p>
+            <a:r>
+              <a:t>REVEAL There is no answer slide for N2. Circulate; use student examples as the check.</a:t>
             </a:r>
           </a:p>
           <a:p>
@@ -1606,7 +1686,12 @@
           </a:p>
           <a:p>
             <a:r>
-              <a:t>TIME 3 min</a:t>
+              <a:t>TIME 2 min</a:t>
+            </a:r>
+          </a:p>
+          <a:p>
+            <a:r>
+              <a:t>PLAN Session 1 (Mon 10/12) · REQUIRED · 2 min · RE-ENTRY: Sessions 2 and 3 also open on this slide (re-read the Big Question; ask 'What evidence have we collected so far?') - 1 / 0.5 min</a:t>
             </a:r>
           </a:p>
           <a:p>
@@ -1631,7 +1716,7 @@
           </a:p>
           <a:p>
             <a:r>
-              <a:t>NEXT My first thinking.</a:t>
+              <a:t>NEXT Session 1: My first thinking (slide 3) · Session 2: Forms of energy (slide 17) · Session 3: Recognizing evidence (slide 28).</a:t>
             </a:r>
           </a:p>
         </p:txBody>
@@ -1711,17 +1796,22 @@
           </a:p>
           <a:p>
             <a:r>
+              <a:t>PLAN Session 2 (Tue 10/13) · REQUIRED · 3 min</a:t>
+            </a:r>
+          </a:p>
+          <a:p>
+            <a:r>
               <a:t>STUDENT RESOURCE Guided Notes V2 (Reader p.4)</a:t>
             </a:r>
           </a:p>
           <a:p>
             <a:r>
-              <a:t>ASK Does a battery have energy if it is sitting still?</a:t>
-            </a:r>
-          </a:p>
-          <a:p>
-            <a:r>
-              <a:t>LISTEN FOR 'yes — it can cause change later'</a:t>
+              <a:t>ASK What does the word 'later' tell us about when the change can happen? (Save examples for slide 23.)</a:t>
+            </a:r>
+          </a:p>
+          <a:p>
+            <a:r>
+              <a:t>LISTEN FOR 'not right now - after'</a:t>
             </a:r>
           </a:p>
           <a:p>
@@ -1806,7 +1896,12 @@
           </a:p>
           <a:p>
             <a:r>
-              <a:t>TIME 2 min</a:t>
+              <a:t>TIME 1 min</a:t>
+            </a:r>
+          </a:p>
+          <a:p>
+            <a:r>
+              <a:t>PLAN Session 2 (Tue 10/13) · REQUIRED · 1 min</a:t>
             </a:r>
           </a:p>
           <a:p>
@@ -1906,7 +2001,12 @@
           </a:p>
           <a:p>
             <a:r>
-              <a:t>TIME 1 min</a:t>
+              <a:t>TIME 0.5 min</a:t>
+            </a:r>
+          </a:p>
+          <a:p>
+            <a:r>
+              <a:t>PLAN Session 2 (Tue 10/13) · REQUIRED · 0.5 min</a:t>
             </a:r>
           </a:p>
           <a:p>
@@ -1996,7 +2096,12 @@
           </a:p>
           <a:p>
             <a:r>
-              <a:t>TIME 3 min</a:t>
+              <a:t>TIME 2 min</a:t>
+            </a:r>
+          </a:p>
+          <a:p>
+            <a:r>
+              <a:t>PLAN Session 2 (Tue 10/13) · REQUIRED · 2 min</a:t>
             </a:r>
           </a:p>
           <a:p>
@@ -2006,12 +2111,17 @@
           </a:p>
           <a:p>
             <a:r>
-              <a:t>ASK Does a still battery have energy?</a:t>
-            </a:r>
-          </a:p>
-          <a:p>
-            <a:r>
-              <a:t>LISTEN FOR 'yes, stored energy'</a:t>
+              <a:t>ASK Does a still battery have energy? Take yes/no predictions and reasons - do not confirm yet.</a:t>
+            </a:r>
+          </a:p>
+          <a:p>
+            <a:r>
+              <a:t>LISTEN FOR 'yes' / 'no' with a reason; accept any prediction</a:t>
+            </a:r>
+          </a:p>
+          <a:p>
+            <a:r>
+              <a:t>REVEAL After students predict, read the battery paragraph on Reader p. 4 aloud: the chemicals inside a battery store energy. The screen stays a question; slide 25 shows the Reader fact.</a:t>
             </a:r>
           </a:p>
           <a:p>
@@ -2096,7 +2206,12 @@
           </a:p>
           <a:p>
             <a:r>
-              <a:t>TIME 3 min</a:t>
+              <a:t>TIME 2 min</a:t>
+            </a:r>
+          </a:p>
+          <a:p>
+            <a:r>
+              <a:t>PLAN Session 2 (Tue 10/13) · REQUIRED · 2 min</a:t>
             </a:r>
           </a:p>
           <a:p>
@@ -2196,7 +2311,17 @@
           </a:p>
           <a:p>
             <a:r>
+              <a:t>PLAN Session 2 (Tue 10/13) · REQUIRED · 2 min</a:t>
+            </a:r>
+          </a:p>
+          <a:p>
+            <a:r>
               <a:t>STUDENT RESOURCE Reader p.4</a:t>
+            </a:r>
+          </a:p>
+          <a:p>
+            <a:r>
+              <a:t>REVEAL (closes the slide 23 prediction) The Reader says chemicals inside a battery store energy - so yes, a still battery has energy. Do not say what the flashlight does yet: students write that in the N3 table.</a:t>
             </a:r>
           </a:p>
           <a:p>
@@ -2286,7 +2411,12 @@
           </a:p>
           <a:p>
             <a:r>
-              <a:t>TIME 5 min</a:t>
+              <a:t>TIME 4 min</a:t>
+            </a:r>
+          </a:p>
+          <a:p>
+            <a:r>
+              <a:t>PLAN Session 2 (Tue 10/13) · REQUIRED · 4 min</a:t>
             </a:r>
           </a:p>
           <a:p>
@@ -2391,17 +2521,22 @@
           </a:p>
           <a:p>
             <a:r>
+              <a:t>PLAN Session 2 (Tue 10/13) · REQUIRED · 1 min</a:t>
+            </a:r>
+          </a:p>
+          <a:p>
+            <a:r>
               <a:t>STUDENT RESOURCE Guided Notes N3</a:t>
             </a:r>
           </a:p>
           <a:p>
             <a:r>
-              <a:t>REVEAL position</a:t>
-            </a:r>
-          </a:p>
-          <a:p>
-            <a:r>
-              <a:t>NEXT Recognizing evidence (N4).</a:t>
+              <a:t>REVEAL position. Table cells show SAMPLE answers only - accept any reasonable later change.</a:t>
+            </a:r>
+          </a:p>
+          <a:p>
+            <a:r>
+              <a:t>NEXT Close Session 2. Session 3 opens on slide 2 (the Big Question), then N4.</a:t>
             </a:r>
           </a:p>
         </p:txBody>
@@ -2481,22 +2616,32 @@
           </a:p>
           <a:p>
             <a:r>
-              <a:t>STUDENT RESOURCE Reader pp.1–6</a:t>
-            </a:r>
-          </a:p>
-          <a:p>
-            <a:r>
-              <a:t>ASK How do we know energy is involved when we can't see it?</a:t>
-            </a:r>
-          </a:p>
-          <a:p>
-            <a:r>
-              <a:t>LISTEN FOR 'we see the change'</a:t>
-            </a:r>
-          </a:p>
-          <a:p>
-            <a:r>
-              <a:t>MISCONCEPTION Evidence, not proof.</a:t>
+              <a:t>PLAN Session 3 (Fri 10/16) · REQUIRED · 2 min</a:t>
+            </a:r>
+          </a:p>
+          <a:p>
+            <a:r>
+              <a:t>STUDENT RESOURCE Reader pp.1–5</a:t>
+            </a:r>
+          </a:p>
+          <a:p>
+            <a:r>
+              <a:t>ASK What clues could show that energy is at work? (Do not give the CHECK YOUR THINKING answer yet.)</a:t>
+            </a:r>
+          </a:p>
+          <a:p>
+            <a:r>
+              <a:t>LISTEN FOR movement, sound, light, heat, something different</a:t>
+            </a:r>
+          </a:p>
+          <a:p>
+            <a:r>
+              <a:t>LANGUAGE Say evidence (not proof).</a:t>
+            </a:r>
+          </a:p>
+          <a:p>
+            <a:r>
+              <a:t>FRIDAY CLOCK The quiz is handed out NO LATER THAN MINUTE 12. Priority: N4 draw &gt; BQ NOW I THINK &gt; CHECK YOUR THINKING. Minute 6: N4 should be done.</a:t>
             </a:r>
           </a:p>
           <a:p>
@@ -2576,12 +2721,17 @@
           </a:p>
           <a:p>
             <a:r>
-              <a:t>TIME 4 min</a:t>
-            </a:r>
-          </a:p>
-          <a:p>
-            <a:r>
-              <a:t>STUDENT RESOURCE Guided Notes N4 (Reader pp.1–6)</a:t>
+              <a:t>TIME 3.5 min</a:t>
+            </a:r>
+          </a:p>
+          <a:p>
+            <a:r>
+              <a:t>PLAN Session 3 (Fri 10/16) · REQUIRED · 3.5 min</a:t>
+            </a:r>
+          </a:p>
+          <a:p>
+            <a:r>
+              <a:t>STUDENT RESOURCE Guided Notes N4 (Reader pp.1–5)</a:t>
             </a:r>
           </a:p>
           <a:p>
@@ -2676,6 +2826,11 @@
           </a:p>
           <a:p>
             <a:r>
+              <a:t>PLAN Session 1 (Mon 10/12) · REQUIRED · 2 min</a:t>
+            </a:r>
+          </a:p>
+          <a:p>
+            <a:r>
               <a:t>STUDENT RESOURCE Guided Notes p.1 top</a:t>
             </a:r>
           </a:p>
@@ -2771,7 +2926,12 @@
           </a:p>
           <a:p>
             <a:r>
-              <a:t>TIME 3 min</a:t>
+              <a:t>TIME 2.5 min</a:t>
+            </a:r>
+          </a:p>
+          <a:p>
+            <a:r>
+              <a:t>PLAN Session 3 (Fri 10/16) · REQUIRED · 2.5 min</a:t>
             </a:r>
           </a:p>
           <a:p>
@@ -2781,12 +2941,22 @@
           </a:p>
           <a:p>
             <a:r>
+              <a:t>FRIDAY CLOCK Past minute 6 when you reach this slide? SKIP slides 30-31 (CHECK YOUR THINKING goes home / catch-up) and go straight to slide 33.</a:t>
+            </a:r>
+          </a:p>
+          <a:p>
+            <a:r>
               <a:t>ASK Complete the sentence starter.</a:t>
             </a:r>
           </a:p>
           <a:p>
             <a:r>
               <a:t>LISTEN FOR 'a change, like a ball starting to move'</a:t>
+            </a:r>
+          </a:p>
+          <a:p>
+            <a:r>
+              <a:t>REVEAL Do not show slide 31 until most students have written.</a:t>
             </a:r>
           </a:p>
           <a:p>
@@ -2866,7 +3036,12 @@
           </a:p>
           <a:p>
             <a:r>
-              <a:t>TIME 2 min</a:t>
+              <a:t>TIME 1 min</a:t>
+            </a:r>
+          </a:p>
+          <a:p>
+            <a:r>
+              <a:t>PLAN Session 3 (Fri 10/16) · REQUIRED · 1 min</a:t>
             </a:r>
           </a:p>
           <a:p>
@@ -2956,7 +3131,12 @@
           </a:p>
           <a:p>
             <a:r>
-              <a:t>TIME 3 min</a:t>
+              <a:t>TIME 2 min</a:t>
+            </a:r>
+          </a:p>
+          <a:p>
+            <a:r>
+              <a:t>PLAN Session 3 (Fri 10/16) · OPTIONAL - skip freely · 2 min</a:t>
             </a:r>
           </a:p>
           <a:p>
@@ -2976,7 +3156,7 @@
           </a:p>
           <a:p>
             <a:r>
-              <a:t>REVEAL The toy car starts to roll — a change.</a:t>
+              <a:t>REVEAL The toy car starts to roll — a change. Then say aloud: 'Look for a change — that is the evidence of energy.' (Spoken after the vote; it is not on the question slide.)</a:t>
             </a:r>
           </a:p>
           <a:p>
@@ -3056,7 +3236,12 @@
           </a:p>
           <a:p>
             <a:r>
-              <a:t>TIME 3 min</a:t>
+              <a:t>TIME 2.5 min</a:t>
+            </a:r>
+          </a:p>
+          <a:p>
+            <a:r>
+              <a:t>PLAN Session 3 (Fri 10/16) · REQUIRED · 2.5 min</a:t>
             </a:r>
           </a:p>
           <a:p>
@@ -3066,6 +3251,11 @@
           </a:p>
           <a:p>
             <a:r>
+              <a:t>FRIDAY CLOCK Start this slide by minute 9.5; if you are later, do NOT start it before the quiz - students write it after handing in the quiz or at home / in catch-up. The quiz is handed out by minute 12.</a:t>
+            </a:r>
+          </a:p>
+          <a:p>
+            <a:r>
               <a:t>ASK Answer the Big Question now.</a:t>
             </a:r>
           </a:p>
@@ -3076,7 +3266,7 @@
           </a:p>
           <a:p>
             <a:r>
-              <a:t>NEXT End-of-chapter review.</a:t>
+              <a:t>NEXT Friday quiz (Session 3). Optional end-of-chapter review slides 34-45 are for a review day or FLEX only.</a:t>
             </a:r>
           </a:p>
         </p:txBody>
@@ -3151,6 +3341,16 @@
           </a:p>
           <a:p>
             <a:r>
+              <a:t>TIME 1 min</a:t>
+            </a:r>
+          </a:p>
+          <a:p>
+            <a:r>
+              <a:t>PLAN OPTIONAL · end-of-chapter review (review day / Friday FLEX only; never inside a required block) · 1 min</a:t>
+            </a:r>
+          </a:p>
+          <a:p>
+            <a:r>
               <a:t>STUDENT RESOURCE none</a:t>
             </a:r>
           </a:p>
@@ -3241,6 +3441,16 @@
           </a:p>
           <a:p>
             <a:r>
+              <a:t>TIME 0.5 min</a:t>
+            </a:r>
+          </a:p>
+          <a:p>
+            <a:r>
+              <a:t>PLAN OPTIONAL · end-of-chapter review (review day / Friday FLEX only; never inside a required block) · 0.5 min</a:t>
+            </a:r>
+          </a:p>
+          <a:p>
+            <a:r>
               <a:t>REVEAL the ability to cause change</a:t>
             </a:r>
           </a:p>
@@ -3321,6 +3531,16 @@
           </a:p>
           <a:p>
             <a:r>
+              <a:t>TIME 1 min</a:t>
+            </a:r>
+          </a:p>
+          <a:p>
+            <a:r>
+              <a:t>PLAN OPTIONAL · end-of-chapter review (review day / Friday FLEX only; never inside a required block) · 1 min</a:t>
+            </a:r>
+          </a:p>
+          <a:p>
+            <a:r>
               <a:t>STUDENT RESOURCE none</a:t>
             </a:r>
           </a:p>
@@ -3411,6 +3631,16 @@
           </a:p>
           <a:p>
             <a:r>
+              <a:t>TIME 0.5 min</a:t>
+            </a:r>
+          </a:p>
+          <a:p>
+            <a:r>
+              <a:t>PLAN OPTIONAL · end-of-chapter review (review day / Friday FLEX only; never inside a required block) · 0.5 min</a:t>
+            </a:r>
+          </a:p>
+          <a:p>
+            <a:r>
               <a:t>REVEAL It gets shorter and sharper</a:t>
             </a:r>
           </a:p>
@@ -3491,6 +3721,16 @@
           </a:p>
           <a:p>
             <a:r>
+              <a:t>TIME 1 min</a:t>
+            </a:r>
+          </a:p>
+          <a:p>
+            <a:r>
+              <a:t>PLAN OPTIONAL · end-of-chapter review (review day / Friday FLEX only; never inside a required block) · 1 min</a:t>
+            </a:r>
+          </a:p>
+          <a:p>
+            <a:r>
               <a:t>STUDENT RESOURCE none</a:t>
             </a:r>
           </a:p>
@@ -3581,6 +3821,16 @@
           </a:p>
           <a:p>
             <a:r>
+              <a:t>TIME 0.5 min</a:t>
+            </a:r>
+          </a:p>
+          <a:p>
+            <a:r>
+              <a:t>PLAN OPTIONAL · end-of-chapter review (review day / Friday FLEX only; never inside a required block) · 0.5 min</a:t>
+            </a:r>
+          </a:p>
+          <a:p>
+            <a:r>
               <a:t>REVEAL A stretched rubber band</a:t>
             </a:r>
           </a:p>
@@ -3661,7 +3911,12 @@
           </a:p>
           <a:p>
             <a:r>
-              <a:t>TIME 3 min</a:t>
+              <a:t>TIME 2 min</a:t>
+            </a:r>
+          </a:p>
+          <a:p>
+            <a:r>
+              <a:t>PLAN Session 1 (Mon 10/12) · OPTIONAL - skip freely · 2 min</a:t>
             </a:r>
           </a:p>
           <a:p>
@@ -3761,6 +4016,16 @@
           </a:p>
           <a:p>
             <a:r>
+              <a:t>TIME 1 min</a:t>
+            </a:r>
+          </a:p>
+          <a:p>
+            <a:r>
+              <a:t>PLAN OPTIONAL · end-of-chapter review (review day / Friday FLEX only; never inside a required block) · 1 min</a:t>
+            </a:r>
+          </a:p>
+          <a:p>
+            <a:r>
               <a:t>STUDENT RESOURCE none</a:t>
             </a:r>
           </a:p>
@@ -3851,6 +4116,16 @@
           </a:p>
           <a:p>
             <a:r>
+              <a:t>TIME 0.5 min</a:t>
+            </a:r>
+          </a:p>
+          <a:p>
+            <a:r>
+              <a:t>PLAN OPTIONAL · end-of-chapter review (review day / Friday FLEX only; never inside a required block) · 0.5 min</a:t>
+            </a:r>
+          </a:p>
+          <a:p>
+            <a:r>
               <a:t>REVEAL motion and sound</a:t>
             </a:r>
           </a:p>
@@ -3931,6 +4206,16 @@
           </a:p>
           <a:p>
             <a:r>
+              <a:t>TIME 1 min</a:t>
+            </a:r>
+          </a:p>
+          <a:p>
+            <a:r>
+              <a:t>PLAN OPTIONAL · end-of-chapter review (review day / Friday FLEX only; never inside a required block) · 1 min</a:t>
+            </a:r>
+          </a:p>
+          <a:p>
+            <a:r>
               <a:t>STUDENT RESOURCE none</a:t>
             </a:r>
           </a:p>
@@ -4021,6 +4306,16 @@
           </a:p>
           <a:p>
             <a:r>
+              <a:t>TIME 0.5 min</a:t>
+            </a:r>
+          </a:p>
+          <a:p>
+            <a:r>
+              <a:t>PLAN OPTIONAL · end-of-chapter review (review day / Friday FLEX only; never inside a required block) · 0.5 min</a:t>
+            </a:r>
+          </a:p>
+          <a:p>
+            <a:r>
               <a:t>REVEAL We observe a change happen</a:t>
             </a:r>
           </a:p>
@@ -4101,6 +4396,16 @@
           </a:p>
           <a:p>
             <a:r>
+              <a:t>TIME 1 min</a:t>
+            </a:r>
+          </a:p>
+          <a:p>
+            <a:r>
+              <a:t>PLAN OPTIONAL · end-of-chapter review (review day / Friday FLEX only; never inside a required block) · 1 min</a:t>
+            </a:r>
+          </a:p>
+          <a:p>
+            <a:r>
               <a:t>STUDENT RESOURCE none</a:t>
             </a:r>
           </a:p>
@@ -4191,6 +4496,16 @@
           </a:p>
           <a:p>
             <a:r>
+              <a:t>TIME 0.5 min</a:t>
+            </a:r>
+          </a:p>
+          <a:p>
+            <a:r>
+              <a:t>PLAN OPTIONAL · end-of-chapter review (review day / Friday FLEX only; never inside a required block) · 0.5 min</a:t>
+            </a:r>
+          </a:p>
+          <a:p>
+            <a:r>
               <a:t>REVEAL Yes — stored energy that can cause change later</a:t>
             </a:r>
           </a:p>
@@ -4276,6 +4591,11 @@
           </a:p>
           <a:p>
             <a:r>
+              <a:t>PLAN Session 1 (Mon 10/12) · OPTIONAL - skip freely · 2 min</a:t>
+            </a:r>
+          </a:p>
+          <a:p>
+            <a:r>
               <a:t>STUDENT RESOURCE none</a:t>
             </a:r>
           </a:p>
@@ -4366,7 +4686,12 @@
           </a:p>
           <a:p>
             <a:r>
-              <a:t>TIME 2 min</a:t>
+              <a:t>TIME 1 min</a:t>
+            </a:r>
+          </a:p>
+          <a:p>
+            <a:r>
+              <a:t>PLAN Session 1 (Mon 10/12) · REQUIRED · 1 min</a:t>
             </a:r>
           </a:p>
           <a:p>
@@ -4461,7 +4786,12 @@
           </a:p>
           <a:p>
             <a:r>
-              <a:t>TIME 2 min</a:t>
+              <a:t>TIME 1 min</a:t>
+            </a:r>
+          </a:p>
+          <a:p>
+            <a:r>
+              <a:t>PLAN Session 1 (Mon 10/12) · REQUIRED · 1 min</a:t>
             </a:r>
           </a:p>
           <a:p>
@@ -4566,6 +4896,11 @@
           </a:p>
           <a:p>
             <a:r>
+              <a:t>PLAN Session 1 (Mon 10/12) · REQUIRED · 3 min</a:t>
+            </a:r>
+          </a:p>
+          <a:p>
+            <a:r>
               <a:t>STUDENT RESOURCE none</a:t>
             </a:r>
           </a:p>
@@ -4661,7 +4996,12 @@
           </a:p>
           <a:p>
             <a:r>
-              <a:t>TIME 3 min</a:t>
+              <a:t>TIME 2 min</a:t>
+            </a:r>
+          </a:p>
+          <a:p>
+            <a:r>
+              <a:t>PLAN Session 1 (Mon 10/12) · REQUIRED · 2 min</a:t>
             </a:r>
           </a:p>
           <a:p>
@@ -4676,7 +5016,12 @@
           </a:p>
           <a:p>
             <a:r>
-              <a:t>LISTEN FOR 'we saw the change'</a:t>
+              <a:t>LISTEN FOR 'we saw the change' / 'clues'</a:t>
+            </a:r>
+          </a:p>
+          <a:p>
+            <a:r>
+              <a:t>REVEAL The word EVIDENCE is introduced from the Reader on slide 14 - do not name it here; the '?' box stays open.</a:t>
             </a:r>
           </a:p>
           <a:p>
@@ -7838,7 +8183,7 @@
         </p:nvSpPr>
         <p:spPr>
           <a:xfrm>
-            <a:off x="822960" y="2606040"/>
+            <a:off x="822960" y="2514600"/>
             <a:ext cx="10515600" cy="457200"/>
           </a:xfrm>
           <a:prstGeom prst="rect">
@@ -7858,27 +8203,66 @@
               </a:spcAft>
             </a:pPr>
             <a:r>
-              <a:rPr sz="2000" b="0" i="0">
+              <a:rPr sz="2400" b="1" i="0">
                 <a:solidFill>
                   <a:srgbClr val="D8DCE4"/>
                 </a:solidFill>
                 <a:latin typeface="Avenir Next"/>
               </a:rPr>
-              <a:t>Discovery / Evidence  ·  Where do we see energy at work?</a:t>
-            </a:r>
-          </a:p>
-        </p:txBody>
-      </p:sp>
-      <p:sp>
-        <p:nvSpPr>
-          <p:cNvPr id="6" name="Rounded Rectangle 5"/>
+              <a:t>Discovery / Evidence</a:t>
+            </a:r>
+          </a:p>
+        </p:txBody>
+      </p:sp>
+      <p:sp>
+        <p:nvSpPr>
+          <p:cNvPr id="6" name="TextBox 5"/>
+          <p:cNvSpPr txBox="1"/>
+          <p:nvPr/>
+        </p:nvSpPr>
+        <p:spPr>
+          <a:xfrm>
+            <a:off x="822960" y="2971800"/>
+            <a:ext cx="10881360" cy="548640"/>
+          </a:xfrm>
+          <a:prstGeom prst="rect">
+            <a:avLst/>
+          </a:prstGeom>
+          <a:noFill/>
+        </p:spPr>
+        <p:txBody>
+          <a:bodyPr wrap="square" anchor="t" lIns="0" rIns="0" tIns="0" bIns="0">
+            <a:spAutoFit/>
+          </a:bodyPr>
+          <a:lstStyle/>
+          <a:p>
+            <a:pPr algn="l">
+              <a:spcAft>
+                <a:spcPts val="1000"/>
+              </a:spcAft>
+            </a:pPr>
+            <a:r>
+              <a:rPr sz="2800" b="0" i="1">
+                <a:solidFill>
+                  <a:srgbClr val="FFFFFF"/>
+                </a:solidFill>
+                <a:latin typeface="Avenir Next"/>
+              </a:rPr>
+              <a:t>Where can we observe evidence of energy causing change?</a:t>
+            </a:r>
+          </a:p>
+        </p:txBody>
+      </p:sp>
+      <p:sp>
+        <p:nvSpPr>
+          <p:cNvPr id="7" name="Rounded Rectangle 6"/>
           <p:cNvSpPr/>
           <p:nvPr/>
         </p:nvSpPr>
         <p:spPr>
           <a:xfrm>
-            <a:off x="822960" y="3840480"/>
-            <a:ext cx="2011679" cy="640080"/>
+            <a:off x="822960" y="3931920"/>
+            <a:ext cx="2286000" cy="685800"/>
           </a:xfrm>
           <a:prstGeom prst="roundRect">
             <a:avLst>
@@ -7913,7 +8297,7 @@
           <a:p>
             <a:pPr algn="ctr"/>
             <a:r>
-              <a:rPr sz="2200" b="1" i="0">
+              <a:rPr sz="2400" b="1" i="0">
                 <a:solidFill>
                   <a:srgbClr val="FFFFFF"/>
                 </a:solidFill>
@@ -7926,13 +8310,13 @@
       </p:sp>
       <p:sp>
         <p:nvSpPr>
-          <p:cNvPr id="7" name="Right Arrow 6"/>
+          <p:cNvPr id="8" name="Right Arrow 7"/>
           <p:cNvSpPr/>
           <p:nvPr/>
         </p:nvSpPr>
         <p:spPr>
           <a:xfrm>
-            <a:off x="2852927" y="4014215"/>
+            <a:off x="3127248" y="4128515"/>
             <a:ext cx="374904" cy="292608"/>
           </a:xfrm>
           <a:prstGeom prst="rightArrow">
@@ -7970,14 +8354,14 @@
       </p:sp>
       <p:sp>
         <p:nvSpPr>
-          <p:cNvPr id="8" name="Rounded Rectangle 7"/>
+          <p:cNvPr id="9" name="Rounded Rectangle 8"/>
           <p:cNvSpPr/>
           <p:nvPr/>
         </p:nvSpPr>
         <p:spPr>
           <a:xfrm>
-            <a:off x="3246120" y="3840480"/>
-            <a:ext cx="2011679" cy="640080"/>
+            <a:off x="3520440" y="3931920"/>
+            <a:ext cx="2286000" cy="685800"/>
           </a:xfrm>
           <a:prstGeom prst="roundRect">
             <a:avLst>
@@ -8012,7 +8396,7 @@
           <a:p>
             <a:pPr algn="ctr"/>
             <a:r>
-              <a:rPr sz="2200" b="1" i="0">
+              <a:rPr sz="2400" b="1" i="0">
                 <a:solidFill>
                   <a:srgbClr val="FFFFFF"/>
                 </a:solidFill>
@@ -8025,13 +8409,13 @@
       </p:sp>
       <p:sp>
         <p:nvSpPr>
-          <p:cNvPr id="9" name="Right Arrow 8"/>
+          <p:cNvPr id="10" name="Right Arrow 9"/>
           <p:cNvSpPr/>
           <p:nvPr/>
         </p:nvSpPr>
         <p:spPr>
           <a:xfrm>
-            <a:off x="5276088" y="4014215"/>
+            <a:off x="5824727" y="4128515"/>
             <a:ext cx="374904" cy="292608"/>
           </a:xfrm>
           <a:prstGeom prst="rightArrow">
@@ -8069,14 +8453,14 @@
       </p:sp>
       <p:sp>
         <p:nvSpPr>
-          <p:cNvPr id="10" name="Rounded Rectangle 9"/>
+          <p:cNvPr id="11" name="Rounded Rectangle 10"/>
           <p:cNvSpPr/>
           <p:nvPr/>
         </p:nvSpPr>
         <p:spPr>
           <a:xfrm>
-            <a:off x="5669279" y="3840480"/>
-            <a:ext cx="2011679" cy="640080"/>
+            <a:off x="6217920" y="3931920"/>
+            <a:ext cx="2286000" cy="685800"/>
           </a:xfrm>
           <a:prstGeom prst="roundRect">
             <a:avLst>
@@ -8084,7 +8468,7 @@
             </a:avLst>
           </a:prstGeom>
           <a:solidFill>
-            <a:srgbClr val="1F2A5A"/>
+            <a:srgbClr val="A67C16"/>
           </a:solidFill>
           <a:ln>
             <a:noFill/>
@@ -8111,26 +8495,26 @@
           <a:p>
             <a:pPr algn="ctr"/>
             <a:r>
-              <a:rPr sz="2200" b="1" i="0">
+              <a:rPr sz="2400" b="1" i="0">
                 <a:solidFill>
                   <a:srgbClr val="FFFFFF"/>
                 </a:solidFill>
                 <a:latin typeface="Avenir Next"/>
               </a:rPr>
-              <a:t>EVIDENCE</a:t>
-            </a:r>
-          </a:p>
-        </p:txBody>
-      </p:sp>
-      <p:sp>
-        <p:nvSpPr>
-          <p:cNvPr id="11" name="TextBox 10"/>
+              <a:t>?</a:t>
+            </a:r>
+          </a:p>
+        </p:txBody>
+      </p:sp>
+      <p:sp>
+        <p:nvSpPr>
+          <p:cNvPr id="12" name="TextBox 11"/>
           <p:cNvSpPr txBox="1"/>
           <p:nvPr/>
         </p:nvSpPr>
         <p:spPr>
           <a:xfrm>
-            <a:off x="822960" y="5394960"/>
+            <a:off x="822960" y="5440680"/>
             <a:ext cx="10515600" cy="457200"/>
           </a:xfrm>
           <a:prstGeom prst="rect">
@@ -8150,7 +8534,7 @@
               </a:spcAft>
             </a:pPr>
             <a:r>
-              <a:rPr sz="2000" b="0" i="1">
+              <a:rPr sz="2400" b="0" i="1">
                 <a:solidFill>
                   <a:srgbClr val="D8DCE4"/>
                 </a:solidFill>
@@ -8163,7 +8547,7 @@
       </p:sp>
       <p:sp>
         <p:nvSpPr>
-          <p:cNvPr id="12" name="TextBox 11"/>
+          <p:cNvPr id="13" name="TextBox 12"/>
           <p:cNvSpPr txBox="1"/>
           <p:nvPr/>
         </p:nvSpPr>
@@ -8325,8 +8709,8 @@
         </p:nvSpPr>
         <p:spPr>
           <a:xfrm>
-            <a:off x="11475720" y="365760"/>
-            <a:ext cx="502920" cy="402336"/>
+            <a:off x="11430000" y="329184"/>
+            <a:ext cx="548640" cy="475488"/>
           </a:xfrm>
           <a:prstGeom prst="roundRect">
             <a:avLst>
@@ -8361,7 +8745,7 @@
           <a:p>
             <a:pPr algn="ctr"/>
             <a:r>
-              <a:rPr sz="1800" b="1" i="0">
+              <a:rPr sz="2400" b="1" i="0">
                 <a:solidFill>
                   <a:srgbClr val="FFFFFF"/>
                 </a:solidFill>
@@ -8439,7 +8823,7 @@
               </a:spcAft>
             </a:pPr>
             <a:r>
-              <a:rPr sz="2000" b="0" i="1">
+              <a:rPr sz="2400" b="0" i="1">
                 <a:solidFill>
                   <a:srgbClr val="4A5268"/>
                 </a:solidFill>
@@ -8550,8 +8934,8 @@
         </p:nvSpPr>
         <p:spPr>
           <a:xfrm>
-            <a:off x="4892040" y="2514600"/>
-            <a:ext cx="822960" cy="365760"/>
+            <a:off x="4251960" y="2441448"/>
+            <a:ext cx="1463040" cy="457200"/>
           </a:xfrm>
           <a:prstGeom prst="roundRect">
             <a:avLst>
@@ -8586,7 +8970,7 @@
           <a:p>
             <a:pPr algn="ctr"/>
             <a:r>
-              <a:rPr sz="1400" b="1" i="0">
+              <a:rPr sz="2400" b="1" i="0">
                 <a:solidFill>
                   <a:srgbClr val="1F2A5A"/>
                 </a:solidFill>
@@ -8606,7 +8990,7 @@
         <p:spPr>
           <a:xfrm>
             <a:off x="822960" y="2441448"/>
-            <a:ext cx="3886200" cy="365760"/>
+            <a:ext cx="3337560" cy="365760"/>
           </a:xfrm>
           <a:prstGeom prst="rect">
             <a:avLst/>
@@ -8625,7 +9009,7 @@
               </a:spcAft>
             </a:pPr>
             <a:r>
-              <a:rPr sz="1800" b="1" i="0">
+              <a:rPr sz="2400" b="1" i="0">
                 <a:solidFill>
                   <a:srgbClr val="7A5620"/>
                 </a:solidFill>
@@ -8703,7 +9087,7 @@
               </a:spcAft>
             </a:pPr>
             <a:r>
-              <a:rPr sz="2600" b="0" i="0">
+              <a:rPr sz="2800" b="0" i="0">
                 <a:solidFill>
                   <a:srgbClr val="1A1D26"/>
                 </a:solidFill>
@@ -8771,7 +9155,7 @@
         <p:spPr>
           <a:xfrm>
             <a:off x="960120" y="4910328"/>
-            <a:ext cx="2034540" cy="512064"/>
+            <a:ext cx="2034540" cy="566928"/>
           </a:xfrm>
           <a:prstGeom prst="roundRect">
             <a:avLst>
@@ -8806,7 +9190,7 @@
           <a:p>
             <a:pPr algn="ctr"/>
             <a:r>
-              <a:rPr sz="1500" b="1" i="0">
+              <a:rPr sz="2400" b="1" i="0">
                 <a:solidFill>
                   <a:srgbClr val="FFFFFF"/>
                 </a:solidFill>
@@ -8870,7 +9254,7 @@
         <p:spPr>
           <a:xfrm>
             <a:off x="3451860" y="4910328"/>
-            <a:ext cx="2034540" cy="512064"/>
+            <a:ext cx="2034540" cy="566928"/>
           </a:xfrm>
           <a:prstGeom prst="roundRect">
             <a:avLst>
@@ -8905,7 +9289,7 @@
           <a:p>
             <a:pPr algn="ctr"/>
             <a:r>
-              <a:rPr sz="1500" b="1" i="0">
+              <a:rPr sz="2400" b="1" i="0">
                 <a:solidFill>
                   <a:srgbClr val="FFFFFF"/>
                 </a:solidFill>
@@ -9055,8 +9439,8 @@
         </p:nvSpPr>
         <p:spPr>
           <a:xfrm>
-            <a:off x="10634472" y="2514600"/>
-            <a:ext cx="822960" cy="365760"/>
+            <a:off x="9994392" y="2441448"/>
+            <a:ext cx="1463040" cy="457200"/>
           </a:xfrm>
           <a:prstGeom prst="roundRect">
             <a:avLst>
@@ -9091,7 +9475,7 @@
           <a:p>
             <a:pPr algn="ctr"/>
             <a:r>
-              <a:rPr sz="1400" b="1" i="0">
+              <a:rPr sz="2400" b="1" i="0">
                 <a:solidFill>
                   <a:srgbClr val="1F2A5A"/>
                 </a:solidFill>
@@ -9111,7 +9495,7 @@
         <p:spPr>
           <a:xfrm>
             <a:off x="6565392" y="2441448"/>
-            <a:ext cx="3886200" cy="365760"/>
+            <a:ext cx="3337560" cy="365760"/>
           </a:xfrm>
           <a:prstGeom prst="rect">
             <a:avLst/>
@@ -9130,7 +9514,7 @@
               </a:spcAft>
             </a:pPr>
             <a:r>
-              <a:rPr sz="1800" b="1" i="0">
+              <a:rPr sz="2400" b="1" i="0">
                 <a:solidFill>
                   <a:srgbClr val="7A5620"/>
                 </a:solidFill>
@@ -9208,7 +9592,7 @@
               </a:spcAft>
             </a:pPr>
             <a:r>
-              <a:rPr sz="2600" b="0" i="0">
+              <a:rPr sz="2800" b="0" i="0">
                 <a:solidFill>
                   <a:srgbClr val="1A1D26"/>
                 </a:solidFill>
@@ -9276,7 +9660,7 @@
         <p:spPr>
           <a:xfrm>
             <a:off x="6702552" y="4910328"/>
-            <a:ext cx="2034540" cy="512064"/>
+            <a:ext cx="2034540" cy="566928"/>
           </a:xfrm>
           <a:prstGeom prst="roundRect">
             <a:avLst>
@@ -9311,7 +9695,7 @@
           <a:p>
             <a:pPr algn="ctr"/>
             <a:r>
-              <a:rPr sz="1500" b="1" i="0">
+              <a:rPr sz="2400" b="1" i="0">
                 <a:solidFill>
                   <a:srgbClr val="FFFFFF"/>
                 </a:solidFill>
@@ -9375,7 +9759,7 @@
         <p:spPr>
           <a:xfrm>
             <a:off x="9194292" y="4910328"/>
-            <a:ext cx="2034540" cy="512064"/>
+            <a:ext cx="2034540" cy="566928"/>
           </a:xfrm>
           <a:prstGeom prst="roundRect">
             <a:avLst>
@@ -9410,7 +9794,7 @@
           <a:p>
             <a:pPr algn="ctr"/>
             <a:r>
-              <a:rPr sz="1500" b="1" i="0">
+              <a:rPr sz="2400" b="1" i="0">
                 <a:solidFill>
                   <a:srgbClr val="FFFFFF"/>
                 </a:solidFill>
@@ -9624,8 +10008,8 @@
         </p:nvSpPr>
         <p:spPr>
           <a:xfrm>
-            <a:off x="11475720" y="365760"/>
-            <a:ext cx="502920" cy="402336"/>
+            <a:off x="11430000" y="329184"/>
+            <a:ext cx="548640" cy="475488"/>
           </a:xfrm>
           <a:prstGeom prst="roundRect">
             <a:avLst>
@@ -9660,7 +10044,7 @@
           <a:p>
             <a:pPr algn="ctr"/>
             <a:r>
-              <a:rPr sz="1800" b="1" i="0">
+              <a:rPr sz="2400" b="1" i="0">
                 <a:solidFill>
                   <a:srgbClr val="FFFFFF"/>
                 </a:solidFill>
@@ -9679,8 +10063,8 @@
         </p:nvSpPr>
         <p:spPr>
           <a:xfrm>
-            <a:off x="10378440" y="365760"/>
-            <a:ext cx="1051560" cy="402336"/>
+            <a:off x="9875520" y="329184"/>
+            <a:ext cx="1463040" cy="475488"/>
           </a:xfrm>
           <a:prstGeom prst="roundRect">
             <a:avLst>
@@ -9715,7 +10099,7 @@
           <a:p>
             <a:pPr algn="ctr"/>
             <a:r>
-              <a:rPr sz="1800" b="1" i="0">
+              <a:rPr sz="2400" b="1" i="0">
                 <a:solidFill>
                   <a:srgbClr val="FFFFFF"/>
                 </a:solidFill>
@@ -9848,7 +10232,7 @@
               </a:spcAft>
             </a:pPr>
             <a:r>
-              <a:rPr sz="2000" b="0" i="1">
+              <a:rPr sz="2400" b="0" i="1">
                 <a:solidFill>
                   <a:srgbClr val="4A5268"/>
                 </a:solidFill>
@@ -10176,8 +10560,8 @@
         </p:nvSpPr>
         <p:spPr>
           <a:xfrm>
-            <a:off x="11475720" y="365760"/>
-            <a:ext cx="502920" cy="402336"/>
+            <a:off x="11430000" y="329184"/>
+            <a:ext cx="548640" cy="475488"/>
           </a:xfrm>
           <a:prstGeom prst="roundRect">
             <a:avLst>
@@ -10212,7 +10596,7 @@
           <a:p>
             <a:pPr algn="ctr"/>
             <a:r>
-              <a:rPr sz="1800" b="1" i="0">
+              <a:rPr sz="2400" b="1" i="0">
                 <a:solidFill>
                   <a:srgbClr val="FFFFFF"/>
                 </a:solidFill>
@@ -10231,8 +10615,8 @@
         </p:nvSpPr>
         <p:spPr>
           <a:xfrm>
-            <a:off x="10305288" y="365760"/>
-            <a:ext cx="1124712" cy="402336"/>
+            <a:off x="9784080" y="329184"/>
+            <a:ext cx="1554480" cy="475488"/>
           </a:xfrm>
           <a:prstGeom prst="roundRect">
             <a:avLst>
@@ -10267,7 +10651,7 @@
           <a:p>
             <a:pPr algn="ctr"/>
             <a:r>
-              <a:rPr sz="1800" b="1" i="0">
+              <a:rPr sz="2400" b="1" i="0">
                 <a:solidFill>
                   <a:srgbClr val="FFFFFF"/>
                 </a:solidFill>
@@ -10400,7 +10784,7 @@
               </a:spcAft>
             </a:pPr>
             <a:r>
-              <a:rPr sz="2000" b="0" i="1">
+              <a:rPr sz="2400" b="0" i="1">
                 <a:solidFill>
                   <a:srgbClr val="4A5268"/>
                 </a:solidFill>
@@ -10728,8 +11112,8 @@
         </p:nvSpPr>
         <p:spPr>
           <a:xfrm>
-            <a:off x="11475720" y="365760"/>
-            <a:ext cx="502920" cy="402336"/>
+            <a:off x="11430000" y="329184"/>
+            <a:ext cx="548640" cy="475488"/>
           </a:xfrm>
           <a:prstGeom prst="roundRect">
             <a:avLst>
@@ -10764,7 +11148,7 @@
           <a:p>
             <a:pPr algn="ctr"/>
             <a:r>
-              <a:rPr sz="1800" b="1" i="0">
+              <a:rPr sz="2400" b="1" i="0">
                 <a:solidFill>
                   <a:srgbClr val="FFFFFF"/>
                 </a:solidFill>
@@ -10783,8 +11167,8 @@
         </p:nvSpPr>
         <p:spPr>
           <a:xfrm>
-            <a:off x="10277856" y="365760"/>
-            <a:ext cx="1152144" cy="402336"/>
+            <a:off x="9738360" y="329184"/>
+            <a:ext cx="1600200" cy="475488"/>
           </a:xfrm>
           <a:prstGeom prst="roundRect">
             <a:avLst>
@@ -10819,7 +11203,7 @@
           <a:p>
             <a:pPr algn="ctr"/>
             <a:r>
-              <a:rPr sz="1800" b="1" i="0">
+              <a:rPr sz="2400" b="1" i="0">
                 <a:solidFill>
                   <a:srgbClr val="FFFFFF"/>
                 </a:solidFill>
@@ -10897,13 +11281,13 @@
               </a:spcAft>
             </a:pPr>
             <a:r>
-              <a:rPr sz="2000" b="0" i="1">
+              <a:rPr sz="2400" b="0" i="1">
                 <a:solidFill>
                   <a:srgbClr val="4A5268"/>
                 </a:solidFill>
                 <a:latin typeface="Avenir Next"/>
               </a:rPr>
-              <a:t>Reader pp. 1–2</a:t>
+              <a:t>Reader p. 1</a:t>
             </a:r>
           </a:p>
         </p:txBody>
@@ -11196,8 +11580,8 @@
         </p:nvSpPr>
         <p:spPr>
           <a:xfrm>
-            <a:off x="11475720" y="365760"/>
-            <a:ext cx="502920" cy="402336"/>
+            <a:off x="11430000" y="329184"/>
+            <a:ext cx="548640" cy="475488"/>
           </a:xfrm>
           <a:prstGeom prst="roundRect">
             <a:avLst>
@@ -11232,7 +11616,7 @@
           <a:p>
             <a:pPr algn="ctr"/>
             <a:r>
-              <a:rPr sz="1800" b="1" i="0">
+              <a:rPr sz="2400" b="1" i="0">
                 <a:solidFill>
                   <a:srgbClr val="FFFFFF"/>
                 </a:solidFill>
@@ -11251,8 +11635,8 @@
         </p:nvSpPr>
         <p:spPr>
           <a:xfrm>
-            <a:off x="10332720" y="365760"/>
-            <a:ext cx="1097280" cy="402336"/>
+            <a:off x="9829800" y="329184"/>
+            <a:ext cx="1508760" cy="475488"/>
           </a:xfrm>
           <a:prstGeom prst="roundRect">
             <a:avLst>
@@ -11287,7 +11671,7 @@
           <a:p>
             <a:pPr algn="ctr"/>
             <a:r>
-              <a:rPr sz="1800" b="1" i="0">
+              <a:rPr sz="2400" b="1" i="0">
                 <a:solidFill>
                   <a:srgbClr val="FFFFFF"/>
                 </a:solidFill>
@@ -11332,7 +11716,7 @@
                 </a:solidFill>
                 <a:latin typeface="Avenir Next"/>
               </a:rPr>
-              <a:t>Change is evidence of energy</a:t>
+              <a:t>Look at the seashore</a:t>
             </a:r>
           </a:p>
         </p:txBody>
@@ -11365,7 +11749,7 @@
               </a:spcAft>
             </a:pPr>
             <a:r>
-              <a:rPr sz="2000" b="0" i="1">
+              <a:rPr sz="2400" b="0" i="1">
                 <a:solidFill>
                   <a:srgbClr val="4A5268"/>
                 </a:solidFill>
@@ -11384,7 +11768,7 @@
         </p:nvSpPr>
         <p:spPr>
           <a:xfrm>
-            <a:off x="685800" y="2468880"/>
+            <a:off x="685800" y="2377440"/>
             <a:ext cx="3291840" cy="1005840"/>
           </a:xfrm>
           <a:prstGeom prst="roundRect">
@@ -11439,7 +11823,7 @@
         </p:nvSpPr>
         <p:spPr>
           <a:xfrm>
-            <a:off x="3995927" y="2825496"/>
+            <a:off x="3995927" y="2734056"/>
             <a:ext cx="420624" cy="292608"/>
           </a:xfrm>
           <a:prstGeom prst="rightArrow">
@@ -11483,7 +11867,7 @@
         </p:nvSpPr>
         <p:spPr>
           <a:xfrm>
-            <a:off x="4434840" y="2468880"/>
+            <a:off x="4434840" y="2377440"/>
             <a:ext cx="3291840" cy="1005840"/>
           </a:xfrm>
           <a:prstGeom prst="roundRect">
@@ -11538,7 +11922,7 @@
         </p:nvSpPr>
         <p:spPr>
           <a:xfrm>
-            <a:off x="7744967" y="2825496"/>
+            <a:off x="7744967" y="2734056"/>
             <a:ext cx="420624" cy="292608"/>
           </a:xfrm>
           <a:prstGeom prst="rightArrow">
@@ -11582,7 +11966,7 @@
         </p:nvSpPr>
         <p:spPr>
           <a:xfrm>
-            <a:off x="8183879" y="2468880"/>
+            <a:off x="8183879" y="2377440"/>
             <a:ext cx="3291840" cy="1005840"/>
           </a:xfrm>
           <a:prstGeom prst="roundRect">
@@ -11591,7 +11975,7 @@
             </a:avLst>
           </a:prstGeom>
           <a:solidFill>
-            <a:srgbClr val="1F2A5A"/>
+            <a:srgbClr val="A67C16"/>
           </a:solidFill>
           <a:ln>
             <a:noFill/>
@@ -11624,7 +12008,7 @@
                 </a:solidFill>
                 <a:latin typeface="Avenir Next"/>
               </a:rPr>
-              <a:t>EVIDENCE</a:t>
+              <a:t>?</a:t>
             </a:r>
           </a:p>
         </p:txBody>
@@ -11637,8 +12021,8 @@
         </p:nvSpPr>
         <p:spPr>
           <a:xfrm>
-            <a:off x="685800" y="3931920"/>
-            <a:ext cx="10789920" cy="1463040"/>
+            <a:off x="685800" y="3794760"/>
+            <a:ext cx="10789920" cy="1737360"/>
           </a:xfrm>
           <a:prstGeom prst="rect">
             <a:avLst/>
@@ -11663,8 +12047,9 @@
                 </a:solidFill>
                 <a:latin typeface="Avenir Next"/>
               </a:rPr>
-              <a:t>When you see a change — water moving, sand shifting, sound —
-you are seeing evidence of energy.</a:t>
+              <a:t>Read Reader p. 2.
+Waves move. Sand shifts. Water makes sound.
+What are these changes a clue about?</a:t>
             </a:r>
           </a:p>
         </p:txBody>
@@ -11833,8 +12218,8 @@
         </p:nvSpPr>
         <p:spPr>
           <a:xfrm>
-            <a:off x="11475720" y="365760"/>
-            <a:ext cx="502920" cy="402336"/>
+            <a:off x="11430000" y="329184"/>
+            <a:ext cx="548640" cy="475488"/>
           </a:xfrm>
           <a:prstGeom prst="roundRect">
             <a:avLst>
@@ -11869,7 +12254,7 @@
           <a:p>
             <a:pPr algn="ctr"/>
             <a:r>
-              <a:rPr sz="1800" b="1" i="0">
+              <a:rPr sz="2400" b="1" i="0">
                 <a:solidFill>
                   <a:srgbClr val="FFFFFF"/>
                 </a:solidFill>
@@ -11888,8 +12273,8 @@
         </p:nvSpPr>
         <p:spPr>
           <a:xfrm>
-            <a:off x="10378440" y="365760"/>
-            <a:ext cx="1051560" cy="402336"/>
+            <a:off x="9875520" y="329184"/>
+            <a:ext cx="1463040" cy="475488"/>
           </a:xfrm>
           <a:prstGeom prst="roundRect">
             <a:avLst>
@@ -11924,7 +12309,7 @@
           <a:p>
             <a:pPr algn="ctr"/>
             <a:r>
-              <a:rPr sz="1800" b="1" i="0">
+              <a:rPr sz="2400" b="1" i="0">
                 <a:solidFill>
                   <a:srgbClr val="FFFFFF"/>
                 </a:solidFill>
@@ -12057,7 +12442,7 @@
               </a:spcAft>
             </a:pPr>
             <a:r>
-              <a:rPr sz="2000" b="0" i="1">
+              <a:rPr sz="2400" b="0" i="1">
                 <a:solidFill>
                   <a:srgbClr val="4A5268"/>
                 </a:solidFill>
@@ -12076,8 +12461,47 @@
         </p:nvSpPr>
         <p:spPr>
           <a:xfrm>
-            <a:off x="1371600" y="2148840"/>
-            <a:ext cx="10058400" cy="731520"/>
+            <a:off x="1371600" y="2240280"/>
+            <a:ext cx="10058400" cy="640080"/>
+          </a:xfrm>
+          <a:prstGeom prst="rect">
+            <a:avLst/>
+          </a:prstGeom>
+          <a:noFill/>
+        </p:spPr>
+        <p:txBody>
+          <a:bodyPr wrap="square" anchor="t" lIns="0" rIns="0" tIns="0" bIns="0">
+            <a:spAutoFit/>
+          </a:bodyPr>
+          <a:lstStyle/>
+          <a:p>
+            <a:pPr algn="l">
+              <a:spcAft>
+                <a:spcPts val="1000"/>
+              </a:spcAft>
+            </a:pPr>
+            <a:r>
+              <a:rPr sz="3000" b="1" i="0">
+                <a:solidFill>
+                  <a:srgbClr val="1A1D26"/>
+                </a:solidFill>
+                <a:latin typeface="Avenir Next"/>
+              </a:rPr>
+              <a:t>Energy has the ability to cause change.</a:t>
+            </a:r>
+          </a:p>
+        </p:txBody>
+      </p:sp>
+      <p:sp>
+        <p:nvSpPr>
+          <p:cNvPr id="10" name="TextBox 9"/>
+          <p:cNvSpPr txBox="1"/>
+          <p:nvPr/>
+        </p:nvSpPr>
+        <p:spPr>
+          <a:xfrm>
+            <a:off x="1371600" y="3246120"/>
+            <a:ext cx="10058400" cy="1280160"/>
           </a:xfrm>
           <a:prstGeom prst="rect">
             <a:avLst/>
@@ -12102,7 +12526,7 @@
                 </a:solidFill>
                 <a:latin typeface="Avenir Next"/>
               </a:rPr>
-              <a:t>Energy has the ability to </a:t>
+              <a:t>When you see a change, you are seeing </a:t>
             </a:r>
             <a:r>
               <a:rPr sz="3000" b="0" i="0" u="sng">
@@ -12111,7 +12535,7 @@
                 </a:solidFill>
                 <a:latin typeface="Avenir Next"/>
               </a:rPr>
-              <a:t>______</a:t>
+              <a:t>_________</a:t>
             </a:r>
             <a:r>
               <a:rPr sz="3000" b="0" i="0">
@@ -12120,38 +12544,20 @@
                 </a:solidFill>
                 <a:latin typeface="Avenir Next"/>
               </a:rPr>
-              <a:t>  </a:t>
-            </a:r>
-            <a:r>
-              <a:rPr sz="3000" b="0" i="0" u="sng">
-                <a:solidFill>
-                  <a:srgbClr val="1A1D26"/>
-                </a:solidFill>
-                <a:latin typeface="Avenir Next"/>
-              </a:rPr>
-              <a:t>________</a:t>
-            </a:r>
-            <a:r>
-              <a:rPr sz="3000" b="0" i="0">
-                <a:solidFill>
-                  <a:srgbClr val="1A1D26"/>
-                </a:solidFill>
-                <a:latin typeface="Avenir Next"/>
-              </a:rPr>
-              <a:t> .</a:t>
-            </a:r>
-          </a:p>
-        </p:txBody>
-      </p:sp>
-      <p:sp>
-        <p:nvSpPr>
-          <p:cNvPr id="10" name="TextBox 9"/>
+              <a:t> of energy.</a:t>
+            </a:r>
+          </a:p>
+        </p:txBody>
+      </p:sp>
+      <p:sp>
+        <p:nvSpPr>
+          <p:cNvPr id="11" name="TextBox 10"/>
           <p:cNvSpPr txBox="1"/>
           <p:nvPr/>
         </p:nvSpPr>
         <p:spPr>
           <a:xfrm>
-            <a:off x="1371600" y="2971800"/>
+            <a:off x="1371600" y="4846320"/>
             <a:ext cx="10058400" cy="457200"/>
           </a:xfrm>
           <a:prstGeom prst="rect">
@@ -12173,328 +12579,18 @@
             <a:r>
               <a:rPr sz="2800" b="0" i="1">
                 <a:solidFill>
-                  <a:srgbClr val="1A1D26"/>
-                </a:solidFill>
-                <a:latin typeface="Avenir Next"/>
-              </a:rPr>
-              <a:t>When you see a change, you are seeing evidence of energy.</a:t>
-            </a:r>
-          </a:p>
-        </p:txBody>
-      </p:sp>
-      <p:sp>
-        <p:nvSpPr>
-          <p:cNvPr id="11" name="Rounded Rectangle 10"/>
-          <p:cNvSpPr/>
-          <p:nvPr/>
-        </p:nvSpPr>
-        <p:spPr>
-          <a:xfrm>
-            <a:off x="1371600" y="3657600"/>
-            <a:ext cx="2194560" cy="640080"/>
-          </a:xfrm>
-          <a:prstGeom prst="roundRect">
-            <a:avLst>
-              <a:gd name="adj" fmla="val 8000"/>
-            </a:avLst>
-          </a:prstGeom>
-          <a:solidFill>
-            <a:srgbClr val="1F2A5A"/>
-          </a:solidFill>
-          <a:ln>
-            <a:noFill/>
-          </a:ln>
-          <a:effectLst/>
-        </p:spPr>
-        <p:style>
-          <a:lnRef idx="1">
-            <a:schemeClr val="accent1"/>
-          </a:lnRef>
-          <a:fillRef idx="3">
-            <a:schemeClr val="accent1"/>
-          </a:fillRef>
-          <a:effectRef idx="2">
-            <a:schemeClr val="accent1"/>
-          </a:effectRef>
-          <a:fontRef idx="minor">
-            <a:schemeClr val="lt1"/>
-          </a:fontRef>
-        </p:style>
-        <p:txBody>
-          <a:bodyPr rtlCol="0" anchor="ctr" wrap="square" lIns="73152" rIns="73152"/>
-          <a:lstStyle/>
-          <a:p>
-            <a:pPr algn="ctr"/>
-            <a:r>
-              <a:rPr sz="2000" b="1" i="0">
-                <a:solidFill>
-                  <a:srgbClr val="FFFFFF"/>
-                </a:solidFill>
-                <a:latin typeface="Avenir Next"/>
-              </a:rPr>
-              <a:t>ENERGY</a:t>
-            </a:r>
-          </a:p>
-        </p:txBody>
-      </p:sp>
-      <p:sp>
-        <p:nvSpPr>
-          <p:cNvPr id="12" name="Right Arrow 11"/>
-          <p:cNvSpPr/>
-          <p:nvPr/>
-        </p:nvSpPr>
-        <p:spPr>
-          <a:xfrm>
-            <a:off x="3584448" y="3831335"/>
-            <a:ext cx="329184" cy="292608"/>
-          </a:xfrm>
-          <a:prstGeom prst="rightArrow">
-            <a:avLst/>
-          </a:prstGeom>
-          <a:solidFill>
-            <a:srgbClr val="A67C16"/>
-          </a:solidFill>
-          <a:ln>
-            <a:noFill/>
-          </a:ln>
-          <a:effectLst/>
-        </p:spPr>
-        <p:style>
-          <a:lnRef idx="1">
-            <a:schemeClr val="accent1"/>
-          </a:lnRef>
-          <a:fillRef idx="3">
-            <a:schemeClr val="accent1"/>
-          </a:fillRef>
-          <a:effectRef idx="2">
-            <a:schemeClr val="accent1"/>
-          </a:effectRef>
-          <a:fontRef idx="minor">
-            <a:schemeClr val="lt1"/>
-          </a:fontRef>
-        </p:style>
-        <p:txBody>
-          <a:bodyPr rtlCol="0" anchor="ctr"/>
-          <a:lstStyle/>
-          <a:p>
-            <a:pPr algn="ctr"/>
-          </a:p>
-        </p:txBody>
-      </p:sp>
-      <p:sp>
-        <p:nvSpPr>
-          <p:cNvPr id="13" name="Rounded Rectangle 12"/>
-          <p:cNvSpPr/>
-          <p:nvPr/>
-        </p:nvSpPr>
-        <p:spPr>
-          <a:xfrm>
-            <a:off x="3931920" y="3657600"/>
-            <a:ext cx="2194560" cy="640080"/>
-          </a:xfrm>
-          <a:prstGeom prst="roundRect">
-            <a:avLst>
-              <a:gd name="adj" fmla="val 8000"/>
-            </a:avLst>
-          </a:prstGeom>
-          <a:solidFill>
-            <a:srgbClr val="7A5620"/>
-          </a:solidFill>
-          <a:ln>
-            <a:noFill/>
-          </a:ln>
-          <a:effectLst/>
-        </p:spPr>
-        <p:style>
-          <a:lnRef idx="1">
-            <a:schemeClr val="accent1"/>
-          </a:lnRef>
-          <a:fillRef idx="3">
-            <a:schemeClr val="accent1"/>
-          </a:fillRef>
-          <a:effectRef idx="2">
-            <a:schemeClr val="accent1"/>
-          </a:effectRef>
-          <a:fontRef idx="minor">
-            <a:schemeClr val="lt1"/>
-          </a:fontRef>
-        </p:style>
-        <p:txBody>
-          <a:bodyPr rtlCol="0" anchor="ctr" wrap="square" lIns="73152" rIns="73152"/>
-          <a:lstStyle/>
-          <a:p>
-            <a:pPr algn="ctr"/>
-            <a:r>
-              <a:rPr sz="2000" b="1" i="0">
-                <a:solidFill>
-                  <a:srgbClr val="FFFFFF"/>
-                </a:solidFill>
-                <a:latin typeface="Avenir Next"/>
-              </a:rPr>
-              <a:t>CHANGE</a:t>
-            </a:r>
-          </a:p>
-        </p:txBody>
-      </p:sp>
-      <p:sp>
-        <p:nvSpPr>
-          <p:cNvPr id="14" name="Right Arrow 13"/>
-          <p:cNvSpPr/>
-          <p:nvPr/>
-        </p:nvSpPr>
-        <p:spPr>
-          <a:xfrm>
-            <a:off x="6144767" y="3831335"/>
-            <a:ext cx="329184" cy="292608"/>
-          </a:xfrm>
-          <a:prstGeom prst="rightArrow">
-            <a:avLst/>
-          </a:prstGeom>
-          <a:solidFill>
-            <a:srgbClr val="A67C16"/>
-          </a:solidFill>
-          <a:ln>
-            <a:noFill/>
-          </a:ln>
-          <a:effectLst/>
-        </p:spPr>
-        <p:style>
-          <a:lnRef idx="1">
-            <a:schemeClr val="accent1"/>
-          </a:lnRef>
-          <a:fillRef idx="3">
-            <a:schemeClr val="accent1"/>
-          </a:fillRef>
-          <a:effectRef idx="2">
-            <a:schemeClr val="accent1"/>
-          </a:effectRef>
-          <a:fontRef idx="minor">
-            <a:schemeClr val="lt1"/>
-          </a:fontRef>
-        </p:style>
-        <p:txBody>
-          <a:bodyPr rtlCol="0" anchor="ctr"/>
-          <a:lstStyle/>
-          <a:p>
-            <a:pPr algn="ctr"/>
-          </a:p>
-        </p:txBody>
-      </p:sp>
-      <p:sp>
-        <p:nvSpPr>
-          <p:cNvPr id="15" name="Rounded Rectangle 14"/>
-          <p:cNvSpPr/>
-          <p:nvPr/>
-        </p:nvSpPr>
-        <p:spPr>
-          <a:xfrm>
-            <a:off x="6492240" y="3657600"/>
-            <a:ext cx="2194560" cy="640080"/>
-          </a:xfrm>
-          <a:prstGeom prst="roundRect">
-            <a:avLst>
-              <a:gd name="adj" fmla="val 8000"/>
-            </a:avLst>
-          </a:prstGeom>
-          <a:solidFill>
-            <a:srgbClr val="1F2A5A"/>
-          </a:solidFill>
-          <a:ln>
-            <a:noFill/>
-          </a:ln>
-          <a:effectLst/>
-        </p:spPr>
-        <p:style>
-          <a:lnRef idx="1">
-            <a:schemeClr val="accent1"/>
-          </a:lnRef>
-          <a:fillRef idx="3">
-            <a:schemeClr val="accent1"/>
-          </a:fillRef>
-          <a:effectRef idx="2">
-            <a:schemeClr val="accent1"/>
-          </a:effectRef>
-          <a:fontRef idx="minor">
-            <a:schemeClr val="lt1"/>
-          </a:fontRef>
-        </p:style>
-        <p:txBody>
-          <a:bodyPr rtlCol="0" anchor="ctr" wrap="square" lIns="73152" rIns="73152"/>
-          <a:lstStyle/>
-          <a:p>
-            <a:pPr algn="ctr"/>
-            <a:r>
-              <a:rPr sz="2000" b="1" i="0">
-                <a:solidFill>
-                  <a:srgbClr val="FFFFFF"/>
-                </a:solidFill>
-                <a:latin typeface="Avenir Next"/>
-              </a:rPr>
-              <a:t>EVIDENCE</a:t>
-            </a:r>
-          </a:p>
-        </p:txBody>
-      </p:sp>
-      <p:sp>
-        <p:nvSpPr>
-          <p:cNvPr id="16" name="TextBox 15"/>
-          <p:cNvSpPr txBox="1"/>
-          <p:nvPr/>
-        </p:nvSpPr>
-        <p:spPr>
-          <a:xfrm>
-            <a:off x="1371600" y="4663440"/>
-            <a:ext cx="10058400" cy="731520"/>
-          </a:xfrm>
-          <a:prstGeom prst="rect">
-            <a:avLst/>
-          </a:prstGeom>
-          <a:noFill/>
-        </p:spPr>
-        <p:txBody>
-          <a:bodyPr wrap="square" anchor="t" lIns="0" rIns="0" tIns="0" bIns="0">
-            <a:spAutoFit/>
-          </a:bodyPr>
-          <a:lstStyle/>
-          <a:p>
-            <a:pPr algn="l">
-              <a:spcAft>
-                <a:spcPts val="1200"/>
-              </a:spcAft>
-            </a:pPr>
-            <a:r>
-              <a:rPr sz="3000" b="0" i="0">
-                <a:solidFill>
-                  <a:srgbClr val="1A1D26"/>
-                </a:solidFill>
-                <a:latin typeface="Avenir Next"/>
-              </a:rPr>
-              <a:t>A change is </a:t>
-            </a:r>
-            <a:r>
-              <a:rPr sz="3000" b="0" i="0" u="sng">
-                <a:solidFill>
-                  <a:srgbClr val="1A1D26"/>
-                </a:solidFill>
-                <a:latin typeface="Avenir Next"/>
-              </a:rPr>
-              <a:t>_________</a:t>
-            </a:r>
-            <a:r>
-              <a:rPr sz="3000" b="0" i="0">
-                <a:solidFill>
-                  <a:srgbClr val="1A1D26"/>
-                </a:solidFill>
-                <a:latin typeface="Avenir Next"/>
-              </a:rPr>
-              <a:t> that energy is involved.</a:t>
-            </a:r>
-          </a:p>
-        </p:txBody>
-      </p:sp>
-      <p:sp>
-        <p:nvSpPr>
-          <p:cNvPr id="17" name="TextBox 16"/>
+                  <a:srgbClr val="4A5268"/>
+                </a:solidFill>
+                <a:latin typeface="Avenir Next"/>
+              </a:rPr>
+              <a:t>Write the missing word in the sentence. Leave the last box of your model empty for now.</a:t>
+            </a:r>
+          </a:p>
+        </p:txBody>
+      </p:sp>
+      <p:sp>
+        <p:nvSpPr>
+          <p:cNvPr id="12" name="TextBox 11"/>
           <p:cNvSpPr txBox="1"/>
           <p:nvPr/>
         </p:nvSpPr>
@@ -12656,8 +12752,8 @@
         </p:nvSpPr>
         <p:spPr>
           <a:xfrm>
-            <a:off x="11475720" y="365760"/>
-            <a:ext cx="502920" cy="402336"/>
+            <a:off x="11430000" y="329184"/>
+            <a:ext cx="548640" cy="475488"/>
           </a:xfrm>
           <a:prstGeom prst="roundRect">
             <a:avLst>
@@ -12692,7 +12788,7 @@
           <a:p>
             <a:pPr algn="ctr"/>
             <a:r>
-              <a:rPr sz="1800" b="1" i="0">
+              <a:rPr sz="2400" b="1" i="0">
                 <a:solidFill>
                   <a:srgbClr val="FFFFFF"/>
                 </a:solidFill>
@@ -12711,8 +12807,8 @@
         </p:nvSpPr>
         <p:spPr>
           <a:xfrm>
-            <a:off x="10305288" y="365760"/>
-            <a:ext cx="1124712" cy="402336"/>
+            <a:off x="9784080" y="329184"/>
+            <a:ext cx="1554480" cy="475488"/>
           </a:xfrm>
           <a:prstGeom prst="roundRect">
             <a:avLst>
@@ -12747,7 +12843,7 @@
           <a:p>
             <a:pPr algn="ctr"/>
             <a:r>
-              <a:rPr sz="1800" b="1" i="0">
+              <a:rPr sz="2400" b="1" i="0">
                 <a:solidFill>
                   <a:srgbClr val="FFFFFF"/>
                 </a:solidFill>
@@ -12880,7 +12976,7 @@
               </a:spcAft>
             </a:pPr>
             <a:r>
-              <a:rPr sz="2000" b="0" i="1">
+              <a:rPr sz="2400" b="0" i="1">
                 <a:solidFill>
                   <a:srgbClr val="4A5268"/>
                 </a:solidFill>
@@ -12899,8 +12995,47 @@
         </p:nvSpPr>
         <p:spPr>
           <a:xfrm>
-            <a:off x="1371600" y="2148840"/>
-            <a:ext cx="10058400" cy="731520"/>
+            <a:off x="1371600" y="2103120"/>
+            <a:ext cx="10058400" cy="640080"/>
+          </a:xfrm>
+          <a:prstGeom prst="rect">
+            <a:avLst/>
+          </a:prstGeom>
+          <a:noFill/>
+        </p:spPr>
+        <p:txBody>
+          <a:bodyPr wrap="square" anchor="t" lIns="0" rIns="0" tIns="0" bIns="0">
+            <a:spAutoFit/>
+          </a:bodyPr>
+          <a:lstStyle/>
+          <a:p>
+            <a:pPr algn="l">
+              <a:spcAft>
+                <a:spcPts val="1000"/>
+              </a:spcAft>
+            </a:pPr>
+            <a:r>
+              <a:rPr sz="3000" b="1" i="0">
+                <a:solidFill>
+                  <a:srgbClr val="1A1D26"/>
+                </a:solidFill>
+                <a:latin typeface="Avenir Next"/>
+              </a:rPr>
+              <a:t>Energy has the ability to cause change.</a:t>
+            </a:r>
+          </a:p>
+        </p:txBody>
+      </p:sp>
+      <p:sp>
+        <p:nvSpPr>
+          <p:cNvPr id="10" name="TextBox 9"/>
+          <p:cNvSpPr txBox="1"/>
+          <p:nvPr/>
+        </p:nvSpPr>
+        <p:spPr>
+          <a:xfrm>
+            <a:off x="1371600" y="2880360"/>
+            <a:ext cx="10058400" cy="914400"/>
           </a:xfrm>
           <a:prstGeom prst="rect">
             <a:avLst/>
@@ -12925,7 +13060,7 @@
                 </a:solidFill>
                 <a:latin typeface="Avenir Next"/>
               </a:rPr>
-              <a:t>Energy has the ability to </a:t>
+              <a:t>When you see a change, you are seeing </a:t>
             </a:r>
             <a:r>
               <a:rPr sz="3000" b="1" i="0">
@@ -12934,7 +13069,7 @@
                 </a:solidFill>
                 <a:latin typeface="Avenir Next"/>
               </a:rPr>
-              <a:t>cause</a:t>
+              <a:t>evidence</a:t>
             </a:r>
             <a:r>
               <a:rPr sz="3000" b="0" i="0">
@@ -12943,64 +13078,7 @@
                 </a:solidFill>
                 <a:latin typeface="Avenir Next"/>
               </a:rPr>
-              <a:t>  </a:t>
-            </a:r>
-            <a:r>
-              <a:rPr sz="3000" b="1" i="0">
-                <a:solidFill>
-                  <a:srgbClr val="A67C16"/>
-                </a:solidFill>
-                <a:latin typeface="Avenir Next"/>
-              </a:rPr>
-              <a:t>change</a:t>
-            </a:r>
-            <a:r>
-              <a:rPr sz="3000" b="0" i="0">
-                <a:solidFill>
-                  <a:srgbClr val="1A1D26"/>
-                </a:solidFill>
-                <a:latin typeface="Avenir Next"/>
-              </a:rPr>
-              <a:t> .</a:t>
-            </a:r>
-          </a:p>
-        </p:txBody>
-      </p:sp>
-      <p:sp>
-        <p:nvSpPr>
-          <p:cNvPr id="10" name="TextBox 9"/>
-          <p:cNvSpPr txBox="1"/>
-          <p:nvPr/>
-        </p:nvSpPr>
-        <p:spPr>
-          <a:xfrm>
-            <a:off x="1371600" y="2971800"/>
-            <a:ext cx="10058400" cy="457200"/>
-          </a:xfrm>
-          <a:prstGeom prst="rect">
-            <a:avLst/>
-          </a:prstGeom>
-          <a:noFill/>
-        </p:spPr>
-        <p:txBody>
-          <a:bodyPr wrap="square" anchor="t" lIns="0" rIns="0" tIns="0" bIns="0">
-            <a:spAutoFit/>
-          </a:bodyPr>
-          <a:lstStyle/>
-          <a:p>
-            <a:pPr algn="l">
-              <a:spcAft>
-                <a:spcPts val="1000"/>
-              </a:spcAft>
-            </a:pPr>
-            <a:r>
-              <a:rPr sz="2800" b="0" i="1">
-                <a:solidFill>
-                  <a:srgbClr val="1A1D26"/>
-                </a:solidFill>
-                <a:latin typeface="Avenir Next"/>
-              </a:rPr>
-              <a:t>When you see a change, you are seeing evidence of energy.</a:t>
+              <a:t> of energy.</a:t>
             </a:r>
           </a:p>
         </p:txBody>
@@ -13013,8 +13091,8 @@
         </p:nvSpPr>
         <p:spPr>
           <a:xfrm>
-            <a:off x="1371600" y="3657600"/>
-            <a:ext cx="2194560" cy="640080"/>
+            <a:off x="1371600" y="4114800"/>
+            <a:ext cx="2773680" cy="822960"/>
           </a:xfrm>
           <a:prstGeom prst="roundRect">
             <a:avLst>
@@ -13049,7 +13127,7 @@
           <a:p>
             <a:pPr algn="ctr"/>
             <a:r>
-              <a:rPr sz="2000" b="1" i="0">
+              <a:rPr sz="2800" b="1" i="0">
                 <a:solidFill>
                   <a:srgbClr val="FFFFFF"/>
                 </a:solidFill>
@@ -13068,8 +13146,8 @@
         </p:nvSpPr>
         <p:spPr>
           <a:xfrm>
-            <a:off x="3584448" y="3831335"/>
-            <a:ext cx="329184" cy="292608"/>
+            <a:off x="4163567" y="4379976"/>
+            <a:ext cx="374904" cy="292608"/>
           </a:xfrm>
           <a:prstGeom prst="rightArrow">
             <a:avLst/>
@@ -13112,8 +13190,8 @@
         </p:nvSpPr>
         <p:spPr>
           <a:xfrm>
-            <a:off x="3931920" y="3657600"/>
-            <a:ext cx="2194560" cy="640080"/>
+            <a:off x="4556760" y="4114800"/>
+            <a:ext cx="2773680" cy="822960"/>
           </a:xfrm>
           <a:prstGeom prst="roundRect">
             <a:avLst>
@@ -13148,7 +13226,7 @@
           <a:p>
             <a:pPr algn="ctr"/>
             <a:r>
-              <a:rPr sz="2000" b="1" i="0">
+              <a:rPr sz="2800" b="1" i="0">
                 <a:solidFill>
                   <a:srgbClr val="FFFFFF"/>
                 </a:solidFill>
@@ -13167,8 +13245,8 @@
         </p:nvSpPr>
         <p:spPr>
           <a:xfrm>
-            <a:off x="6144767" y="3831335"/>
-            <a:ext cx="329184" cy="292608"/>
+            <a:off x="7348727" y="4379976"/>
+            <a:ext cx="374904" cy="292608"/>
           </a:xfrm>
           <a:prstGeom prst="rightArrow">
             <a:avLst/>
@@ -13211,8 +13289,8 @@
         </p:nvSpPr>
         <p:spPr>
           <a:xfrm>
-            <a:off x="6492240" y="3657600"/>
-            <a:ext cx="2194560" cy="640080"/>
+            <a:off x="7741920" y="4114800"/>
+            <a:ext cx="2773680" cy="822960"/>
           </a:xfrm>
           <a:prstGeom prst="roundRect">
             <a:avLst>
@@ -13247,7 +13325,7 @@
           <a:p>
             <a:pPr algn="ctr"/>
             <a:r>
-              <a:rPr sz="2000" b="1" i="0">
+              <a:rPr sz="2800" b="1" i="0">
                 <a:solidFill>
                   <a:srgbClr val="FFFFFF"/>
                 </a:solidFill>
@@ -13266,65 +13344,8 @@
         </p:nvSpPr>
         <p:spPr>
           <a:xfrm>
-            <a:off x="1371600" y="4663440"/>
-            <a:ext cx="10058400" cy="731520"/>
-          </a:xfrm>
-          <a:prstGeom prst="rect">
-            <a:avLst/>
-          </a:prstGeom>
-          <a:noFill/>
-        </p:spPr>
-        <p:txBody>
-          <a:bodyPr wrap="square" anchor="t" lIns="0" rIns="0" tIns="0" bIns="0">
-            <a:spAutoFit/>
-          </a:bodyPr>
-          <a:lstStyle/>
-          <a:p>
-            <a:pPr algn="l">
-              <a:spcAft>
-                <a:spcPts val="1200"/>
-              </a:spcAft>
-            </a:pPr>
-            <a:r>
-              <a:rPr sz="3000" b="0" i="0">
-                <a:solidFill>
-                  <a:srgbClr val="1A1D26"/>
-                </a:solidFill>
-                <a:latin typeface="Avenir Next"/>
-              </a:rPr>
-              <a:t>A change is </a:t>
-            </a:r>
-            <a:r>
-              <a:rPr sz="3000" b="1" i="0">
-                <a:solidFill>
-                  <a:srgbClr val="A67C16"/>
-                </a:solidFill>
-                <a:latin typeface="Avenir Next"/>
-              </a:rPr>
-              <a:t>evidence</a:t>
-            </a:r>
-            <a:r>
-              <a:rPr sz="3000" b="0" i="0">
-                <a:solidFill>
-                  <a:srgbClr val="1A1D26"/>
-                </a:solidFill>
-                <a:latin typeface="Avenir Next"/>
-              </a:rPr>
-              <a:t> that energy is involved.</a:t>
-            </a:r>
-          </a:p>
-        </p:txBody>
-      </p:sp>
-      <p:sp>
-        <p:nvSpPr>
-          <p:cNvPr id="17" name="TextBox 16"/>
-          <p:cNvSpPr txBox="1"/>
-          <p:nvPr/>
-        </p:nvSpPr>
-        <p:spPr>
-          <a:xfrm>
-            <a:off x="1371600" y="5532120"/>
-            <a:ext cx="10058400" cy="365760"/>
+            <a:off x="1371600" y="5257800"/>
+            <a:ext cx="10058400" cy="457200"/>
           </a:xfrm>
           <a:prstGeom prst="rect">
             <a:avLst/>
@@ -13349,14 +13370,14 @@
                 </a:solidFill>
                 <a:latin typeface="Avenir Next"/>
               </a:rPr>
-              <a:t>cause · change · evidence</a:t>
-            </a:r>
-          </a:p>
-        </p:txBody>
-      </p:sp>
-      <p:sp>
-        <p:nvSpPr>
-          <p:cNvPr id="18" name="TextBox 17"/>
+              <a:t>Now write the same word in the last box of your model.</a:t>
+            </a:r>
+          </a:p>
+        </p:txBody>
+      </p:sp>
+      <p:sp>
+        <p:nvSpPr>
+          <p:cNvPr id="17" name="TextBox 16"/>
           <p:cNvSpPr txBox="1"/>
           <p:nvPr/>
         </p:nvSpPr>
@@ -13518,8 +13539,8 @@
         </p:nvSpPr>
         <p:spPr>
           <a:xfrm>
-            <a:off x="11475720" y="365760"/>
-            <a:ext cx="502920" cy="402336"/>
+            <a:off x="11430000" y="329184"/>
+            <a:ext cx="548640" cy="475488"/>
           </a:xfrm>
           <a:prstGeom prst="roundRect">
             <a:avLst>
@@ -13554,7 +13575,7 @@
           <a:p>
             <a:pPr algn="ctr"/>
             <a:r>
-              <a:rPr sz="1800" b="1" i="0">
+              <a:rPr sz="2400" b="1" i="0">
                 <a:solidFill>
                   <a:srgbClr val="FFFFFF"/>
                 </a:solidFill>
@@ -13632,7 +13653,7 @@
               </a:spcAft>
             </a:pPr>
             <a:r>
-              <a:rPr sz="2000" b="0" i="1">
+              <a:rPr sz="2400" b="0" i="1">
                 <a:solidFill>
                   <a:srgbClr val="4A5268"/>
                 </a:solidFill>
@@ -13687,7 +13708,7 @@
           <a:p>
             <a:pPr algn="ctr"/>
             <a:r>
-              <a:rPr sz="2000" b="1" i="0">
+              <a:rPr sz="2400" b="1" i="0">
                 <a:solidFill>
                   <a:srgbClr val="FFFFFF"/>
                 </a:solidFill>
@@ -13742,7 +13763,7 @@
           <a:p>
             <a:pPr algn="ctr"/>
             <a:r>
-              <a:rPr sz="2000" b="1" i="0">
+              <a:rPr sz="2400" b="1" i="0">
                 <a:solidFill>
                   <a:srgbClr val="FFFFFF"/>
                 </a:solidFill>
@@ -13797,7 +13818,7 @@
           <a:p>
             <a:pPr algn="ctr"/>
             <a:r>
-              <a:rPr sz="2000" b="1" i="0">
+              <a:rPr sz="2400" b="1" i="0">
                 <a:solidFill>
                   <a:srgbClr val="FFFFFF"/>
                 </a:solidFill>
@@ -13852,7 +13873,7 @@
           <a:p>
             <a:pPr algn="ctr"/>
             <a:r>
-              <a:rPr sz="2000" b="1" i="0">
+              <a:rPr sz="2400" b="1" i="0">
                 <a:solidFill>
                   <a:srgbClr val="FFFFFF"/>
                 </a:solidFill>
@@ -13907,7 +13928,7 @@
           <a:p>
             <a:pPr algn="ctr"/>
             <a:r>
-              <a:rPr sz="2000" b="1" i="0">
+              <a:rPr sz="2400" b="1" i="0">
                 <a:solidFill>
                   <a:srgbClr val="FFFFFF"/>
                 </a:solidFill>
@@ -13926,8 +13947,8 @@
         </p:nvSpPr>
         <p:spPr>
           <a:xfrm>
-            <a:off x="502920" y="4023360"/>
-            <a:ext cx="10698480" cy="1280160"/>
+            <a:off x="502920" y="3931920"/>
+            <a:ext cx="10698480" cy="1737360"/>
           </a:xfrm>
           <a:prstGeom prst="rect">
             <a:avLst/>
@@ -13952,8 +13973,9 @@
                 </a:solidFill>
                 <a:latin typeface="Avenir Next"/>
               </a:rPr>
-              <a:t>The carousel spins (motion), plays music (sound), shines bright bulbs
-(light), warms those bulbs (heat), and plugs in (electrical energy).</a:t>
+              <a:t>On the carousel, the horses spin and move up and down.
+That is motion.
+Find the other forms in the Reader.</a:t>
             </a:r>
           </a:p>
         </p:txBody>
@@ -14122,8 +14144,8 @@
         </p:nvSpPr>
         <p:spPr>
           <a:xfrm>
-            <a:off x="11475720" y="365760"/>
-            <a:ext cx="502920" cy="402336"/>
+            <a:off x="11430000" y="329184"/>
+            <a:ext cx="548640" cy="475488"/>
           </a:xfrm>
           <a:prstGeom prst="roundRect">
             <a:avLst>
@@ -14158,7 +14180,7 @@
           <a:p>
             <a:pPr algn="ctr"/>
             <a:r>
-              <a:rPr sz="1800" b="1" i="0">
+              <a:rPr sz="2400" b="1" i="0">
                 <a:solidFill>
                   <a:srgbClr val="FFFFFF"/>
                 </a:solidFill>
@@ -14177,8 +14199,8 @@
         </p:nvSpPr>
         <p:spPr>
           <a:xfrm>
-            <a:off x="10003536" y="365760"/>
-            <a:ext cx="1426464" cy="402336"/>
+            <a:off x="9372600" y="329184"/>
+            <a:ext cx="1965960" cy="475488"/>
           </a:xfrm>
           <a:prstGeom prst="roundRect">
             <a:avLst>
@@ -14213,7 +14235,7 @@
           <a:p>
             <a:pPr algn="ctr"/>
             <a:r>
-              <a:rPr sz="1800" b="1" i="0">
+              <a:rPr sz="2400" b="1" i="0">
                 <a:solidFill>
                   <a:srgbClr val="FFFFFF"/>
                 </a:solidFill>
@@ -14291,7 +14313,7 @@
               </a:spcAft>
             </a:pPr>
             <a:r>
-              <a:rPr sz="2000" b="0" i="1">
+              <a:rPr sz="2400" b="0" i="1">
                 <a:solidFill>
                   <a:srgbClr val="4A5268"/>
                 </a:solidFill>
@@ -14423,9 +14445,9 @@
                 </a:solidFill>
                 <a:latin typeface="Avenir Next"/>
               </a:rPr>
-              <a:t>motion  —  your hands move
-sound  —  you hear a clap
-heat  —  your hands may feel warm</a:t>
+              <a:t>What do you SEE?
+What do you HEAR?
+What do you FEEL in your hands?</a:t>
             </a:r>
           </a:p>
         </p:txBody>
@@ -14594,8 +14616,8 @@
         </p:nvSpPr>
         <p:spPr>
           <a:xfrm>
-            <a:off x="11475720" y="365760"/>
-            <a:ext cx="502920" cy="402336"/>
+            <a:off x="11430000" y="329184"/>
+            <a:ext cx="548640" cy="475488"/>
           </a:xfrm>
           <a:prstGeom prst="roundRect">
             <a:avLst>
@@ -14630,7 +14652,7 @@
           <a:p>
             <a:pPr algn="ctr"/>
             <a:r>
-              <a:rPr sz="1800" b="1" i="0">
+              <a:rPr sz="2400" b="1" i="0">
                 <a:solidFill>
                   <a:srgbClr val="FFFFFF"/>
                 </a:solidFill>
@@ -14649,8 +14671,8 @@
         </p:nvSpPr>
         <p:spPr>
           <a:xfrm>
-            <a:off x="10378440" y="365760"/>
-            <a:ext cx="1051560" cy="402336"/>
+            <a:off x="9875520" y="329184"/>
+            <a:ext cx="1463040" cy="475488"/>
           </a:xfrm>
           <a:prstGeom prst="roundRect">
             <a:avLst>
@@ -14685,7 +14707,7 @@
           <a:p>
             <a:pPr algn="ctr"/>
             <a:r>
-              <a:rPr sz="1800" b="1" i="0">
+              <a:rPr sz="2400" b="1" i="0">
                 <a:solidFill>
                   <a:srgbClr val="FFFFFF"/>
                 </a:solidFill>
@@ -14818,7 +14840,7 @@
               </a:spcAft>
             </a:pPr>
             <a:r>
-              <a:rPr sz="2000" b="0" i="1">
+              <a:rPr sz="2400" b="0" i="1">
                 <a:solidFill>
                   <a:srgbClr val="4A5268"/>
                 </a:solidFill>
@@ -14863,7 +14885,7 @@
                 </a:solidFill>
                 <a:latin typeface="Avenir Next"/>
               </a:rPr>
-              <a:t>Write or draw one example that shows a change for each form.</a:t>
+              <a:t>Write one example that shows a change for each form.</a:t>
             </a:r>
           </a:p>
         </p:txBody>
@@ -14920,7 +14942,7 @@
         </p:nvSpPr>
         <p:spPr>
           <a:xfrm>
-            <a:off x="1508760" y="2807208"/>
+            <a:off x="1508760" y="2788920"/>
             <a:ext cx="2834640" cy="365760"/>
           </a:xfrm>
           <a:prstGeom prst="rect">
@@ -14940,7 +14962,7 @@
               </a:spcAft>
             </a:pPr>
             <a:r>
-              <a:rPr sz="2000" b="1" i="0">
+              <a:rPr sz="2400" b="1" i="0">
                 <a:solidFill>
                   <a:srgbClr val="FFFFFF"/>
                 </a:solidFill>
@@ -15023,7 +15045,7 @@
               </a:spcAft>
             </a:pPr>
             <a:r>
-              <a:rPr sz="2000" b="1" i="0">
+              <a:rPr sz="2200" b="1" i="0">
                 <a:solidFill>
                   <a:srgbClr val="FFFFFF"/>
                 </a:solidFill>
@@ -15088,8 +15110,8 @@
         </p:nvSpPr>
         <p:spPr>
           <a:xfrm>
-            <a:off x="1508760" y="3364992"/>
-            <a:ext cx="2834640" cy="365760"/>
+            <a:off x="1508760" y="3319272"/>
+            <a:ext cx="2834640" cy="411480"/>
           </a:xfrm>
           <a:prstGeom prst="rect">
             <a:avLst/>
@@ -15108,7 +15130,7 @@
               </a:spcAft>
             </a:pPr>
             <a:r>
-              <a:rPr sz="2000" b="1" i="0">
+              <a:rPr sz="2400" b="1" i="0">
                 <a:solidFill>
                   <a:srgbClr val="1F2A5A"/>
                 </a:solidFill>
@@ -15219,8 +15241,8 @@
         </p:nvSpPr>
         <p:spPr>
           <a:xfrm>
-            <a:off x="1508760" y="3931920"/>
-            <a:ext cx="2834640" cy="365760"/>
+            <a:off x="1508760" y="3886200"/>
+            <a:ext cx="2834640" cy="411480"/>
           </a:xfrm>
           <a:prstGeom prst="rect">
             <a:avLst/>
@@ -15239,7 +15261,7 @@
               </a:spcAft>
             </a:pPr>
             <a:r>
-              <a:rPr sz="2000" b="1" i="0">
+              <a:rPr sz="2400" b="1" i="0">
                 <a:solidFill>
                   <a:srgbClr val="1F2A5A"/>
                 </a:solidFill>
@@ -15350,8 +15372,8 @@
         </p:nvSpPr>
         <p:spPr>
           <a:xfrm>
-            <a:off x="1508760" y="4498848"/>
-            <a:ext cx="2834640" cy="365760"/>
+            <a:off x="1508760" y="4453128"/>
+            <a:ext cx="2834640" cy="411480"/>
           </a:xfrm>
           <a:prstGeom prst="rect">
             <a:avLst/>
@@ -15370,7 +15392,7 @@
               </a:spcAft>
             </a:pPr>
             <a:r>
-              <a:rPr sz="2000" b="1" i="0">
+              <a:rPr sz="2400" b="1" i="0">
                 <a:solidFill>
                   <a:srgbClr val="1F2A5A"/>
                 </a:solidFill>
@@ -15481,8 +15503,8 @@
         </p:nvSpPr>
         <p:spPr>
           <a:xfrm>
-            <a:off x="1508760" y="5065776"/>
-            <a:ext cx="2834640" cy="365760"/>
+            <a:off x="1508760" y="5020056"/>
+            <a:ext cx="2834640" cy="411480"/>
           </a:xfrm>
           <a:prstGeom prst="rect">
             <a:avLst/>
@@ -15501,7 +15523,7 @@
               </a:spcAft>
             </a:pPr>
             <a:r>
-              <a:rPr sz="2000" b="1" i="0">
+              <a:rPr sz="2400" b="1" i="0">
                 <a:solidFill>
                   <a:srgbClr val="1F2A5A"/>
                 </a:solidFill>
@@ -15612,8 +15634,8 @@
         </p:nvSpPr>
         <p:spPr>
           <a:xfrm>
-            <a:off x="1508760" y="5632704"/>
-            <a:ext cx="2834640" cy="365760"/>
+            <a:off x="1508760" y="5586984"/>
+            <a:ext cx="2834640" cy="411480"/>
           </a:xfrm>
           <a:prstGeom prst="rect">
             <a:avLst/>
@@ -15632,7 +15654,7 @@
               </a:spcAft>
             </a:pPr>
             <a:r>
-              <a:rPr sz="2000" b="1" i="0">
+              <a:rPr sz="2400" b="1" i="0">
                 <a:solidFill>
                   <a:srgbClr val="1F2A5A"/>
                 </a:solidFill>
@@ -15853,8 +15875,8 @@
         </p:nvSpPr>
         <p:spPr>
           <a:xfrm>
-            <a:off x="11475720" y="365760"/>
-            <a:ext cx="502920" cy="402336"/>
+            <a:off x="11430000" y="329184"/>
+            <a:ext cx="548640" cy="475488"/>
           </a:xfrm>
           <a:prstGeom prst="roundRect">
             <a:avLst>
@@ -15889,7 +15911,7 @@
           <a:p>
             <a:pPr algn="ctr"/>
             <a:r>
-              <a:rPr sz="1800" b="1" i="0">
+              <a:rPr sz="2400" b="1" i="0">
                 <a:solidFill>
                   <a:srgbClr val="FFFFFF"/>
                 </a:solidFill>
@@ -15908,8 +15930,8 @@
         </p:nvSpPr>
         <p:spPr>
           <a:xfrm>
-            <a:off x="9601200" y="365760"/>
-            <a:ext cx="1828800" cy="402336"/>
+            <a:off x="8823960" y="329184"/>
+            <a:ext cx="2514600" cy="475488"/>
           </a:xfrm>
           <a:prstGeom prst="roundRect">
             <a:avLst>
@@ -15944,7 +15966,7 @@
           <a:p>
             <a:pPr algn="ctr"/>
             <a:r>
-              <a:rPr sz="1800" b="1" i="0">
+              <a:rPr sz="2400" b="1" i="0">
                 <a:solidFill>
                   <a:srgbClr val="FFFFFF"/>
                 </a:solidFill>
@@ -15983,7 +16005,7 @@
               </a:spcAft>
             </a:pPr>
             <a:r>
-              <a:rPr sz="2000" b="1" i="0">
+              <a:rPr sz="2400" b="1" i="0">
                 <a:solidFill>
                   <a:srgbClr val="7A5620"/>
                 </a:solidFill>
@@ -16321,8 +16343,8 @@
         </p:nvSpPr>
         <p:spPr>
           <a:xfrm>
-            <a:off x="11475720" y="365760"/>
-            <a:ext cx="502920" cy="402336"/>
+            <a:off x="11430000" y="329184"/>
+            <a:ext cx="548640" cy="475488"/>
           </a:xfrm>
           <a:prstGeom prst="roundRect">
             <a:avLst>
@@ -16357,7 +16379,7 @@
           <a:p>
             <a:pPr algn="ctr"/>
             <a:r>
-              <a:rPr sz="1800" b="1" i="0">
+              <a:rPr sz="2400" b="1" i="0">
                 <a:solidFill>
                   <a:srgbClr val="FFFFFF"/>
                 </a:solidFill>
@@ -16435,7 +16457,7 @@
               </a:spcAft>
             </a:pPr>
             <a:r>
-              <a:rPr sz="2000" b="0" i="1">
+              <a:rPr sz="2400" b="0" i="1">
                 <a:solidFill>
                   <a:srgbClr val="4A5268"/>
                 </a:solidFill>
@@ -16546,8 +16568,8 @@
         </p:nvSpPr>
         <p:spPr>
           <a:xfrm>
-            <a:off x="8366760" y="2514600"/>
-            <a:ext cx="822960" cy="365760"/>
+            <a:off x="7726680" y="2441448"/>
+            <a:ext cx="1463040" cy="457200"/>
           </a:xfrm>
           <a:prstGeom prst="roundRect">
             <a:avLst>
@@ -16582,7 +16604,7 @@
           <a:p>
             <a:pPr algn="ctr"/>
             <a:r>
-              <a:rPr sz="1400" b="1" i="0">
+              <a:rPr sz="2400" b="1" i="0">
                 <a:solidFill>
                   <a:srgbClr val="1F2A5A"/>
                 </a:solidFill>
@@ -16602,7 +16624,7 @@
         <p:spPr>
           <a:xfrm>
             <a:off x="3063240" y="2441448"/>
-            <a:ext cx="5120640" cy="365760"/>
+            <a:ext cx="4572000" cy="365760"/>
           </a:xfrm>
           <a:prstGeom prst="rect">
             <a:avLst/>
@@ -16621,7 +16643,7 @@
               </a:spcAft>
             </a:pPr>
             <a:r>
-              <a:rPr sz="1800" b="1" i="0">
+              <a:rPr sz="2400" b="1" i="0">
                 <a:solidFill>
                   <a:srgbClr val="7A5620"/>
                 </a:solidFill>
@@ -16699,7 +16721,7 @@
               </a:spcAft>
             </a:pPr>
             <a:r>
-              <a:rPr sz="2600" b="0" i="0">
+              <a:rPr sz="2800" b="0" i="0">
                 <a:solidFill>
                   <a:srgbClr val="1A1D26"/>
                 </a:solidFill>
@@ -16767,7 +16789,7 @@
         <p:spPr>
           <a:xfrm>
             <a:off x="3200400" y="4910328"/>
-            <a:ext cx="1615440" cy="512064"/>
+            <a:ext cx="1615440" cy="566928"/>
           </a:xfrm>
           <a:prstGeom prst="roundRect">
             <a:avLst>
@@ -16802,7 +16824,7 @@
           <a:p>
             <a:pPr algn="ctr"/>
             <a:r>
-              <a:rPr sz="1500" b="1" i="0">
+              <a:rPr sz="2400" b="1" i="0">
                 <a:solidFill>
                   <a:srgbClr val="FFFFFF"/>
                 </a:solidFill>
@@ -16866,7 +16888,7 @@
         <p:spPr>
           <a:xfrm>
             <a:off x="5273040" y="4910328"/>
-            <a:ext cx="1615440" cy="512064"/>
+            <a:ext cx="1615440" cy="566928"/>
           </a:xfrm>
           <a:prstGeom prst="roundRect">
             <a:avLst>
@@ -16901,7 +16923,7 @@
           <a:p>
             <a:pPr algn="ctr"/>
             <a:r>
-              <a:rPr sz="1500" b="1" i="0">
+              <a:rPr sz="2400" b="1" i="0">
                 <a:solidFill>
                   <a:srgbClr val="FFFFFF"/>
                 </a:solidFill>
@@ -16965,7 +16987,7 @@
         <p:spPr>
           <a:xfrm>
             <a:off x="7345680" y="4910328"/>
-            <a:ext cx="1615440" cy="512064"/>
+            <a:ext cx="1615440" cy="566928"/>
           </a:xfrm>
           <a:prstGeom prst="roundRect">
             <a:avLst>
@@ -17000,7 +17022,7 @@
           <a:p>
             <a:pPr algn="ctr"/>
             <a:r>
-              <a:rPr sz="1500" b="1" i="0">
+              <a:rPr sz="2400" b="1" i="0">
                 <a:solidFill>
                   <a:srgbClr val="FFFFFF"/>
                 </a:solidFill>
@@ -17214,8 +17236,8 @@
         </p:nvSpPr>
         <p:spPr>
           <a:xfrm>
-            <a:off x="11475720" y="365760"/>
-            <a:ext cx="502920" cy="402336"/>
+            <a:off x="11430000" y="329184"/>
+            <a:ext cx="548640" cy="475488"/>
           </a:xfrm>
           <a:prstGeom prst="roundRect">
             <a:avLst>
@@ -17250,7 +17272,7 @@
           <a:p>
             <a:pPr algn="ctr"/>
             <a:r>
-              <a:rPr sz="1800" b="1" i="0">
+              <a:rPr sz="2400" b="1" i="0">
                 <a:solidFill>
                   <a:srgbClr val="FFFFFF"/>
                 </a:solidFill>
@@ -17269,8 +17291,8 @@
         </p:nvSpPr>
         <p:spPr>
           <a:xfrm>
-            <a:off x="10378440" y="365760"/>
-            <a:ext cx="1051560" cy="402336"/>
+            <a:off x="9875520" y="329184"/>
+            <a:ext cx="1463040" cy="475488"/>
           </a:xfrm>
           <a:prstGeom prst="roundRect">
             <a:avLst>
@@ -17305,7 +17327,7 @@
           <a:p>
             <a:pPr algn="ctr"/>
             <a:r>
-              <a:rPr sz="1800" b="1" i="0">
+              <a:rPr sz="2400" b="1" i="0">
                 <a:solidFill>
                   <a:srgbClr val="FFFFFF"/>
                 </a:solidFill>
@@ -17438,7 +17460,7 @@
               </a:spcAft>
             </a:pPr>
             <a:r>
-              <a:rPr sz="2000" b="0" i="1">
+              <a:rPr sz="2400" b="0" i="1">
                 <a:solidFill>
                   <a:srgbClr val="4A5268"/>
                 </a:solidFill>
@@ -17709,8 +17731,8 @@
         </p:nvSpPr>
         <p:spPr>
           <a:xfrm>
-            <a:off x="11475720" y="365760"/>
-            <a:ext cx="502920" cy="402336"/>
+            <a:off x="11430000" y="329184"/>
+            <a:ext cx="548640" cy="475488"/>
           </a:xfrm>
           <a:prstGeom prst="roundRect">
             <a:avLst>
@@ -17745,7 +17767,7 @@
           <a:p>
             <a:pPr algn="ctr"/>
             <a:r>
-              <a:rPr sz="1800" b="1" i="0">
+              <a:rPr sz="2400" b="1" i="0">
                 <a:solidFill>
                   <a:srgbClr val="FFFFFF"/>
                 </a:solidFill>
@@ -17764,8 +17786,8 @@
         </p:nvSpPr>
         <p:spPr>
           <a:xfrm>
-            <a:off x="10305288" y="365760"/>
-            <a:ext cx="1124712" cy="402336"/>
+            <a:off x="9784080" y="329184"/>
+            <a:ext cx="1554480" cy="475488"/>
           </a:xfrm>
           <a:prstGeom prst="roundRect">
             <a:avLst>
@@ -17800,7 +17822,7 @@
           <a:p>
             <a:pPr algn="ctr"/>
             <a:r>
-              <a:rPr sz="1800" b="1" i="0">
+              <a:rPr sz="2400" b="1" i="0">
                 <a:solidFill>
                   <a:srgbClr val="FFFFFF"/>
                 </a:solidFill>
@@ -17933,7 +17955,7 @@
               </a:spcAft>
             </a:pPr>
             <a:r>
-              <a:rPr sz="2000" b="0" i="1">
+              <a:rPr sz="2400" b="0" i="1">
                 <a:solidFill>
                   <a:srgbClr val="4A5268"/>
                 </a:solidFill>
@@ -18204,8 +18226,8 @@
         </p:nvSpPr>
         <p:spPr>
           <a:xfrm>
-            <a:off x="11475720" y="365760"/>
-            <a:ext cx="502920" cy="402336"/>
+            <a:off x="11430000" y="329184"/>
+            <a:ext cx="548640" cy="475488"/>
           </a:xfrm>
           <a:prstGeom prst="roundRect">
             <a:avLst>
@@ -18240,7 +18262,7 @@
           <a:p>
             <a:pPr algn="ctr"/>
             <a:r>
-              <a:rPr sz="1800" b="1" i="0">
+              <a:rPr sz="2400" b="1" i="0">
                 <a:solidFill>
                   <a:srgbClr val="FFFFFF"/>
                 </a:solidFill>
@@ -18259,8 +18281,8 @@
         </p:nvSpPr>
         <p:spPr>
           <a:xfrm>
-            <a:off x="10113264" y="365760"/>
-            <a:ext cx="1316736" cy="402336"/>
+            <a:off x="9509760" y="329184"/>
+            <a:ext cx="1828800" cy="475488"/>
           </a:xfrm>
           <a:prstGeom prst="roundRect">
             <a:avLst>
@@ -18295,7 +18317,7 @@
           <a:p>
             <a:pPr algn="ctr"/>
             <a:r>
-              <a:rPr sz="1800" b="1" i="0">
+              <a:rPr sz="2400" b="1" i="0">
                 <a:solidFill>
                   <a:srgbClr val="FFFFFF"/>
                 </a:solidFill>
@@ -18373,13 +18395,13 @@
               </a:spcAft>
             </a:pPr>
             <a:r>
-              <a:rPr sz="2000" b="0" i="1">
+              <a:rPr sz="2400" b="0" i="1">
                 <a:solidFill>
                   <a:srgbClr val="4A5268"/>
                 </a:solidFill>
                 <a:latin typeface="Avenir Next"/>
               </a:rPr>
-              <a:t>Reader p. 4 — a battery sits still and shows no change… yet.</a:t>
+              <a:t>Reader p. 4 — think about a battery inside a flashlight.</a:t>
             </a:r>
           </a:p>
         </p:txBody>
@@ -18441,7 +18463,7 @@
         <p:spPr>
           <a:xfrm>
             <a:off x="1645920" y="2697480"/>
-            <a:ext cx="8869680" cy="457200"/>
+            <a:ext cx="8869680" cy="1005840"/>
           </a:xfrm>
           <a:prstGeom prst="rect">
             <a:avLst/>
@@ -18466,7 +18488,7 @@
                 </a:solidFill>
                 <a:latin typeface="Avenir Next"/>
               </a:rPr>
-              <a:t>A battery sitting still shows no change — yet.</a:t>
+              <a:t>A battery sits still in a flashlight that is switched off.</a:t>
             </a:r>
           </a:p>
         </p:txBody>
@@ -18479,8 +18501,8 @@
         </p:nvSpPr>
         <p:spPr>
           <a:xfrm>
-            <a:off x="1645920" y="3429000"/>
-            <a:ext cx="8869680" cy="1280160"/>
+            <a:off x="1645920" y="3794760"/>
+            <a:ext cx="8869680" cy="1097280"/>
           </a:xfrm>
           <a:prstGeom prst="rect">
             <a:avLst/>
@@ -18505,8 +18527,8 @@
                 </a:solidFill>
                 <a:latin typeface="Avenir Next"/>
               </a:rPr>
-              <a:t>Inside a battery, chemicals store energy.
-When it goes in a flashlight, the stored energy is released.</a:t>
+              <a:t>Yes or no? Make a prediction.
+Tell your partner why.</a:t>
             </a:r>
           </a:p>
         </p:txBody>
@@ -18675,8 +18697,8 @@
         </p:nvSpPr>
         <p:spPr>
           <a:xfrm>
-            <a:off x="11475720" y="365760"/>
-            <a:ext cx="502920" cy="402336"/>
+            <a:off x="11430000" y="329184"/>
+            <a:ext cx="548640" cy="475488"/>
           </a:xfrm>
           <a:prstGeom prst="roundRect">
             <a:avLst>
@@ -18711,7 +18733,7 @@
           <a:p>
             <a:pPr algn="ctr"/>
             <a:r>
-              <a:rPr sz="1800" b="1" i="0">
+              <a:rPr sz="2400" b="1" i="0">
                 <a:solidFill>
                   <a:srgbClr val="FFFFFF"/>
                 </a:solidFill>
@@ -18789,13 +18811,13 @@
               </a:spcAft>
             </a:pPr>
             <a:r>
-              <a:rPr sz="2000" b="0" i="1">
+              <a:rPr sz="2400" b="0" i="1">
                 <a:solidFill>
                   <a:srgbClr val="4A5268"/>
                 </a:solidFill>
                 <a:latin typeface="Avenir Next"/>
               </a:rPr>
-              <a:t>Reader p. 5 — an object held up can fall and cause a change.</a:t>
+              <a:t>Reader p. 5 — an object held up can cause a change later.</a:t>
             </a:r>
           </a:p>
         </p:txBody>
@@ -18882,7 +18904,7 @@
                 </a:solidFill>
                 <a:latin typeface="Avenir Next"/>
               </a:rPr>
-              <a:t>Raised apple → let go → it falls</a:t>
+              <a:t>Raised apple → let go → ?</a:t>
             </a:r>
           </a:p>
         </p:txBody>
@@ -18922,7 +18944,7 @@
                 <a:latin typeface="Avenir Next"/>
               </a:rPr>
               <a:t>An apple held above the ground has stored energy
-because of its position. Let it go and it will fall.</a:t>
+because of its position. Imagine you let go. What will happen?</a:t>
             </a:r>
           </a:p>
         </p:txBody>
@@ -19091,8 +19113,8 @@
         </p:nvSpPr>
         <p:spPr>
           <a:xfrm>
-            <a:off x="11475720" y="365760"/>
-            <a:ext cx="502920" cy="402336"/>
+            <a:off x="11430000" y="329184"/>
+            <a:ext cx="548640" cy="475488"/>
           </a:xfrm>
           <a:prstGeom prst="roundRect">
             <a:avLst>
@@ -19127,7 +19149,7 @@
           <a:p>
             <a:pPr algn="ctr"/>
             <a:r>
-              <a:rPr sz="1800" b="1" i="0">
+              <a:rPr sz="2400" b="1" i="0">
                 <a:solidFill>
                   <a:srgbClr val="FFFFFF"/>
                 </a:solidFill>
@@ -19146,8 +19168,8 @@
         </p:nvSpPr>
         <p:spPr>
           <a:xfrm>
-            <a:off x="10332720" y="365760"/>
-            <a:ext cx="1097280" cy="402336"/>
+            <a:off x="9829800" y="329184"/>
+            <a:ext cx="1508760" cy="475488"/>
           </a:xfrm>
           <a:prstGeom prst="roundRect">
             <a:avLst>
@@ -19182,7 +19204,7 @@
           <a:p>
             <a:pPr algn="ctr"/>
             <a:r>
-              <a:rPr sz="1800" b="1" i="0">
+              <a:rPr sz="2400" b="1" i="0">
                 <a:solidFill>
                   <a:srgbClr val="FFFFFF"/>
                 </a:solidFill>
@@ -19234,7 +19256,46 @@
       </p:sp>
       <p:sp>
         <p:nvSpPr>
-          <p:cNvPr id="7" name="Rounded Rectangle 6"/>
+          <p:cNvPr id="7" name="TextBox 6"/>
+          <p:cNvSpPr txBox="1"/>
+          <p:nvPr/>
+        </p:nvSpPr>
+        <p:spPr>
+          <a:xfrm>
+            <a:off x="502920" y="1600200"/>
+            <a:ext cx="10698480" cy="365760"/>
+          </a:xfrm>
+          <a:prstGeom prst="rect">
+            <a:avLst/>
+          </a:prstGeom>
+          <a:noFill/>
+        </p:spPr>
+        <p:txBody>
+          <a:bodyPr wrap="square" anchor="t" lIns="0" rIns="0" tIns="0" bIns="0">
+            <a:spAutoFit/>
+          </a:bodyPr>
+          <a:lstStyle/>
+          <a:p>
+            <a:pPr algn="l">
+              <a:spcAft>
+                <a:spcPts val="1000"/>
+              </a:spcAft>
+            </a:pPr>
+            <a:r>
+              <a:rPr sz="2400" b="0" i="1">
+                <a:solidFill>
+                  <a:srgbClr val="4A5268"/>
+                </a:solidFill>
+                <a:latin typeface="Avenir Next"/>
+              </a:rPr>
+              <a:t>Reader p. 4 — back to our battery: the chemicals inside it store energy.</a:t>
+            </a:r>
+          </a:p>
+        </p:txBody>
+      </p:sp>
+      <p:sp>
+        <p:nvSpPr>
+          <p:cNvPr id="8" name="Rounded Rectangle 7"/>
           <p:cNvSpPr/>
           <p:nvPr/>
         </p:nvSpPr>
@@ -19289,7 +19350,7 @@
       </p:sp>
       <p:sp>
         <p:nvSpPr>
-          <p:cNvPr id="8" name="Right Arrow 7"/>
+          <p:cNvPr id="9" name="Right Arrow 8"/>
           <p:cNvSpPr/>
           <p:nvPr/>
         </p:nvSpPr>
@@ -19333,7 +19394,7 @@
       </p:sp>
       <p:sp>
         <p:nvSpPr>
-          <p:cNvPr id="9" name="Rounded Rectangle 8"/>
+          <p:cNvPr id="10" name="Rounded Rectangle 9"/>
           <p:cNvSpPr/>
           <p:nvPr/>
         </p:nvSpPr>
@@ -19388,7 +19449,7 @@
       </p:sp>
       <p:sp>
         <p:nvSpPr>
-          <p:cNvPr id="10" name="Right Arrow 9"/>
+          <p:cNvPr id="11" name="Right Arrow 10"/>
           <p:cNvSpPr/>
           <p:nvPr/>
         </p:nvSpPr>
@@ -19432,7 +19493,7 @@
       </p:sp>
       <p:sp>
         <p:nvSpPr>
-          <p:cNvPr id="11" name="Rounded Rectangle 10"/>
+          <p:cNvPr id="12" name="Rounded Rectangle 11"/>
           <p:cNvSpPr/>
           <p:nvPr/>
         </p:nvSpPr>
@@ -19487,7 +19548,7 @@
       </p:sp>
       <p:sp>
         <p:nvSpPr>
-          <p:cNvPr id="12" name="TextBox 11"/>
+          <p:cNvPr id="13" name="TextBox 12"/>
           <p:cNvSpPr txBox="1"/>
           <p:nvPr/>
         </p:nvSpPr>
@@ -19520,14 +19581,14 @@
                 <a:latin typeface="Avenir Next"/>
               </a:rPr>
               <a:t>Stretch a rubber band — it now stores energy.
-Let it go — it moves and makes a sound: the change.</a:t>
-            </a:r>
-          </a:p>
-        </p:txBody>
-      </p:sp>
-      <p:sp>
-        <p:nvSpPr>
-          <p:cNvPr id="13" name="TextBox 12"/>
+Let it go. What change will you see and hear?</a:t>
+            </a:r>
+          </a:p>
+        </p:txBody>
+      </p:sp>
+      <p:sp>
+        <p:nvSpPr>
+          <p:cNvPr id="14" name="TextBox 13"/>
           <p:cNvSpPr txBox="1"/>
           <p:nvPr/>
         </p:nvSpPr>
@@ -19689,8 +19750,8 @@
         </p:nvSpPr>
         <p:spPr>
           <a:xfrm>
-            <a:off x="11475720" y="365760"/>
-            <a:ext cx="502920" cy="402336"/>
+            <a:off x="11430000" y="329184"/>
+            <a:ext cx="548640" cy="475488"/>
           </a:xfrm>
           <a:prstGeom prst="roundRect">
             <a:avLst>
@@ -19725,7 +19786,7 @@
           <a:p>
             <a:pPr algn="ctr"/>
             <a:r>
-              <a:rPr sz="1800" b="1" i="0">
+              <a:rPr sz="2400" b="1" i="0">
                 <a:solidFill>
                   <a:srgbClr val="FFFFFF"/>
                 </a:solidFill>
@@ -19744,8 +19805,8 @@
         </p:nvSpPr>
         <p:spPr>
           <a:xfrm>
-            <a:off x="10378440" y="365760"/>
-            <a:ext cx="1051560" cy="402336"/>
+            <a:off x="9875520" y="329184"/>
+            <a:ext cx="1463040" cy="475488"/>
           </a:xfrm>
           <a:prstGeom prst="roundRect">
             <a:avLst>
@@ -19780,7 +19841,7 @@
           <a:p>
             <a:pPr algn="ctr"/>
             <a:r>
-              <a:rPr sz="1800" b="1" i="0">
+              <a:rPr sz="2400" b="1" i="0">
                 <a:solidFill>
                   <a:srgbClr val="FFFFFF"/>
                 </a:solidFill>
@@ -19913,7 +19974,7 @@
               </a:spcAft>
             </a:pPr>
             <a:r>
-              <a:rPr sz="2000" b="0" i="1">
+              <a:rPr sz="2400" b="0" i="1">
                 <a:solidFill>
                   <a:srgbClr val="4A5268"/>
                 </a:solidFill>
@@ -19932,8 +19993,8 @@
         </p:nvSpPr>
         <p:spPr>
           <a:xfrm>
-            <a:off x="1371600" y="1965960"/>
-            <a:ext cx="2194560" cy="502920"/>
+            <a:off x="914400" y="1920240"/>
+            <a:ext cx="2956559" cy="594360"/>
           </a:xfrm>
           <a:prstGeom prst="roundRect">
             <a:avLst>
@@ -19968,7 +20029,7 @@
           <a:p>
             <a:pPr algn="ctr"/>
             <a:r>
-              <a:rPr sz="1800" b="1" i="0">
+              <a:rPr sz="2400" b="1" i="0">
                 <a:solidFill>
                   <a:srgbClr val="FFFFFF"/>
                 </a:solidFill>
@@ -19987,7 +20048,7 @@
         </p:nvSpPr>
         <p:spPr>
           <a:xfrm>
-            <a:off x="3584448" y="2071115"/>
+            <a:off x="3889247" y="2071116"/>
             <a:ext cx="329184" cy="292608"/>
           </a:xfrm>
           <a:prstGeom prst="rightArrow">
@@ -20031,8 +20092,8 @@
         </p:nvSpPr>
         <p:spPr>
           <a:xfrm>
-            <a:off x="3931920" y="1965960"/>
-            <a:ext cx="2194560" cy="502920"/>
+            <a:off x="4236720" y="1920240"/>
+            <a:ext cx="2956559" cy="594360"/>
           </a:xfrm>
           <a:prstGeom prst="roundRect">
             <a:avLst>
@@ -20067,7 +20128,7 @@
           <a:p>
             <a:pPr algn="ctr"/>
             <a:r>
-              <a:rPr sz="1800" b="1" i="0">
+              <a:rPr sz="2400" b="1" i="0">
                 <a:solidFill>
                   <a:srgbClr val="FFFFFF"/>
                 </a:solidFill>
@@ -20086,7 +20147,7 @@
         </p:nvSpPr>
         <p:spPr>
           <a:xfrm>
-            <a:off x="6144767" y="2071115"/>
+            <a:off x="7211567" y="2071116"/>
             <a:ext cx="329184" cy="292608"/>
           </a:xfrm>
           <a:prstGeom prst="rightArrow">
@@ -20130,8 +20191,8 @@
         </p:nvSpPr>
         <p:spPr>
           <a:xfrm>
-            <a:off x="6492240" y="1965960"/>
-            <a:ext cx="2194560" cy="502920"/>
+            <a:off x="7559039" y="1920240"/>
+            <a:ext cx="2956559" cy="594360"/>
           </a:xfrm>
           <a:prstGeom prst="roundRect">
             <a:avLst>
@@ -20166,7 +20227,7 @@
           <a:p>
             <a:pPr algn="ctr"/>
             <a:r>
-              <a:rPr sz="1800" b="1" i="0">
+              <a:rPr sz="2400" b="1" i="0">
                 <a:solidFill>
                   <a:srgbClr val="FFFFFF"/>
                 </a:solidFill>
@@ -20185,8 +20246,8 @@
         </p:nvSpPr>
         <p:spPr>
           <a:xfrm>
-            <a:off x="1371600" y="2606040"/>
-            <a:ext cx="3840480" cy="457200"/>
+            <a:off x="914400" y="2697480"/>
+            <a:ext cx="4389120" cy="457200"/>
           </a:xfrm>
           <a:prstGeom prst="rect">
             <a:avLst/>
@@ -20229,8 +20290,8 @@
         </p:nvSpPr>
         <p:spPr>
           <a:xfrm>
-            <a:off x="1481328" y="2679192"/>
-            <a:ext cx="3621024" cy="320040"/>
+            <a:off x="1024128" y="2761488"/>
+            <a:ext cx="4169663" cy="320040"/>
           </a:xfrm>
           <a:prstGeom prst="rect">
             <a:avLst/>
@@ -20249,7 +20310,7 @@
               </a:spcAft>
             </a:pPr>
             <a:r>
-              <a:rPr sz="1800" b="1" i="0">
+              <a:rPr sz="2200" b="1" i="0">
                 <a:solidFill>
                   <a:srgbClr val="FFFFFF"/>
                 </a:solidFill>
@@ -20268,8 +20329,8 @@
         </p:nvSpPr>
         <p:spPr>
           <a:xfrm>
-            <a:off x="5349240" y="2606040"/>
-            <a:ext cx="6080759" cy="457200"/>
+            <a:off x="5440680" y="2697480"/>
+            <a:ext cx="5989320" cy="457200"/>
           </a:xfrm>
           <a:prstGeom prst="rect">
             <a:avLst/>
@@ -20312,8 +20373,8 @@
         </p:nvSpPr>
         <p:spPr>
           <a:xfrm>
-            <a:off x="5458968" y="2679192"/>
-            <a:ext cx="5861303" cy="320040"/>
+            <a:off x="5550408" y="2761488"/>
+            <a:ext cx="5769864" cy="320040"/>
           </a:xfrm>
           <a:prstGeom prst="rect">
             <a:avLst/>
@@ -20332,7 +20393,7 @@
               </a:spcAft>
             </a:pPr>
             <a:r>
-              <a:rPr sz="1800" b="1" i="0">
+              <a:rPr sz="2000" b="1" i="0">
                 <a:solidFill>
                   <a:srgbClr val="FFFFFF"/>
                 </a:solidFill>
@@ -20351,8 +20412,8 @@
         </p:nvSpPr>
         <p:spPr>
           <a:xfrm>
-            <a:off x="1371600" y="3063240"/>
-            <a:ext cx="3840480" cy="502920"/>
+            <a:off x="914400" y="3154680"/>
+            <a:ext cx="4389120" cy="530352"/>
           </a:xfrm>
           <a:prstGeom prst="rect">
             <a:avLst/>
@@ -20397,8 +20458,8 @@
         </p:nvSpPr>
         <p:spPr>
           <a:xfrm>
-            <a:off x="1481328" y="3182112"/>
-            <a:ext cx="3621024" cy="365760"/>
+            <a:off x="1024128" y="3209544"/>
+            <a:ext cx="4169663" cy="411480"/>
           </a:xfrm>
           <a:prstGeom prst="rect">
             <a:avLst/>
@@ -20417,7 +20478,7 @@
               </a:spcAft>
             </a:pPr>
             <a:r>
-              <a:rPr sz="1800" b="1" i="0">
+              <a:rPr sz="2400" b="1" i="0">
                 <a:solidFill>
                   <a:srgbClr val="1F2A5A"/>
                 </a:solidFill>
@@ -20436,8 +20497,8 @@
         </p:nvSpPr>
         <p:spPr>
           <a:xfrm>
-            <a:off x="5349240" y="3063240"/>
-            <a:ext cx="6080759" cy="502920"/>
+            <a:off x="5440680" y="3154680"/>
+            <a:ext cx="5989320" cy="530352"/>
           </a:xfrm>
           <a:prstGeom prst="rect">
             <a:avLst/>
@@ -20482,8 +20543,8 @@
         </p:nvSpPr>
         <p:spPr>
           <a:xfrm>
-            <a:off x="1371600" y="3566160"/>
-            <a:ext cx="3840480" cy="502920"/>
+            <a:off x="914400" y="3685032"/>
+            <a:ext cx="4389120" cy="530352"/>
           </a:xfrm>
           <a:prstGeom prst="rect">
             <a:avLst/>
@@ -20528,8 +20589,8 @@
         </p:nvSpPr>
         <p:spPr>
           <a:xfrm>
-            <a:off x="1481328" y="3685032"/>
-            <a:ext cx="3621024" cy="365760"/>
+            <a:off x="1024128" y="3739896"/>
+            <a:ext cx="4169663" cy="411480"/>
           </a:xfrm>
           <a:prstGeom prst="rect">
             <a:avLst/>
@@ -20548,7 +20609,7 @@
               </a:spcAft>
             </a:pPr>
             <a:r>
-              <a:rPr sz="1800" b="1" i="0">
+              <a:rPr sz="2400" b="1" i="0">
                 <a:solidFill>
                   <a:srgbClr val="1F2A5A"/>
                 </a:solidFill>
@@ -20567,8 +20628,8 @@
         </p:nvSpPr>
         <p:spPr>
           <a:xfrm>
-            <a:off x="5349240" y="3566160"/>
-            <a:ext cx="6080759" cy="502920"/>
+            <a:off x="5440680" y="3685032"/>
+            <a:ext cx="5989320" cy="530352"/>
           </a:xfrm>
           <a:prstGeom prst="rect">
             <a:avLst/>
@@ -20613,8 +20674,8 @@
         </p:nvSpPr>
         <p:spPr>
           <a:xfrm>
-            <a:off x="1371600" y="4069080"/>
-            <a:ext cx="3840480" cy="502920"/>
+            <a:off x="914400" y="4215384"/>
+            <a:ext cx="4389120" cy="530352"/>
           </a:xfrm>
           <a:prstGeom prst="rect">
             <a:avLst/>
@@ -20659,8 +20720,8 @@
         </p:nvSpPr>
         <p:spPr>
           <a:xfrm>
-            <a:off x="1481328" y="4187952"/>
-            <a:ext cx="3621024" cy="365760"/>
+            <a:off x="1024128" y="4270248"/>
+            <a:ext cx="4169663" cy="411480"/>
           </a:xfrm>
           <a:prstGeom prst="rect">
             <a:avLst/>
@@ -20679,7 +20740,7 @@
               </a:spcAft>
             </a:pPr>
             <a:r>
-              <a:rPr sz="1800" b="1" i="0">
+              <a:rPr sz="2400" b="1" i="0">
                 <a:solidFill>
                   <a:srgbClr val="1F2A5A"/>
                 </a:solidFill>
@@ -20698,8 +20759,8 @@
         </p:nvSpPr>
         <p:spPr>
           <a:xfrm>
-            <a:off x="5349240" y="4069080"/>
-            <a:ext cx="6080759" cy="502920"/>
+            <a:off x="5440680" y="4215384"/>
+            <a:ext cx="5989320" cy="530352"/>
           </a:xfrm>
           <a:prstGeom prst="rect">
             <a:avLst/>
@@ -20744,8 +20805,8 @@
         </p:nvSpPr>
         <p:spPr>
           <a:xfrm>
-            <a:off x="1371600" y="4754880"/>
-            <a:ext cx="10058400" cy="640080"/>
+            <a:off x="914400" y="4937760"/>
+            <a:ext cx="10515600" cy="640080"/>
           </a:xfrm>
           <a:prstGeom prst="rect">
             <a:avLst/>
@@ -20957,8 +21018,8 @@
         </p:nvSpPr>
         <p:spPr>
           <a:xfrm>
-            <a:off x="11475720" y="365760"/>
-            <a:ext cx="502920" cy="402336"/>
+            <a:off x="11430000" y="329184"/>
+            <a:ext cx="548640" cy="475488"/>
           </a:xfrm>
           <a:prstGeom prst="roundRect">
             <a:avLst>
@@ -20993,7 +21054,7 @@
           <a:p>
             <a:pPr algn="ctr"/>
             <a:r>
-              <a:rPr sz="1800" b="1" i="0">
+              <a:rPr sz="2400" b="1" i="0">
                 <a:solidFill>
                   <a:srgbClr val="FFFFFF"/>
                 </a:solidFill>
@@ -21012,8 +21073,8 @@
         </p:nvSpPr>
         <p:spPr>
           <a:xfrm>
-            <a:off x="10305288" y="365760"/>
-            <a:ext cx="1124712" cy="402336"/>
+            <a:off x="9784080" y="329184"/>
+            <a:ext cx="1554480" cy="475488"/>
           </a:xfrm>
           <a:prstGeom prst="roundRect">
             <a:avLst>
@@ -21048,7 +21109,7 @@
           <a:p>
             <a:pPr algn="ctr"/>
             <a:r>
-              <a:rPr sz="1800" b="1" i="0">
+              <a:rPr sz="2400" b="1" i="0">
                 <a:solidFill>
                   <a:srgbClr val="FFFFFF"/>
                 </a:solidFill>
@@ -21181,7 +21242,7 @@
               </a:spcAft>
             </a:pPr>
             <a:r>
-              <a:rPr sz="2000" b="0" i="1">
+              <a:rPr sz="2400" b="0" i="1">
                 <a:solidFill>
                   <a:srgbClr val="4A5268"/>
                 </a:solidFill>
@@ -21200,8 +21261,8 @@
         </p:nvSpPr>
         <p:spPr>
           <a:xfrm>
-            <a:off x="1371600" y="1965960"/>
-            <a:ext cx="2194560" cy="502920"/>
+            <a:off x="914400" y="1920240"/>
+            <a:ext cx="2956559" cy="594360"/>
           </a:xfrm>
           <a:prstGeom prst="roundRect">
             <a:avLst>
@@ -21236,7 +21297,7 @@
           <a:p>
             <a:pPr algn="ctr"/>
             <a:r>
-              <a:rPr sz="1800" b="1" i="0">
+              <a:rPr sz="2400" b="1" i="0">
                 <a:solidFill>
                   <a:srgbClr val="FFFFFF"/>
                 </a:solidFill>
@@ -21255,7 +21316,7 @@
         </p:nvSpPr>
         <p:spPr>
           <a:xfrm>
-            <a:off x="3584448" y="2071115"/>
+            <a:off x="3889247" y="2071116"/>
             <a:ext cx="329184" cy="292608"/>
           </a:xfrm>
           <a:prstGeom prst="rightArrow">
@@ -21299,8 +21360,8 @@
         </p:nvSpPr>
         <p:spPr>
           <a:xfrm>
-            <a:off x="3931920" y="1965960"/>
-            <a:ext cx="2194560" cy="502920"/>
+            <a:off x="4236720" y="1920240"/>
+            <a:ext cx="2956559" cy="594360"/>
           </a:xfrm>
           <a:prstGeom prst="roundRect">
             <a:avLst>
@@ -21335,7 +21396,7 @@
           <a:p>
             <a:pPr algn="ctr"/>
             <a:r>
-              <a:rPr sz="1800" b="1" i="0">
+              <a:rPr sz="2400" b="1" i="0">
                 <a:solidFill>
                   <a:srgbClr val="FFFFFF"/>
                 </a:solidFill>
@@ -21354,7 +21415,7 @@
         </p:nvSpPr>
         <p:spPr>
           <a:xfrm>
-            <a:off x="6144767" y="2071115"/>
+            <a:off x="7211567" y="2071116"/>
             <a:ext cx="329184" cy="292608"/>
           </a:xfrm>
           <a:prstGeom prst="rightArrow">
@@ -21398,8 +21459,8 @@
         </p:nvSpPr>
         <p:spPr>
           <a:xfrm>
-            <a:off x="6492240" y="1965960"/>
-            <a:ext cx="2194560" cy="502920"/>
+            <a:off x="7559039" y="1920240"/>
+            <a:ext cx="2956559" cy="594360"/>
           </a:xfrm>
           <a:prstGeom prst="roundRect">
             <a:avLst>
@@ -21434,7 +21495,7 @@
           <a:p>
             <a:pPr algn="ctr"/>
             <a:r>
-              <a:rPr sz="1800" b="1" i="0">
+              <a:rPr sz="2400" b="1" i="0">
                 <a:solidFill>
                   <a:srgbClr val="FFFFFF"/>
                 </a:solidFill>
@@ -21453,8 +21514,8 @@
         </p:nvSpPr>
         <p:spPr>
           <a:xfrm>
-            <a:off x="1371600" y="2606040"/>
-            <a:ext cx="3840480" cy="457200"/>
+            <a:off x="914400" y="2697480"/>
+            <a:ext cx="4389120" cy="457200"/>
           </a:xfrm>
           <a:prstGeom prst="rect">
             <a:avLst/>
@@ -21497,8 +21558,8 @@
         </p:nvSpPr>
         <p:spPr>
           <a:xfrm>
-            <a:off x="1481328" y="2679192"/>
-            <a:ext cx="3621024" cy="320040"/>
+            <a:off x="1024128" y="2761488"/>
+            <a:ext cx="4169663" cy="320040"/>
           </a:xfrm>
           <a:prstGeom prst="rect">
             <a:avLst/>
@@ -21517,7 +21578,7 @@
               </a:spcAft>
             </a:pPr>
             <a:r>
-              <a:rPr sz="1800" b="1" i="0">
+              <a:rPr sz="2200" b="1" i="0">
                 <a:solidFill>
                   <a:srgbClr val="FFFFFF"/>
                 </a:solidFill>
@@ -21536,8 +21597,8 @@
         </p:nvSpPr>
         <p:spPr>
           <a:xfrm>
-            <a:off x="5349240" y="2606040"/>
-            <a:ext cx="6080759" cy="457200"/>
+            <a:off x="5440680" y="2697480"/>
+            <a:ext cx="5989320" cy="457200"/>
           </a:xfrm>
           <a:prstGeom prst="rect">
             <a:avLst/>
@@ -21580,8 +21641,8 @@
         </p:nvSpPr>
         <p:spPr>
           <a:xfrm>
-            <a:off x="5458968" y="2679192"/>
-            <a:ext cx="5861303" cy="320040"/>
+            <a:off x="5550408" y="2761488"/>
+            <a:ext cx="5769864" cy="320040"/>
           </a:xfrm>
           <a:prstGeom prst="rect">
             <a:avLst/>
@@ -21600,7 +21661,7 @@
               </a:spcAft>
             </a:pPr>
             <a:r>
-              <a:rPr sz="1800" b="1" i="0">
+              <a:rPr sz="2000" b="1" i="0">
                 <a:solidFill>
                   <a:srgbClr val="FFFFFF"/>
                 </a:solidFill>
@@ -21619,8 +21680,8 @@
         </p:nvSpPr>
         <p:spPr>
           <a:xfrm>
-            <a:off x="1371600" y="3063240"/>
-            <a:ext cx="3840480" cy="502920"/>
+            <a:off x="914400" y="3154680"/>
+            <a:ext cx="4389120" cy="530352"/>
           </a:xfrm>
           <a:prstGeom prst="rect">
             <a:avLst/>
@@ -21665,8 +21726,8 @@
         </p:nvSpPr>
         <p:spPr>
           <a:xfrm>
-            <a:off x="1481328" y="3182112"/>
-            <a:ext cx="3621024" cy="365760"/>
+            <a:off x="1024128" y="3209544"/>
+            <a:ext cx="4169663" cy="411480"/>
           </a:xfrm>
           <a:prstGeom prst="rect">
             <a:avLst/>
@@ -21685,7 +21746,7 @@
               </a:spcAft>
             </a:pPr>
             <a:r>
-              <a:rPr sz="1800" b="1" i="0">
+              <a:rPr sz="2400" b="1" i="0">
                 <a:solidFill>
                   <a:srgbClr val="1F2A5A"/>
                 </a:solidFill>
@@ -21704,8 +21765,8 @@
         </p:nvSpPr>
         <p:spPr>
           <a:xfrm>
-            <a:off x="5349240" y="3063240"/>
-            <a:ext cx="6080759" cy="502920"/>
+            <a:off x="5440680" y="3154680"/>
+            <a:ext cx="5989320" cy="530352"/>
           </a:xfrm>
           <a:prstGeom prst="rect">
             <a:avLst/>
@@ -21744,14 +21805,53 @@
       </p:sp>
       <p:sp>
         <p:nvSpPr>
-          <p:cNvPr id="21" name="Rectangle 20"/>
+          <p:cNvPr id="21" name="TextBox 20"/>
+          <p:cNvSpPr txBox="1"/>
+          <p:nvPr/>
+        </p:nvSpPr>
+        <p:spPr>
+          <a:xfrm>
+            <a:off x="5550408" y="3209544"/>
+            <a:ext cx="5769864" cy="411480"/>
+          </a:xfrm>
+          <a:prstGeom prst="rect">
+            <a:avLst/>
+          </a:prstGeom>
+          <a:noFill/>
+        </p:spPr>
+        <p:txBody>
+          <a:bodyPr wrap="square" anchor="ctr" lIns="0" rIns="0" tIns="0" bIns="0">
+            <a:spAutoFit/>
+          </a:bodyPr>
+          <a:lstStyle/>
+          <a:p>
+            <a:pPr algn="l">
+              <a:spcAft>
+                <a:spcPts val="1000"/>
+              </a:spcAft>
+            </a:pPr>
+            <a:r>
+              <a:rPr sz="2800" b="0" i="1">
+                <a:solidFill>
+                  <a:srgbClr val="7A5620"/>
+                </a:solidFill>
+                <a:latin typeface="Avenir Next"/>
+              </a:rPr>
+              <a:t>the flashlight lights up</a:t>
+            </a:r>
+          </a:p>
+        </p:txBody>
+      </p:sp>
+      <p:sp>
+        <p:nvSpPr>
+          <p:cNvPr id="22" name="Rectangle 21"/>
           <p:cNvSpPr/>
           <p:nvPr/>
         </p:nvSpPr>
         <p:spPr>
           <a:xfrm>
-            <a:off x="1371600" y="3566160"/>
-            <a:ext cx="3840480" cy="502920"/>
+            <a:off x="914400" y="3685032"/>
+            <a:ext cx="4389120" cy="530352"/>
           </a:xfrm>
           <a:prstGeom prst="rect">
             <a:avLst/>
@@ -21790,14 +21890,14 @@
       </p:sp>
       <p:sp>
         <p:nvSpPr>
-          <p:cNvPr id="22" name="TextBox 21"/>
+          <p:cNvPr id="23" name="TextBox 22"/>
           <p:cNvSpPr txBox="1"/>
           <p:nvPr/>
         </p:nvSpPr>
         <p:spPr>
           <a:xfrm>
-            <a:off x="1481328" y="3685032"/>
-            <a:ext cx="3621024" cy="365760"/>
+            <a:off x="1024128" y="3739896"/>
+            <a:ext cx="4169663" cy="411480"/>
           </a:xfrm>
           <a:prstGeom prst="rect">
             <a:avLst/>
@@ -21816,7 +21916,7 @@
               </a:spcAft>
             </a:pPr>
             <a:r>
-              <a:rPr sz="1800" b="1" i="0">
+              <a:rPr sz="2400" b="1" i="0">
                 <a:solidFill>
                   <a:srgbClr val="1F2A5A"/>
                 </a:solidFill>
@@ -21829,14 +21929,14 @@
       </p:sp>
       <p:sp>
         <p:nvSpPr>
-          <p:cNvPr id="23" name="Rectangle 22"/>
+          <p:cNvPr id="24" name="Rectangle 23"/>
           <p:cNvSpPr/>
           <p:nvPr/>
         </p:nvSpPr>
         <p:spPr>
           <a:xfrm>
-            <a:off x="5349240" y="3566160"/>
-            <a:ext cx="6080759" cy="502920"/>
+            <a:off x="5440680" y="3685032"/>
+            <a:ext cx="5989320" cy="530352"/>
           </a:xfrm>
           <a:prstGeom prst="rect">
             <a:avLst/>
@@ -21875,14 +21975,53 @@
       </p:sp>
       <p:sp>
         <p:nvSpPr>
-          <p:cNvPr id="24" name="Rectangle 23"/>
+          <p:cNvPr id="25" name="TextBox 24"/>
+          <p:cNvSpPr txBox="1"/>
+          <p:nvPr/>
+        </p:nvSpPr>
+        <p:spPr>
+          <a:xfrm>
+            <a:off x="5550408" y="3739896"/>
+            <a:ext cx="5769864" cy="411480"/>
+          </a:xfrm>
+          <a:prstGeom prst="rect">
+            <a:avLst/>
+          </a:prstGeom>
+          <a:noFill/>
+        </p:spPr>
+        <p:txBody>
+          <a:bodyPr wrap="square" anchor="ctr" lIns="0" rIns="0" tIns="0" bIns="0">
+            <a:spAutoFit/>
+          </a:bodyPr>
+          <a:lstStyle/>
+          <a:p>
+            <a:pPr algn="l">
+              <a:spcAft>
+                <a:spcPts val="1000"/>
+              </a:spcAft>
+            </a:pPr>
+            <a:r>
+              <a:rPr sz="2800" b="0" i="1">
+                <a:solidFill>
+                  <a:srgbClr val="7A5620"/>
+                </a:solidFill>
+                <a:latin typeface="Avenir Next"/>
+              </a:rPr>
+              <a:t>it snaps and makes a sound</a:t>
+            </a:r>
+          </a:p>
+        </p:txBody>
+      </p:sp>
+      <p:sp>
+        <p:nvSpPr>
+          <p:cNvPr id="26" name="Rectangle 25"/>
           <p:cNvSpPr/>
           <p:nvPr/>
         </p:nvSpPr>
         <p:spPr>
           <a:xfrm>
-            <a:off x="1371600" y="4069080"/>
-            <a:ext cx="3840480" cy="502920"/>
+            <a:off x="914400" y="4215384"/>
+            <a:ext cx="4389120" cy="530352"/>
           </a:xfrm>
           <a:prstGeom prst="rect">
             <a:avLst/>
@@ -21921,14 +22060,14 @@
       </p:sp>
       <p:sp>
         <p:nvSpPr>
-          <p:cNvPr id="25" name="TextBox 24"/>
+          <p:cNvPr id="27" name="TextBox 26"/>
           <p:cNvSpPr txBox="1"/>
           <p:nvPr/>
         </p:nvSpPr>
         <p:spPr>
           <a:xfrm>
-            <a:off x="1481328" y="4187952"/>
-            <a:ext cx="3621024" cy="365760"/>
+            <a:off x="1024128" y="4270248"/>
+            <a:ext cx="4169663" cy="411480"/>
           </a:xfrm>
           <a:prstGeom prst="rect">
             <a:avLst/>
@@ -21947,7 +22086,7 @@
               </a:spcAft>
             </a:pPr>
             <a:r>
-              <a:rPr sz="1800" b="1" i="0">
+              <a:rPr sz="2400" b="1" i="0">
                 <a:solidFill>
                   <a:srgbClr val="1F2A5A"/>
                 </a:solidFill>
@@ -21960,14 +22099,14 @@
       </p:sp>
       <p:sp>
         <p:nvSpPr>
-          <p:cNvPr id="26" name="Rectangle 25"/>
+          <p:cNvPr id="28" name="Rectangle 27"/>
           <p:cNvSpPr/>
           <p:nvPr/>
         </p:nvSpPr>
         <p:spPr>
           <a:xfrm>
-            <a:off x="5349240" y="4069080"/>
-            <a:ext cx="6080759" cy="502920"/>
+            <a:off x="5440680" y="4215384"/>
+            <a:ext cx="5989320" cy="530352"/>
           </a:xfrm>
           <a:prstGeom prst="rect">
             <a:avLst/>
@@ -22006,14 +22145,53 @@
       </p:sp>
       <p:sp>
         <p:nvSpPr>
-          <p:cNvPr id="27" name="TextBox 26"/>
+          <p:cNvPr id="29" name="TextBox 28"/>
           <p:cNvSpPr txBox="1"/>
           <p:nvPr/>
         </p:nvSpPr>
         <p:spPr>
           <a:xfrm>
-            <a:off x="1371600" y="4754880"/>
-            <a:ext cx="10058400" cy="640080"/>
+            <a:off x="5550408" y="4270248"/>
+            <a:ext cx="5769864" cy="411480"/>
+          </a:xfrm>
+          <a:prstGeom prst="rect">
+            <a:avLst/>
+          </a:prstGeom>
+          <a:noFill/>
+        </p:spPr>
+        <p:txBody>
+          <a:bodyPr wrap="square" anchor="ctr" lIns="0" rIns="0" tIns="0" bIns="0">
+            <a:spAutoFit/>
+          </a:bodyPr>
+          <a:lstStyle/>
+          <a:p>
+            <a:pPr algn="l">
+              <a:spcAft>
+                <a:spcPts val="1000"/>
+              </a:spcAft>
+            </a:pPr>
+            <a:r>
+              <a:rPr sz="2800" b="0" i="1">
+                <a:solidFill>
+                  <a:srgbClr val="7A5620"/>
+                </a:solidFill>
+                <a:latin typeface="Avenir Next"/>
+              </a:rPr>
+              <a:t>it falls down</a:t>
+            </a:r>
+          </a:p>
+        </p:txBody>
+      </p:sp>
+      <p:sp>
+        <p:nvSpPr>
+          <p:cNvPr id="30" name="TextBox 29"/>
+          <p:cNvSpPr txBox="1"/>
+          <p:nvPr/>
+        </p:nvSpPr>
+        <p:spPr>
+          <a:xfrm>
+            <a:off x="914400" y="4937760"/>
+            <a:ext cx="10515600" cy="640080"/>
           </a:xfrm>
           <a:prstGeom prst="rect">
             <a:avLst/>
@@ -22063,14 +22241,14 @@
       </p:sp>
       <p:sp>
         <p:nvSpPr>
-          <p:cNvPr id="28" name="TextBox 27"/>
+          <p:cNvPr id="31" name="TextBox 30"/>
           <p:cNvSpPr txBox="1"/>
           <p:nvPr/>
         </p:nvSpPr>
         <p:spPr>
           <a:xfrm>
-            <a:off x="1371600" y="5623560"/>
-            <a:ext cx="10058400" cy="365760"/>
+            <a:off x="1371600" y="5760720"/>
+            <a:ext cx="10058400" cy="457200"/>
           </a:xfrm>
           <a:prstGeom prst="rect">
             <a:avLst/>
@@ -22095,14 +22273,14 @@
                 </a:solidFill>
                 <a:latin typeface="Avenir Next"/>
               </a:rPr>
-              <a:t>position</a:t>
-            </a:r>
-          </a:p>
-        </p:txBody>
-      </p:sp>
-      <p:sp>
-        <p:nvSpPr>
-          <p:cNvPr id="29" name="TextBox 28"/>
+              <a:t>position  ·  Sample answers shown - yours may differ.</a:t>
+            </a:r>
+          </a:p>
+        </p:txBody>
+      </p:sp>
+      <p:sp>
+        <p:nvSpPr>
+          <p:cNvPr id="32" name="TextBox 31"/>
           <p:cNvSpPr txBox="1"/>
           <p:nvPr/>
         </p:nvSpPr>
@@ -22264,8 +22442,8 @@
         </p:nvSpPr>
         <p:spPr>
           <a:xfrm>
-            <a:off x="11475720" y="365760"/>
-            <a:ext cx="502920" cy="402336"/>
+            <a:off x="11430000" y="329184"/>
+            <a:ext cx="548640" cy="475488"/>
           </a:xfrm>
           <a:prstGeom prst="roundRect">
             <a:avLst>
@@ -22300,7 +22478,7 @@
           <a:p>
             <a:pPr algn="ctr"/>
             <a:r>
-              <a:rPr sz="1800" b="1" i="0">
+              <a:rPr sz="2400" b="1" i="0">
                 <a:solidFill>
                   <a:srgbClr val="FFFFFF"/>
                 </a:solidFill>
@@ -22319,8 +22497,8 @@
         </p:nvSpPr>
         <p:spPr>
           <a:xfrm>
-            <a:off x="9948672" y="365760"/>
-            <a:ext cx="1481328" cy="402336"/>
+            <a:off x="9281160" y="329184"/>
+            <a:ext cx="2057400" cy="475488"/>
           </a:xfrm>
           <a:prstGeom prst="roundRect">
             <a:avLst>
@@ -22355,7 +22533,7 @@
           <a:p>
             <a:pPr algn="ctr"/>
             <a:r>
-              <a:rPr sz="1800" b="1" i="0">
+              <a:rPr sz="2400" b="1" i="0">
                 <a:solidFill>
                   <a:srgbClr val="FFFFFF"/>
                 </a:solidFill>
@@ -22433,13 +22611,13 @@
               </a:spcAft>
             </a:pPr>
             <a:r>
-              <a:rPr sz="2000" b="0" i="1">
+              <a:rPr sz="2400" b="0" i="1">
                 <a:solidFill>
                   <a:srgbClr val="4A5268"/>
                 </a:solidFill>
                 <a:latin typeface="Avenir Next"/>
               </a:rPr>
-              <a:t>Reader pp. 1–6 — we see the change, not the energy.</a:t>
+              <a:t>Reader pp. 1–5 — think about the clues we can see, hear, or feel.</a:t>
             </a:r>
           </a:p>
         </p:txBody>
@@ -22525,7 +22703,7 @@
                 <a:latin typeface="Avenir Next"/>
               </a:rPr>
               <a:t>Energy can be invisible.
-We recognize energy by the change we observe.</a:t>
+What clues could show that energy is at work?</a:t>
             </a:r>
           </a:p>
         </p:txBody>
@@ -22564,7 +22742,7 @@
                 </a:solidFill>
                 <a:latin typeface="Avenir Next"/>
               </a:rPr>
-              <a:t>Evidence = the change you see, hear, or feel.</a:t>
+              <a:t>Think of a change you have seen. What did you see, hear, or feel?</a:t>
             </a:r>
           </a:p>
         </p:txBody>
@@ -22733,8 +22911,8 @@
         </p:nvSpPr>
         <p:spPr>
           <a:xfrm>
-            <a:off x="11475720" y="365760"/>
-            <a:ext cx="502920" cy="402336"/>
+            <a:off x="11430000" y="329184"/>
+            <a:ext cx="548640" cy="475488"/>
           </a:xfrm>
           <a:prstGeom prst="roundRect">
             <a:avLst>
@@ -22769,7 +22947,7 @@
           <a:p>
             <a:pPr algn="ctr"/>
             <a:r>
-              <a:rPr sz="1800" b="1" i="0">
+              <a:rPr sz="2400" b="1" i="0">
                 <a:solidFill>
                   <a:srgbClr val="FFFFFF"/>
                 </a:solidFill>
@@ -22788,8 +22966,8 @@
         </p:nvSpPr>
         <p:spPr>
           <a:xfrm>
-            <a:off x="10424160" y="365760"/>
-            <a:ext cx="1005840" cy="402336"/>
+            <a:off x="9966960" y="329184"/>
+            <a:ext cx="1371600" cy="475488"/>
           </a:xfrm>
           <a:prstGeom prst="roundRect">
             <a:avLst>
@@ -22824,7 +23002,7 @@
           <a:p>
             <a:pPr algn="ctr"/>
             <a:r>
-              <a:rPr sz="1800" b="1" i="0">
+              <a:rPr sz="2400" b="1" i="0">
                 <a:solidFill>
                   <a:srgbClr val="FFFFFF"/>
                 </a:solidFill>
@@ -22957,13 +23135,13 @@
               </a:spcAft>
             </a:pPr>
             <a:r>
-              <a:rPr sz="2000" b="0" i="1">
+              <a:rPr sz="2400" b="0" i="1">
                 <a:solidFill>
                   <a:srgbClr val="4A5268"/>
                 </a:solidFill>
                 <a:latin typeface="Avenir Next"/>
               </a:rPr>
-              <a:t>Guided Notes · Reader pp. 1–6</a:t>
+              <a:t>Guided Notes · Reader pp. 1–5</a:t>
             </a:r>
           </a:p>
         </p:txBody>
@@ -23064,7 +23242,7 @@
         <p:spPr>
           <a:xfrm>
             <a:off x="1554480" y="3154679"/>
-            <a:ext cx="3131820" cy="365760"/>
+            <a:ext cx="3131820" cy="457200"/>
           </a:xfrm>
           <a:prstGeom prst="rect">
             <a:avLst/>
@@ -23083,7 +23261,7 @@
               </a:spcAft>
             </a:pPr>
             <a:r>
-              <a:rPr sz="2400" b="1" i="0">
+              <a:rPr sz="2800" b="1" i="0">
                 <a:solidFill>
                   <a:srgbClr val="A67C16"/>
                 </a:solidFill>
@@ -23102,8 +23280,8 @@
         </p:nvSpPr>
         <p:spPr>
           <a:xfrm>
-            <a:off x="1554480" y="3584448"/>
-            <a:ext cx="3131820" cy="1005839"/>
+            <a:off x="1554480" y="3703320"/>
+            <a:ext cx="3131820" cy="914399"/>
           </a:xfrm>
           <a:prstGeom prst="rect">
             <a:avLst/>
@@ -23190,7 +23368,7 @@
         <p:spPr>
           <a:xfrm>
             <a:off x="5372100" y="3154679"/>
-            <a:ext cx="3131820" cy="365760"/>
+            <a:ext cx="3131820" cy="457200"/>
           </a:xfrm>
           <a:prstGeom prst="rect">
             <a:avLst/>
@@ -23209,7 +23387,7 @@
               </a:spcAft>
             </a:pPr>
             <a:r>
-              <a:rPr sz="2400" b="1" i="0">
+              <a:rPr sz="2800" b="1" i="0">
                 <a:solidFill>
                   <a:srgbClr val="A67C16"/>
                 </a:solidFill>
@@ -23228,8 +23406,8 @@
         </p:nvSpPr>
         <p:spPr>
           <a:xfrm>
-            <a:off x="5372100" y="3584448"/>
-            <a:ext cx="3131820" cy="1005839"/>
+            <a:off x="5372100" y="3703320"/>
+            <a:ext cx="3131820" cy="914399"/>
           </a:xfrm>
           <a:prstGeom prst="rect">
             <a:avLst/>
@@ -23267,7 +23445,7 @@
         </p:nvSpPr>
         <p:spPr>
           <a:xfrm>
-            <a:off x="1371600" y="4937760"/>
+            <a:off x="1371600" y="4983480"/>
             <a:ext cx="10058400" cy="457200"/>
           </a:xfrm>
           <a:prstGeom prst="rect">
@@ -23283,33 +23461,112 @@
           <a:p>
             <a:pPr algn="l">
               <a:spcAft>
-                <a:spcPts val="1200"/>
+                <a:spcPts val="1000"/>
               </a:spcAft>
             </a:pPr>
             <a:r>
-              <a:rPr sz="3000" b="1" i="0">
+              <a:rPr sz="2800" b="1" i="0">
                 <a:solidFill>
                   <a:srgbClr val="1A1D26"/>
                 </a:solidFill>
                 <a:latin typeface="Avenir Next"/>
               </a:rPr>
-              <a:t>What changed?  </a:t>
-            </a:r>
-            <a:r>
-              <a:rPr sz="3000" b="0" i="0" u="sng">
-                <a:solidFill>
-                  <a:srgbClr val="1A1D26"/>
-                </a:solidFill>
-                <a:latin typeface="Avenir Next"/>
-              </a:rPr>
-              <a:t>________________</a:t>
-            </a:r>
-          </a:p>
-        </p:txBody>
-      </p:sp>
-      <p:sp>
-        <p:nvSpPr>
-          <p:cNvPr id="17" name="TextBox 16"/>
+              <a:t>What changed?</a:t>
+            </a:r>
+          </a:p>
+        </p:txBody>
+      </p:sp>
+      <p:sp>
+        <p:nvSpPr>
+          <p:cNvPr id="17" name="Rectangle 16"/>
+          <p:cNvSpPr/>
+          <p:nvPr/>
+        </p:nvSpPr>
+        <p:spPr>
+          <a:xfrm>
+            <a:off x="1371600" y="5623560"/>
+            <a:ext cx="9601200" cy="32004"/>
+          </a:xfrm>
+          <a:prstGeom prst="rect">
+            <a:avLst/>
+          </a:prstGeom>
+          <a:solidFill>
+            <a:srgbClr val="4A5268"/>
+          </a:solidFill>
+          <a:ln>
+            <a:noFill/>
+          </a:ln>
+          <a:effectLst/>
+        </p:spPr>
+        <p:style>
+          <a:lnRef idx="1">
+            <a:schemeClr val="accent1"/>
+          </a:lnRef>
+          <a:fillRef idx="3">
+            <a:schemeClr val="accent1"/>
+          </a:fillRef>
+          <a:effectRef idx="2">
+            <a:schemeClr val="accent1"/>
+          </a:effectRef>
+          <a:fontRef idx="minor">
+            <a:schemeClr val="lt1"/>
+          </a:fontRef>
+        </p:style>
+        <p:txBody>
+          <a:bodyPr rtlCol="0" anchor="ctr"/>
+          <a:lstStyle/>
+          <a:p>
+            <a:pPr algn="ctr"/>
+          </a:p>
+        </p:txBody>
+      </p:sp>
+      <p:sp>
+        <p:nvSpPr>
+          <p:cNvPr id="18" name="Rectangle 17"/>
+          <p:cNvSpPr/>
+          <p:nvPr/>
+        </p:nvSpPr>
+        <p:spPr>
+          <a:xfrm>
+            <a:off x="1371600" y="6080760"/>
+            <a:ext cx="9601200" cy="32004"/>
+          </a:xfrm>
+          <a:prstGeom prst="rect">
+            <a:avLst/>
+          </a:prstGeom>
+          <a:solidFill>
+            <a:srgbClr val="4A5268"/>
+          </a:solidFill>
+          <a:ln>
+            <a:noFill/>
+          </a:ln>
+          <a:effectLst/>
+        </p:spPr>
+        <p:style>
+          <a:lnRef idx="1">
+            <a:schemeClr val="accent1"/>
+          </a:lnRef>
+          <a:fillRef idx="3">
+            <a:schemeClr val="accent1"/>
+          </a:fillRef>
+          <a:effectRef idx="2">
+            <a:schemeClr val="accent1"/>
+          </a:effectRef>
+          <a:fontRef idx="minor">
+            <a:schemeClr val="lt1"/>
+          </a:fontRef>
+        </p:style>
+        <p:txBody>
+          <a:bodyPr rtlCol="0" anchor="ctr"/>
+          <a:lstStyle/>
+          <a:p>
+            <a:pPr algn="ctr"/>
+          </a:p>
+        </p:txBody>
+      </p:sp>
+      <p:sp>
+        <p:nvSpPr>
+          <p:cNvPr id="19" name="TextBox 18"/>
           <p:cNvSpPr txBox="1"/>
           <p:nvPr/>
         </p:nvSpPr>
@@ -23471,8 +23728,8 @@
         </p:nvSpPr>
         <p:spPr>
           <a:xfrm>
-            <a:off x="11475720" y="365760"/>
-            <a:ext cx="502920" cy="402336"/>
+            <a:off x="11430000" y="329184"/>
+            <a:ext cx="548640" cy="475488"/>
           </a:xfrm>
           <a:prstGeom prst="roundRect">
             <a:avLst>
@@ -23507,7 +23764,7 @@
           <a:p>
             <a:pPr algn="ctr"/>
             <a:r>
-              <a:rPr sz="1800" b="1" i="0">
+              <a:rPr sz="2400" b="1" i="0">
                 <a:solidFill>
                   <a:srgbClr val="FFFFFF"/>
                 </a:solidFill>
@@ -23526,8 +23783,8 @@
         </p:nvSpPr>
         <p:spPr>
           <a:xfrm>
-            <a:off x="10378440" y="365760"/>
-            <a:ext cx="1051560" cy="402336"/>
+            <a:off x="9875520" y="329184"/>
+            <a:ext cx="1463040" cy="475488"/>
           </a:xfrm>
           <a:prstGeom prst="roundRect">
             <a:avLst>
@@ -23562,7 +23819,7 @@
           <a:p>
             <a:pPr algn="ctr"/>
             <a:r>
-              <a:rPr sz="1800" b="1" i="0">
+              <a:rPr sz="2400" b="1" i="0">
                 <a:solidFill>
                   <a:srgbClr val="FFFFFF"/>
                 </a:solidFill>
@@ -23695,7 +23952,7 @@
               </a:spcAft>
             </a:pPr>
             <a:r>
-              <a:rPr sz="2000" b="0" i="1">
+              <a:rPr sz="2400" b="0" i="1">
                 <a:solidFill>
                   <a:srgbClr val="4A5268"/>
                 </a:solidFill>
@@ -24075,8 +24332,8 @@
         </p:nvSpPr>
         <p:spPr>
           <a:xfrm>
-            <a:off x="11475720" y="365760"/>
-            <a:ext cx="502920" cy="402336"/>
+            <a:off x="11430000" y="329184"/>
+            <a:ext cx="548640" cy="475488"/>
           </a:xfrm>
           <a:prstGeom prst="roundRect">
             <a:avLst>
@@ -24111,7 +24368,7 @@
           <a:p>
             <a:pPr algn="ctr"/>
             <a:r>
-              <a:rPr sz="1800" b="1" i="0">
+              <a:rPr sz="2400" b="1" i="0">
                 <a:solidFill>
                   <a:srgbClr val="FFFFFF"/>
                 </a:solidFill>
@@ -24130,8 +24387,8 @@
         </p:nvSpPr>
         <p:spPr>
           <a:xfrm>
-            <a:off x="10378440" y="365760"/>
-            <a:ext cx="1051560" cy="402336"/>
+            <a:off x="9875520" y="329184"/>
+            <a:ext cx="1463040" cy="475488"/>
           </a:xfrm>
           <a:prstGeom prst="roundRect">
             <a:avLst>
@@ -24166,7 +24423,7 @@
           <a:p>
             <a:pPr algn="ctr"/>
             <a:r>
-              <a:rPr sz="1800" b="1" i="0">
+              <a:rPr sz="2400" b="1" i="0">
                 <a:solidFill>
                   <a:srgbClr val="FFFFFF"/>
                 </a:solidFill>
@@ -24299,13 +24556,13 @@
               </a:spcAft>
             </a:pPr>
             <a:r>
-              <a:rPr sz="2000" b="0" i="1">
+              <a:rPr sz="2400" b="0" i="1">
                 <a:solidFill>
                   <a:srgbClr val="4A5268"/>
                 </a:solidFill>
                 <a:latin typeface="Avenir Next"/>
               </a:rPr>
-              <a:t>Guided Notes · Reader pp. 1–6</a:t>
+              <a:t>Guided Notes · Reader pp. 1–5</a:t>
             </a:r>
           </a:p>
         </p:txBody>
@@ -24386,7 +24643,7 @@
               </a:spcAft>
             </a:pPr>
             <a:r>
-              <a:rPr sz="2200" b="1" i="0">
+              <a:rPr sz="2400" b="1" i="0">
                 <a:solidFill>
                   <a:srgbClr val="7A5620"/>
                 </a:solidFill>
@@ -24727,8 +24984,8 @@
         </p:nvSpPr>
         <p:spPr>
           <a:xfrm>
-            <a:off x="11475720" y="365760"/>
-            <a:ext cx="502920" cy="402336"/>
+            <a:off x="11430000" y="329184"/>
+            <a:ext cx="548640" cy="475488"/>
           </a:xfrm>
           <a:prstGeom prst="roundRect">
             <a:avLst>
@@ -24763,7 +25020,7 @@
           <a:p>
             <a:pPr algn="ctr"/>
             <a:r>
-              <a:rPr sz="1800" b="1" i="0">
+              <a:rPr sz="2400" b="1" i="0">
                 <a:solidFill>
                   <a:srgbClr val="FFFFFF"/>
                 </a:solidFill>
@@ -24782,8 +25039,8 @@
         </p:nvSpPr>
         <p:spPr>
           <a:xfrm>
-            <a:off x="10305288" y="365760"/>
-            <a:ext cx="1124712" cy="402336"/>
+            <a:off x="9784080" y="329184"/>
+            <a:ext cx="1554480" cy="475488"/>
           </a:xfrm>
           <a:prstGeom prst="roundRect">
             <a:avLst>
@@ -24818,7 +25075,7 @@
           <a:p>
             <a:pPr algn="ctr"/>
             <a:r>
-              <a:rPr sz="1800" b="1" i="0">
+              <a:rPr sz="2400" b="1" i="0">
                 <a:solidFill>
                   <a:srgbClr val="FFFFFF"/>
                 </a:solidFill>
@@ -24944,7 +25201,7 @@
               </a:spcAft>
             </a:pPr>
             <a:r>
-              <a:rPr sz="1800" b="1" i="0">
+              <a:rPr sz="2400" b="1" i="0">
                 <a:solidFill>
                   <a:srgbClr val="7A5620"/>
                 </a:solidFill>
@@ -25197,8 +25454,8 @@
         </p:nvSpPr>
         <p:spPr>
           <a:xfrm>
-            <a:off x="11475720" y="365760"/>
-            <a:ext cx="502920" cy="402336"/>
+            <a:off x="11430000" y="329184"/>
+            <a:ext cx="548640" cy="475488"/>
           </a:xfrm>
           <a:prstGeom prst="roundRect">
             <a:avLst>
@@ -25233,7 +25490,7 @@
           <a:p>
             <a:pPr algn="ctr"/>
             <a:r>
-              <a:rPr sz="1800" b="1" i="0">
+              <a:rPr sz="2400" b="1" i="0">
                 <a:solidFill>
                   <a:srgbClr val="FFFFFF"/>
                 </a:solidFill>
@@ -25252,8 +25509,8 @@
         </p:nvSpPr>
         <p:spPr>
           <a:xfrm>
-            <a:off x="9948672" y="365760"/>
-            <a:ext cx="1481328" cy="402336"/>
+            <a:off x="9281160" y="329184"/>
+            <a:ext cx="2057400" cy="475488"/>
           </a:xfrm>
           <a:prstGeom prst="roundRect">
             <a:avLst>
@@ -25288,7 +25545,7 @@
           <a:p>
             <a:pPr algn="ctr"/>
             <a:r>
-              <a:rPr sz="1800" b="1" i="0">
+              <a:rPr sz="2400" b="1" i="0">
                 <a:solidFill>
                   <a:srgbClr val="FFFFFF"/>
                 </a:solidFill>
@@ -25633,7 +25890,7 @@
                 </a:solidFill>
                 <a:latin typeface="Avenir Next"/>
               </a:rPr>
-              <a:t>Look for a change — that is the evidence of energy.</a:t>
+              <a:t>Pick one. Tell your partner why.</a:t>
             </a:r>
           </a:p>
         </p:txBody>
@@ -25802,8 +26059,8 @@
         </p:nvSpPr>
         <p:spPr>
           <a:xfrm>
-            <a:off x="11475720" y="365760"/>
-            <a:ext cx="502920" cy="402336"/>
+            <a:off x="11430000" y="329184"/>
+            <a:ext cx="548640" cy="475488"/>
           </a:xfrm>
           <a:prstGeom prst="roundRect">
             <a:avLst>
@@ -25838,7 +26095,7 @@
           <a:p>
             <a:pPr algn="ctr"/>
             <a:r>
-              <a:rPr sz="1800" b="1" i="0">
+              <a:rPr sz="2400" b="1" i="0">
                 <a:solidFill>
                   <a:srgbClr val="FFFFFF"/>
                 </a:solidFill>
@@ -25857,8 +26114,8 @@
         </p:nvSpPr>
         <p:spPr>
           <a:xfrm>
-            <a:off x="10378440" y="365760"/>
-            <a:ext cx="1051560" cy="402336"/>
+            <a:off x="9875520" y="329184"/>
+            <a:ext cx="1463040" cy="475488"/>
           </a:xfrm>
           <a:prstGeom prst="roundRect">
             <a:avLst>
@@ -25893,7 +26150,7 @@
           <a:p>
             <a:pPr algn="ctr"/>
             <a:r>
-              <a:rPr sz="1800" b="1" i="0">
+              <a:rPr sz="2400" b="1" i="0">
                 <a:solidFill>
                   <a:srgbClr val="FFFFFF"/>
                 </a:solidFill>
@@ -26026,7 +26283,7 @@
               </a:spcAft>
             </a:pPr>
             <a:r>
-              <a:rPr sz="2000" b="0" i="1">
+              <a:rPr sz="2400" b="0" i="1">
                 <a:solidFill>
                   <a:srgbClr val="4A5268"/>
                 </a:solidFill>
@@ -26092,7 +26349,7 @@
         <p:spPr>
           <a:xfrm>
             <a:off x="1645920" y="2240280"/>
-            <a:ext cx="9509760" cy="365760"/>
+            <a:ext cx="9509760" cy="411480"/>
           </a:xfrm>
           <a:prstGeom prst="rect">
             <a:avLst/>
@@ -26111,7 +26368,7 @@
               </a:spcAft>
             </a:pPr>
             <a:r>
-              <a:rPr sz="1800" b="1" i="0">
+              <a:rPr sz="2400" b="1" i="0">
                 <a:solidFill>
                   <a:srgbClr val="A67C16"/>
                 </a:solidFill>
@@ -26496,8 +26753,8 @@
         </p:nvSpPr>
         <p:spPr>
           <a:xfrm>
-            <a:off x="11475720" y="365760"/>
-            <a:ext cx="502920" cy="402336"/>
+            <a:off x="11430000" y="329184"/>
+            <a:ext cx="548640" cy="475488"/>
           </a:xfrm>
           <a:prstGeom prst="roundRect">
             <a:avLst>
@@ -26532,7 +26789,7 @@
           <a:p>
             <a:pPr algn="ctr"/>
             <a:r>
-              <a:rPr sz="1800" b="1" i="0">
+              <a:rPr sz="2400" b="1" i="0">
                 <a:solidFill>
                   <a:srgbClr val="FFFFFF"/>
                 </a:solidFill>
@@ -26742,7 +26999,7 @@
                 </a:solidFill>
                 <a:latin typeface="Avenir Next"/>
               </a:rPr>
-              <a:t>the ability to cause change</a:t>
+              <a:t>a visible glow</a:t>
             </a:r>
           </a:p>
         </p:txBody>
@@ -26868,7 +27125,7 @@
                 </a:solidFill>
                 <a:latin typeface="Avenir Next"/>
               </a:rPr>
-              <a:t>a visible glow</a:t>
+              <a:t>something only batteries have</a:t>
             </a:r>
           </a:p>
         </p:txBody>
@@ -26994,7 +27251,7 @@
                 </a:solidFill>
                 <a:latin typeface="Avenir Next"/>
               </a:rPr>
-              <a:t>something only batteries have</a:t>
+              <a:t>the ability to cause change</a:t>
             </a:r>
           </a:p>
         </p:txBody>
@@ -27289,8 +27546,8 @@
         </p:nvSpPr>
         <p:spPr>
           <a:xfrm>
-            <a:off x="11475720" y="365760"/>
-            <a:ext cx="502920" cy="402336"/>
+            <a:off x="11430000" y="329184"/>
+            <a:ext cx="548640" cy="475488"/>
           </a:xfrm>
           <a:prstGeom prst="roundRect">
             <a:avLst>
@@ -27325,7 +27582,7 @@
           <a:p>
             <a:pPr algn="ctr"/>
             <a:r>
-              <a:rPr sz="1800" b="1" i="0">
+              <a:rPr sz="2400" b="1" i="0">
                 <a:solidFill>
                   <a:srgbClr val="FFFFFF"/>
                 </a:solidFill>
@@ -27344,8 +27601,8 @@
         </p:nvSpPr>
         <p:spPr>
           <a:xfrm>
-            <a:off x="10305288" y="365760"/>
-            <a:ext cx="1124712" cy="402336"/>
+            <a:off x="9784080" y="329184"/>
+            <a:ext cx="1554480" cy="475488"/>
           </a:xfrm>
           <a:prstGeom prst="roundRect">
             <a:avLst>
@@ -27380,7 +27637,7 @@
           <a:p>
             <a:pPr algn="ctr"/>
             <a:r>
-              <a:rPr sz="1800" b="1" i="0">
+              <a:rPr sz="2400" b="1" i="0">
                 <a:solidFill>
                   <a:srgbClr val="FFFFFF"/>
                 </a:solidFill>
@@ -27478,6 +27735,258 @@
         <p:spPr>
           <a:xfrm>
             <a:off x="914400" y="2542032"/>
+            <a:ext cx="10332720" cy="676656"/>
+          </a:xfrm>
+          <a:prstGeom prst="roundRect">
+            <a:avLst>
+              <a:gd name="adj" fmla="val 8000"/>
+            </a:avLst>
+          </a:prstGeom>
+          <a:solidFill>
+            <a:srgbClr val="FFFFFF"/>
+          </a:solidFill>
+          <a:ln w="12700">
+            <a:solidFill>
+              <a:srgbClr val="D8DCE4"/>
+            </a:solidFill>
+          </a:ln>
+          <a:effectLst/>
+        </p:spPr>
+        <p:style>
+          <a:lnRef idx="1">
+            <a:schemeClr val="accent1"/>
+          </a:lnRef>
+          <a:fillRef idx="3">
+            <a:schemeClr val="accent1"/>
+          </a:fillRef>
+          <a:effectRef idx="2">
+            <a:schemeClr val="accent1"/>
+          </a:effectRef>
+          <a:fontRef idx="minor">
+            <a:schemeClr val="lt1"/>
+          </a:fontRef>
+        </p:style>
+        <p:txBody>
+          <a:bodyPr rtlCol="0" anchor="ctr"/>
+          <a:lstStyle/>
+          <a:p>
+            <a:pPr algn="ctr"/>
+          </a:p>
+        </p:txBody>
+      </p:sp>
+      <p:sp>
+        <p:nvSpPr>
+          <p:cNvPr id="9" name="TextBox 8"/>
+          <p:cNvSpPr txBox="1"/>
+          <p:nvPr/>
+        </p:nvSpPr>
+        <p:spPr>
+          <a:xfrm>
+            <a:off x="1143000" y="2660903"/>
+            <a:ext cx="548640" cy="457200"/>
+          </a:xfrm>
+          <a:prstGeom prst="rect">
+            <a:avLst/>
+          </a:prstGeom>
+          <a:noFill/>
+        </p:spPr>
+        <p:txBody>
+          <a:bodyPr wrap="square" anchor="ctr" lIns="0" rIns="0" tIns="0" bIns="0">
+            <a:spAutoFit/>
+          </a:bodyPr>
+          <a:lstStyle/>
+          <a:p>
+            <a:pPr algn="l">
+              <a:spcAft>
+                <a:spcPts val="1000"/>
+              </a:spcAft>
+            </a:pPr>
+            <a:r>
+              <a:rPr sz="2800" b="1" i="0">
+                <a:solidFill>
+                  <a:srgbClr val="A67C16"/>
+                </a:solidFill>
+                <a:latin typeface="Avenir Next"/>
+              </a:rPr>
+              <a:t>A</a:t>
+            </a:r>
+          </a:p>
+        </p:txBody>
+      </p:sp>
+      <p:sp>
+        <p:nvSpPr>
+          <p:cNvPr id="10" name="TextBox 9"/>
+          <p:cNvSpPr txBox="1"/>
+          <p:nvPr/>
+        </p:nvSpPr>
+        <p:spPr>
+          <a:xfrm>
+            <a:off x="1783080" y="2642615"/>
+            <a:ext cx="9235440" cy="493776"/>
+          </a:xfrm>
+          <a:prstGeom prst="rect">
+            <a:avLst/>
+          </a:prstGeom>
+          <a:noFill/>
+        </p:spPr>
+        <p:txBody>
+          <a:bodyPr wrap="square" anchor="ctr" lIns="0" rIns="0" tIns="0" bIns="0">
+            <a:spAutoFit/>
+          </a:bodyPr>
+          <a:lstStyle/>
+          <a:p>
+            <a:pPr algn="l">
+              <a:spcAft>
+                <a:spcPts val="1000"/>
+              </a:spcAft>
+            </a:pPr>
+            <a:r>
+              <a:rPr sz="2800" b="0" i="0">
+                <a:solidFill>
+                  <a:srgbClr val="1A1D26"/>
+                </a:solidFill>
+                <a:latin typeface="Avenir Next"/>
+              </a:rPr>
+              <a:t>a visible glow</a:t>
+            </a:r>
+          </a:p>
+        </p:txBody>
+      </p:sp>
+      <p:sp>
+        <p:nvSpPr>
+          <p:cNvPr id="11" name="Rounded Rectangle 10"/>
+          <p:cNvSpPr/>
+          <p:nvPr/>
+        </p:nvSpPr>
+        <p:spPr>
+          <a:xfrm>
+            <a:off x="914400" y="3346703"/>
+            <a:ext cx="10332720" cy="676656"/>
+          </a:xfrm>
+          <a:prstGeom prst="roundRect">
+            <a:avLst>
+              <a:gd name="adj" fmla="val 8000"/>
+            </a:avLst>
+          </a:prstGeom>
+          <a:solidFill>
+            <a:srgbClr val="FFFFFF"/>
+          </a:solidFill>
+          <a:ln w="12700">
+            <a:solidFill>
+              <a:srgbClr val="D8DCE4"/>
+            </a:solidFill>
+          </a:ln>
+          <a:effectLst/>
+        </p:spPr>
+        <p:style>
+          <a:lnRef idx="1">
+            <a:schemeClr val="accent1"/>
+          </a:lnRef>
+          <a:fillRef idx="3">
+            <a:schemeClr val="accent1"/>
+          </a:fillRef>
+          <a:effectRef idx="2">
+            <a:schemeClr val="accent1"/>
+          </a:effectRef>
+          <a:fontRef idx="minor">
+            <a:schemeClr val="lt1"/>
+          </a:fontRef>
+        </p:style>
+        <p:txBody>
+          <a:bodyPr rtlCol="0" anchor="ctr"/>
+          <a:lstStyle/>
+          <a:p>
+            <a:pPr algn="ctr"/>
+          </a:p>
+        </p:txBody>
+      </p:sp>
+      <p:sp>
+        <p:nvSpPr>
+          <p:cNvPr id="12" name="TextBox 11"/>
+          <p:cNvSpPr txBox="1"/>
+          <p:nvPr/>
+        </p:nvSpPr>
+        <p:spPr>
+          <a:xfrm>
+            <a:off x="1143000" y="3465575"/>
+            <a:ext cx="548640" cy="457200"/>
+          </a:xfrm>
+          <a:prstGeom prst="rect">
+            <a:avLst/>
+          </a:prstGeom>
+          <a:noFill/>
+        </p:spPr>
+        <p:txBody>
+          <a:bodyPr wrap="square" anchor="ctr" lIns="0" rIns="0" tIns="0" bIns="0">
+            <a:spAutoFit/>
+          </a:bodyPr>
+          <a:lstStyle/>
+          <a:p>
+            <a:pPr algn="l">
+              <a:spcAft>
+                <a:spcPts val="1000"/>
+              </a:spcAft>
+            </a:pPr>
+            <a:r>
+              <a:rPr sz="2800" b="1" i="0">
+                <a:solidFill>
+                  <a:srgbClr val="A67C16"/>
+                </a:solidFill>
+                <a:latin typeface="Avenir Next"/>
+              </a:rPr>
+              <a:t>B</a:t>
+            </a:r>
+          </a:p>
+        </p:txBody>
+      </p:sp>
+      <p:sp>
+        <p:nvSpPr>
+          <p:cNvPr id="13" name="TextBox 12"/>
+          <p:cNvSpPr txBox="1"/>
+          <p:nvPr/>
+        </p:nvSpPr>
+        <p:spPr>
+          <a:xfrm>
+            <a:off x="1783080" y="3447287"/>
+            <a:ext cx="9235440" cy="493776"/>
+          </a:xfrm>
+          <a:prstGeom prst="rect">
+            <a:avLst/>
+          </a:prstGeom>
+          <a:noFill/>
+        </p:spPr>
+        <p:txBody>
+          <a:bodyPr wrap="square" anchor="ctr" lIns="0" rIns="0" tIns="0" bIns="0">
+            <a:spAutoFit/>
+          </a:bodyPr>
+          <a:lstStyle/>
+          <a:p>
+            <a:pPr algn="l">
+              <a:spcAft>
+                <a:spcPts val="1000"/>
+              </a:spcAft>
+            </a:pPr>
+            <a:r>
+              <a:rPr sz="2800" b="0" i="0">
+                <a:solidFill>
+                  <a:srgbClr val="1A1D26"/>
+                </a:solidFill>
+                <a:latin typeface="Avenir Next"/>
+              </a:rPr>
+              <a:t>something only batteries have</a:t>
+            </a:r>
+          </a:p>
+        </p:txBody>
+      </p:sp>
+      <p:sp>
+        <p:nvSpPr>
+          <p:cNvPr id="14" name="Rounded Rectangle 13"/>
+          <p:cNvSpPr/>
+          <p:nvPr/>
+        </p:nvSpPr>
+        <p:spPr>
+          <a:xfrm>
+            <a:off x="914400" y="4151376"/>
             <a:ext cx="10332720" cy="676656"/>
           </a:xfrm>
           <a:prstGeom prst="roundRect">
@@ -27519,13 +28028,13 @@
       </p:sp>
       <p:sp>
         <p:nvSpPr>
-          <p:cNvPr id="9" name="TextBox 8"/>
+          <p:cNvPr id="15" name="TextBox 14"/>
           <p:cNvSpPr txBox="1"/>
           <p:nvPr/>
         </p:nvSpPr>
         <p:spPr>
           <a:xfrm>
-            <a:off x="1143000" y="2660903"/>
+            <a:off x="1143000" y="4270248"/>
             <a:ext cx="548640" cy="457200"/>
           </a:xfrm>
           <a:prstGeom prst="rect">
@@ -27551,20 +28060,20 @@
                 </a:solidFill>
                 <a:latin typeface="Avenir Next"/>
               </a:rPr>
-              <a:t>A</a:t>
-            </a:r>
-          </a:p>
-        </p:txBody>
-      </p:sp>
-      <p:sp>
-        <p:nvSpPr>
-          <p:cNvPr id="10" name="TextBox 9"/>
+              <a:t>C</a:t>
+            </a:r>
+          </a:p>
+        </p:txBody>
+      </p:sp>
+      <p:sp>
+        <p:nvSpPr>
+          <p:cNvPr id="16" name="TextBox 15"/>
           <p:cNvSpPr txBox="1"/>
           <p:nvPr/>
         </p:nvSpPr>
         <p:spPr>
           <a:xfrm>
-            <a:off x="1783080" y="2642615"/>
+            <a:off x="1783080" y="4251960"/>
             <a:ext cx="9235440" cy="493776"/>
           </a:xfrm>
           <a:prstGeom prst="rect">
@@ -27597,13 +28106,13 @@
       </p:sp>
       <p:sp>
         <p:nvSpPr>
-          <p:cNvPr id="11" name="Rounded Rectangle 10"/>
+          <p:cNvPr id="17" name="Rounded Rectangle 16"/>
           <p:cNvSpPr/>
           <p:nvPr/>
         </p:nvSpPr>
         <p:spPr>
           <a:xfrm>
-            <a:off x="914400" y="3346703"/>
+            <a:off x="914400" y="4956048"/>
             <a:ext cx="10332720" cy="676656"/>
           </a:xfrm>
           <a:prstGeom prst="roundRect">
@@ -27645,258 +28154,6 @@
       </p:sp>
       <p:sp>
         <p:nvSpPr>
-          <p:cNvPr id="12" name="TextBox 11"/>
-          <p:cNvSpPr txBox="1"/>
-          <p:nvPr/>
-        </p:nvSpPr>
-        <p:spPr>
-          <a:xfrm>
-            <a:off x="1143000" y="3465575"/>
-            <a:ext cx="548640" cy="457200"/>
-          </a:xfrm>
-          <a:prstGeom prst="rect">
-            <a:avLst/>
-          </a:prstGeom>
-          <a:noFill/>
-        </p:spPr>
-        <p:txBody>
-          <a:bodyPr wrap="square" anchor="ctr" lIns="0" rIns="0" tIns="0" bIns="0">
-            <a:spAutoFit/>
-          </a:bodyPr>
-          <a:lstStyle/>
-          <a:p>
-            <a:pPr algn="l">
-              <a:spcAft>
-                <a:spcPts val="1000"/>
-              </a:spcAft>
-            </a:pPr>
-            <a:r>
-              <a:rPr sz="2800" b="1" i="0">
-                <a:solidFill>
-                  <a:srgbClr val="A67C16"/>
-                </a:solidFill>
-                <a:latin typeface="Avenir Next"/>
-              </a:rPr>
-              <a:t>B</a:t>
-            </a:r>
-          </a:p>
-        </p:txBody>
-      </p:sp>
-      <p:sp>
-        <p:nvSpPr>
-          <p:cNvPr id="13" name="TextBox 12"/>
-          <p:cNvSpPr txBox="1"/>
-          <p:nvPr/>
-        </p:nvSpPr>
-        <p:spPr>
-          <a:xfrm>
-            <a:off x="1783080" y="3447287"/>
-            <a:ext cx="9235440" cy="493776"/>
-          </a:xfrm>
-          <a:prstGeom prst="rect">
-            <a:avLst/>
-          </a:prstGeom>
-          <a:noFill/>
-        </p:spPr>
-        <p:txBody>
-          <a:bodyPr wrap="square" anchor="ctr" lIns="0" rIns="0" tIns="0" bIns="0">
-            <a:spAutoFit/>
-          </a:bodyPr>
-          <a:lstStyle/>
-          <a:p>
-            <a:pPr algn="l">
-              <a:spcAft>
-                <a:spcPts val="1000"/>
-              </a:spcAft>
-            </a:pPr>
-            <a:r>
-              <a:rPr sz="2800" b="0" i="0">
-                <a:solidFill>
-                  <a:srgbClr val="1A1D26"/>
-                </a:solidFill>
-                <a:latin typeface="Avenir Next"/>
-              </a:rPr>
-              <a:t>a visible glow</a:t>
-            </a:r>
-          </a:p>
-        </p:txBody>
-      </p:sp>
-      <p:sp>
-        <p:nvSpPr>
-          <p:cNvPr id="14" name="Rounded Rectangle 13"/>
-          <p:cNvSpPr/>
-          <p:nvPr/>
-        </p:nvSpPr>
-        <p:spPr>
-          <a:xfrm>
-            <a:off x="914400" y="4151376"/>
-            <a:ext cx="10332720" cy="676656"/>
-          </a:xfrm>
-          <a:prstGeom prst="roundRect">
-            <a:avLst>
-              <a:gd name="adj" fmla="val 8000"/>
-            </a:avLst>
-          </a:prstGeom>
-          <a:solidFill>
-            <a:srgbClr val="FFFFFF"/>
-          </a:solidFill>
-          <a:ln w="12700">
-            <a:solidFill>
-              <a:srgbClr val="D8DCE4"/>
-            </a:solidFill>
-          </a:ln>
-          <a:effectLst/>
-        </p:spPr>
-        <p:style>
-          <a:lnRef idx="1">
-            <a:schemeClr val="accent1"/>
-          </a:lnRef>
-          <a:fillRef idx="3">
-            <a:schemeClr val="accent1"/>
-          </a:fillRef>
-          <a:effectRef idx="2">
-            <a:schemeClr val="accent1"/>
-          </a:effectRef>
-          <a:fontRef idx="minor">
-            <a:schemeClr val="lt1"/>
-          </a:fontRef>
-        </p:style>
-        <p:txBody>
-          <a:bodyPr rtlCol="0" anchor="ctr"/>
-          <a:lstStyle/>
-          <a:p>
-            <a:pPr algn="ctr"/>
-          </a:p>
-        </p:txBody>
-      </p:sp>
-      <p:sp>
-        <p:nvSpPr>
-          <p:cNvPr id="15" name="TextBox 14"/>
-          <p:cNvSpPr txBox="1"/>
-          <p:nvPr/>
-        </p:nvSpPr>
-        <p:spPr>
-          <a:xfrm>
-            <a:off x="1143000" y="4270248"/>
-            <a:ext cx="548640" cy="457200"/>
-          </a:xfrm>
-          <a:prstGeom prst="rect">
-            <a:avLst/>
-          </a:prstGeom>
-          <a:noFill/>
-        </p:spPr>
-        <p:txBody>
-          <a:bodyPr wrap="square" anchor="ctr" lIns="0" rIns="0" tIns="0" bIns="0">
-            <a:spAutoFit/>
-          </a:bodyPr>
-          <a:lstStyle/>
-          <a:p>
-            <a:pPr algn="l">
-              <a:spcAft>
-                <a:spcPts val="1000"/>
-              </a:spcAft>
-            </a:pPr>
-            <a:r>
-              <a:rPr sz="2800" b="1" i="0">
-                <a:solidFill>
-                  <a:srgbClr val="A67C16"/>
-                </a:solidFill>
-                <a:latin typeface="Avenir Next"/>
-              </a:rPr>
-              <a:t>C</a:t>
-            </a:r>
-          </a:p>
-        </p:txBody>
-      </p:sp>
-      <p:sp>
-        <p:nvSpPr>
-          <p:cNvPr id="16" name="TextBox 15"/>
-          <p:cNvSpPr txBox="1"/>
-          <p:nvPr/>
-        </p:nvSpPr>
-        <p:spPr>
-          <a:xfrm>
-            <a:off x="1783080" y="4251960"/>
-            <a:ext cx="9235440" cy="493776"/>
-          </a:xfrm>
-          <a:prstGeom prst="rect">
-            <a:avLst/>
-          </a:prstGeom>
-          <a:noFill/>
-        </p:spPr>
-        <p:txBody>
-          <a:bodyPr wrap="square" anchor="ctr" lIns="0" rIns="0" tIns="0" bIns="0">
-            <a:spAutoFit/>
-          </a:bodyPr>
-          <a:lstStyle/>
-          <a:p>
-            <a:pPr algn="l">
-              <a:spcAft>
-                <a:spcPts val="1000"/>
-              </a:spcAft>
-            </a:pPr>
-            <a:r>
-              <a:rPr sz="2800" b="0" i="0">
-                <a:solidFill>
-                  <a:srgbClr val="1A1D26"/>
-                </a:solidFill>
-                <a:latin typeface="Avenir Next"/>
-              </a:rPr>
-              <a:t>something only batteries have</a:t>
-            </a:r>
-          </a:p>
-        </p:txBody>
-      </p:sp>
-      <p:sp>
-        <p:nvSpPr>
-          <p:cNvPr id="17" name="Rounded Rectangle 16"/>
-          <p:cNvSpPr/>
-          <p:nvPr/>
-        </p:nvSpPr>
-        <p:spPr>
-          <a:xfrm>
-            <a:off x="914400" y="4956048"/>
-            <a:ext cx="10332720" cy="676656"/>
-          </a:xfrm>
-          <a:prstGeom prst="roundRect">
-            <a:avLst>
-              <a:gd name="adj" fmla="val 8000"/>
-            </a:avLst>
-          </a:prstGeom>
-          <a:solidFill>
-            <a:srgbClr val="FFFFFF"/>
-          </a:solidFill>
-          <a:ln w="12700">
-            <a:solidFill>
-              <a:srgbClr val="D8DCE4"/>
-            </a:solidFill>
-          </a:ln>
-          <a:effectLst/>
-        </p:spPr>
-        <p:style>
-          <a:lnRef idx="1">
-            <a:schemeClr val="accent1"/>
-          </a:lnRef>
-          <a:fillRef idx="3">
-            <a:schemeClr val="accent1"/>
-          </a:fillRef>
-          <a:effectRef idx="2">
-            <a:schemeClr val="accent1"/>
-          </a:effectRef>
-          <a:fontRef idx="minor">
-            <a:schemeClr val="lt1"/>
-          </a:fontRef>
-        </p:style>
-        <p:txBody>
-          <a:bodyPr rtlCol="0" anchor="ctr"/>
-          <a:lstStyle/>
-          <a:p>
-            <a:pPr algn="ctr"/>
-          </a:p>
-        </p:txBody>
-      </p:sp>
-      <p:sp>
-        <p:nvSpPr>
           <p:cNvPr id="18" name="TextBox 17"/>
           <p:cNvSpPr txBox="1"/>
           <p:nvPr/>
@@ -28030,7 +28287,7 @@
         <p:spPr>
           <a:xfrm>
             <a:off x="731520" y="5916168"/>
-            <a:ext cx="10698480" cy="457200"/>
+            <a:ext cx="10241280" cy="457200"/>
           </a:xfrm>
           <a:prstGeom prst="rect">
             <a:avLst/>
@@ -28224,8 +28481,8 @@
         </p:nvSpPr>
         <p:spPr>
           <a:xfrm>
-            <a:off x="11475720" y="365760"/>
-            <a:ext cx="502920" cy="402336"/>
+            <a:off x="11430000" y="329184"/>
+            <a:ext cx="548640" cy="475488"/>
           </a:xfrm>
           <a:prstGeom prst="roundRect">
             <a:avLst>
@@ -28260,7 +28517,7 @@
           <a:p>
             <a:pPr algn="ctr"/>
             <a:r>
-              <a:rPr sz="1800" b="1" i="0">
+              <a:rPr sz="2400" b="1" i="0">
                 <a:solidFill>
                   <a:srgbClr val="FFFFFF"/>
                 </a:solidFill>
@@ -28470,7 +28727,7 @@
                 </a:solidFill>
                 <a:latin typeface="Avenir Next"/>
               </a:rPr>
-              <a:t>It gets longer</a:t>
+              <a:t>It gets shorter and sharper</a:t>
             </a:r>
           </a:p>
         </p:txBody>
@@ -28596,7 +28853,7 @@
                 </a:solidFill>
                 <a:latin typeface="Avenir Next"/>
               </a:rPr>
-              <a:t>It gets shorter and sharper</a:t>
+              <a:t>It gets longer</a:t>
             </a:r>
           </a:p>
         </p:txBody>
@@ -29017,8 +29274,8 @@
         </p:nvSpPr>
         <p:spPr>
           <a:xfrm>
-            <a:off x="11475720" y="365760"/>
-            <a:ext cx="502920" cy="402336"/>
+            <a:off x="11430000" y="329184"/>
+            <a:ext cx="548640" cy="475488"/>
           </a:xfrm>
           <a:prstGeom prst="roundRect">
             <a:avLst>
@@ -29053,7 +29310,7 @@
           <a:p>
             <a:pPr algn="ctr"/>
             <a:r>
-              <a:rPr sz="1800" b="1" i="0">
+              <a:rPr sz="2400" b="1" i="0">
                 <a:solidFill>
                   <a:srgbClr val="FFFFFF"/>
                 </a:solidFill>
@@ -29072,8 +29329,8 @@
         </p:nvSpPr>
         <p:spPr>
           <a:xfrm>
-            <a:off x="10305288" y="365760"/>
-            <a:ext cx="1124712" cy="402336"/>
+            <a:off x="9784080" y="329184"/>
+            <a:ext cx="1554480" cy="475488"/>
           </a:xfrm>
           <a:prstGeom prst="roundRect">
             <a:avLst>
@@ -29108,7 +29365,7 @@
           <a:p>
             <a:pPr algn="ctr"/>
             <a:r>
-              <a:rPr sz="1800" b="1" i="0">
+              <a:rPr sz="2400" b="1" i="0">
                 <a:solidFill>
                   <a:srgbClr val="FFFFFF"/>
                 </a:solidFill>
@@ -29206,6 +29463,132 @@
         <p:spPr>
           <a:xfrm>
             <a:off x="914400" y="2542032"/>
+            <a:ext cx="10332720" cy="676656"/>
+          </a:xfrm>
+          <a:prstGeom prst="roundRect">
+            <a:avLst>
+              <a:gd name="adj" fmla="val 8000"/>
+            </a:avLst>
+          </a:prstGeom>
+          <a:solidFill>
+            <a:srgbClr val="F3E8CF"/>
+          </a:solidFill>
+          <a:ln w="19050">
+            <a:solidFill>
+              <a:srgbClr val="A67C16"/>
+            </a:solidFill>
+          </a:ln>
+          <a:effectLst/>
+        </p:spPr>
+        <p:style>
+          <a:lnRef idx="1">
+            <a:schemeClr val="accent1"/>
+          </a:lnRef>
+          <a:fillRef idx="3">
+            <a:schemeClr val="accent1"/>
+          </a:fillRef>
+          <a:effectRef idx="2">
+            <a:schemeClr val="accent1"/>
+          </a:effectRef>
+          <a:fontRef idx="minor">
+            <a:schemeClr val="lt1"/>
+          </a:fontRef>
+        </p:style>
+        <p:txBody>
+          <a:bodyPr rtlCol="0" anchor="ctr"/>
+          <a:lstStyle/>
+          <a:p>
+            <a:pPr algn="ctr"/>
+          </a:p>
+        </p:txBody>
+      </p:sp>
+      <p:sp>
+        <p:nvSpPr>
+          <p:cNvPr id="9" name="TextBox 8"/>
+          <p:cNvSpPr txBox="1"/>
+          <p:nvPr/>
+        </p:nvSpPr>
+        <p:spPr>
+          <a:xfrm>
+            <a:off x="1143000" y="2660903"/>
+            <a:ext cx="548640" cy="457200"/>
+          </a:xfrm>
+          <a:prstGeom prst="rect">
+            <a:avLst/>
+          </a:prstGeom>
+          <a:noFill/>
+        </p:spPr>
+        <p:txBody>
+          <a:bodyPr wrap="square" anchor="ctr" lIns="0" rIns="0" tIns="0" bIns="0">
+            <a:spAutoFit/>
+          </a:bodyPr>
+          <a:lstStyle/>
+          <a:p>
+            <a:pPr algn="l">
+              <a:spcAft>
+                <a:spcPts val="1000"/>
+              </a:spcAft>
+            </a:pPr>
+            <a:r>
+              <a:rPr sz="2800" b="1" i="0">
+                <a:solidFill>
+                  <a:srgbClr val="A67C16"/>
+                </a:solidFill>
+                <a:latin typeface="Avenir Next"/>
+              </a:rPr>
+              <a:t>A</a:t>
+            </a:r>
+          </a:p>
+        </p:txBody>
+      </p:sp>
+      <p:sp>
+        <p:nvSpPr>
+          <p:cNvPr id="10" name="TextBox 9"/>
+          <p:cNvSpPr txBox="1"/>
+          <p:nvPr/>
+        </p:nvSpPr>
+        <p:spPr>
+          <a:xfrm>
+            <a:off x="1783080" y="2642615"/>
+            <a:ext cx="9235440" cy="493776"/>
+          </a:xfrm>
+          <a:prstGeom prst="rect">
+            <a:avLst/>
+          </a:prstGeom>
+          <a:noFill/>
+        </p:spPr>
+        <p:txBody>
+          <a:bodyPr wrap="square" anchor="ctr" lIns="0" rIns="0" tIns="0" bIns="0">
+            <a:spAutoFit/>
+          </a:bodyPr>
+          <a:lstStyle/>
+          <a:p>
+            <a:pPr algn="l">
+              <a:spcAft>
+                <a:spcPts val="1000"/>
+              </a:spcAft>
+            </a:pPr>
+            <a:r>
+              <a:rPr sz="2800" b="1" i="0">
+                <a:solidFill>
+                  <a:srgbClr val="1A1D26"/>
+                </a:solidFill>
+                <a:latin typeface="Avenir Next"/>
+              </a:rPr>
+              <a:t>It gets shorter and sharper</a:t>
+            </a:r>
+          </a:p>
+        </p:txBody>
+      </p:sp>
+      <p:sp>
+        <p:nvSpPr>
+          <p:cNvPr id="11" name="Rounded Rectangle 10"/>
+          <p:cNvSpPr/>
+          <p:nvPr/>
+        </p:nvSpPr>
+        <p:spPr>
+          <a:xfrm>
+            <a:off x="914400" y="3346703"/>
             <a:ext cx="10332720" cy="676656"/>
           </a:xfrm>
           <a:prstGeom prst="roundRect">
@@ -29247,13 +29630,13 @@
       </p:sp>
       <p:sp>
         <p:nvSpPr>
-          <p:cNvPr id="9" name="TextBox 8"/>
+          <p:cNvPr id="12" name="TextBox 11"/>
           <p:cNvSpPr txBox="1"/>
           <p:nvPr/>
         </p:nvSpPr>
         <p:spPr>
           <a:xfrm>
-            <a:off x="1143000" y="2660903"/>
+            <a:off x="1143000" y="3465575"/>
             <a:ext cx="548640" cy="457200"/>
           </a:xfrm>
           <a:prstGeom prst="rect">
@@ -29279,20 +29662,20 @@
                 </a:solidFill>
                 <a:latin typeface="Avenir Next"/>
               </a:rPr>
-              <a:t>A</a:t>
-            </a:r>
-          </a:p>
-        </p:txBody>
-      </p:sp>
-      <p:sp>
-        <p:nvSpPr>
-          <p:cNvPr id="10" name="TextBox 9"/>
+              <a:t>B</a:t>
+            </a:r>
+          </a:p>
+        </p:txBody>
+      </p:sp>
+      <p:sp>
+        <p:nvSpPr>
+          <p:cNvPr id="13" name="TextBox 12"/>
           <p:cNvSpPr txBox="1"/>
           <p:nvPr/>
         </p:nvSpPr>
         <p:spPr>
           <a:xfrm>
-            <a:off x="1783080" y="2642615"/>
+            <a:off x="1783080" y="3447287"/>
             <a:ext cx="9235440" cy="493776"/>
           </a:xfrm>
           <a:prstGeom prst="rect">
@@ -29319,132 +29702,6 @@
                 <a:latin typeface="Avenir Next"/>
               </a:rPr>
               <a:t>It gets longer</a:t>
-            </a:r>
-          </a:p>
-        </p:txBody>
-      </p:sp>
-      <p:sp>
-        <p:nvSpPr>
-          <p:cNvPr id="11" name="Rounded Rectangle 10"/>
-          <p:cNvSpPr/>
-          <p:nvPr/>
-        </p:nvSpPr>
-        <p:spPr>
-          <a:xfrm>
-            <a:off x="914400" y="3346703"/>
-            <a:ext cx="10332720" cy="676656"/>
-          </a:xfrm>
-          <a:prstGeom prst="roundRect">
-            <a:avLst>
-              <a:gd name="adj" fmla="val 8000"/>
-            </a:avLst>
-          </a:prstGeom>
-          <a:solidFill>
-            <a:srgbClr val="F3E8CF"/>
-          </a:solidFill>
-          <a:ln w="19050">
-            <a:solidFill>
-              <a:srgbClr val="A67C16"/>
-            </a:solidFill>
-          </a:ln>
-          <a:effectLst/>
-        </p:spPr>
-        <p:style>
-          <a:lnRef idx="1">
-            <a:schemeClr val="accent1"/>
-          </a:lnRef>
-          <a:fillRef idx="3">
-            <a:schemeClr val="accent1"/>
-          </a:fillRef>
-          <a:effectRef idx="2">
-            <a:schemeClr val="accent1"/>
-          </a:effectRef>
-          <a:fontRef idx="minor">
-            <a:schemeClr val="lt1"/>
-          </a:fontRef>
-        </p:style>
-        <p:txBody>
-          <a:bodyPr rtlCol="0" anchor="ctr"/>
-          <a:lstStyle/>
-          <a:p>
-            <a:pPr algn="ctr"/>
-          </a:p>
-        </p:txBody>
-      </p:sp>
-      <p:sp>
-        <p:nvSpPr>
-          <p:cNvPr id="12" name="TextBox 11"/>
-          <p:cNvSpPr txBox="1"/>
-          <p:nvPr/>
-        </p:nvSpPr>
-        <p:spPr>
-          <a:xfrm>
-            <a:off x="1143000" y="3465575"/>
-            <a:ext cx="548640" cy="457200"/>
-          </a:xfrm>
-          <a:prstGeom prst="rect">
-            <a:avLst/>
-          </a:prstGeom>
-          <a:noFill/>
-        </p:spPr>
-        <p:txBody>
-          <a:bodyPr wrap="square" anchor="ctr" lIns="0" rIns="0" tIns="0" bIns="0">
-            <a:spAutoFit/>
-          </a:bodyPr>
-          <a:lstStyle/>
-          <a:p>
-            <a:pPr algn="l">
-              <a:spcAft>
-                <a:spcPts val="1000"/>
-              </a:spcAft>
-            </a:pPr>
-            <a:r>
-              <a:rPr sz="2800" b="1" i="0">
-                <a:solidFill>
-                  <a:srgbClr val="A67C16"/>
-                </a:solidFill>
-                <a:latin typeface="Avenir Next"/>
-              </a:rPr>
-              <a:t>B</a:t>
-            </a:r>
-          </a:p>
-        </p:txBody>
-      </p:sp>
-      <p:sp>
-        <p:nvSpPr>
-          <p:cNvPr id="13" name="TextBox 12"/>
-          <p:cNvSpPr txBox="1"/>
-          <p:nvPr/>
-        </p:nvSpPr>
-        <p:spPr>
-          <a:xfrm>
-            <a:off x="1783080" y="3447287"/>
-            <a:ext cx="9235440" cy="493776"/>
-          </a:xfrm>
-          <a:prstGeom prst="rect">
-            <a:avLst/>
-          </a:prstGeom>
-          <a:noFill/>
-        </p:spPr>
-        <p:txBody>
-          <a:bodyPr wrap="square" anchor="ctr" lIns="0" rIns="0" tIns="0" bIns="0">
-            <a:spAutoFit/>
-          </a:bodyPr>
-          <a:lstStyle/>
-          <a:p>
-            <a:pPr algn="l">
-              <a:spcAft>
-                <a:spcPts val="1000"/>
-              </a:spcAft>
-            </a:pPr>
-            <a:r>
-              <a:rPr sz="2800" b="1" i="0">
-                <a:solidFill>
-                  <a:srgbClr val="1A1D26"/>
-                </a:solidFill>
-                <a:latin typeface="Avenir Next"/>
-              </a:rPr>
-              <a:t>It gets shorter and sharper</a:t>
             </a:r>
           </a:p>
         </p:txBody>
@@ -29758,7 +30015,7 @@
         <p:spPr>
           <a:xfrm>
             <a:off x="731520" y="5916168"/>
-            <a:ext cx="10698480" cy="457200"/>
+            <a:ext cx="10241280" cy="457200"/>
           </a:xfrm>
           <a:prstGeom prst="rect">
             <a:avLst/>
@@ -29952,8 +30209,8 @@
         </p:nvSpPr>
         <p:spPr>
           <a:xfrm>
-            <a:off x="11475720" y="365760"/>
-            <a:ext cx="502920" cy="402336"/>
+            <a:off x="11430000" y="329184"/>
+            <a:ext cx="548640" cy="475488"/>
           </a:xfrm>
           <a:prstGeom prst="roundRect">
             <a:avLst>
@@ -29988,7 +30245,7 @@
           <a:p>
             <a:pPr algn="ctr"/>
             <a:r>
-              <a:rPr sz="1800" b="1" i="0">
+              <a:rPr sz="2400" b="1" i="0">
                 <a:solidFill>
                   <a:srgbClr val="FFFFFF"/>
                 </a:solidFill>
@@ -30450,7 +30707,7 @@
                 </a:solidFill>
                 <a:latin typeface="Avenir Next"/>
               </a:rPr>
-              <a:t>A stretched rubber band</a:t>
+              <a:t>A flashlight already on</a:t>
             </a:r>
           </a:p>
         </p:txBody>
@@ -30576,7 +30833,7 @@
                 </a:solidFill>
                 <a:latin typeface="Avenir Next"/>
               </a:rPr>
-              <a:t>A flashlight already on</a:t>
+              <a:t>A stretched rubber band</a:t>
             </a:r>
           </a:p>
         </p:txBody>
@@ -30745,8 +31002,8 @@
         </p:nvSpPr>
         <p:spPr>
           <a:xfrm>
-            <a:off x="11475720" y="365760"/>
-            <a:ext cx="502920" cy="402336"/>
+            <a:off x="11430000" y="329184"/>
+            <a:ext cx="548640" cy="475488"/>
           </a:xfrm>
           <a:prstGeom prst="roundRect">
             <a:avLst>
@@ -30781,7 +31038,7 @@
           <a:p>
             <a:pPr algn="ctr"/>
             <a:r>
-              <a:rPr sz="1800" b="1" i="0">
+              <a:rPr sz="2400" b="1" i="0">
                 <a:solidFill>
                   <a:srgbClr val="FFFFFF"/>
                 </a:solidFill>
@@ -30800,8 +31057,8 @@
         </p:nvSpPr>
         <p:spPr>
           <a:xfrm>
-            <a:off x="10305288" y="365760"/>
-            <a:ext cx="1124712" cy="402336"/>
+            <a:off x="9784080" y="329184"/>
+            <a:ext cx="1554480" cy="475488"/>
           </a:xfrm>
           <a:prstGeom prst="roundRect">
             <a:avLst>
@@ -30836,7 +31093,7 @@
           <a:p>
             <a:pPr algn="ctr"/>
             <a:r>
-              <a:rPr sz="1800" b="1" i="0">
+              <a:rPr sz="2400" b="1" i="0">
                 <a:solidFill>
                   <a:srgbClr val="FFFFFF"/>
                 </a:solidFill>
@@ -31194,6 +31451,132 @@
             </a:avLst>
           </a:prstGeom>
           <a:solidFill>
+            <a:srgbClr val="FFFFFF"/>
+          </a:solidFill>
+          <a:ln w="12700">
+            <a:solidFill>
+              <a:srgbClr val="D8DCE4"/>
+            </a:solidFill>
+          </a:ln>
+          <a:effectLst/>
+        </p:spPr>
+        <p:style>
+          <a:lnRef idx="1">
+            <a:schemeClr val="accent1"/>
+          </a:lnRef>
+          <a:fillRef idx="3">
+            <a:schemeClr val="accent1"/>
+          </a:fillRef>
+          <a:effectRef idx="2">
+            <a:schemeClr val="accent1"/>
+          </a:effectRef>
+          <a:fontRef idx="minor">
+            <a:schemeClr val="lt1"/>
+          </a:fontRef>
+        </p:style>
+        <p:txBody>
+          <a:bodyPr rtlCol="0" anchor="ctr"/>
+          <a:lstStyle/>
+          <a:p>
+            <a:pPr algn="ctr"/>
+          </a:p>
+        </p:txBody>
+      </p:sp>
+      <p:sp>
+        <p:nvSpPr>
+          <p:cNvPr id="15" name="TextBox 14"/>
+          <p:cNvSpPr txBox="1"/>
+          <p:nvPr/>
+        </p:nvSpPr>
+        <p:spPr>
+          <a:xfrm>
+            <a:off x="1143000" y="4270248"/>
+            <a:ext cx="548640" cy="457200"/>
+          </a:xfrm>
+          <a:prstGeom prst="rect">
+            <a:avLst/>
+          </a:prstGeom>
+          <a:noFill/>
+        </p:spPr>
+        <p:txBody>
+          <a:bodyPr wrap="square" anchor="ctr" lIns="0" rIns="0" tIns="0" bIns="0">
+            <a:spAutoFit/>
+          </a:bodyPr>
+          <a:lstStyle/>
+          <a:p>
+            <a:pPr algn="l">
+              <a:spcAft>
+                <a:spcPts val="1000"/>
+              </a:spcAft>
+            </a:pPr>
+            <a:r>
+              <a:rPr sz="2800" b="1" i="0">
+                <a:solidFill>
+                  <a:srgbClr val="A67C16"/>
+                </a:solidFill>
+                <a:latin typeface="Avenir Next"/>
+              </a:rPr>
+              <a:t>C</a:t>
+            </a:r>
+          </a:p>
+        </p:txBody>
+      </p:sp>
+      <p:sp>
+        <p:nvSpPr>
+          <p:cNvPr id="16" name="TextBox 15"/>
+          <p:cNvSpPr txBox="1"/>
+          <p:nvPr/>
+        </p:nvSpPr>
+        <p:spPr>
+          <a:xfrm>
+            <a:off x="1783080" y="4251960"/>
+            <a:ext cx="9235440" cy="493776"/>
+          </a:xfrm>
+          <a:prstGeom prst="rect">
+            <a:avLst/>
+          </a:prstGeom>
+          <a:noFill/>
+        </p:spPr>
+        <p:txBody>
+          <a:bodyPr wrap="square" anchor="ctr" lIns="0" rIns="0" tIns="0" bIns="0">
+            <a:spAutoFit/>
+          </a:bodyPr>
+          <a:lstStyle/>
+          <a:p>
+            <a:pPr algn="l">
+              <a:spcAft>
+                <a:spcPts val="1000"/>
+              </a:spcAft>
+            </a:pPr>
+            <a:r>
+              <a:rPr sz="2800" b="0" i="0">
+                <a:solidFill>
+                  <a:srgbClr val="1A1D26"/>
+                </a:solidFill>
+                <a:latin typeface="Avenir Next"/>
+              </a:rPr>
+              <a:t>A flashlight already on</a:t>
+            </a:r>
+          </a:p>
+        </p:txBody>
+      </p:sp>
+      <p:sp>
+        <p:nvSpPr>
+          <p:cNvPr id="17" name="Rounded Rectangle 16"/>
+          <p:cNvSpPr/>
+          <p:nvPr/>
+        </p:nvSpPr>
+        <p:spPr>
+          <a:xfrm>
+            <a:off x="914400" y="4956048"/>
+            <a:ext cx="10332720" cy="676656"/>
+          </a:xfrm>
+          <a:prstGeom prst="roundRect">
+            <a:avLst>
+              <a:gd name="adj" fmla="val 8000"/>
+            </a:avLst>
+          </a:prstGeom>
+          <a:solidFill>
             <a:srgbClr val="F3E8CF"/>
           </a:solidFill>
           <a:ln w="19050">
@@ -31227,13 +31610,13 @@
       </p:sp>
       <p:sp>
         <p:nvSpPr>
-          <p:cNvPr id="15" name="TextBox 14"/>
+          <p:cNvPr id="18" name="TextBox 17"/>
           <p:cNvSpPr txBox="1"/>
           <p:nvPr/>
         </p:nvSpPr>
         <p:spPr>
           <a:xfrm>
-            <a:off x="1143000" y="4270248"/>
+            <a:off x="1143000" y="5074920"/>
             <a:ext cx="548640" cy="457200"/>
           </a:xfrm>
           <a:prstGeom prst="rect">
@@ -31259,20 +31642,20 @@
                 </a:solidFill>
                 <a:latin typeface="Avenir Next"/>
               </a:rPr>
-              <a:t>C</a:t>
-            </a:r>
-          </a:p>
-        </p:txBody>
-      </p:sp>
-      <p:sp>
-        <p:nvSpPr>
-          <p:cNvPr id="16" name="TextBox 15"/>
+              <a:t>D</a:t>
+            </a:r>
+          </a:p>
+        </p:txBody>
+      </p:sp>
+      <p:sp>
+        <p:nvSpPr>
+          <p:cNvPr id="19" name="TextBox 18"/>
           <p:cNvSpPr txBox="1"/>
           <p:nvPr/>
         </p:nvSpPr>
         <p:spPr>
           <a:xfrm>
-            <a:off x="1783080" y="4251960"/>
+            <a:off x="1783080" y="5056632"/>
             <a:ext cx="9235440" cy="493776"/>
           </a:xfrm>
           <a:prstGeom prst="rect">
@@ -31299,132 +31682,6 @@
                 <a:latin typeface="Avenir Next"/>
               </a:rPr>
               <a:t>A stretched rubber band</a:t>
-            </a:r>
-          </a:p>
-        </p:txBody>
-      </p:sp>
-      <p:sp>
-        <p:nvSpPr>
-          <p:cNvPr id="17" name="Rounded Rectangle 16"/>
-          <p:cNvSpPr/>
-          <p:nvPr/>
-        </p:nvSpPr>
-        <p:spPr>
-          <a:xfrm>
-            <a:off x="914400" y="4956048"/>
-            <a:ext cx="10332720" cy="676656"/>
-          </a:xfrm>
-          <a:prstGeom prst="roundRect">
-            <a:avLst>
-              <a:gd name="adj" fmla="val 8000"/>
-            </a:avLst>
-          </a:prstGeom>
-          <a:solidFill>
-            <a:srgbClr val="FFFFFF"/>
-          </a:solidFill>
-          <a:ln w="12700">
-            <a:solidFill>
-              <a:srgbClr val="D8DCE4"/>
-            </a:solidFill>
-          </a:ln>
-          <a:effectLst/>
-        </p:spPr>
-        <p:style>
-          <a:lnRef idx="1">
-            <a:schemeClr val="accent1"/>
-          </a:lnRef>
-          <a:fillRef idx="3">
-            <a:schemeClr val="accent1"/>
-          </a:fillRef>
-          <a:effectRef idx="2">
-            <a:schemeClr val="accent1"/>
-          </a:effectRef>
-          <a:fontRef idx="minor">
-            <a:schemeClr val="lt1"/>
-          </a:fontRef>
-        </p:style>
-        <p:txBody>
-          <a:bodyPr rtlCol="0" anchor="ctr"/>
-          <a:lstStyle/>
-          <a:p>
-            <a:pPr algn="ctr"/>
-          </a:p>
-        </p:txBody>
-      </p:sp>
-      <p:sp>
-        <p:nvSpPr>
-          <p:cNvPr id="18" name="TextBox 17"/>
-          <p:cNvSpPr txBox="1"/>
-          <p:nvPr/>
-        </p:nvSpPr>
-        <p:spPr>
-          <a:xfrm>
-            <a:off x="1143000" y="5074920"/>
-            <a:ext cx="548640" cy="457200"/>
-          </a:xfrm>
-          <a:prstGeom prst="rect">
-            <a:avLst/>
-          </a:prstGeom>
-          <a:noFill/>
-        </p:spPr>
-        <p:txBody>
-          <a:bodyPr wrap="square" anchor="ctr" lIns="0" rIns="0" tIns="0" bIns="0">
-            <a:spAutoFit/>
-          </a:bodyPr>
-          <a:lstStyle/>
-          <a:p>
-            <a:pPr algn="l">
-              <a:spcAft>
-                <a:spcPts val="1000"/>
-              </a:spcAft>
-            </a:pPr>
-            <a:r>
-              <a:rPr sz="2800" b="1" i="0">
-                <a:solidFill>
-                  <a:srgbClr val="A67C16"/>
-                </a:solidFill>
-                <a:latin typeface="Avenir Next"/>
-              </a:rPr>
-              <a:t>D</a:t>
-            </a:r>
-          </a:p>
-        </p:txBody>
-      </p:sp>
-      <p:sp>
-        <p:nvSpPr>
-          <p:cNvPr id="19" name="TextBox 18"/>
-          <p:cNvSpPr txBox="1"/>
-          <p:nvPr/>
-        </p:nvSpPr>
-        <p:spPr>
-          <a:xfrm>
-            <a:off x="1783080" y="5056632"/>
-            <a:ext cx="9235440" cy="493776"/>
-          </a:xfrm>
-          <a:prstGeom prst="rect">
-            <a:avLst/>
-          </a:prstGeom>
-          <a:noFill/>
-        </p:spPr>
-        <p:txBody>
-          <a:bodyPr wrap="square" anchor="ctr" lIns="0" rIns="0" tIns="0" bIns="0">
-            <a:spAutoFit/>
-          </a:bodyPr>
-          <a:lstStyle/>
-          <a:p>
-            <a:pPr algn="l">
-              <a:spcAft>
-                <a:spcPts val="1000"/>
-              </a:spcAft>
-            </a:pPr>
-            <a:r>
-              <a:rPr sz="2800" b="0" i="0">
-                <a:solidFill>
-                  <a:srgbClr val="1A1D26"/>
-                </a:solidFill>
-                <a:latin typeface="Avenir Next"/>
-              </a:rPr>
-              <a:t>A flashlight already on</a:t>
             </a:r>
           </a:p>
         </p:txBody>
@@ -31486,7 +31743,7 @@
         <p:spPr>
           <a:xfrm>
             <a:off x="731520" y="5916168"/>
-            <a:ext cx="10698480" cy="457200"/>
+            <a:ext cx="10241280" cy="457200"/>
           </a:xfrm>
           <a:prstGeom prst="rect">
             <a:avLst/>
@@ -31680,8 +31937,8 @@
         </p:nvSpPr>
         <p:spPr>
           <a:xfrm>
-            <a:off x="11475720" y="365760"/>
-            <a:ext cx="502920" cy="402336"/>
+            <a:off x="11430000" y="329184"/>
+            <a:ext cx="548640" cy="475488"/>
           </a:xfrm>
           <a:prstGeom prst="roundRect">
             <a:avLst>
@@ -31716,7 +31973,7 @@
           <a:p>
             <a:pPr algn="ctr"/>
             <a:r>
-              <a:rPr sz="1800" b="1" i="0">
+              <a:rPr sz="2400" b="1" i="0">
                 <a:solidFill>
                   <a:srgbClr val="FFFFFF"/>
                 </a:solidFill>
@@ -31735,8 +31992,8 @@
         </p:nvSpPr>
         <p:spPr>
           <a:xfrm>
-            <a:off x="10003536" y="365760"/>
-            <a:ext cx="1426464" cy="402336"/>
+            <a:off x="9372600" y="329184"/>
+            <a:ext cx="1965960" cy="475488"/>
           </a:xfrm>
           <a:prstGeom prst="roundRect">
             <a:avLst>
@@ -31771,7 +32028,7 @@
           <a:p>
             <a:pPr algn="ctr"/>
             <a:r>
-              <a:rPr sz="1800" b="1" i="0">
+              <a:rPr sz="2400" b="1" i="0">
                 <a:solidFill>
                   <a:srgbClr val="FFFFFF"/>
                 </a:solidFill>
@@ -31849,7 +32106,7 @@
               </a:spcAft>
             </a:pPr>
             <a:r>
-              <a:rPr sz="2000" b="0" i="1">
+              <a:rPr sz="2400" b="0" i="1">
                 <a:solidFill>
                   <a:srgbClr val="4A5268"/>
                 </a:solidFill>
@@ -31917,7 +32174,7 @@
         <p:spPr>
           <a:xfrm>
             <a:off x="868680" y="2423160"/>
-            <a:ext cx="2857500" cy="365760"/>
+            <a:ext cx="2857500" cy="457200"/>
           </a:xfrm>
           <a:prstGeom prst="rect">
             <a:avLst/>
@@ -31936,7 +32193,7 @@
               </a:spcAft>
             </a:pPr>
             <a:r>
-              <a:rPr sz="2400" b="1" i="0">
+              <a:rPr sz="2800" b="1" i="0">
                 <a:solidFill>
                   <a:srgbClr val="A67C16"/>
                 </a:solidFill>
@@ -31955,8 +32212,8 @@
         </p:nvSpPr>
         <p:spPr>
           <a:xfrm>
-            <a:off x="868680" y="2852928"/>
-            <a:ext cx="2857500" cy="1645920"/>
+            <a:off x="868680" y="2971800"/>
+            <a:ext cx="2857500" cy="1554480"/>
           </a:xfrm>
           <a:prstGeom prst="rect">
             <a:avLst/>
@@ -31981,7 +32238,7 @@
                 </a:solidFill>
                 <a:latin typeface="Avenir Next"/>
               </a:rPr>
-              <a:t>quiet · hard to see</a:t>
+              <a:t>hard to see</a:t>
             </a:r>
           </a:p>
         </p:txBody>
@@ -32043,7 +32300,7 @@
         <p:spPr>
           <a:xfrm>
             <a:off x="4411980" y="2423160"/>
-            <a:ext cx="2857500" cy="365760"/>
+            <a:ext cx="2857500" cy="457200"/>
           </a:xfrm>
           <a:prstGeom prst="rect">
             <a:avLst/>
@@ -32062,7 +32319,7 @@
               </a:spcAft>
             </a:pPr>
             <a:r>
-              <a:rPr sz="2400" b="1" i="0">
+              <a:rPr sz="2800" b="1" i="0">
                 <a:solidFill>
                   <a:srgbClr val="A67C16"/>
                 </a:solidFill>
@@ -32081,8 +32338,8 @@
         </p:nvSpPr>
         <p:spPr>
           <a:xfrm>
-            <a:off x="4411980" y="2852928"/>
-            <a:ext cx="2857500" cy="1645920"/>
+            <a:off x="4411980" y="2971800"/>
+            <a:ext cx="2857500" cy="1554480"/>
           </a:xfrm>
           <a:prstGeom prst="rect">
             <a:avLst/>
@@ -32316,8 +32573,8 @@
         </p:nvSpPr>
         <p:spPr>
           <a:xfrm>
-            <a:off x="11475720" y="365760"/>
-            <a:ext cx="502920" cy="402336"/>
+            <a:off x="11430000" y="329184"/>
+            <a:ext cx="548640" cy="475488"/>
           </a:xfrm>
           <a:prstGeom prst="roundRect">
             <a:avLst>
@@ -32352,7 +32609,7 @@
           <a:p>
             <a:pPr algn="ctr"/>
             <a:r>
-              <a:rPr sz="1800" b="1" i="0">
+              <a:rPr sz="2400" b="1" i="0">
                 <a:solidFill>
                   <a:srgbClr val="FFFFFF"/>
                 </a:solidFill>
@@ -32436,7 +32693,7 @@
                 </a:solidFill>
                 <a:latin typeface="Avenir Next"/>
               </a:rPr>
-              <a:t>A carousel spins and plays music. Which two forms of energy do you observe?</a:t>
+              <a:t>A carousel spins and plays music. Which two forms of energy come from the spinning and the music?</a:t>
             </a:r>
           </a:p>
         </p:txBody>
@@ -32562,7 +32819,7 @@
                 </a:solidFill>
                 <a:latin typeface="Avenir Next"/>
               </a:rPr>
-              <a:t>motion and silence</a:t>
+              <a:t>only light</a:t>
             </a:r>
           </a:p>
         </p:txBody>
@@ -32688,7 +32945,7 @@
                 </a:solidFill>
                 <a:latin typeface="Avenir Next"/>
               </a:rPr>
-              <a:t>sound and stillness</a:t>
+              <a:t>motion and sound</a:t>
             </a:r>
           </a:p>
         </p:txBody>
@@ -32814,7 +33071,7 @@
                 </a:solidFill>
                 <a:latin typeface="Avenir Next"/>
               </a:rPr>
-              <a:t>only light</a:t>
+              <a:t>motion and silence</a:t>
             </a:r>
           </a:p>
         </p:txBody>
@@ -32940,7 +33197,7 @@
                 </a:solidFill>
                 <a:latin typeface="Avenir Next"/>
               </a:rPr>
-              <a:t>motion and sound</a:t>
+              <a:t>sound and stillness</a:t>
             </a:r>
           </a:p>
         </p:txBody>
@@ -33109,8 +33366,8 @@
         </p:nvSpPr>
         <p:spPr>
           <a:xfrm>
-            <a:off x="11475720" y="365760"/>
-            <a:ext cx="502920" cy="402336"/>
+            <a:off x="11430000" y="329184"/>
+            <a:ext cx="548640" cy="475488"/>
           </a:xfrm>
           <a:prstGeom prst="roundRect">
             <a:avLst>
@@ -33145,7 +33402,7 @@
           <a:p>
             <a:pPr algn="ctr"/>
             <a:r>
-              <a:rPr sz="1800" b="1" i="0">
+              <a:rPr sz="2400" b="1" i="0">
                 <a:solidFill>
                   <a:srgbClr val="FFFFFF"/>
                 </a:solidFill>
@@ -33164,8 +33421,8 @@
         </p:nvSpPr>
         <p:spPr>
           <a:xfrm>
-            <a:off x="10305288" y="365760"/>
-            <a:ext cx="1124712" cy="402336"/>
+            <a:off x="9784080" y="329184"/>
+            <a:ext cx="1554480" cy="475488"/>
           </a:xfrm>
           <a:prstGeom prst="roundRect">
             <a:avLst>
@@ -33200,7 +33457,7 @@
           <a:p>
             <a:pPr algn="ctr"/>
             <a:r>
-              <a:rPr sz="1800" b="1" i="0">
+              <a:rPr sz="2400" b="1" i="0">
                 <a:solidFill>
                   <a:srgbClr val="FFFFFF"/>
                 </a:solidFill>
@@ -33284,7 +33541,7 @@
                 </a:solidFill>
                 <a:latin typeface="Avenir Next"/>
               </a:rPr>
-              <a:t>A carousel spins and plays music. Which two forms of energy do you observe?</a:t>
+              <a:t>A carousel spins and plays music. Which two forms of energy come from the spinning and the music?</a:t>
             </a:r>
           </a:p>
         </p:txBody>
@@ -33410,7 +33667,7 @@
                 </a:solidFill>
                 <a:latin typeface="Avenir Next"/>
               </a:rPr>
-              <a:t>motion and silence</a:t>
+              <a:t>only light</a:t>
             </a:r>
           </a:p>
         </p:txBody>
@@ -33424,6 +33681,132 @@
         <p:spPr>
           <a:xfrm>
             <a:off x="914400" y="3346703"/>
+            <a:ext cx="10332720" cy="676656"/>
+          </a:xfrm>
+          <a:prstGeom prst="roundRect">
+            <a:avLst>
+              <a:gd name="adj" fmla="val 8000"/>
+            </a:avLst>
+          </a:prstGeom>
+          <a:solidFill>
+            <a:srgbClr val="F3E8CF"/>
+          </a:solidFill>
+          <a:ln w="19050">
+            <a:solidFill>
+              <a:srgbClr val="A67C16"/>
+            </a:solidFill>
+          </a:ln>
+          <a:effectLst/>
+        </p:spPr>
+        <p:style>
+          <a:lnRef idx="1">
+            <a:schemeClr val="accent1"/>
+          </a:lnRef>
+          <a:fillRef idx="3">
+            <a:schemeClr val="accent1"/>
+          </a:fillRef>
+          <a:effectRef idx="2">
+            <a:schemeClr val="accent1"/>
+          </a:effectRef>
+          <a:fontRef idx="minor">
+            <a:schemeClr val="lt1"/>
+          </a:fontRef>
+        </p:style>
+        <p:txBody>
+          <a:bodyPr rtlCol="0" anchor="ctr"/>
+          <a:lstStyle/>
+          <a:p>
+            <a:pPr algn="ctr"/>
+          </a:p>
+        </p:txBody>
+      </p:sp>
+      <p:sp>
+        <p:nvSpPr>
+          <p:cNvPr id="12" name="TextBox 11"/>
+          <p:cNvSpPr txBox="1"/>
+          <p:nvPr/>
+        </p:nvSpPr>
+        <p:spPr>
+          <a:xfrm>
+            <a:off x="1143000" y="3465575"/>
+            <a:ext cx="548640" cy="457200"/>
+          </a:xfrm>
+          <a:prstGeom prst="rect">
+            <a:avLst/>
+          </a:prstGeom>
+          <a:noFill/>
+        </p:spPr>
+        <p:txBody>
+          <a:bodyPr wrap="square" anchor="ctr" lIns="0" rIns="0" tIns="0" bIns="0">
+            <a:spAutoFit/>
+          </a:bodyPr>
+          <a:lstStyle/>
+          <a:p>
+            <a:pPr algn="l">
+              <a:spcAft>
+                <a:spcPts val="1000"/>
+              </a:spcAft>
+            </a:pPr>
+            <a:r>
+              <a:rPr sz="2800" b="1" i="0">
+                <a:solidFill>
+                  <a:srgbClr val="A67C16"/>
+                </a:solidFill>
+                <a:latin typeface="Avenir Next"/>
+              </a:rPr>
+              <a:t>B</a:t>
+            </a:r>
+          </a:p>
+        </p:txBody>
+      </p:sp>
+      <p:sp>
+        <p:nvSpPr>
+          <p:cNvPr id="13" name="TextBox 12"/>
+          <p:cNvSpPr txBox="1"/>
+          <p:nvPr/>
+        </p:nvSpPr>
+        <p:spPr>
+          <a:xfrm>
+            <a:off x="1783080" y="3447287"/>
+            <a:ext cx="9235440" cy="493776"/>
+          </a:xfrm>
+          <a:prstGeom prst="rect">
+            <a:avLst/>
+          </a:prstGeom>
+          <a:noFill/>
+        </p:spPr>
+        <p:txBody>
+          <a:bodyPr wrap="square" anchor="ctr" lIns="0" rIns="0" tIns="0" bIns="0">
+            <a:spAutoFit/>
+          </a:bodyPr>
+          <a:lstStyle/>
+          <a:p>
+            <a:pPr algn="l">
+              <a:spcAft>
+                <a:spcPts val="1000"/>
+              </a:spcAft>
+            </a:pPr>
+            <a:r>
+              <a:rPr sz="2800" b="1" i="0">
+                <a:solidFill>
+                  <a:srgbClr val="1A1D26"/>
+                </a:solidFill>
+                <a:latin typeface="Avenir Next"/>
+              </a:rPr>
+              <a:t>motion and sound</a:t>
+            </a:r>
+          </a:p>
+        </p:txBody>
+      </p:sp>
+      <p:sp>
+        <p:nvSpPr>
+          <p:cNvPr id="14" name="Rounded Rectangle 13"/>
+          <p:cNvSpPr/>
+          <p:nvPr/>
+        </p:nvSpPr>
+        <p:spPr>
+          <a:xfrm>
+            <a:off x="914400" y="4151376"/>
             <a:ext cx="10332720" cy="676656"/>
           </a:xfrm>
           <a:prstGeom prst="roundRect">
@@ -33465,13 +33848,13 @@
       </p:sp>
       <p:sp>
         <p:nvSpPr>
-          <p:cNvPr id="12" name="TextBox 11"/>
+          <p:cNvPr id="15" name="TextBox 14"/>
           <p:cNvSpPr txBox="1"/>
           <p:nvPr/>
         </p:nvSpPr>
         <p:spPr>
           <a:xfrm>
-            <a:off x="1143000" y="3465575"/>
+            <a:off x="1143000" y="4270248"/>
             <a:ext cx="548640" cy="457200"/>
           </a:xfrm>
           <a:prstGeom prst="rect">
@@ -33497,20 +33880,20 @@
                 </a:solidFill>
                 <a:latin typeface="Avenir Next"/>
               </a:rPr>
-              <a:t>B</a:t>
-            </a:r>
-          </a:p>
-        </p:txBody>
-      </p:sp>
-      <p:sp>
-        <p:nvSpPr>
-          <p:cNvPr id="13" name="TextBox 12"/>
+              <a:t>C</a:t>
+            </a:r>
+          </a:p>
+        </p:txBody>
+      </p:sp>
+      <p:sp>
+        <p:nvSpPr>
+          <p:cNvPr id="16" name="TextBox 15"/>
           <p:cNvSpPr txBox="1"/>
           <p:nvPr/>
         </p:nvSpPr>
         <p:spPr>
           <a:xfrm>
-            <a:off x="1783080" y="3447287"/>
+            <a:off x="1783080" y="4251960"/>
             <a:ext cx="9235440" cy="493776"/>
           </a:xfrm>
           <a:prstGeom prst="rect">
@@ -33536,20 +33919,20 @@
                 </a:solidFill>
                 <a:latin typeface="Avenir Next"/>
               </a:rPr>
-              <a:t>sound and stillness</a:t>
-            </a:r>
-          </a:p>
-        </p:txBody>
-      </p:sp>
-      <p:sp>
-        <p:nvSpPr>
-          <p:cNvPr id="14" name="Rounded Rectangle 13"/>
+              <a:t>motion and silence</a:t>
+            </a:r>
+          </a:p>
+        </p:txBody>
+      </p:sp>
+      <p:sp>
+        <p:nvSpPr>
+          <p:cNvPr id="17" name="Rounded Rectangle 16"/>
           <p:cNvSpPr/>
           <p:nvPr/>
         </p:nvSpPr>
         <p:spPr>
           <a:xfrm>
-            <a:off x="914400" y="4151376"/>
+            <a:off x="914400" y="4956048"/>
             <a:ext cx="10332720" cy="676656"/>
           </a:xfrm>
           <a:prstGeom prst="roundRect">
@@ -33591,13 +33974,13 @@
       </p:sp>
       <p:sp>
         <p:nvSpPr>
-          <p:cNvPr id="15" name="TextBox 14"/>
+          <p:cNvPr id="18" name="TextBox 17"/>
           <p:cNvSpPr txBox="1"/>
           <p:nvPr/>
         </p:nvSpPr>
         <p:spPr>
           <a:xfrm>
-            <a:off x="1143000" y="4270248"/>
+            <a:off x="1143000" y="5074920"/>
             <a:ext cx="548640" cy="457200"/>
           </a:xfrm>
           <a:prstGeom prst="rect">
@@ -33623,20 +34006,20 @@
                 </a:solidFill>
                 <a:latin typeface="Avenir Next"/>
               </a:rPr>
-              <a:t>C</a:t>
-            </a:r>
-          </a:p>
-        </p:txBody>
-      </p:sp>
-      <p:sp>
-        <p:nvSpPr>
-          <p:cNvPr id="16" name="TextBox 15"/>
+              <a:t>D</a:t>
+            </a:r>
+          </a:p>
+        </p:txBody>
+      </p:sp>
+      <p:sp>
+        <p:nvSpPr>
+          <p:cNvPr id="19" name="TextBox 18"/>
           <p:cNvSpPr txBox="1"/>
           <p:nvPr/>
         </p:nvSpPr>
         <p:spPr>
           <a:xfrm>
-            <a:off x="1783080" y="4251960"/>
+            <a:off x="1783080" y="5056632"/>
             <a:ext cx="9235440" cy="493776"/>
           </a:xfrm>
           <a:prstGeom prst="rect">
@@ -33662,133 +34045,7 @@
                 </a:solidFill>
                 <a:latin typeface="Avenir Next"/>
               </a:rPr>
-              <a:t>only light</a:t>
-            </a:r>
-          </a:p>
-        </p:txBody>
-      </p:sp>
-      <p:sp>
-        <p:nvSpPr>
-          <p:cNvPr id="17" name="Rounded Rectangle 16"/>
-          <p:cNvSpPr/>
-          <p:nvPr/>
-        </p:nvSpPr>
-        <p:spPr>
-          <a:xfrm>
-            <a:off x="914400" y="4956048"/>
-            <a:ext cx="10332720" cy="676656"/>
-          </a:xfrm>
-          <a:prstGeom prst="roundRect">
-            <a:avLst>
-              <a:gd name="adj" fmla="val 8000"/>
-            </a:avLst>
-          </a:prstGeom>
-          <a:solidFill>
-            <a:srgbClr val="F3E8CF"/>
-          </a:solidFill>
-          <a:ln w="19050">
-            <a:solidFill>
-              <a:srgbClr val="A67C16"/>
-            </a:solidFill>
-          </a:ln>
-          <a:effectLst/>
-        </p:spPr>
-        <p:style>
-          <a:lnRef idx="1">
-            <a:schemeClr val="accent1"/>
-          </a:lnRef>
-          <a:fillRef idx="3">
-            <a:schemeClr val="accent1"/>
-          </a:fillRef>
-          <a:effectRef idx="2">
-            <a:schemeClr val="accent1"/>
-          </a:effectRef>
-          <a:fontRef idx="minor">
-            <a:schemeClr val="lt1"/>
-          </a:fontRef>
-        </p:style>
-        <p:txBody>
-          <a:bodyPr rtlCol="0" anchor="ctr"/>
-          <a:lstStyle/>
-          <a:p>
-            <a:pPr algn="ctr"/>
-          </a:p>
-        </p:txBody>
-      </p:sp>
-      <p:sp>
-        <p:nvSpPr>
-          <p:cNvPr id="18" name="TextBox 17"/>
-          <p:cNvSpPr txBox="1"/>
-          <p:nvPr/>
-        </p:nvSpPr>
-        <p:spPr>
-          <a:xfrm>
-            <a:off x="1143000" y="5074920"/>
-            <a:ext cx="548640" cy="457200"/>
-          </a:xfrm>
-          <a:prstGeom prst="rect">
-            <a:avLst/>
-          </a:prstGeom>
-          <a:noFill/>
-        </p:spPr>
-        <p:txBody>
-          <a:bodyPr wrap="square" anchor="ctr" lIns="0" rIns="0" tIns="0" bIns="0">
-            <a:spAutoFit/>
-          </a:bodyPr>
-          <a:lstStyle/>
-          <a:p>
-            <a:pPr algn="l">
-              <a:spcAft>
-                <a:spcPts val="1000"/>
-              </a:spcAft>
-            </a:pPr>
-            <a:r>
-              <a:rPr sz="2800" b="1" i="0">
-                <a:solidFill>
-                  <a:srgbClr val="A67C16"/>
-                </a:solidFill>
-                <a:latin typeface="Avenir Next"/>
-              </a:rPr>
-              <a:t>D</a:t>
-            </a:r>
-          </a:p>
-        </p:txBody>
-      </p:sp>
-      <p:sp>
-        <p:nvSpPr>
-          <p:cNvPr id="19" name="TextBox 18"/>
-          <p:cNvSpPr txBox="1"/>
-          <p:nvPr/>
-        </p:nvSpPr>
-        <p:spPr>
-          <a:xfrm>
-            <a:off x="1783080" y="5056632"/>
-            <a:ext cx="9235440" cy="493776"/>
-          </a:xfrm>
-          <a:prstGeom prst="rect">
-            <a:avLst/>
-          </a:prstGeom>
-          <a:noFill/>
-        </p:spPr>
-        <p:txBody>
-          <a:bodyPr wrap="square" anchor="ctr" lIns="0" rIns="0" tIns="0" bIns="0">
-            <a:spAutoFit/>
-          </a:bodyPr>
-          <a:lstStyle/>
-          <a:p>
-            <a:pPr algn="l">
-              <a:spcAft>
-                <a:spcPts val="1000"/>
-              </a:spcAft>
-            </a:pPr>
-            <a:r>
-              <a:rPr sz="2800" b="1" i="0">
-                <a:solidFill>
-                  <a:srgbClr val="1A1D26"/>
-                </a:solidFill>
-                <a:latin typeface="Avenir Next"/>
-              </a:rPr>
-              <a:t>motion and sound</a:t>
+              <a:t>sound and stillness</a:t>
             </a:r>
           </a:p>
         </p:txBody>
@@ -33850,7 +34107,7 @@
         <p:spPr>
           <a:xfrm>
             <a:off x="731520" y="5916168"/>
-            <a:ext cx="10698480" cy="457200"/>
+            <a:ext cx="10241280" cy="457200"/>
           </a:xfrm>
           <a:prstGeom prst="rect">
             <a:avLst/>
@@ -34044,8 +34301,8 @@
         </p:nvSpPr>
         <p:spPr>
           <a:xfrm>
-            <a:off x="11475720" y="365760"/>
-            <a:ext cx="502920" cy="402336"/>
+            <a:off x="11430000" y="329184"/>
+            <a:ext cx="548640" cy="475488"/>
           </a:xfrm>
           <a:prstGeom prst="roundRect">
             <a:avLst>
@@ -34080,7 +34337,7 @@
           <a:p>
             <a:pPr algn="ctr"/>
             <a:r>
-              <a:rPr sz="1800" b="1" i="0">
+              <a:rPr sz="2400" b="1" i="0">
                 <a:solidFill>
                   <a:srgbClr val="FFFFFF"/>
                 </a:solidFill>
@@ -34290,7 +34547,7 @@
                 </a:solidFill>
                 <a:latin typeface="Avenir Next"/>
               </a:rPr>
-              <a:t>Energy can always be seen</a:t>
+              <a:t>We observe a change happen</a:t>
             </a:r>
           </a:p>
         </p:txBody>
@@ -34416,7 +34673,7 @@
                 </a:solidFill>
                 <a:latin typeface="Avenir Next"/>
               </a:rPr>
-              <a:t>We observe a change happen</a:t>
+              <a:t>Energy can always be seen</a:t>
             </a:r>
           </a:p>
         </p:txBody>
@@ -34837,8 +35094,8 @@
         </p:nvSpPr>
         <p:spPr>
           <a:xfrm>
-            <a:off x="11475720" y="365760"/>
-            <a:ext cx="502920" cy="402336"/>
+            <a:off x="11430000" y="329184"/>
+            <a:ext cx="548640" cy="475488"/>
           </a:xfrm>
           <a:prstGeom prst="roundRect">
             <a:avLst>
@@ -34873,7 +35130,7 @@
           <a:p>
             <a:pPr algn="ctr"/>
             <a:r>
-              <a:rPr sz="1800" b="1" i="0">
+              <a:rPr sz="2400" b="1" i="0">
                 <a:solidFill>
                   <a:srgbClr val="FFFFFF"/>
                 </a:solidFill>
@@ -34892,8 +35149,8 @@
         </p:nvSpPr>
         <p:spPr>
           <a:xfrm>
-            <a:off x="10305288" y="365760"/>
-            <a:ext cx="1124712" cy="402336"/>
+            <a:off x="9784080" y="329184"/>
+            <a:ext cx="1554480" cy="475488"/>
           </a:xfrm>
           <a:prstGeom prst="roundRect">
             <a:avLst>
@@ -34928,7 +35185,7 @@
           <a:p>
             <a:pPr algn="ctr"/>
             <a:r>
-              <a:rPr sz="1800" b="1" i="0">
+              <a:rPr sz="2400" b="1" i="0">
                 <a:solidFill>
                   <a:srgbClr val="FFFFFF"/>
                 </a:solidFill>
@@ -35026,6 +35283,132 @@
         <p:spPr>
           <a:xfrm>
             <a:off x="914400" y="2542032"/>
+            <a:ext cx="10332720" cy="676656"/>
+          </a:xfrm>
+          <a:prstGeom prst="roundRect">
+            <a:avLst>
+              <a:gd name="adj" fmla="val 8000"/>
+            </a:avLst>
+          </a:prstGeom>
+          <a:solidFill>
+            <a:srgbClr val="F3E8CF"/>
+          </a:solidFill>
+          <a:ln w="19050">
+            <a:solidFill>
+              <a:srgbClr val="A67C16"/>
+            </a:solidFill>
+          </a:ln>
+          <a:effectLst/>
+        </p:spPr>
+        <p:style>
+          <a:lnRef idx="1">
+            <a:schemeClr val="accent1"/>
+          </a:lnRef>
+          <a:fillRef idx="3">
+            <a:schemeClr val="accent1"/>
+          </a:fillRef>
+          <a:effectRef idx="2">
+            <a:schemeClr val="accent1"/>
+          </a:effectRef>
+          <a:fontRef idx="minor">
+            <a:schemeClr val="lt1"/>
+          </a:fontRef>
+        </p:style>
+        <p:txBody>
+          <a:bodyPr rtlCol="0" anchor="ctr"/>
+          <a:lstStyle/>
+          <a:p>
+            <a:pPr algn="ctr"/>
+          </a:p>
+        </p:txBody>
+      </p:sp>
+      <p:sp>
+        <p:nvSpPr>
+          <p:cNvPr id="9" name="TextBox 8"/>
+          <p:cNvSpPr txBox="1"/>
+          <p:nvPr/>
+        </p:nvSpPr>
+        <p:spPr>
+          <a:xfrm>
+            <a:off x="1143000" y="2660903"/>
+            <a:ext cx="548640" cy="457200"/>
+          </a:xfrm>
+          <a:prstGeom prst="rect">
+            <a:avLst/>
+          </a:prstGeom>
+          <a:noFill/>
+        </p:spPr>
+        <p:txBody>
+          <a:bodyPr wrap="square" anchor="ctr" lIns="0" rIns="0" tIns="0" bIns="0">
+            <a:spAutoFit/>
+          </a:bodyPr>
+          <a:lstStyle/>
+          <a:p>
+            <a:pPr algn="l">
+              <a:spcAft>
+                <a:spcPts val="1000"/>
+              </a:spcAft>
+            </a:pPr>
+            <a:r>
+              <a:rPr sz="2800" b="1" i="0">
+                <a:solidFill>
+                  <a:srgbClr val="A67C16"/>
+                </a:solidFill>
+                <a:latin typeface="Avenir Next"/>
+              </a:rPr>
+              <a:t>A</a:t>
+            </a:r>
+          </a:p>
+        </p:txBody>
+      </p:sp>
+      <p:sp>
+        <p:nvSpPr>
+          <p:cNvPr id="10" name="TextBox 9"/>
+          <p:cNvSpPr txBox="1"/>
+          <p:nvPr/>
+        </p:nvSpPr>
+        <p:spPr>
+          <a:xfrm>
+            <a:off x="1783080" y="2642615"/>
+            <a:ext cx="9235440" cy="493776"/>
+          </a:xfrm>
+          <a:prstGeom prst="rect">
+            <a:avLst/>
+          </a:prstGeom>
+          <a:noFill/>
+        </p:spPr>
+        <p:txBody>
+          <a:bodyPr wrap="square" anchor="ctr" lIns="0" rIns="0" tIns="0" bIns="0">
+            <a:spAutoFit/>
+          </a:bodyPr>
+          <a:lstStyle/>
+          <a:p>
+            <a:pPr algn="l">
+              <a:spcAft>
+                <a:spcPts val="1000"/>
+              </a:spcAft>
+            </a:pPr>
+            <a:r>
+              <a:rPr sz="2800" b="1" i="0">
+                <a:solidFill>
+                  <a:srgbClr val="1A1D26"/>
+                </a:solidFill>
+                <a:latin typeface="Avenir Next"/>
+              </a:rPr>
+              <a:t>We observe a change happen</a:t>
+            </a:r>
+          </a:p>
+        </p:txBody>
+      </p:sp>
+      <p:sp>
+        <p:nvSpPr>
+          <p:cNvPr id="11" name="Rounded Rectangle 10"/>
+          <p:cNvSpPr/>
+          <p:nvPr/>
+        </p:nvSpPr>
+        <p:spPr>
+          <a:xfrm>
+            <a:off x="914400" y="3346703"/>
             <a:ext cx="10332720" cy="676656"/>
           </a:xfrm>
           <a:prstGeom prst="roundRect">
@@ -35067,13 +35450,13 @@
       </p:sp>
       <p:sp>
         <p:nvSpPr>
-          <p:cNvPr id="9" name="TextBox 8"/>
+          <p:cNvPr id="12" name="TextBox 11"/>
           <p:cNvSpPr txBox="1"/>
           <p:nvPr/>
         </p:nvSpPr>
         <p:spPr>
           <a:xfrm>
-            <a:off x="1143000" y="2660903"/>
+            <a:off x="1143000" y="3465575"/>
             <a:ext cx="548640" cy="457200"/>
           </a:xfrm>
           <a:prstGeom prst="rect">
@@ -35099,20 +35482,20 @@
                 </a:solidFill>
                 <a:latin typeface="Avenir Next"/>
               </a:rPr>
-              <a:t>A</a:t>
-            </a:r>
-          </a:p>
-        </p:txBody>
-      </p:sp>
-      <p:sp>
-        <p:nvSpPr>
-          <p:cNvPr id="10" name="TextBox 9"/>
+              <a:t>B</a:t>
+            </a:r>
+          </a:p>
+        </p:txBody>
+      </p:sp>
+      <p:sp>
+        <p:nvSpPr>
+          <p:cNvPr id="13" name="TextBox 12"/>
           <p:cNvSpPr txBox="1"/>
           <p:nvPr/>
         </p:nvSpPr>
         <p:spPr>
           <a:xfrm>
-            <a:off x="1783080" y="2642615"/>
+            <a:off x="1783080" y="3447287"/>
             <a:ext cx="9235440" cy="493776"/>
           </a:xfrm>
           <a:prstGeom prst="rect">
@@ -35139,132 +35522,6 @@
                 <a:latin typeface="Avenir Next"/>
               </a:rPr>
               <a:t>Energy can always be seen</a:t>
-            </a:r>
-          </a:p>
-        </p:txBody>
-      </p:sp>
-      <p:sp>
-        <p:nvSpPr>
-          <p:cNvPr id="11" name="Rounded Rectangle 10"/>
-          <p:cNvSpPr/>
-          <p:nvPr/>
-        </p:nvSpPr>
-        <p:spPr>
-          <a:xfrm>
-            <a:off x="914400" y="3346703"/>
-            <a:ext cx="10332720" cy="676656"/>
-          </a:xfrm>
-          <a:prstGeom prst="roundRect">
-            <a:avLst>
-              <a:gd name="adj" fmla="val 8000"/>
-            </a:avLst>
-          </a:prstGeom>
-          <a:solidFill>
-            <a:srgbClr val="F3E8CF"/>
-          </a:solidFill>
-          <a:ln w="19050">
-            <a:solidFill>
-              <a:srgbClr val="A67C16"/>
-            </a:solidFill>
-          </a:ln>
-          <a:effectLst/>
-        </p:spPr>
-        <p:style>
-          <a:lnRef idx="1">
-            <a:schemeClr val="accent1"/>
-          </a:lnRef>
-          <a:fillRef idx="3">
-            <a:schemeClr val="accent1"/>
-          </a:fillRef>
-          <a:effectRef idx="2">
-            <a:schemeClr val="accent1"/>
-          </a:effectRef>
-          <a:fontRef idx="minor">
-            <a:schemeClr val="lt1"/>
-          </a:fontRef>
-        </p:style>
-        <p:txBody>
-          <a:bodyPr rtlCol="0" anchor="ctr"/>
-          <a:lstStyle/>
-          <a:p>
-            <a:pPr algn="ctr"/>
-          </a:p>
-        </p:txBody>
-      </p:sp>
-      <p:sp>
-        <p:nvSpPr>
-          <p:cNvPr id="12" name="TextBox 11"/>
-          <p:cNvSpPr txBox="1"/>
-          <p:nvPr/>
-        </p:nvSpPr>
-        <p:spPr>
-          <a:xfrm>
-            <a:off x="1143000" y="3465575"/>
-            <a:ext cx="548640" cy="457200"/>
-          </a:xfrm>
-          <a:prstGeom prst="rect">
-            <a:avLst/>
-          </a:prstGeom>
-          <a:noFill/>
-        </p:spPr>
-        <p:txBody>
-          <a:bodyPr wrap="square" anchor="ctr" lIns="0" rIns="0" tIns="0" bIns="0">
-            <a:spAutoFit/>
-          </a:bodyPr>
-          <a:lstStyle/>
-          <a:p>
-            <a:pPr algn="l">
-              <a:spcAft>
-                <a:spcPts val="1000"/>
-              </a:spcAft>
-            </a:pPr>
-            <a:r>
-              <a:rPr sz="2800" b="1" i="0">
-                <a:solidFill>
-                  <a:srgbClr val="A67C16"/>
-                </a:solidFill>
-                <a:latin typeface="Avenir Next"/>
-              </a:rPr>
-              <a:t>B</a:t>
-            </a:r>
-          </a:p>
-        </p:txBody>
-      </p:sp>
-      <p:sp>
-        <p:nvSpPr>
-          <p:cNvPr id="13" name="TextBox 12"/>
-          <p:cNvSpPr txBox="1"/>
-          <p:nvPr/>
-        </p:nvSpPr>
-        <p:spPr>
-          <a:xfrm>
-            <a:off x="1783080" y="3447287"/>
-            <a:ext cx="9235440" cy="493776"/>
-          </a:xfrm>
-          <a:prstGeom prst="rect">
-            <a:avLst/>
-          </a:prstGeom>
-          <a:noFill/>
-        </p:spPr>
-        <p:txBody>
-          <a:bodyPr wrap="square" anchor="ctr" lIns="0" rIns="0" tIns="0" bIns="0">
-            <a:spAutoFit/>
-          </a:bodyPr>
-          <a:lstStyle/>
-          <a:p>
-            <a:pPr algn="l">
-              <a:spcAft>
-                <a:spcPts val="1000"/>
-              </a:spcAft>
-            </a:pPr>
-            <a:r>
-              <a:rPr sz="2800" b="1" i="0">
-                <a:solidFill>
-                  <a:srgbClr val="1A1D26"/>
-                </a:solidFill>
-                <a:latin typeface="Avenir Next"/>
-              </a:rPr>
-              <a:t>We observe a change happen</a:t>
             </a:r>
           </a:p>
         </p:txBody>
@@ -35578,7 +35835,7 @@
         <p:spPr>
           <a:xfrm>
             <a:off x="731520" y="5916168"/>
-            <a:ext cx="10698480" cy="457200"/>
+            <a:ext cx="10241280" cy="457200"/>
           </a:xfrm>
           <a:prstGeom prst="rect">
             <a:avLst/>
@@ -35772,8 +36029,8 @@
         </p:nvSpPr>
         <p:spPr>
           <a:xfrm>
-            <a:off x="11475720" y="365760"/>
-            <a:ext cx="502920" cy="402336"/>
+            <a:off x="11430000" y="329184"/>
+            <a:ext cx="548640" cy="475488"/>
           </a:xfrm>
           <a:prstGeom prst="roundRect">
             <a:avLst>
@@ -35808,7 +36065,7 @@
           <a:p>
             <a:pPr algn="ctr"/>
             <a:r>
-              <a:rPr sz="1800" b="1" i="0">
+              <a:rPr sz="2400" b="1" i="0">
                 <a:solidFill>
                   <a:srgbClr val="FFFFFF"/>
                 </a:solidFill>
@@ -36565,8 +36822,8 @@
         </p:nvSpPr>
         <p:spPr>
           <a:xfrm>
-            <a:off x="11475720" y="365760"/>
-            <a:ext cx="502920" cy="402336"/>
+            <a:off x="11430000" y="329184"/>
+            <a:ext cx="548640" cy="475488"/>
           </a:xfrm>
           <a:prstGeom prst="roundRect">
             <a:avLst>
@@ -36601,7 +36858,7 @@
           <a:p>
             <a:pPr algn="ctr"/>
             <a:r>
-              <a:rPr sz="1800" b="1" i="0">
+              <a:rPr sz="2400" b="1" i="0">
                 <a:solidFill>
                   <a:srgbClr val="FFFFFF"/>
                 </a:solidFill>
@@ -36620,8 +36877,8 @@
         </p:nvSpPr>
         <p:spPr>
           <a:xfrm>
-            <a:off x="10305288" y="365760"/>
-            <a:ext cx="1124712" cy="402336"/>
+            <a:off x="9784080" y="329184"/>
+            <a:ext cx="1554480" cy="475488"/>
           </a:xfrm>
           <a:prstGeom prst="roundRect">
             <a:avLst>
@@ -36656,7 +36913,7 @@
           <a:p>
             <a:pPr algn="ctr"/>
             <a:r>
-              <a:rPr sz="1800" b="1" i="0">
+              <a:rPr sz="2400" b="1" i="0">
                 <a:solidFill>
                   <a:srgbClr val="FFFFFF"/>
                 </a:solidFill>
@@ -37306,7 +37563,7 @@
         <p:spPr>
           <a:xfrm>
             <a:off x="731520" y="5916168"/>
-            <a:ext cx="10698480" cy="457200"/>
+            <a:ext cx="10241280" cy="457200"/>
           </a:xfrm>
           <a:prstGeom prst="rect">
             <a:avLst/>
@@ -37331,7 +37588,7 @@
                 </a:solidFill>
                 <a:latin typeface="Avenir Next"/>
               </a:rPr>
-              <a:t>A battery stores energy; it changes when released.</a:t>
+              <a:t>A battery stores energy. It can cause a change later.</a:t>
             </a:r>
           </a:p>
         </p:txBody>
@@ -37500,8 +37757,8 @@
         </p:nvSpPr>
         <p:spPr>
           <a:xfrm>
-            <a:off x="11475720" y="365760"/>
-            <a:ext cx="502920" cy="402336"/>
+            <a:off x="11430000" y="329184"/>
+            <a:ext cx="548640" cy="475488"/>
           </a:xfrm>
           <a:prstGeom prst="roundRect">
             <a:avLst>
@@ -37536,7 +37793,7 @@
           <a:p>
             <a:pPr algn="ctr"/>
             <a:r>
-              <a:rPr sz="1800" b="1" i="0">
+              <a:rPr sz="2400" b="1" i="0">
                 <a:solidFill>
                   <a:srgbClr val="FFFFFF"/>
                 </a:solidFill>
@@ -37555,8 +37812,8 @@
         </p:nvSpPr>
         <p:spPr>
           <a:xfrm>
-            <a:off x="9601200" y="365760"/>
-            <a:ext cx="1828800" cy="402336"/>
+            <a:off x="8823960" y="329184"/>
+            <a:ext cx="2514600" cy="475488"/>
           </a:xfrm>
           <a:prstGeom prst="roundRect">
             <a:avLst>
@@ -37591,7 +37848,7 @@
           <a:p>
             <a:pPr algn="ctr"/>
             <a:r>
-              <a:rPr sz="1800" b="1" i="0">
+              <a:rPr sz="2400" b="1" i="0">
                 <a:solidFill>
                   <a:srgbClr val="FFFFFF"/>
                 </a:solidFill>
@@ -38098,8 +38355,8 @@
         </p:nvSpPr>
         <p:spPr>
           <a:xfrm>
-            <a:off x="11475720" y="365760"/>
-            <a:ext cx="502920" cy="402336"/>
+            <a:off x="11430000" y="329184"/>
+            <a:ext cx="548640" cy="475488"/>
           </a:xfrm>
           <a:prstGeom prst="roundRect">
             <a:avLst>
@@ -38134,7 +38391,7 @@
           <a:p>
             <a:pPr algn="ctr"/>
             <a:r>
-              <a:rPr sz="1800" b="1" i="0">
+              <a:rPr sz="2400" b="1" i="0">
                 <a:solidFill>
                   <a:srgbClr val="FFFFFF"/>
                 </a:solidFill>
@@ -38153,8 +38410,8 @@
         </p:nvSpPr>
         <p:spPr>
           <a:xfrm>
-            <a:off x="10003536" y="365760"/>
-            <a:ext cx="1426464" cy="402336"/>
+            <a:off x="9372600" y="329184"/>
+            <a:ext cx="1965960" cy="475488"/>
           </a:xfrm>
           <a:prstGeom prst="roundRect">
             <a:avLst>
@@ -38189,7 +38446,7 @@
           <a:p>
             <a:pPr algn="ctr"/>
             <a:r>
-              <a:rPr sz="1800" b="1" i="0">
+              <a:rPr sz="2400" b="1" i="0">
                 <a:solidFill>
                   <a:srgbClr val="FFFFFF"/>
                 </a:solidFill>
@@ -38267,7 +38524,7 @@
               </a:spcAft>
             </a:pPr>
             <a:r>
-              <a:rPr sz="2000" b="0" i="1">
+              <a:rPr sz="2400" b="0" i="1">
                 <a:solidFill>
                   <a:srgbClr val="4A5268"/>
                 </a:solidFill>
@@ -38607,8 +38864,8 @@
         </p:nvSpPr>
         <p:spPr>
           <a:xfrm>
-            <a:off x="11475720" y="365760"/>
-            <a:ext cx="502920" cy="402336"/>
+            <a:off x="11430000" y="329184"/>
+            <a:ext cx="548640" cy="475488"/>
           </a:xfrm>
           <a:prstGeom prst="roundRect">
             <a:avLst>
@@ -38643,7 +38900,7 @@
           <a:p>
             <a:pPr algn="ctr"/>
             <a:r>
-              <a:rPr sz="1800" b="1" i="0">
+              <a:rPr sz="2400" b="1" i="0">
                 <a:solidFill>
                   <a:srgbClr val="FFFFFF"/>
                 </a:solidFill>
@@ -38662,8 +38919,8 @@
         </p:nvSpPr>
         <p:spPr>
           <a:xfrm>
-            <a:off x="10113264" y="365760"/>
-            <a:ext cx="1316736" cy="402336"/>
+            <a:off x="9509760" y="329184"/>
+            <a:ext cx="1828800" cy="475488"/>
           </a:xfrm>
           <a:prstGeom prst="roundRect">
             <a:avLst>
@@ -38698,7 +38955,7 @@
           <a:p>
             <a:pPr algn="ctr"/>
             <a:r>
-              <a:rPr sz="1800" b="1" i="0">
+              <a:rPr sz="2400" b="1" i="0">
                 <a:solidFill>
                   <a:srgbClr val="FFFFFF"/>
                 </a:solidFill>
@@ -38776,7 +39033,7 @@
               </a:spcAft>
             </a:pPr>
             <a:r>
-              <a:rPr sz="2000" b="0" i="1">
+              <a:rPr sz="2400" b="0" i="1">
                 <a:solidFill>
                   <a:srgbClr val="4A5268"/>
                 </a:solidFill>
@@ -39116,8 +39373,8 @@
         </p:nvSpPr>
         <p:spPr>
           <a:xfrm>
-            <a:off x="11475720" y="365760"/>
-            <a:ext cx="502920" cy="402336"/>
+            <a:off x="11430000" y="329184"/>
+            <a:ext cx="548640" cy="475488"/>
           </a:xfrm>
           <a:prstGeom prst="roundRect">
             <a:avLst>
@@ -39152,7 +39409,7 @@
           <a:p>
             <a:pPr algn="ctr"/>
             <a:r>
-              <a:rPr sz="1800" b="1" i="0">
+              <a:rPr sz="2400" b="1" i="0">
                 <a:solidFill>
                   <a:srgbClr val="FFFFFF"/>
                 </a:solidFill>
@@ -39171,8 +39428,8 @@
         </p:nvSpPr>
         <p:spPr>
           <a:xfrm>
-            <a:off x="10003536" y="365760"/>
-            <a:ext cx="1426464" cy="402336"/>
+            <a:off x="9372600" y="329184"/>
+            <a:ext cx="1965960" cy="475488"/>
           </a:xfrm>
           <a:prstGeom prst="roundRect">
             <a:avLst>
@@ -39207,7 +39464,7 @@
           <a:p>
             <a:pPr algn="ctr"/>
             <a:r>
-              <a:rPr sz="1800" b="1" i="0">
+              <a:rPr sz="2400" b="1" i="0">
                 <a:solidFill>
                   <a:srgbClr val="FFFFFF"/>
                 </a:solidFill>
@@ -39314,7 +39571,7 @@
         <p:spPr>
           <a:xfrm>
             <a:off x="868680" y="2331720"/>
-            <a:ext cx="2857500" cy="365760"/>
+            <a:ext cx="2857500" cy="457200"/>
           </a:xfrm>
           <a:prstGeom prst="rect">
             <a:avLst/>
@@ -39333,7 +39590,7 @@
               </a:spcAft>
             </a:pPr>
             <a:r>
-              <a:rPr sz="2400" b="1" i="0">
+              <a:rPr sz="2800" b="1" i="0">
                 <a:solidFill>
                   <a:srgbClr val="A67C16"/>
                 </a:solidFill>
@@ -39352,8 +39609,8 @@
         </p:nvSpPr>
         <p:spPr>
           <a:xfrm>
-            <a:off x="868680" y="2761488"/>
-            <a:ext cx="2857500" cy="2011680"/>
+            <a:off x="868680" y="2880360"/>
+            <a:ext cx="2857500" cy="1920240"/>
           </a:xfrm>
           <a:prstGeom prst="rect">
             <a:avLst/>
@@ -39440,7 +39697,7 @@
         <p:spPr>
           <a:xfrm>
             <a:off x="4411980" y="2331720"/>
-            <a:ext cx="2857500" cy="365760"/>
+            <a:ext cx="2857500" cy="457200"/>
           </a:xfrm>
           <a:prstGeom prst="rect">
             <a:avLst/>
@@ -39459,7 +39716,7 @@
               </a:spcAft>
             </a:pPr>
             <a:r>
-              <a:rPr sz="2400" b="1" i="0">
+              <a:rPr sz="2800" b="1" i="0">
                 <a:solidFill>
                   <a:srgbClr val="A67C16"/>
                 </a:solidFill>
@@ -39478,8 +39735,8 @@
         </p:nvSpPr>
         <p:spPr>
           <a:xfrm>
-            <a:off x="4411980" y="2761488"/>
-            <a:ext cx="2857500" cy="2011680"/>
+            <a:off x="4411980" y="2880360"/>
+            <a:ext cx="2857500" cy="1920240"/>
           </a:xfrm>
           <a:prstGeom prst="rect">
             <a:avLst/>
@@ -39585,7 +39842,7 @@
               </a:spcAft>
             </a:pPr>
             <a:r>
-              <a:rPr sz="2000" b="1" i="0">
+              <a:rPr sz="2400" b="1" i="0">
                 <a:solidFill>
                   <a:srgbClr val="7A5620"/>
                 </a:solidFill>
@@ -39801,8 +40058,8 @@
         </p:nvSpPr>
         <p:spPr>
           <a:xfrm>
-            <a:off x="11475720" y="365760"/>
-            <a:ext cx="502920" cy="402336"/>
+            <a:off x="11430000" y="329184"/>
+            <a:ext cx="548640" cy="475488"/>
           </a:xfrm>
           <a:prstGeom prst="roundRect">
             <a:avLst>
@@ -39837,7 +40094,7 @@
           <a:p>
             <a:pPr algn="ctr"/>
             <a:r>
-              <a:rPr sz="1800" b="1" i="0">
+              <a:rPr sz="2400" b="1" i="0">
                 <a:solidFill>
                   <a:srgbClr val="FFFFFF"/>
                 </a:solidFill>
@@ -39856,8 +40113,8 @@
         </p:nvSpPr>
         <p:spPr>
           <a:xfrm>
-            <a:off x="9948672" y="365760"/>
-            <a:ext cx="1481328" cy="402336"/>
+            <a:off x="9555480" y="329184"/>
+            <a:ext cx="1783080" cy="475488"/>
           </a:xfrm>
           <a:prstGeom prst="roundRect">
             <a:avLst>
@@ -39892,13 +40149,13 @@
           <a:p>
             <a:pPr algn="ctr"/>
             <a:r>
-              <a:rPr sz="1800" b="1" i="0">
+              <a:rPr sz="2400" b="1" i="0">
                 <a:solidFill>
                   <a:srgbClr val="FFFFFF"/>
                 </a:solidFill>
                 <a:latin typeface="Avenir Next"/>
               </a:rPr>
-              <a:t>EVIDENCE</a:t>
+              <a:t>EXPLAIN</a:t>
             </a:r>
           </a:p>
         </p:txBody>
@@ -39970,7 +40227,7 @@
               </a:spcAft>
             </a:pPr>
             <a:r>
-              <a:rPr sz="2000" b="0" i="1">
+              <a:rPr sz="2400" b="0" i="1">
                 <a:solidFill>
                   <a:srgbClr val="4A5268"/>
                 </a:solidFill>
@@ -40196,7 +40453,7 @@
             </a:avLst>
           </a:prstGeom>
           <a:solidFill>
-            <a:srgbClr val="1F2A5A"/>
+            <a:srgbClr val="A67C16"/>
           </a:solidFill>
           <a:ln>
             <a:noFill/>
@@ -40229,7 +40486,7 @@
                 </a:solidFill>
                 <a:latin typeface="Avenir Next"/>
               </a:rPr>
-              <a:t>EVIDENCE</a:t>
+              <a:t>?</a:t>
             </a:r>
           </a:p>
         </p:txBody>
@@ -40269,7 +40526,7 @@
                 <a:latin typeface="Avenir Next"/>
               </a:rPr>
               <a:t>The pencil got shorter and sharper and made a sound.
-Those changes are evidence that energy was involved.</a:t>
+Those changes are clues that energy was involved.</a:t>
             </a:r>
           </a:p>
         </p:txBody>
